--- a/Curso Gas B/11 - UNE 60670 - Diseno y construccion/11 - UNE 60670 - Diseno y construccion - Vídeo 3.pptx
+++ b/Curso Gas B/11 - UNE 60670 - Diseno y construccion/11 - UNE 60670 - Diseno y construccion - Vídeo 3.pptx
@@ -22,6 +22,7 @@
     <p:sldId id="270" r:id="rId22"/>
     <p:sldId id="271" r:id="rId23"/>
     <p:sldId id="272" r:id="rId24"/>
+    <p:sldId id="273" r:id="rId25"/>
   </p:sldIdLst>
   <p:sldSz cx="12191695" cy="6858000" type="screen4x3"/>
   <p:notesSz cx="6858000" cy="9144000"/>
@@ -593,12 +594,12 @@
           <a:lstStyle/>
           <a:p>
             <a:r>
-              <a:t>N1: ¿Qué tiene de especial la llave de montante colectivo?</a:t>
-            </a:r>
-          </a:p>
-          <a:p>
-            <a:r>
-              <a:t>N2: Se pone cuando hay más de un montante colectivo, para poder cortar cada uno por separado. Pero lo interesante es la llave de montante adicional, que es una previsión de futuro. Imagina un edificio que se monta pensando en que algún día se ampliará con más viviendas: se deja el montante preparado con una llave al final que se queda cerrada, bloqueada y precintada, y con un tapón ciego detrás. El día que se amplíe el edificio, se conecta ahí sin tener que cortar el gas a los vecinos que ya viven. Es dejar la puerta preparada para crecer sin molestar a nadie. Y hay otro elemento: en receptoras nuevas con algún tramo aéreo, se pone una toma Peterson, que es un punto de purga y medición accesible desde la vía pública. Resumen: la llave adicional es para ampliar sin cortes, y va bien cerrada y precintada hasta que llegue ese día.</a:t>
+              <a:t>N1: ¿Cuándo hace falta llave de edificio?</a:t>
+            </a:r>
+          </a:p>
+          <a:p>
+            <a:r>
+              <a:t>N2: Empecemos por la de acometida: esa se instala siempre, es la que da inicio a la instalación receptora, y dónde va lo decide la compañía distribuidora, accesible desde la vía pública para ella y para los bomberos o la policía. Ahora, la de edificio no siempre hace falta. Solo se pone cuando la acometida interior, el tramo entre la llave de acometida y la fachada, es larga: veinticinco metros si el tubo va visto, o solo cuatro metros si va enterrado. ¿Por qué tan poco si va enterrado? Porque una fuga enterrada es mucho más difícil de detectar y de cerrar, así que la norma quiere una llave más cerca. También se pone la de edificio cuando la acometida da a más de un edificio. Y si la acometida es corta, no hace falta: la propia llave de acometida ya hace ese papel de cierre general.</a:t>
             </a:r>
           </a:p>
         </p:txBody>
@@ -668,12 +669,12 @@
           <a:lstStyle/>
           <a:p>
             <a:r>
-              <a:t>N1: ¿Para qué sirve la llave de usuario?</a:t>
-            </a:r>
-          </a:p>
-          <a:p>
-            <a:r>
-              <a:t>N2: La llave de usuario sirve para aislar cada instalación individual del resto, o sea para poder cortar el gas de una vivienda concreta sin tocar las demás. Se instala en todos los casos y tiene que ser fácilmente accesible, con grado dos para la distribuidora, desde la zona común o el límite de la propiedad. La llave de contador también se pone siempre, y va en el mismo recinto que el contador, lo más cerca posible de su entrada, para poder cortarle el gas al aparato de medida. Y hay un detalle práctico muy típico: cuando los contadores están centralizados, todos juntos en un cuarto, la propia llave de contador puede asumir la función de llave de usuario, porque cumple lo mismo. Así te ahorras una llave. En resumen, la de usuario aísla tu piso y, en centralizaciones, la del contador puede hacer ese doble papel.</a:t>
+              <a:t>N1: ¿Qué tiene de especial la llave de montante colectivo?</a:t>
+            </a:r>
+          </a:p>
+          <a:p>
+            <a:r>
+              <a:t>N2: Se pone cuando hay más de un montante colectivo, para poder cortar cada uno por separado. Pero lo interesante es la llave de montante adicional, que es una previsión de futuro. Imagina un edificio que se monta pensando en que algún día se ampliará con más viviendas: se deja el montante preparado con una llave al final que se queda cerrada, bloqueada y precintada, y con un tapón ciego detrás. El día que se amplíe el edificio, se conecta ahí sin tener que cortar el gas a los vecinos que ya viven. Es dejar la puerta preparada para crecer sin molestar a nadie. Y hay otro elemento: en receptoras nuevas con algún tramo aéreo, se pone una toma Peterson, que es un punto de purga y medición accesible desde la vía pública. Resumen: la llave adicional es para ampliar sin cortes, y va bien cerrada y precintada hasta que llegue ese día.</a:t>
             </a:r>
           </a:p>
         </p:txBody>
@@ -743,12 +744,12 @@
           <a:lstStyle/>
           <a:p>
             <a:r>
-              <a:t>N1: ¿Y la llave de vivienda en qué se diferencia?</a:t>
-            </a:r>
-          </a:p>
-          <a:p>
-            <a:r>
-              <a:t>N2: La llave de vivienda es la que tienes tú a mano para cortar el gas de toda tu casa, por ejemplo antes de irte de vacaciones o si hueles a gas. Por eso se instala siempre y con grado de accesibilidad uno, que significa que la puedes manejar tú directamente, sin pedir permiso a nadie. Se coloca normalmente en el exterior de la vivienda pero de forma que se pueda accionar desde dentro; también puede ir por dentro, y entonces se pone de manera que el tramo de tubo antes de ella, ya dentro de casa, sea lo más corto posible, para que quede el mínimo de tubería sin poder cortar. Un matiz que cae en examen: la llave de usuario solo puede hacer de llave de vivienda si es fácilmente accesible desde fuera, desde zona común, y con autorización expresa de la distribuidora. Si no, son llaves distintas.</a:t>
+              <a:t>N1: ¿Para qué sirve la llave de usuario?</a:t>
+            </a:r>
+          </a:p>
+          <a:p>
+            <a:r>
+              <a:t>N2: La llave de usuario sirve para aislar cada instalación individual del resto, o sea para poder cortar el gas de una vivienda concreta sin tocar las demás. Se instala en todos los casos y tiene que ser fácilmente accesible, con grado dos para la distribuidora, desde la zona común o el límite de la propiedad. La llave de contador también se pone siempre, y va en el mismo recinto que el contador, lo más cerca posible de su entrada, para poder cortarle el gas al aparato de medida. Y hay un detalle práctico muy típico: cuando los contadores están centralizados, todos juntos en un cuarto, la propia llave de contador puede asumir la función de llave de usuario, porque cumple lo mismo. Así te ahorras una llave. En resumen, la de usuario aísla tu piso y, en centralizaciones, la del contador puede hacer ese doble papel.</a:t>
             </a:r>
           </a:p>
         </p:txBody>
@@ -818,12 +819,12 @@
           <a:lstStyle/>
           <a:p>
             <a:r>
-              <a:t>N1: ¿Cada aparato lleva su propia llave?</a:t>
-            </a:r>
-          </a:p>
-          <a:p>
-            <a:r>
-              <a:t>N2: Sí, cada aparato de gas, la caldera, el calentador, la cocina, lleva su llave de conexión, colocada lo más cerca posible del aparato y en el mismo recinto, con grado uno para el usuario. La idea es poder cortarle el gas a un aparato concreto sin dejar la casa entera sin gas. Hay reglas importantes. Si un aparato está pendiente de instalar o de arrancar, su llave se deja cerrada, bloqueada y precintada, y además taponada si el aparato todavía no está puesto, para que nadie abra gas a un tubo que no va a ningún sitio. Y una seguridad clave en las cocinas domésticas: es obligatorio un limitador de exceso de flujo. ¿Qué hace? Si se suelta el tubo de la cocina y el gas empieza a salir a chorro, el limitador lo corta de golpe. Si la llave no lo trae de serie, se pone uno externo sellado con pasta endurecible. Es la seguridad típica del se ha soltado el tubo de la vitrocerámica.</a:t>
+              <a:t>N1: ¿Y la llave de vivienda en qué se diferencia?</a:t>
+            </a:r>
+          </a:p>
+          <a:p>
+            <a:r>
+              <a:t>N2: La llave de vivienda es la que tienes tú a mano para cortar el gas de toda tu casa, por ejemplo antes de irte de vacaciones o si hueles a gas. Por eso se instala siempre y con grado de accesibilidad uno, que significa que la puedes manejar tú directamente, sin pedir permiso a nadie. Se coloca normalmente en el exterior de la vivienda pero de forma que se pueda accionar desde dentro; también puede ir por dentro, y entonces se pone de manera que el tramo de tubo antes de ella, ya dentro de casa, sea lo más corto posible, para que quede el mínimo de tubería sin poder cortar. Un matiz que cae en examen: la llave de usuario solo puede hacer de llave de vivienda si es fácilmente accesible desde fuera, desde zona común, y con autorización expresa de la distribuidora. Si no, son llaves distintas.</a:t>
             </a:r>
           </a:p>
         </p:txBody>
@@ -893,12 +894,12 @@
           <a:lstStyle/>
           <a:p>
             <a:r>
-              <a:t>N1: Me pierdo con los grados de accesibilidad. ¿Cómo los distingo?</a:t>
-            </a:r>
-          </a:p>
-          <a:p>
-            <a:r>
-              <a:t>N2: Es más fácil de lo que parece si piensas en quién tiene que poder llegar a la llave. El grado uno es a mano del usuario: la manejas tú directamente, como la llave de vivienda o la de cada aparato, que están dentro o justo al alcance. El grado dos es accesible desde la zona común o pública con cierta facilidad, y es el típico de la distribuidora o de los servicios de emergencia, como la llave de usuario. Y el grado tres es el menos accesible, hace falta más para llegar, por ejemplo con una escalera o herramientas. La regla para no fallar es: lo tuyo, lo de dentro de tu casa, grado uno; lo de la compañía, en zonas comunes, grado dos o tres. Piensa siempre quién necesita abrir esa llave y a qué distancia está de él.</a:t>
+              <a:t>N1: ¿Cada aparato lleva su propia llave?</a:t>
+            </a:r>
+          </a:p>
+          <a:p>
+            <a:r>
+              <a:t>N2: Sí, cada aparato de gas, la caldera, el calentador, la cocina, lleva su llave de conexión, colocada lo más cerca posible del aparato y en el mismo recinto, con grado uno para el usuario. La idea es poder cortarle el gas a un aparato concreto sin dejar la casa entera sin gas. Hay reglas importantes. Si un aparato está pendiente de instalar o de arrancar, su llave se deja cerrada, bloqueada y precintada, y además taponada si el aparato todavía no está puesto, para que nadie abra gas a un tubo que no va a ningún sitio. Y una seguridad clave en las cocinas domésticas: es obligatorio un limitador de exceso de flujo. ¿Qué hace? Si se suelta el tubo de la cocina y el gas empieza a salir a chorro, el limitador lo corta de golpe. Si la llave no lo trae de serie, se pone uno externo sellado con pasta endurecible. Es la seguridad típica del se ha soltado el tubo de la vitrocerámica.</a:t>
             </a:r>
           </a:p>
         </p:txBody>
@@ -968,12 +969,12 @@
           <a:lstStyle/>
           <a:p>
             <a:r>
-              <a:t>N1: ¿Puede una misma llave hacer de varias?</a:t>
-            </a:r>
-          </a:p>
-          <a:p>
-            <a:r>
-              <a:t>N2: Sí, para ahorrar material, una misma llave puede cumplir la función de varias, pero solo si reúne todos los requisitos que se exigen a cada una de ellas. Ahora bien, graba dos prohibiciones que caen fijo en el examen. La primera: la llave de vivienda nunca puede hacer de llave de aparato. ¿Por qué? Porque si fueran la misma, no podrías aislar un solo aparato sin dejar toda la casa sin gas, y se perdería el sentido de tener una llave por aparato. La segunda: la llave que viene incorporada en un regulador no puede hacer de llave de usuario, salvo una excepción muy concreta, la de las instalaciones con envase de gas licuado de hasta quince kilos, donde si el regulador lleva corte incorporado, ese sí puede hacer de llave de usuario. Fuera de esos dos límites, el multiuso está permitido. Dos noes que memorizar: vivienda no es aparato, y regulador no es usuario salvo bombona pequeña.</a:t>
+              <a:t>N1: Me pierdo con los grados de accesibilidad. ¿Cómo los distingo?</a:t>
+            </a:r>
+          </a:p>
+          <a:p>
+            <a:r>
+              <a:t>N2: Es más fácil de lo que parece si piensas en quién tiene que poder llegar a la llave. El grado uno es a mano del usuario: la manejas tú directamente, como la llave de vivienda o la de cada aparato, que están dentro o justo al alcance. El grado dos es accesible desde la zona común o pública con cierta facilidad, y es el típico de la distribuidora o de los servicios de emergencia, como la llave de usuario. Y el grado tres es el menos accesible, hace falta más para llegar, por ejemplo con una escalera o herramientas. La regla para no fallar es: lo tuyo, lo de dentro de tu casa, grado uno; lo de la compañía, en zonas comunes, grado dos o tres. Piensa siempre quién necesita abrir esa llave y a qué distancia está de él.</a:t>
             </a:r>
           </a:p>
         </p:txBody>
@@ -1043,12 +1044,12 @@
           <a:lstStyle/>
           <a:p>
             <a:r>
-              <a:t>N1: Una vez montado todo esto, ¿cómo se pone en marcha?</a:t>
-            </a:r>
-          </a:p>
-          <a:p>
-            <a:r>
-              <a:t>N2: Con la instalación terminada, se sigue un circuito de papeles y comprobaciones que no te puedes saltar. Primero, la empresa instaladora habilitada hace las pruebas de estanquidad, para comprobar que no se escapa nada, y firma el certificado de instalación, el modelo I erre ge. Con ese certificado, la empresa distribuidora hace la puesta en servicio, que es dar gas de forma legal. Y la puesta en marcha de cada aparato la certifica quien lo arranca, sea el servicio técnico del fabricante o el instalador habilitado. Un detalle práctico: del certificado, la copia es para el usuario y el original para la distribuidora. Sin ese circuito completo, la instalación no puede recibir gas legalmente, aunque esté perfectamente montada. El papel y la prueba son los que abren la llave.</a:t>
+              <a:t>N1: ¿Puede una misma llave hacer de varias?</a:t>
+            </a:r>
+          </a:p>
+          <a:p>
+            <a:r>
+              <a:t>N2: Sí, para ahorrar material, una misma llave puede cumplir la función de varias, pero solo si reúne todos los requisitos que se exigen a cada una de ellas. Ahora bien, graba dos prohibiciones que caen fijo en el examen. La primera: la llave de vivienda nunca puede hacer de llave de aparato. ¿Por qué? Porque si fueran la misma, no podrías aislar un solo aparato sin dejar toda la casa sin gas, y se perdería el sentido de tener una llave por aparato. La segunda: la llave que viene incorporada en un regulador no puede hacer de llave de usuario, salvo una excepción muy concreta, la de las instalaciones con envase de gas licuado de hasta quince kilos, donde si el regulador lleva corte incorporado, ese sí puede hacer de llave de usuario. Fuera de esos dos límites, el multiuso está permitido. Dos noes que memorizar: vivienda no es aparato, y regulador no es usuario salvo bombona pequeña.</a:t>
             </a:r>
           </a:p>
         </p:txBody>
@@ -1118,6 +1119,81 @@
           <a:lstStyle/>
           <a:p>
             <a:r>
+              <a:t>N1: Una vez montado todo esto, ¿cómo se pone en marcha?</a:t>
+            </a:r>
+          </a:p>
+          <a:p>
+            <a:r>
+              <a:t>N2: Con la instalación terminada, se sigue un circuito de papeles y comprobaciones que no te puedes saltar. Primero, la empresa instaladora habilitada hace las pruebas de estanquidad, para comprobar que no se escapa nada, y firma el certificado de instalación, el modelo I erre ge. Con ese certificado, la empresa distribuidora hace la puesta en servicio, que es dar gas de forma legal. Y la puesta en marcha de cada aparato la certifica quien lo arranca, sea el servicio técnico del fabricante o el instalador habilitado. Un detalle práctico: del certificado, la copia es para el usuario y el original para la distribuidora. Sin ese circuito completo, la instalación no puede recibir gas legalmente, aunque esté perfectamente montada. El papel y la prueba son los que abren la llave.</a:t>
+            </a:r>
+          </a:p>
+        </p:txBody>
+      </p:sp>
+      <p:sp>
+        <p:nvSpPr>
+          <p:cNvPr id="4" name="Slide Number Placeholder 3"/>
+          <p:cNvSpPr>
+            <a:spLocks noGrp="1"/>
+          </p:cNvSpPr>
+          <p:nvPr>
+            <p:ph type="sldNum" idx="5" sz="quarter"/>
+          </p:nvPr>
+        </p:nvSpPr>
+        <p:spPr/>
+      </p:sp>
+    </p:spTree>
+  </p:cSld>
+  <p:clrMapOvr>
+    <a:masterClrMapping/>
+  </p:clrMapOvr>
+</p:notes>
+</file>
+
+<file path=ppt/notesSlides/notesSlide18.xml><?xml version="1.0" encoding="utf-8"?>
+<p:notes xmlns:a="http://schemas.openxmlformats.org/drawingml/2006/main" xmlns:p="http://schemas.openxmlformats.org/presentationml/2006/main" xmlns:r="http://schemas.openxmlformats.org/officeDocument/2006/relationships">
+  <p:cSld>
+    <p:spTree>
+      <p:nvGrpSpPr>
+        <p:cNvPr id="1" name=""/>
+        <p:cNvGrpSpPr/>
+        <p:nvPr/>
+      </p:nvGrpSpPr>
+      <p:grpSpPr>
+        <a:xfrm>
+          <a:off x="0" y="0"/>
+          <a:ext cx="0" cy="0"/>
+          <a:chOff x="0" y="0"/>
+          <a:chExt cx="0" cy="0"/>
+        </a:xfrm>
+      </p:grpSpPr>
+      <p:sp>
+        <p:nvSpPr>
+          <p:cNvPr id="2" name="Slide Image Placeholder 1"/>
+          <p:cNvSpPr>
+            <a:spLocks noGrp="1"/>
+          </p:cNvSpPr>
+          <p:nvPr>
+            <p:ph type="sldImg" idx="2"/>
+          </p:nvPr>
+        </p:nvSpPr>
+        <p:spPr/>
+      </p:sp>
+      <p:sp>
+        <p:nvSpPr>
+          <p:cNvPr id="3" name="Notes Placeholder 2"/>
+          <p:cNvSpPr>
+            <a:spLocks noGrp="1"/>
+          </p:cNvSpPr>
+          <p:nvPr>
+            <p:ph type="body" idx="3" sz="quarter"/>
+          </p:nvPr>
+        </p:nvSpPr>
+        <p:spPr/>
+        <p:txBody>
+          <a:bodyPr/>
+          <a:lstStyle/>
+          <a:p>
+            <a:r>
               <a:t>N1: Último empujón. ¿Cómo lo ato todo y cierro el tema?</a:t>
             </a:r>
           </a:p>
@@ -1276,16 +1352,7 @@
         <p:txBody>
           <a:bodyPr/>
           <a:lstStyle/>
-          <a:p>
-            <a:r>
-              <a:t>N1: ¿Qué es una toma de presión y para qué sirve?</a:t>
-            </a:r>
-          </a:p>
-          <a:p>
-            <a:r>
-              <a:t>N2: Una toma de presión es el pincho donde el gasista enchufa el manómetro para ver a cuánta presión va el gas en ese punto exacto. Sin tomas trabajarías a ciegas, no sabrías si el gas llega bien o se pierde por el camino. Por eso la norma las coloca en los sitios donde interesa comparar: a la entrada y a la salida de los reguladores, para comprobar que el regulador hace su trabajo; en la entrada de la centralización de contadores; a la salida del contador; y en el tramo interior, justo después de la llave de entrada a la vivienda. El truco para acordarte es sencillo: quieres poder medir a cada lado de los elementos importantes, para ver cuánta presión entra y cuánta sale. Un detalle práctico: los conjuntos de regulación normalizados ya vienen con sus tomas de fábrica, así que ahí no tienes que añadir nada.</a:t>
-            </a:r>
-          </a:p>
+          <a:p/>
         </p:txBody>
       </p:sp>
       <p:sp>
@@ -1353,12 +1420,12 @@
           <a:lstStyle/>
           <a:p>
             <a:r>
-              <a:t>N1: ¿Cómo se regula el gas natural?</a:t>
-            </a:r>
-          </a:p>
-          <a:p>
-            <a:r>
-              <a:t>N2: Con un sistema que se vuelve más exigente cuanta más presión entra, y esto es puro sentido de la seguridad. La segunda familia es el gas natural. Fíjate en la escalera. En lo más alto, de más de ciento cincuenta milibares hasta cinco bar, pides lo máximo: regulador, más una seguridad por máxima presión, más una seguridad por mínima. En el tramo medio, de más de cincuenta hasta ciento cincuenta milibares, regulador más seguridad por mínima. Y en lo más bajo, hasta cincuenta milibares, pones regulador solo si hace falta bajar la presión, y la seguridad por mínima solo si la presión pasa de veinticinco milibares; por debajo, se consulta a la compañía. ¿Por qué cuanta más presión más aparatos de seguridad? Porque una presión alta que se descontrola hace más daño: puede reventar membranas y estropear aparatos. La seguridad por máxima corta si la presión sube demasiado; la de mínima protege si se cae. Cuanto más arriba, más red de seguridad.</a:t>
+              <a:t>N1: ¿Qué es una toma de presión y para qué sirve?</a:t>
+            </a:r>
+          </a:p>
+          <a:p>
+            <a:r>
+              <a:t>N2: Una toma de presión es el pincho donde el gasista enchufa el manómetro para ver a cuánta presión va el gas en ese punto exacto. Sin tomas trabajarías a ciegas, no sabrías si el gas llega bien o se pierde por el camino. Por eso la norma las coloca en los sitios donde interesa comparar: a la entrada y a la salida de los reguladores, para comprobar que el regulador hace su trabajo; en la entrada de la centralización de contadores; a la salida del contador; y en el tramo interior, justo después de la llave de entrada a la vivienda. El truco para acordarte es sencillo: quieres poder medir a cada lado de los elementos importantes, para ver cuánta presión entra y cuánta sale. Un detalle práctico: los conjuntos de regulación normalizados ya vienen con sus tomas de fábrica, así que ahí no tienes que añadir nada.</a:t>
             </a:r>
           </a:p>
         </p:txBody>
@@ -1428,12 +1495,12 @@
           <a:lstStyle/>
           <a:p>
             <a:r>
-              <a:t>N1: ¿Dónde se coloca un conjunto de regulación de presión alta?</a:t>
-            </a:r>
-          </a:p>
-          <a:p>
-            <a:r>
-              <a:t>N2: Los conjuntos que trabajan entre cuatro décimas de bar y cinco bar tienen que ir en un sitio accesible desde zona común, lo que se llama grado de accesibilidad dos, y siempre con salida al exterior. En concreto, en armarios adosados o empotrados en paredes exteriores, en nichos que tengan al menos una pared que dé a la calle, en la centralización de contadores o en salas de máquinas. La razón de que dé al exterior es clara: si el conjunto tiene una fuga o su válvula de alivio suelta gas, que se vaya fuera y no se acumule dentro. Y una cifra que cae fijo: en los armarios y nichos hace falta una ventilación directa al exterior de al menos cinco centímetros cuadrados, y vale incluso la propia rendija entre la puerta y el armario si mide lo suficiente. Grábate el cinco: cinco centímetros cuadrados de ventilación.</a:t>
+              <a:t>N1: ¿Cómo se regula el gas natural?</a:t>
+            </a:r>
+          </a:p>
+          <a:p>
+            <a:r>
+              <a:t>N2: Con un sistema que se vuelve más exigente cuanta más presión entra, y esto es puro sentido de la seguridad. La segunda familia es el gas natural. Fíjate en la escalera. En lo más alto, de más de ciento cincuenta milibares hasta cinco bar, pides lo máximo: regulador, más una seguridad por máxima presión, más una seguridad por mínima. En el tramo medio, de más de cincuenta hasta ciento cincuenta milibares, regulador más seguridad por mínima. Y en lo más bajo, hasta cincuenta milibares, pones regulador solo si hace falta bajar la presión, y la seguridad por mínima solo si la presión pasa de veinticinco milibares; por debajo, se consulta a la compañía. ¿Por qué cuanta más presión más aparatos de seguridad? Porque una presión alta que se descontrola hace más daño: puede reventar membranas y estropear aparatos. La seguridad por máxima corta si la presión sube demasiado; la de mínima protege si se cae. Cuanto más arriba, más red de seguridad.</a:t>
             </a:r>
           </a:p>
         </p:txBody>
@@ -1503,12 +1570,12 @@
           <a:lstStyle/>
           <a:p>
             <a:r>
-              <a:t>N1: ¿Y los reguladores pequeños de una vivienda?</a:t>
-            </a:r>
-          </a:p>
-          <a:p>
-            <a:r>
-              <a:t>N2: Aquí hay dos cosas que memorizar. La primera, una frontera: un regulador de hasta cuatro coma ocho metros cúbicos por hora de aire es un regulador de a pie, no se considera conjunto de regulación, y se pincha directo a la entrada del contador o en línea. Por encima de ese caudal, si el regulador no trae seguridad por mínima incorporada, se la tienes que poner tú. La segunda cosa es la ventilación del regulador con válvula de alivio, la uve a ese, cuando va instalado por dentro. Necesita una ventilación permanente con el exterior de cinco centímetros cuadrados, y aquí está el truco de examen: la rejilla se pone arriba si el gas es más ligero que el aire, como el gas natural que sube, y abajo si el gas es más pesado, como el butano o el propano que bajan. Es de lógica: la rejilla se coloca por donde tiende a irse el gas. Otra vez el cinco, y el cuatro coma ocho como frontera.</a:t>
+              <a:t>N1: ¿Dónde se coloca un conjunto de regulación de presión alta?</a:t>
+            </a:r>
+          </a:p>
+          <a:p>
+            <a:r>
+              <a:t>N2: Los conjuntos que trabajan entre cuatro décimas de bar y cinco bar tienen que ir en un sitio accesible desde zona común, lo que se llama grado de accesibilidad dos, y siempre con salida al exterior. En concreto, en armarios adosados o empotrados en paredes exteriores, en nichos que tengan al menos una pared que dé a la calle, en la centralización de contadores o en salas de máquinas. La razón de que dé al exterior es clara: si el conjunto tiene una fuga o su válvula de alivio suelta gas, que se vaya fuera y no se acumule dentro. Y una cifra que cae fijo: en los armarios y nichos hace falta una ventilación directa al exterior de al menos cinco centímetros cuadrados, y vale incluso la propia rendija entre la puerta y el armario si mide lo suficiente. Grábate el cinco: cinco centímetros cuadrados de ventilación.</a:t>
             </a:r>
           </a:p>
         </p:txBody>
@@ -1578,12 +1645,12 @@
           <a:lstStyle/>
           <a:p>
             <a:r>
-              <a:t>N1: ¿Y el gas de bombona o de depósito, el GLP?</a:t>
-            </a:r>
-          </a:p>
-          <a:p>
-            <a:r>
-              <a:t>N2: El GLP, que es la tercera familia, o sea butano y propano, sale del depósito o de la bombona a mucha presión, así que se baja en dos escalones. Primero una etapa que lo deja entre una décima y dos bar a la entrada de la instalación receptora; esa cifra, de cero coma uno a dos bar, es la clave que cae. Y luego una segunda etapa que lo baja hasta la presión que necesita el aparato. Esa primera reducción se hace con dos reguladores en serie o con uno que lleve seguridad de alta. Si el suministro viene de una batería de bombonas, hay un inversor automático que cambia solo del grupo de bombonas vacío al lleno, para que no te quedes sin gas. Y con dos bombonas trabajando a la vez se ponen válvulas antirretorno, para que el gas no se trasvase de una bombona a la otra. Un apunte: si varias viviendas cuelgan del mismo depósito, cada una lleva su propia seguridad por mínima.</a:t>
+              <a:t>N1: ¿Y los reguladores pequeños de una vivienda?</a:t>
+            </a:r>
+          </a:p>
+          <a:p>
+            <a:r>
+              <a:t>N2: Aquí hay dos cosas que memorizar. La primera, una frontera: un regulador de hasta cuatro coma ocho metros cúbicos por hora de aire es un regulador de a pie, no se considera conjunto de regulación, y se pincha directo a la entrada del contador o en línea. Por encima de ese caudal, si el regulador no trae seguridad por mínima incorporada, se la tienes que poner tú. La segunda cosa es la ventilación del regulador con válvula de alivio, la uve a ese, cuando va instalado por dentro. Necesita una ventilación permanente con el exterior de cinco centímetros cuadrados, y aquí está el truco de examen: la rejilla se pone arriba si el gas es más ligero que el aire, como el gas natural que sube, y abajo si el gas es más pesado, como el butano o el propano que bajan. Es de lógica: la rejilla se coloca por donde tiende a irse el gas. Otra vez el cinco, y el cuatro coma ocho como frontera.</a:t>
             </a:r>
           </a:p>
         </p:txBody>
@@ -1653,12 +1720,12 @@
           <a:lstStyle/>
           <a:p>
             <a:r>
-              <a:t>N1: ¿Cómo me aprendo todas las llaves sin liarme?</a:t>
-            </a:r>
-          </a:p>
-          <a:p>
-            <a:r>
-              <a:t>N2: Visualizando el recorrido del gas y las llaves que se va encontrando por el camino, en orden. Entra por la llave de acometida, que es la de la calle y la pone la compañía. Luego, si la acometida es larga, la llave de edificio, a pie de fachada. Después, la de montante colectivo, si hay más de un montante. A continuación, la llave de usuario, que aísla tu vivienda del resto. Luego la llave de contador. Después la llave de vivienda, que es la tuya, dentro de casa. Y al final, la llave de conexión de cada aparato, una por cada caldera, calentador o cocina. Si te aprendes el recorrido de fuera hacia dentro, colocas cada llave en su sitio sin fallar, porque cada una va donde el gas la encuentra. Vamos a verlas una a una.</a:t>
+              <a:t>N1: ¿Y el gas de bombona o de depósito, el GLP?</a:t>
+            </a:r>
+          </a:p>
+          <a:p>
+            <a:r>
+              <a:t>N2: El GLP, que es la tercera familia, o sea butano y propano, sale del depósito o de la bombona a mucha presión, así que se baja en dos escalones. Primero una etapa que lo deja entre una décima y dos bar a la entrada de la instalación receptora; esa cifra, de cero coma uno a dos bar, es la clave que cae. Y luego una segunda etapa que lo baja hasta la presión que necesita el aparato. Esa primera reducción se hace con dos reguladores en serie o con uno que lleve seguridad de alta. Si el suministro viene de una batería de bombonas, hay un inversor automático que cambia solo del grupo de bombonas vacío al lleno, para que no te quedes sin gas. Y con dos bombonas trabajando a la vez se ponen válvulas antirretorno, para que el gas no se trasvase de una bombona a la otra. Un apunte: si varias viviendas cuelgan del mismo depósito, cada una lleva su propia seguridad por mínima.</a:t>
             </a:r>
           </a:p>
         </p:txBody>
@@ -1728,12 +1795,12 @@
           <a:lstStyle/>
           <a:p>
             <a:r>
-              <a:t>N1: ¿Cuándo hace falta llave de edificio?</a:t>
-            </a:r>
-          </a:p>
-          <a:p>
-            <a:r>
-              <a:t>N2: Empecemos por la de acometida: esa se instala siempre, es la que da inicio a la instalación receptora, y dónde va lo decide la compañía distribuidora, accesible desde la vía pública para ella y para los bomberos o la policía. Ahora, la de edificio no siempre hace falta. Solo se pone cuando la acometida interior, el tramo entre la llave de acometida y la fachada, es larga: veinticinco metros si el tubo va visto, o solo cuatro metros si va enterrado. ¿Por qué tan poco si va enterrado? Porque una fuga enterrada es mucho más difícil de detectar y de cerrar, así que la norma quiere una llave más cerca. También se pone la de edificio cuando la acometida da a más de un edificio. Y si la acometida es corta, no hace falta: la propia llave de acometida ya hace ese papel de cierre general.</a:t>
+              <a:t>N1: ¿Cómo me aprendo todas las llaves sin liarme?</a:t>
+            </a:r>
+          </a:p>
+          <a:p>
+            <a:r>
+              <a:t>N2: Visualizando el recorrido del gas y las llaves que se va encontrando por el camino, en orden. Entra por la llave de acometida, que es la de la calle y la pone la compañía. Luego, si la acometida es larga, la llave de edificio, a pie de fachada. Después, la de montante colectivo, si hay más de un montante. A continuación, la llave de usuario, que aísla tu vivienda del resto. Luego la llave de contador. Después la llave de vivienda, que es la tuya, dentro de casa. Y al final, la llave de conexión de cada aparato, una por cada caldera, calentador o cocina. Si te aprendes el recorrido de fuera hacia dentro, colocas cada llave en su sitio sin fallar, porque cada una va donde el gas la encuentra. Vamos a verlas una a una.</a:t>
             </a:r>
           </a:p>
         </p:txBody>
@@ -4808,7 +4875,7 @@
             <a:r>
               <a:rPr sz="1400" b="1" i="0">
                 <a:solidFill>
-                  <a:srgbClr val="CADCFC"/>
+                  <a:srgbClr val="F4A24C"/>
                 </a:solidFill>
                 <a:latin typeface="Montserrat"/>
               </a:rPr>
@@ -4819,13 +4886,57 @@
       </p:sp>
       <p:sp>
         <p:nvSpPr>
-          <p:cNvPr id="4" name="TextBox 3"/>
+          <p:cNvPr id="4" name="Rounded Rectangle 3"/>
+          <p:cNvSpPr/>
+          <p:nvPr/>
+        </p:nvSpPr>
+        <p:spPr>
+          <a:xfrm>
+            <a:off x="868680" y="2057400"/>
+            <a:ext cx="1463040" cy="82296"/>
+          </a:xfrm>
+          <a:prstGeom prst="roundRect">
+            <a:avLst/>
+          </a:prstGeom>
+          <a:solidFill>
+            <a:srgbClr val="E8801A"/>
+          </a:solidFill>
+          <a:ln>
+            <a:noFill/>
+          </a:ln>
+          <a:effectLst/>
+        </p:spPr>
+        <p:style>
+          <a:lnRef idx="1">
+            <a:schemeClr val="accent1"/>
+          </a:lnRef>
+          <a:fillRef idx="3">
+            <a:schemeClr val="accent1"/>
+          </a:fillRef>
+          <a:effectRef idx="2">
+            <a:schemeClr val="accent1"/>
+          </a:effectRef>
+          <a:fontRef idx="minor">
+            <a:schemeClr val="lt1"/>
+          </a:fontRef>
+        </p:style>
+        <p:txBody>
+          <a:bodyPr rtlCol="0" anchor="ctr"/>
+          <a:lstStyle/>
+          <a:p>
+            <a:pPr algn="ctr"/>
+          </a:p>
+        </p:txBody>
+      </p:sp>
+      <p:sp>
+        <p:nvSpPr>
+          <p:cNvPr id="5" name="TextBox 4"/>
           <p:cNvSpPr txBox="1"/>
           <p:nvPr/>
         </p:nvSpPr>
         <p:spPr>
           <a:xfrm>
-            <a:off x="822960" y="2194560"/>
+            <a:off x="822960" y="2286000"/>
             <a:ext cx="10515600" cy="2011680"/>
           </a:xfrm>
           <a:prstGeom prst="rect">
@@ -4864,7 +4975,7 @@
       </p:sp>
       <p:sp>
         <p:nvSpPr>
-          <p:cNvPr id="5" name="TextBox 4"/>
+          <p:cNvPr id="6" name="TextBox 5"/>
           <p:cNvSpPr txBox="1"/>
           <p:nvPr/>
         </p:nvSpPr>
@@ -4988,7 +5099,7 @@
                 </a:solidFill>
                 <a:latin typeface="Montserrat"/>
               </a:rPr>
-              <a:t>010 / 017</a:t>
+              <a:t>010 / 018</a:t>
             </a:r>
           </a:p>
         </p:txBody>
@@ -5036,7 +5147,7 @@
         <p:spPr>
           <a:xfrm>
             <a:off x="822960" y="457200"/>
-            <a:ext cx="8229600" cy="365760"/>
+            <a:ext cx="10058400" cy="365760"/>
           </a:xfrm>
           <a:prstGeom prst="rect">
             <a:avLst/>
@@ -5050,13 +5161,13 @@
           <a:lstStyle/>
           <a:p>
             <a:r>
-              <a:rPr sz="1200" b="1" i="0">
-                <a:solidFill>
-                  <a:srgbClr val="64748B"/>
-                </a:solidFill>
-                <a:latin typeface="Montserrat"/>
-              </a:rPr>
-              <a:t>APARTADO 7.3 · MONTANTE COLECTIVO</a:t>
+              <a:rPr sz="1300" b="1" i="0">
+                <a:solidFill>
+                  <a:srgbClr val="E8801A"/>
+                </a:solidFill>
+                <a:latin typeface="Montserrat"/>
+              </a:rPr>
+              <a:t>APARTADOS 7.1 Y 7.2</a:t>
             </a:r>
           </a:p>
         </p:txBody>
@@ -5084,26 +5195,70 @@
           <a:lstStyle/>
           <a:p>
             <a:r>
-              <a:rPr sz="2700" b="1" i="0">
+              <a:rPr sz="2800" b="1" i="0">
                 <a:solidFill>
                   <a:srgbClr val="1E2761"/>
                 </a:solidFill>
                 <a:latin typeface="Montserrat"/>
               </a:rPr>
-              <a:t>La llave para poder crecer</a:t>
-            </a:r>
-          </a:p>
-        </p:txBody>
-      </p:sp>
-      <p:sp>
-        <p:nvSpPr>
-          <p:cNvPr id="7" name="TextBox 6"/>
+              <a:t>Acometida y edificio: 25 y 4</a:t>
+            </a:r>
+          </a:p>
+        </p:txBody>
+      </p:sp>
+      <p:sp>
+        <p:nvSpPr>
+          <p:cNvPr id="7" name="Rounded Rectangle 6"/>
+          <p:cNvSpPr/>
+          <p:nvPr/>
+        </p:nvSpPr>
+        <p:spPr>
+          <a:xfrm>
+            <a:off x="868680" y="1627632"/>
+            <a:ext cx="2011680" cy="73152"/>
+          </a:xfrm>
+          <a:prstGeom prst="roundRect">
+            <a:avLst/>
+          </a:prstGeom>
+          <a:solidFill>
+            <a:srgbClr val="E8801A"/>
+          </a:solidFill>
+          <a:ln>
+            <a:noFill/>
+          </a:ln>
+          <a:effectLst/>
+        </p:spPr>
+        <p:style>
+          <a:lnRef idx="1">
+            <a:schemeClr val="accent1"/>
+          </a:lnRef>
+          <a:fillRef idx="3">
+            <a:schemeClr val="accent1"/>
+          </a:fillRef>
+          <a:effectRef idx="2">
+            <a:schemeClr val="accent1"/>
+          </a:effectRef>
+          <a:fontRef idx="minor">
+            <a:schemeClr val="lt1"/>
+          </a:fontRef>
+        </p:style>
+        <p:txBody>
+          <a:bodyPr rtlCol="0" anchor="ctr"/>
+          <a:lstStyle/>
+          <a:p>
+            <a:pPr algn="ctr"/>
+          </a:p>
+        </p:txBody>
+      </p:sp>
+      <p:sp>
+        <p:nvSpPr>
+          <p:cNvPr id="8" name="TextBox 7"/>
           <p:cNvSpPr txBox="1"/>
           <p:nvPr/>
         </p:nvSpPr>
         <p:spPr>
           <a:xfrm>
-            <a:off x="822960" y="1920240"/>
+            <a:off x="822960" y="1965960"/>
             <a:ext cx="4983480" cy="4206240"/>
           </a:xfrm>
           <a:prstGeom prst="rect">
@@ -5119,17 +5274,17 @@
           <a:p>
             <a:pPr>
               <a:spcAft>
-                <a:spcPts val="1000"/>
+                <a:spcPts val="1100"/>
               </a:spcAft>
             </a:pPr>
             <a:r>
               <a:rPr sz="1600" b="1" i="0">
                 <a:solidFill>
-                  <a:srgbClr val="2E3A80"/>
-                </a:solidFill>
-                <a:latin typeface="Montserrat"/>
-              </a:rPr>
-              <a:t>•  </a:t>
+                  <a:srgbClr val="E8801A"/>
+                </a:solidFill>
+                <a:latin typeface="Montserrat"/>
+              </a:rPr>
+              <a:t>▸  </a:t>
             </a:r>
             <a:r>
               <a:rPr sz="1600" b="0" i="0">
@@ -5138,23 +5293,23 @@
                 </a:solidFill>
                 <a:latin typeface="Montserrat"/>
               </a:rPr>
-              <a:t>Una si hay más de un montante</a:t>
+              <a:t>Acometida: siempre, la pone la distribuidora</a:t>
             </a:r>
           </a:p>
           <a:p>
             <a:pPr>
               <a:spcAft>
-                <a:spcPts val="1000"/>
+                <a:spcPts val="1100"/>
               </a:spcAft>
             </a:pPr>
             <a:r>
               <a:rPr sz="1600" b="1" i="0">
                 <a:solidFill>
-                  <a:srgbClr val="2E3A80"/>
-                </a:solidFill>
-                <a:latin typeface="Montserrat"/>
-              </a:rPr>
-              <a:t>•  </a:t>
+                  <a:srgbClr val="E8801A"/>
+                </a:solidFill>
+                <a:latin typeface="Montserrat"/>
+              </a:rPr>
+              <a:t>▸  </a:t>
             </a:r>
             <a:r>
               <a:rPr sz="1600" b="0" i="0">
@@ -5163,23 +5318,23 @@
                 </a:solidFill>
                 <a:latin typeface="Montserrat"/>
               </a:rPr>
-              <a:t>Adicional: cerrada, bloqueada y precintada</a:t>
+              <a:t>Edificio: solo si la acometida es larga</a:t>
             </a:r>
           </a:p>
           <a:p>
             <a:pPr>
               <a:spcAft>
-                <a:spcPts val="1000"/>
+                <a:spcPts val="1100"/>
               </a:spcAft>
             </a:pPr>
             <a:r>
               <a:rPr sz="1600" b="1" i="0">
                 <a:solidFill>
-                  <a:srgbClr val="2E3A80"/>
-                </a:solidFill>
-                <a:latin typeface="Montserrat"/>
-              </a:rPr>
-              <a:t>•  </a:t>
+                  <a:srgbClr val="E8801A"/>
+                </a:solidFill>
+                <a:latin typeface="Montserrat"/>
+              </a:rPr>
+              <a:t>▸  </a:t>
             </a:r>
             <a:r>
               <a:rPr sz="1600" b="0" i="0">
@@ -5188,14 +5343,14 @@
                 </a:solidFill>
                 <a:latin typeface="Montserrat"/>
               </a:rPr>
-              <a:t>Toma Peterson en tramos aéreos</a:t>
-            </a:r>
-          </a:p>
-        </p:txBody>
-      </p:sp>
-      <p:sp>
-        <p:nvSpPr>
-          <p:cNvPr id="8" name="imgph" descr="IMGQ:vertical gas riser pipe in stairwell"/>
+              <a:t>25 m si va vista o 4 m si va enterrada</a:t>
+            </a:r>
+          </a:p>
+        </p:txBody>
+      </p:sp>
+      <p:sp>
+        <p:nvSpPr>
+          <p:cNvPr id="9" name="imgph" descr="IMGQ:gas service valve on street pavement"/>
           <p:cNvSpPr/>
           <p:nvPr/>
         </p:nvSpPr>
@@ -5241,7 +5396,7 @@
       </p:sp>
       <p:sp>
         <p:nvSpPr>
-          <p:cNvPr id="9" name="TextBox 8"/>
+          <p:cNvPr id="10" name="TextBox 9"/>
           <p:cNvSpPr txBox="1"/>
           <p:nvPr/>
         </p:nvSpPr>
@@ -5281,7 +5436,7 @@
                 </a:solidFill>
                 <a:latin typeface="Montserrat"/>
               </a:rPr>
-              <a:t>vertical gas riser pipe in stairwell</a:t>
+              <a:t>gas service valve on street pavement</a:t>
             </a:r>
           </a:p>
         </p:txBody>
@@ -5378,7 +5533,7 @@
                 </a:solidFill>
                 <a:latin typeface="Montserrat"/>
               </a:rPr>
-              <a:t>011 / 017</a:t>
+              <a:t>011 / 018</a:t>
             </a:r>
           </a:p>
         </p:txBody>
@@ -5426,7 +5581,7 @@
         <p:spPr>
           <a:xfrm>
             <a:off x="822960" y="457200"/>
-            <a:ext cx="8229600" cy="365760"/>
+            <a:ext cx="10058400" cy="365760"/>
           </a:xfrm>
           <a:prstGeom prst="rect">
             <a:avLst/>
@@ -5440,13 +5595,13 @@
           <a:lstStyle/>
           <a:p>
             <a:r>
-              <a:rPr sz="1200" b="1" i="0">
-                <a:solidFill>
-                  <a:srgbClr val="64748B"/>
-                </a:solidFill>
-                <a:latin typeface="Montserrat"/>
-              </a:rPr>
-              <a:t>APARTADOS 7.4 Y 7.5.1</a:t>
+              <a:rPr sz="1300" b="1" i="0">
+                <a:solidFill>
+                  <a:srgbClr val="E8801A"/>
+                </a:solidFill>
+                <a:latin typeface="Montserrat"/>
+              </a:rPr>
+              <a:t>APARTADO 7.3 · MONTANTE COLECTIVO</a:t>
             </a:r>
           </a:p>
         </p:txBody>
@@ -5474,26 +5629,70 @@
           <a:lstStyle/>
           <a:p>
             <a:r>
-              <a:rPr sz="2700" b="1" i="0">
+              <a:rPr sz="2800" b="1" i="0">
                 <a:solidFill>
                   <a:srgbClr val="1E2761"/>
                 </a:solidFill>
                 <a:latin typeface="Montserrat"/>
               </a:rPr>
-              <a:t>Usuario y contador: aislar tu piso</a:t>
-            </a:r>
-          </a:p>
-        </p:txBody>
-      </p:sp>
-      <p:sp>
-        <p:nvSpPr>
-          <p:cNvPr id="7" name="TextBox 6"/>
+              <a:t>La llave para poder crecer</a:t>
+            </a:r>
+          </a:p>
+        </p:txBody>
+      </p:sp>
+      <p:sp>
+        <p:nvSpPr>
+          <p:cNvPr id="7" name="Rounded Rectangle 6"/>
+          <p:cNvSpPr/>
+          <p:nvPr/>
+        </p:nvSpPr>
+        <p:spPr>
+          <a:xfrm>
+            <a:off x="868680" y="1627632"/>
+            <a:ext cx="2011680" cy="73152"/>
+          </a:xfrm>
+          <a:prstGeom prst="roundRect">
+            <a:avLst/>
+          </a:prstGeom>
+          <a:solidFill>
+            <a:srgbClr val="E8801A"/>
+          </a:solidFill>
+          <a:ln>
+            <a:noFill/>
+          </a:ln>
+          <a:effectLst/>
+        </p:spPr>
+        <p:style>
+          <a:lnRef idx="1">
+            <a:schemeClr val="accent1"/>
+          </a:lnRef>
+          <a:fillRef idx="3">
+            <a:schemeClr val="accent1"/>
+          </a:fillRef>
+          <a:effectRef idx="2">
+            <a:schemeClr val="accent1"/>
+          </a:effectRef>
+          <a:fontRef idx="minor">
+            <a:schemeClr val="lt1"/>
+          </a:fontRef>
+        </p:style>
+        <p:txBody>
+          <a:bodyPr rtlCol="0" anchor="ctr"/>
+          <a:lstStyle/>
+          <a:p>
+            <a:pPr algn="ctr"/>
+          </a:p>
+        </p:txBody>
+      </p:sp>
+      <p:sp>
+        <p:nvSpPr>
+          <p:cNvPr id="8" name="TextBox 7"/>
           <p:cNvSpPr txBox="1"/>
           <p:nvPr/>
         </p:nvSpPr>
         <p:spPr>
           <a:xfrm>
-            <a:off x="822960" y="1920240"/>
+            <a:off x="822960" y="1965960"/>
             <a:ext cx="4983480" cy="4206240"/>
           </a:xfrm>
           <a:prstGeom prst="rect">
@@ -5509,17 +5708,17 @@
           <a:p>
             <a:pPr>
               <a:spcAft>
-                <a:spcPts val="1000"/>
+                <a:spcPts val="1100"/>
               </a:spcAft>
             </a:pPr>
             <a:r>
               <a:rPr sz="1600" b="1" i="0">
                 <a:solidFill>
-                  <a:srgbClr val="2E3A80"/>
-                </a:solidFill>
-                <a:latin typeface="Montserrat"/>
-              </a:rPr>
-              <a:t>•  </a:t>
+                  <a:srgbClr val="E8801A"/>
+                </a:solidFill>
+                <a:latin typeface="Montserrat"/>
+              </a:rPr>
+              <a:t>▸  </a:t>
             </a:r>
             <a:r>
               <a:rPr sz="1600" b="0" i="0">
@@ -5528,23 +5727,23 @@
                 </a:solidFill>
                 <a:latin typeface="Montserrat"/>
               </a:rPr>
-              <a:t>Usuario: aísla cada vivienda, grado 2</a:t>
+              <a:t>Una si hay más de un montante</a:t>
             </a:r>
           </a:p>
           <a:p>
             <a:pPr>
               <a:spcAft>
-                <a:spcPts val="1000"/>
+                <a:spcPts val="1100"/>
               </a:spcAft>
             </a:pPr>
             <a:r>
               <a:rPr sz="1600" b="1" i="0">
                 <a:solidFill>
-                  <a:srgbClr val="2E3A80"/>
-                </a:solidFill>
-                <a:latin typeface="Montserrat"/>
-              </a:rPr>
-              <a:t>•  </a:t>
+                  <a:srgbClr val="E8801A"/>
+                </a:solidFill>
+                <a:latin typeface="Montserrat"/>
+              </a:rPr>
+              <a:t>▸  </a:t>
             </a:r>
             <a:r>
               <a:rPr sz="1600" b="0" i="0">
@@ -5553,23 +5752,23 @@
                 </a:solidFill>
                 <a:latin typeface="Montserrat"/>
               </a:rPr>
-              <a:t>Contador: siempre, junto a su entrada</a:t>
+              <a:t>Adicional: cerrada, bloqueada y precintada</a:t>
             </a:r>
           </a:p>
           <a:p>
             <a:pPr>
               <a:spcAft>
-                <a:spcPts val="1000"/>
+                <a:spcPts val="1100"/>
               </a:spcAft>
             </a:pPr>
             <a:r>
               <a:rPr sz="1600" b="1" i="0">
                 <a:solidFill>
-                  <a:srgbClr val="2E3A80"/>
-                </a:solidFill>
-                <a:latin typeface="Montserrat"/>
-              </a:rPr>
-              <a:t>•  </a:t>
+                  <a:srgbClr val="E8801A"/>
+                </a:solidFill>
+                <a:latin typeface="Montserrat"/>
+              </a:rPr>
+              <a:t>▸  </a:t>
             </a:r>
             <a:r>
               <a:rPr sz="1600" b="0" i="0">
@@ -5578,14 +5777,14 @@
                 </a:solidFill>
                 <a:latin typeface="Montserrat"/>
               </a:rPr>
-              <a:t>El contador puede hacer de usuario</a:t>
-            </a:r>
-          </a:p>
-        </p:txBody>
-      </p:sp>
-      <p:sp>
-        <p:nvSpPr>
-          <p:cNvPr id="8" name="imgph" descr="IMGQ:gas meter with shut off valve"/>
+              <a:t>Toma Peterson en tramos aéreos</a:t>
+            </a:r>
+          </a:p>
+        </p:txBody>
+      </p:sp>
+      <p:sp>
+        <p:nvSpPr>
+          <p:cNvPr id="9" name="imgph" descr="IMGQ:vertical gas riser pipe in stairwell"/>
           <p:cNvSpPr/>
           <p:nvPr/>
         </p:nvSpPr>
@@ -5631,7 +5830,7 @@
       </p:sp>
       <p:sp>
         <p:nvSpPr>
-          <p:cNvPr id="9" name="TextBox 8"/>
+          <p:cNvPr id="10" name="TextBox 9"/>
           <p:cNvSpPr txBox="1"/>
           <p:nvPr/>
         </p:nvSpPr>
@@ -5671,7 +5870,7 @@
                 </a:solidFill>
                 <a:latin typeface="Montserrat"/>
               </a:rPr>
-              <a:t>gas meter with shut off valve</a:t>
+              <a:t>vertical gas riser pipe in stairwell</a:t>
             </a:r>
           </a:p>
         </p:txBody>
@@ -5768,7 +5967,7 @@
                 </a:solidFill>
                 <a:latin typeface="Montserrat"/>
               </a:rPr>
-              <a:t>012 / 017</a:t>
+              <a:t>012 / 018</a:t>
             </a:r>
           </a:p>
         </p:txBody>
@@ -5816,7 +6015,7 @@
         <p:spPr>
           <a:xfrm>
             <a:off x="822960" y="457200"/>
-            <a:ext cx="8229600" cy="365760"/>
+            <a:ext cx="10058400" cy="365760"/>
           </a:xfrm>
           <a:prstGeom prst="rect">
             <a:avLst/>
@@ -5830,13 +6029,13 @@
           <a:lstStyle/>
           <a:p>
             <a:r>
-              <a:rPr sz="1200" b="1" i="0">
-                <a:solidFill>
-                  <a:srgbClr val="64748B"/>
-                </a:solidFill>
-                <a:latin typeface="Montserrat"/>
-              </a:rPr>
-              <a:t>APARTADO 7.5.2 · LLAVE DE VIVIENDA</a:t>
+              <a:rPr sz="1300" b="1" i="0">
+                <a:solidFill>
+                  <a:srgbClr val="E8801A"/>
+                </a:solidFill>
+                <a:latin typeface="Montserrat"/>
+              </a:rPr>
+              <a:t>APARTADOS 7.4 Y 7.5.1</a:t>
             </a:r>
           </a:p>
         </p:txBody>
@@ -5864,26 +6063,70 @@
           <a:lstStyle/>
           <a:p>
             <a:r>
-              <a:rPr sz="2700" b="1" i="0">
+              <a:rPr sz="2800" b="1" i="0">
                 <a:solidFill>
                   <a:srgbClr val="1E2761"/>
                 </a:solidFill>
                 <a:latin typeface="Montserrat"/>
               </a:rPr>
-              <a:t>La llave de vivienda es la tuya</a:t>
-            </a:r>
-          </a:p>
-        </p:txBody>
-      </p:sp>
-      <p:sp>
-        <p:nvSpPr>
-          <p:cNvPr id="7" name="TextBox 6"/>
+              <a:t>Usuario y contador: aislar tu piso</a:t>
+            </a:r>
+          </a:p>
+        </p:txBody>
+      </p:sp>
+      <p:sp>
+        <p:nvSpPr>
+          <p:cNvPr id="7" name="Rounded Rectangle 6"/>
+          <p:cNvSpPr/>
+          <p:nvPr/>
+        </p:nvSpPr>
+        <p:spPr>
+          <a:xfrm>
+            <a:off x="868680" y="1627632"/>
+            <a:ext cx="2011680" cy="73152"/>
+          </a:xfrm>
+          <a:prstGeom prst="roundRect">
+            <a:avLst/>
+          </a:prstGeom>
+          <a:solidFill>
+            <a:srgbClr val="E8801A"/>
+          </a:solidFill>
+          <a:ln>
+            <a:noFill/>
+          </a:ln>
+          <a:effectLst/>
+        </p:spPr>
+        <p:style>
+          <a:lnRef idx="1">
+            <a:schemeClr val="accent1"/>
+          </a:lnRef>
+          <a:fillRef idx="3">
+            <a:schemeClr val="accent1"/>
+          </a:fillRef>
+          <a:effectRef idx="2">
+            <a:schemeClr val="accent1"/>
+          </a:effectRef>
+          <a:fontRef idx="minor">
+            <a:schemeClr val="lt1"/>
+          </a:fontRef>
+        </p:style>
+        <p:txBody>
+          <a:bodyPr rtlCol="0" anchor="ctr"/>
+          <a:lstStyle/>
+          <a:p>
+            <a:pPr algn="ctr"/>
+          </a:p>
+        </p:txBody>
+      </p:sp>
+      <p:sp>
+        <p:nvSpPr>
+          <p:cNvPr id="8" name="TextBox 7"/>
           <p:cNvSpPr txBox="1"/>
           <p:nvPr/>
         </p:nvSpPr>
         <p:spPr>
           <a:xfrm>
-            <a:off x="822960" y="1920240"/>
+            <a:off x="822960" y="1965960"/>
             <a:ext cx="4983480" cy="4206240"/>
           </a:xfrm>
           <a:prstGeom prst="rect">
@@ -5899,17 +6142,17 @@
           <a:p>
             <a:pPr>
               <a:spcAft>
-                <a:spcPts val="1000"/>
+                <a:spcPts val="1100"/>
               </a:spcAft>
             </a:pPr>
             <a:r>
               <a:rPr sz="1600" b="1" i="0">
                 <a:solidFill>
-                  <a:srgbClr val="2E3A80"/>
-                </a:solidFill>
-                <a:latin typeface="Montserrat"/>
-              </a:rPr>
-              <a:t>•  </a:t>
+                  <a:srgbClr val="E8801A"/>
+                </a:solidFill>
+                <a:latin typeface="Montserrat"/>
+              </a:rPr>
+              <a:t>▸  </a:t>
             </a:r>
             <a:r>
               <a:rPr sz="1600" b="0" i="0">
@@ -5918,23 +6161,23 @@
                 </a:solidFill>
                 <a:latin typeface="Montserrat"/>
               </a:rPr>
-              <a:t>Siempre, con accesibilidad de grado 1</a:t>
+              <a:t>Usuario: aísla cada vivienda, grado 2</a:t>
             </a:r>
           </a:p>
           <a:p>
             <a:pPr>
               <a:spcAft>
-                <a:spcPts val="1000"/>
+                <a:spcPts val="1100"/>
               </a:spcAft>
             </a:pPr>
             <a:r>
               <a:rPr sz="1600" b="1" i="0">
                 <a:solidFill>
-                  <a:srgbClr val="2E3A80"/>
-                </a:solidFill>
-                <a:latin typeface="Montserrat"/>
-              </a:rPr>
-              <a:t>•  </a:t>
+                  <a:srgbClr val="E8801A"/>
+                </a:solidFill>
+                <a:latin typeface="Montserrat"/>
+              </a:rPr>
+              <a:t>▸  </a:t>
             </a:r>
             <a:r>
               <a:rPr sz="1600" b="0" i="0">
@@ -5943,23 +6186,23 @@
                 </a:solidFill>
                 <a:latin typeface="Montserrat"/>
               </a:rPr>
-              <a:t>Fuera de la vivienda pero accesible dentro</a:t>
+              <a:t>Contador: siempre, junto a su entrada</a:t>
             </a:r>
           </a:p>
           <a:p>
             <a:pPr>
               <a:spcAft>
-                <a:spcPts val="1000"/>
+                <a:spcPts val="1100"/>
               </a:spcAft>
             </a:pPr>
             <a:r>
               <a:rPr sz="1600" b="1" i="0">
                 <a:solidFill>
-                  <a:srgbClr val="2E3A80"/>
-                </a:solidFill>
-                <a:latin typeface="Montserrat"/>
-              </a:rPr>
-              <a:t>•  </a:t>
+                  <a:srgbClr val="E8801A"/>
+                </a:solidFill>
+                <a:latin typeface="Montserrat"/>
+              </a:rPr>
+              <a:t>▸  </a:t>
             </a:r>
             <a:r>
               <a:rPr sz="1600" b="0" i="0">
@@ -5968,14 +6211,14 @@
                 </a:solidFill>
                 <a:latin typeface="Montserrat"/>
               </a:rPr>
-              <a:t>Corta el gas de toda la casa</a:t>
-            </a:r>
-          </a:p>
-        </p:txBody>
-      </p:sp>
-      <p:sp>
-        <p:nvSpPr>
-          <p:cNvPr id="8" name="imgph" descr="IMGQ:gas valve inside home hallway"/>
+              <a:t>El contador puede hacer de usuario</a:t>
+            </a:r>
+          </a:p>
+        </p:txBody>
+      </p:sp>
+      <p:sp>
+        <p:nvSpPr>
+          <p:cNvPr id="9" name="imgph" descr="IMGQ:gas meter with shut off valve"/>
           <p:cNvSpPr/>
           <p:nvPr/>
         </p:nvSpPr>
@@ -6021,7 +6264,7 @@
       </p:sp>
       <p:sp>
         <p:nvSpPr>
-          <p:cNvPr id="9" name="TextBox 8"/>
+          <p:cNvPr id="10" name="TextBox 9"/>
           <p:cNvSpPr txBox="1"/>
           <p:nvPr/>
         </p:nvSpPr>
@@ -6061,7 +6304,7 @@
                 </a:solidFill>
                 <a:latin typeface="Montserrat"/>
               </a:rPr>
-              <a:t>gas valve inside home hallway</a:t>
+              <a:t>gas meter with shut off valve</a:t>
             </a:r>
           </a:p>
         </p:txBody>
@@ -6158,7 +6401,7 @@
                 </a:solidFill>
                 <a:latin typeface="Montserrat"/>
               </a:rPr>
-              <a:t>013 / 017</a:t>
+              <a:t>013 / 018</a:t>
             </a:r>
           </a:p>
         </p:txBody>
@@ -6206,7 +6449,7 @@
         <p:spPr>
           <a:xfrm>
             <a:off x="822960" y="457200"/>
-            <a:ext cx="8229600" cy="365760"/>
+            <a:ext cx="10058400" cy="365760"/>
           </a:xfrm>
           <a:prstGeom prst="rect">
             <a:avLst/>
@@ -6220,13 +6463,13 @@
           <a:lstStyle/>
           <a:p>
             <a:r>
-              <a:rPr sz="1200" b="1" i="0">
-                <a:solidFill>
-                  <a:srgbClr val="64748B"/>
-                </a:solidFill>
-                <a:latin typeface="Montserrat"/>
-              </a:rPr>
-              <a:t>APARTADO 7.5.3 · LLAVE DE APARATO</a:t>
+              <a:rPr sz="1300" b="1" i="0">
+                <a:solidFill>
+                  <a:srgbClr val="E8801A"/>
+                </a:solidFill>
+                <a:latin typeface="Montserrat"/>
+              </a:rPr>
+              <a:t>APARTADO 7.5.2 · LLAVE DE VIVIENDA</a:t>
             </a:r>
           </a:p>
         </p:txBody>
@@ -6254,26 +6497,70 @@
           <a:lstStyle/>
           <a:p>
             <a:r>
-              <a:rPr sz="2700" b="1" i="0">
+              <a:rPr sz="2800" b="1" i="0">
                 <a:solidFill>
                   <a:srgbClr val="1E2761"/>
                 </a:solidFill>
                 <a:latin typeface="Montserrat"/>
               </a:rPr>
-              <a:t>Una llave por cada aparato</a:t>
-            </a:r>
-          </a:p>
-        </p:txBody>
-      </p:sp>
-      <p:sp>
-        <p:nvSpPr>
-          <p:cNvPr id="7" name="TextBox 6"/>
+              <a:t>La llave de vivienda es la tuya</a:t>
+            </a:r>
+          </a:p>
+        </p:txBody>
+      </p:sp>
+      <p:sp>
+        <p:nvSpPr>
+          <p:cNvPr id="7" name="Rounded Rectangle 6"/>
+          <p:cNvSpPr/>
+          <p:nvPr/>
+        </p:nvSpPr>
+        <p:spPr>
+          <a:xfrm>
+            <a:off x="868680" y="1627632"/>
+            <a:ext cx="2011680" cy="73152"/>
+          </a:xfrm>
+          <a:prstGeom prst="roundRect">
+            <a:avLst/>
+          </a:prstGeom>
+          <a:solidFill>
+            <a:srgbClr val="E8801A"/>
+          </a:solidFill>
+          <a:ln>
+            <a:noFill/>
+          </a:ln>
+          <a:effectLst/>
+        </p:spPr>
+        <p:style>
+          <a:lnRef idx="1">
+            <a:schemeClr val="accent1"/>
+          </a:lnRef>
+          <a:fillRef idx="3">
+            <a:schemeClr val="accent1"/>
+          </a:fillRef>
+          <a:effectRef idx="2">
+            <a:schemeClr val="accent1"/>
+          </a:effectRef>
+          <a:fontRef idx="minor">
+            <a:schemeClr val="lt1"/>
+          </a:fontRef>
+        </p:style>
+        <p:txBody>
+          <a:bodyPr rtlCol="0" anchor="ctr"/>
+          <a:lstStyle/>
+          <a:p>
+            <a:pPr algn="ctr"/>
+          </a:p>
+        </p:txBody>
+      </p:sp>
+      <p:sp>
+        <p:nvSpPr>
+          <p:cNvPr id="8" name="TextBox 7"/>
           <p:cNvSpPr txBox="1"/>
           <p:nvPr/>
         </p:nvSpPr>
         <p:spPr>
           <a:xfrm>
-            <a:off x="822960" y="1920240"/>
+            <a:off x="822960" y="1965960"/>
             <a:ext cx="4983480" cy="4206240"/>
           </a:xfrm>
           <a:prstGeom prst="rect">
@@ -6289,17 +6576,17 @@
           <a:p>
             <a:pPr>
               <a:spcAft>
-                <a:spcPts val="1000"/>
+                <a:spcPts val="1100"/>
               </a:spcAft>
             </a:pPr>
             <a:r>
               <a:rPr sz="1600" b="1" i="0">
                 <a:solidFill>
-                  <a:srgbClr val="2E3A80"/>
-                </a:solidFill>
-                <a:latin typeface="Montserrat"/>
-              </a:rPr>
-              <a:t>•  </a:t>
+                  <a:srgbClr val="E8801A"/>
+                </a:solidFill>
+                <a:latin typeface="Montserrat"/>
+              </a:rPr>
+              <a:t>▸  </a:t>
             </a:r>
             <a:r>
               <a:rPr sz="1600" b="0" i="0">
@@ -6308,23 +6595,23 @@
                 </a:solidFill>
                 <a:latin typeface="Montserrat"/>
               </a:rPr>
-              <a:t>Junto al aparato, en el mismo recinto</a:t>
+              <a:t>Siempre, con accesibilidad de grado 1</a:t>
             </a:r>
           </a:p>
           <a:p>
             <a:pPr>
               <a:spcAft>
-                <a:spcPts val="1000"/>
+                <a:spcPts val="1100"/>
               </a:spcAft>
             </a:pPr>
             <a:r>
               <a:rPr sz="1600" b="1" i="0">
                 <a:solidFill>
-                  <a:srgbClr val="2E3A80"/>
-                </a:solidFill>
-                <a:latin typeface="Montserrat"/>
-              </a:rPr>
-              <a:t>•  </a:t>
+                  <a:srgbClr val="E8801A"/>
+                </a:solidFill>
+                <a:latin typeface="Montserrat"/>
+              </a:rPr>
+              <a:t>▸  </a:t>
             </a:r>
             <a:r>
               <a:rPr sz="1600" b="0" i="0">
@@ -6333,23 +6620,23 @@
                 </a:solidFill>
                 <a:latin typeface="Montserrat"/>
               </a:rPr>
-              <a:t>Pendientes: cerradas, bloqueadas, precintadas</a:t>
+              <a:t>Fuera de la vivienda pero accesible dentro</a:t>
             </a:r>
           </a:p>
           <a:p>
             <a:pPr>
               <a:spcAft>
-                <a:spcPts val="1000"/>
+                <a:spcPts val="1100"/>
               </a:spcAft>
             </a:pPr>
             <a:r>
               <a:rPr sz="1600" b="1" i="0">
                 <a:solidFill>
-                  <a:srgbClr val="2E3A80"/>
-                </a:solidFill>
-                <a:latin typeface="Montserrat"/>
-              </a:rPr>
-              <a:t>•  </a:t>
+                  <a:srgbClr val="E8801A"/>
+                </a:solidFill>
+                <a:latin typeface="Montserrat"/>
+              </a:rPr>
+              <a:t>▸  </a:t>
             </a:r>
             <a:r>
               <a:rPr sz="1600" b="0" i="0">
@@ -6358,14 +6645,14 @@
                 </a:solidFill>
                 <a:latin typeface="Montserrat"/>
               </a:rPr>
-              <a:t>Cocina: limitador de exceso de flujo</a:t>
-            </a:r>
-          </a:p>
-        </p:txBody>
-      </p:sp>
-      <p:sp>
-        <p:nvSpPr>
-          <p:cNvPr id="8" name="imgph" descr="IMGQ:gas cooker connection valve in kitchen"/>
+              <a:t>Corta el gas de toda la casa</a:t>
+            </a:r>
+          </a:p>
+        </p:txBody>
+      </p:sp>
+      <p:sp>
+        <p:nvSpPr>
+          <p:cNvPr id="9" name="imgph" descr="IMGQ:gas valve inside home hallway"/>
           <p:cNvSpPr/>
           <p:nvPr/>
         </p:nvSpPr>
@@ -6411,7 +6698,7 @@
       </p:sp>
       <p:sp>
         <p:nvSpPr>
-          <p:cNvPr id="9" name="TextBox 8"/>
+          <p:cNvPr id="10" name="TextBox 9"/>
           <p:cNvSpPr txBox="1"/>
           <p:nvPr/>
         </p:nvSpPr>
@@ -6451,7 +6738,7 @@
                 </a:solidFill>
                 <a:latin typeface="Montserrat"/>
               </a:rPr>
-              <a:t>gas cooker connection valve in kitchen</a:t>
+              <a:t>gas valve inside home hallway</a:t>
             </a:r>
           </a:p>
         </p:txBody>
@@ -6548,7 +6835,7 @@
                 </a:solidFill>
                 <a:latin typeface="Montserrat"/>
               </a:rPr>
-              <a:t>014 / 017</a:t>
+              <a:t>014 / 018</a:t>
             </a:r>
           </a:p>
         </p:txBody>
@@ -6596,7 +6883,7 @@
         <p:spPr>
           <a:xfrm>
             <a:off x="822960" y="457200"/>
-            <a:ext cx="8229600" cy="365760"/>
+            <a:ext cx="10058400" cy="365760"/>
           </a:xfrm>
           <a:prstGeom prst="rect">
             <a:avLst/>
@@ -6610,13 +6897,13 @@
           <a:lstStyle/>
           <a:p>
             <a:r>
-              <a:rPr sz="1200" b="1" i="0">
-                <a:solidFill>
-                  <a:srgbClr val="64748B"/>
-                </a:solidFill>
-                <a:latin typeface="Montserrat"/>
-              </a:rPr>
-              <a:t>GRADOS DE ACCESIBILIDAD</a:t>
+              <a:rPr sz="1300" b="1" i="0">
+                <a:solidFill>
+                  <a:srgbClr val="E8801A"/>
+                </a:solidFill>
+                <a:latin typeface="Montserrat"/>
+              </a:rPr>
+              <a:t>APARTADO 7.5.3 · LLAVE DE APARATO</a:t>
             </a:r>
           </a:p>
         </p:txBody>
@@ -6644,26 +6931,70 @@
           <a:lstStyle/>
           <a:p>
             <a:r>
-              <a:rPr sz="2700" b="1" i="0">
+              <a:rPr sz="2800" b="1" i="0">
                 <a:solidFill>
                   <a:srgbClr val="1E2761"/>
                 </a:solidFill>
                 <a:latin typeface="Montserrat"/>
               </a:rPr>
-              <a:t>Quién llega a cada llave</a:t>
-            </a:r>
-          </a:p>
-        </p:txBody>
-      </p:sp>
-      <p:sp>
-        <p:nvSpPr>
-          <p:cNvPr id="7" name="TextBox 6"/>
+              <a:t>Una llave por cada aparato</a:t>
+            </a:r>
+          </a:p>
+        </p:txBody>
+      </p:sp>
+      <p:sp>
+        <p:nvSpPr>
+          <p:cNvPr id="7" name="Rounded Rectangle 6"/>
+          <p:cNvSpPr/>
+          <p:nvPr/>
+        </p:nvSpPr>
+        <p:spPr>
+          <a:xfrm>
+            <a:off x="868680" y="1627632"/>
+            <a:ext cx="2011680" cy="73152"/>
+          </a:xfrm>
+          <a:prstGeom prst="roundRect">
+            <a:avLst/>
+          </a:prstGeom>
+          <a:solidFill>
+            <a:srgbClr val="E8801A"/>
+          </a:solidFill>
+          <a:ln>
+            <a:noFill/>
+          </a:ln>
+          <a:effectLst/>
+        </p:spPr>
+        <p:style>
+          <a:lnRef idx="1">
+            <a:schemeClr val="accent1"/>
+          </a:lnRef>
+          <a:fillRef idx="3">
+            <a:schemeClr val="accent1"/>
+          </a:fillRef>
+          <a:effectRef idx="2">
+            <a:schemeClr val="accent1"/>
+          </a:effectRef>
+          <a:fontRef idx="minor">
+            <a:schemeClr val="lt1"/>
+          </a:fontRef>
+        </p:style>
+        <p:txBody>
+          <a:bodyPr rtlCol="0" anchor="ctr"/>
+          <a:lstStyle/>
+          <a:p>
+            <a:pPr algn="ctr"/>
+          </a:p>
+        </p:txBody>
+      </p:sp>
+      <p:sp>
+        <p:nvSpPr>
+          <p:cNvPr id="8" name="TextBox 7"/>
           <p:cNvSpPr txBox="1"/>
           <p:nvPr/>
         </p:nvSpPr>
         <p:spPr>
           <a:xfrm>
-            <a:off x="822960" y="1920240"/>
+            <a:off x="822960" y="1965960"/>
             <a:ext cx="4983480" cy="4206240"/>
           </a:xfrm>
           <a:prstGeom prst="rect">
@@ -6679,17 +7010,17 @@
           <a:p>
             <a:pPr>
               <a:spcAft>
-                <a:spcPts val="1000"/>
+                <a:spcPts val="1100"/>
               </a:spcAft>
             </a:pPr>
             <a:r>
               <a:rPr sz="1600" b="1" i="0">
                 <a:solidFill>
-                  <a:srgbClr val="2E3A80"/>
-                </a:solidFill>
-                <a:latin typeface="Montserrat"/>
-              </a:rPr>
-              <a:t>•  </a:t>
+                  <a:srgbClr val="E8801A"/>
+                </a:solidFill>
+                <a:latin typeface="Montserrat"/>
+              </a:rPr>
+              <a:t>▸  </a:t>
             </a:r>
             <a:r>
               <a:rPr sz="1600" b="0" i="0">
@@ -6698,23 +7029,23 @@
                 </a:solidFill>
                 <a:latin typeface="Montserrat"/>
               </a:rPr>
-              <a:t>Grado 1: a mano del usuario</a:t>
+              <a:t>Junto al aparato, en el mismo recinto</a:t>
             </a:r>
           </a:p>
           <a:p>
             <a:pPr>
               <a:spcAft>
-                <a:spcPts val="1000"/>
+                <a:spcPts val="1100"/>
               </a:spcAft>
             </a:pPr>
             <a:r>
               <a:rPr sz="1600" b="1" i="0">
                 <a:solidFill>
-                  <a:srgbClr val="2E3A80"/>
-                </a:solidFill>
-                <a:latin typeface="Montserrat"/>
-              </a:rPr>
-              <a:t>•  </a:t>
+                  <a:srgbClr val="E8801A"/>
+                </a:solidFill>
+                <a:latin typeface="Montserrat"/>
+              </a:rPr>
+              <a:t>▸  </a:t>
             </a:r>
             <a:r>
               <a:rPr sz="1600" b="0" i="0">
@@ -6723,23 +7054,23 @@
                 </a:solidFill>
                 <a:latin typeface="Montserrat"/>
               </a:rPr>
-              <a:t>Grado 2: desde zona común, la distribuidora</a:t>
+              <a:t>Pendientes: cerradas, bloqueadas, precintadas</a:t>
             </a:r>
           </a:p>
           <a:p>
             <a:pPr>
               <a:spcAft>
-                <a:spcPts val="1000"/>
+                <a:spcPts val="1100"/>
               </a:spcAft>
             </a:pPr>
             <a:r>
               <a:rPr sz="1600" b="1" i="0">
                 <a:solidFill>
-                  <a:srgbClr val="2E3A80"/>
-                </a:solidFill>
-                <a:latin typeface="Montserrat"/>
-              </a:rPr>
-              <a:t>•  </a:t>
+                  <a:srgbClr val="E8801A"/>
+                </a:solidFill>
+                <a:latin typeface="Montserrat"/>
+              </a:rPr>
+              <a:t>▸  </a:t>
             </a:r>
             <a:r>
               <a:rPr sz="1600" b="0" i="0">
@@ -6748,14 +7079,14 @@
                 </a:solidFill>
                 <a:latin typeface="Montserrat"/>
               </a:rPr>
-              <a:t>Grado 3: el menos accesible</a:t>
-            </a:r>
-          </a:p>
-        </p:txBody>
-      </p:sp>
-      <p:sp>
-        <p:nvSpPr>
-          <p:cNvPr id="8" name="imgph" descr="IMGQ:gas valve behind access panel"/>
+              <a:t>Cocina: limitador de exceso de flujo</a:t>
+            </a:r>
+          </a:p>
+        </p:txBody>
+      </p:sp>
+      <p:sp>
+        <p:nvSpPr>
+          <p:cNvPr id="9" name="imgph" descr="IMGQ:gas cooker connection valve in kitchen"/>
           <p:cNvSpPr/>
           <p:nvPr/>
         </p:nvSpPr>
@@ -6801,7 +7132,7 @@
       </p:sp>
       <p:sp>
         <p:nvSpPr>
-          <p:cNvPr id="9" name="TextBox 8"/>
+          <p:cNvPr id="10" name="TextBox 9"/>
           <p:cNvSpPr txBox="1"/>
           <p:nvPr/>
         </p:nvSpPr>
@@ -6841,7 +7172,7 @@
                 </a:solidFill>
                 <a:latin typeface="Montserrat"/>
               </a:rPr>
-              <a:t>gas valve behind access panel</a:t>
+              <a:t>gas cooker connection valve in kitchen</a:t>
             </a:r>
           </a:p>
         </p:txBody>
@@ -6938,7 +7269,7 @@
                 </a:solidFill>
                 <a:latin typeface="Montserrat"/>
               </a:rPr>
-              <a:t>015 / 017</a:t>
+              <a:t>015 / 018</a:t>
             </a:r>
           </a:p>
         </p:txBody>
@@ -6986,7 +7317,7 @@
         <p:spPr>
           <a:xfrm>
             <a:off x="822960" y="457200"/>
-            <a:ext cx="8229600" cy="365760"/>
+            <a:ext cx="10058400" cy="365760"/>
           </a:xfrm>
           <a:prstGeom prst="rect">
             <a:avLst/>
@@ -7000,13 +7331,13 @@
           <a:lstStyle/>
           <a:p>
             <a:r>
-              <a:rPr sz="1200" b="1" i="0">
-                <a:solidFill>
-                  <a:srgbClr val="64748B"/>
-                </a:solidFill>
-                <a:latin typeface="Montserrat"/>
-              </a:rPr>
-              <a:t>APARTADO 7.6 · MULTIFUNCIÓN</a:t>
+              <a:rPr sz="1300" b="1" i="0">
+                <a:solidFill>
+                  <a:srgbClr val="E8801A"/>
+                </a:solidFill>
+                <a:latin typeface="Montserrat"/>
+              </a:rPr>
+              <a:t>GRADOS DE ACCESIBILIDAD</a:t>
             </a:r>
           </a:p>
         </p:txBody>
@@ -7034,26 +7365,70 @@
           <a:lstStyle/>
           <a:p>
             <a:r>
-              <a:rPr sz="2700" b="1" i="0">
+              <a:rPr sz="2800" b="1" i="0">
                 <a:solidFill>
                   <a:srgbClr val="1E2761"/>
                 </a:solidFill>
                 <a:latin typeface="Montserrat"/>
               </a:rPr>
-              <a:t>Una llave, varios sombreros</a:t>
-            </a:r>
-          </a:p>
-        </p:txBody>
-      </p:sp>
-      <p:sp>
-        <p:nvSpPr>
-          <p:cNvPr id="7" name="TextBox 6"/>
+              <a:t>Quién llega a cada llave</a:t>
+            </a:r>
+          </a:p>
+        </p:txBody>
+      </p:sp>
+      <p:sp>
+        <p:nvSpPr>
+          <p:cNvPr id="7" name="Rounded Rectangle 6"/>
+          <p:cNvSpPr/>
+          <p:nvPr/>
+        </p:nvSpPr>
+        <p:spPr>
+          <a:xfrm>
+            <a:off x="868680" y="1627632"/>
+            <a:ext cx="2011680" cy="73152"/>
+          </a:xfrm>
+          <a:prstGeom prst="roundRect">
+            <a:avLst/>
+          </a:prstGeom>
+          <a:solidFill>
+            <a:srgbClr val="E8801A"/>
+          </a:solidFill>
+          <a:ln>
+            <a:noFill/>
+          </a:ln>
+          <a:effectLst/>
+        </p:spPr>
+        <p:style>
+          <a:lnRef idx="1">
+            <a:schemeClr val="accent1"/>
+          </a:lnRef>
+          <a:fillRef idx="3">
+            <a:schemeClr val="accent1"/>
+          </a:fillRef>
+          <a:effectRef idx="2">
+            <a:schemeClr val="accent1"/>
+          </a:effectRef>
+          <a:fontRef idx="minor">
+            <a:schemeClr val="lt1"/>
+          </a:fontRef>
+        </p:style>
+        <p:txBody>
+          <a:bodyPr rtlCol="0" anchor="ctr"/>
+          <a:lstStyle/>
+          <a:p>
+            <a:pPr algn="ctr"/>
+          </a:p>
+        </p:txBody>
+      </p:sp>
+      <p:sp>
+        <p:nvSpPr>
+          <p:cNvPr id="8" name="TextBox 7"/>
           <p:cNvSpPr txBox="1"/>
           <p:nvPr/>
         </p:nvSpPr>
         <p:spPr>
           <a:xfrm>
-            <a:off x="822960" y="1920240"/>
+            <a:off x="822960" y="1965960"/>
             <a:ext cx="4983480" cy="4206240"/>
           </a:xfrm>
           <a:prstGeom prst="rect">
@@ -7069,17 +7444,17 @@
           <a:p>
             <a:pPr>
               <a:spcAft>
-                <a:spcPts val="1000"/>
+                <a:spcPts val="1100"/>
               </a:spcAft>
             </a:pPr>
             <a:r>
               <a:rPr sz="1600" b="1" i="0">
                 <a:solidFill>
-                  <a:srgbClr val="2E3A80"/>
-                </a:solidFill>
-                <a:latin typeface="Montserrat"/>
-              </a:rPr>
-              <a:t>•  </a:t>
+                  <a:srgbClr val="E8801A"/>
+                </a:solidFill>
+                <a:latin typeface="Montserrat"/>
+              </a:rPr>
+              <a:t>▸  </a:t>
             </a:r>
             <a:r>
               <a:rPr sz="1600" b="0" i="0">
@@ -7088,23 +7463,23 @@
                 </a:solidFill>
                 <a:latin typeface="Montserrat"/>
               </a:rPr>
-              <a:t>Multiuso si cumple todo lo exigido</a:t>
+              <a:t>Grado 1: a mano del usuario</a:t>
             </a:r>
           </a:p>
           <a:p>
             <a:pPr>
               <a:spcAft>
-                <a:spcPts val="1000"/>
+                <a:spcPts val="1100"/>
               </a:spcAft>
             </a:pPr>
             <a:r>
               <a:rPr sz="1600" b="1" i="0">
                 <a:solidFill>
-                  <a:srgbClr val="2E3A80"/>
-                </a:solidFill>
-                <a:latin typeface="Montserrat"/>
-              </a:rPr>
-              <a:t>•  </a:t>
+                  <a:srgbClr val="E8801A"/>
+                </a:solidFill>
+                <a:latin typeface="Montserrat"/>
+              </a:rPr>
+              <a:t>▸  </a:t>
             </a:r>
             <a:r>
               <a:rPr sz="1600" b="0" i="0">
@@ -7113,23 +7488,23 @@
                 </a:solidFill>
                 <a:latin typeface="Montserrat"/>
               </a:rPr>
-              <a:t>Vivienda NUNCA hace de aparato</a:t>
+              <a:t>Grado 2: desde zona común, la distribuidora</a:t>
             </a:r>
           </a:p>
           <a:p>
             <a:pPr>
               <a:spcAft>
-                <a:spcPts val="1000"/>
+                <a:spcPts val="1100"/>
               </a:spcAft>
             </a:pPr>
             <a:r>
               <a:rPr sz="1600" b="1" i="0">
                 <a:solidFill>
-                  <a:srgbClr val="2E3A80"/>
-                </a:solidFill>
-                <a:latin typeface="Montserrat"/>
-              </a:rPr>
-              <a:t>•  </a:t>
+                  <a:srgbClr val="E8801A"/>
+                </a:solidFill>
+                <a:latin typeface="Montserrat"/>
+              </a:rPr>
+              <a:t>▸  </a:t>
             </a:r>
             <a:r>
               <a:rPr sz="1600" b="0" i="0">
@@ -7138,14 +7513,14 @@
                 </a:solidFill>
                 <a:latin typeface="Montserrat"/>
               </a:rPr>
-              <a:t>Regulador no hace de usuario (salvo GLP ≤ 15 kg)</a:t>
-            </a:r>
-          </a:p>
-        </p:txBody>
-      </p:sp>
-      <p:sp>
-        <p:nvSpPr>
-          <p:cNvPr id="8" name="imgph" descr="IMGQ:brass gas ball valve close up"/>
+              <a:t>Grado 3: el menos accesible</a:t>
+            </a:r>
+          </a:p>
+        </p:txBody>
+      </p:sp>
+      <p:sp>
+        <p:nvSpPr>
+          <p:cNvPr id="9" name="imgph" descr="IMGQ:gas valve behind access panel"/>
           <p:cNvSpPr/>
           <p:nvPr/>
         </p:nvSpPr>
@@ -7191,7 +7566,7 @@
       </p:sp>
       <p:sp>
         <p:nvSpPr>
-          <p:cNvPr id="9" name="TextBox 8"/>
+          <p:cNvPr id="10" name="TextBox 9"/>
           <p:cNvSpPr txBox="1"/>
           <p:nvPr/>
         </p:nvSpPr>
@@ -7231,7 +7606,7 @@
                 </a:solidFill>
                 <a:latin typeface="Montserrat"/>
               </a:rPr>
-              <a:t>brass gas ball valve close up</a:t>
+              <a:t>gas valve behind access panel</a:t>
             </a:r>
           </a:p>
         </p:txBody>
@@ -7328,7 +7703,7 @@
                 </a:solidFill>
                 <a:latin typeface="Montserrat"/>
               </a:rPr>
-              <a:t>016 / 017</a:t>
+              <a:t>016 / 018</a:t>
             </a:r>
           </a:p>
         </p:txBody>
@@ -7376,7 +7751,7 @@
         <p:spPr>
           <a:xfrm>
             <a:off x="822960" y="457200"/>
-            <a:ext cx="8229600" cy="365760"/>
+            <a:ext cx="10058400" cy="365760"/>
           </a:xfrm>
           <a:prstGeom prst="rect">
             <a:avLst/>
@@ -7390,13 +7765,13 @@
           <a:lstStyle/>
           <a:p>
             <a:r>
-              <a:rPr sz="1200" b="1" i="0">
-                <a:solidFill>
-                  <a:srgbClr val="64748B"/>
-                </a:solidFill>
-                <a:latin typeface="Montserrat"/>
-              </a:rPr>
-              <a:t>DOCUMENTACIÓN Y PUESTA EN SERVICIO</a:t>
+              <a:rPr sz="1300" b="1" i="0">
+                <a:solidFill>
+                  <a:srgbClr val="E8801A"/>
+                </a:solidFill>
+                <a:latin typeface="Montserrat"/>
+              </a:rPr>
+              <a:t>APARTADO 7.6 · MULTIFUNCIÓN</a:t>
             </a:r>
           </a:p>
         </p:txBody>
@@ -7424,26 +7799,70 @@
           <a:lstStyle/>
           <a:p>
             <a:r>
-              <a:rPr sz="2700" b="1" i="0">
+              <a:rPr sz="2800" b="1" i="0">
                 <a:solidFill>
                   <a:srgbClr val="1E2761"/>
                 </a:solidFill>
                 <a:latin typeface="Montserrat"/>
               </a:rPr>
-              <a:t>Del certificado al gas abierto</a:t>
-            </a:r>
-          </a:p>
-        </p:txBody>
-      </p:sp>
-      <p:sp>
-        <p:nvSpPr>
-          <p:cNvPr id="7" name="TextBox 6"/>
+              <a:t>Una llave, varios sombreros</a:t>
+            </a:r>
+          </a:p>
+        </p:txBody>
+      </p:sp>
+      <p:sp>
+        <p:nvSpPr>
+          <p:cNvPr id="7" name="Rounded Rectangle 6"/>
+          <p:cNvSpPr/>
+          <p:nvPr/>
+        </p:nvSpPr>
+        <p:spPr>
+          <a:xfrm>
+            <a:off x="868680" y="1627632"/>
+            <a:ext cx="2011680" cy="73152"/>
+          </a:xfrm>
+          <a:prstGeom prst="roundRect">
+            <a:avLst/>
+          </a:prstGeom>
+          <a:solidFill>
+            <a:srgbClr val="E8801A"/>
+          </a:solidFill>
+          <a:ln>
+            <a:noFill/>
+          </a:ln>
+          <a:effectLst/>
+        </p:spPr>
+        <p:style>
+          <a:lnRef idx="1">
+            <a:schemeClr val="accent1"/>
+          </a:lnRef>
+          <a:fillRef idx="3">
+            <a:schemeClr val="accent1"/>
+          </a:fillRef>
+          <a:effectRef idx="2">
+            <a:schemeClr val="accent1"/>
+          </a:effectRef>
+          <a:fontRef idx="minor">
+            <a:schemeClr val="lt1"/>
+          </a:fontRef>
+        </p:style>
+        <p:txBody>
+          <a:bodyPr rtlCol="0" anchor="ctr"/>
+          <a:lstStyle/>
+          <a:p>
+            <a:pPr algn="ctr"/>
+          </a:p>
+        </p:txBody>
+      </p:sp>
+      <p:sp>
+        <p:nvSpPr>
+          <p:cNvPr id="8" name="TextBox 7"/>
           <p:cNvSpPr txBox="1"/>
           <p:nvPr/>
         </p:nvSpPr>
         <p:spPr>
           <a:xfrm>
-            <a:off x="822960" y="1920240"/>
+            <a:off x="822960" y="1965960"/>
             <a:ext cx="4983480" cy="4206240"/>
           </a:xfrm>
           <a:prstGeom prst="rect">
@@ -7459,17 +7878,17 @@
           <a:p>
             <a:pPr>
               <a:spcAft>
-                <a:spcPts val="1000"/>
+                <a:spcPts val="1100"/>
               </a:spcAft>
             </a:pPr>
             <a:r>
               <a:rPr sz="1600" b="1" i="0">
                 <a:solidFill>
-                  <a:srgbClr val="2E3A80"/>
-                </a:solidFill>
-                <a:latin typeface="Montserrat"/>
-              </a:rPr>
-              <a:t>•  </a:t>
+                  <a:srgbClr val="E8801A"/>
+                </a:solidFill>
+                <a:latin typeface="Montserrat"/>
+              </a:rPr>
+              <a:t>▸  </a:t>
             </a:r>
             <a:r>
               <a:rPr sz="1600" b="0" i="0">
@@ -7478,23 +7897,23 @@
                 </a:solidFill>
                 <a:latin typeface="Montserrat"/>
               </a:rPr>
-              <a:t>La instaladora firma el certificado (IRG)</a:t>
+              <a:t>Multiuso si cumple todo lo exigido</a:t>
             </a:r>
           </a:p>
           <a:p>
             <a:pPr>
               <a:spcAft>
-                <a:spcPts val="1000"/>
+                <a:spcPts val="1100"/>
               </a:spcAft>
             </a:pPr>
             <a:r>
               <a:rPr sz="1600" b="1" i="0">
                 <a:solidFill>
-                  <a:srgbClr val="2E3A80"/>
-                </a:solidFill>
-                <a:latin typeface="Montserrat"/>
-              </a:rPr>
-              <a:t>•  </a:t>
+                  <a:srgbClr val="E8801A"/>
+                </a:solidFill>
+                <a:latin typeface="Montserrat"/>
+              </a:rPr>
+              <a:t>▸  </a:t>
             </a:r>
             <a:r>
               <a:rPr sz="1600" b="0" i="0">
@@ -7503,23 +7922,23 @@
                 </a:solidFill>
                 <a:latin typeface="Montserrat"/>
               </a:rPr>
-              <a:t>Pruebas de estanquidad antes de dar gas</a:t>
+              <a:t>Vivienda NUNCA hace de aparato</a:t>
             </a:r>
           </a:p>
           <a:p>
             <a:pPr>
               <a:spcAft>
-                <a:spcPts val="1000"/>
+                <a:spcPts val="1100"/>
               </a:spcAft>
             </a:pPr>
             <a:r>
               <a:rPr sz="1600" b="1" i="0">
                 <a:solidFill>
-                  <a:srgbClr val="2E3A80"/>
-                </a:solidFill>
-                <a:latin typeface="Montserrat"/>
-              </a:rPr>
-              <a:t>•  </a:t>
+                  <a:srgbClr val="E8801A"/>
+                </a:solidFill>
+                <a:latin typeface="Montserrat"/>
+              </a:rPr>
+              <a:t>▸  </a:t>
             </a:r>
             <a:r>
               <a:rPr sz="1600" b="0" i="0">
@@ -7528,14 +7947,14 @@
                 </a:solidFill>
                 <a:latin typeface="Montserrat"/>
               </a:rPr>
-              <a:t>La distribuidora hace la puesta en servicio</a:t>
-            </a:r>
-          </a:p>
-        </p:txBody>
-      </p:sp>
-      <p:sp>
-        <p:nvSpPr>
-          <p:cNvPr id="8" name="imgph" descr="IMGQ:gas installation certificate with signature"/>
+              <a:t>Regulador no hace de usuario (salvo GLP ≤ 15 kg)</a:t>
+            </a:r>
+          </a:p>
+        </p:txBody>
+      </p:sp>
+      <p:sp>
+        <p:nvSpPr>
+          <p:cNvPr id="9" name="imgph" descr="IMGQ:brass gas ball valve close up"/>
           <p:cNvSpPr/>
           <p:nvPr/>
         </p:nvSpPr>
@@ -7581,7 +8000,7 @@
       </p:sp>
       <p:sp>
         <p:nvSpPr>
-          <p:cNvPr id="9" name="TextBox 8"/>
+          <p:cNvPr id="10" name="TextBox 9"/>
           <p:cNvSpPr txBox="1"/>
           <p:nvPr/>
         </p:nvSpPr>
@@ -7621,7 +8040,7 @@
                 </a:solidFill>
                 <a:latin typeface="Montserrat"/>
               </a:rPr>
-              <a:t>gas installation certificate with signature</a:t>
+              <a:t>brass gas ball valve close up</a:t>
             </a:r>
           </a:p>
         </p:txBody>
@@ -7659,6 +8078,440 @@
             <a:avLst/>
           </a:prstGeom>
           <a:solidFill>
+            <a:srgbClr val="FFFFFF"/>
+          </a:solidFill>
+          <a:ln>
+            <a:noFill/>
+          </a:ln>
+          <a:effectLst/>
+        </p:spPr>
+        <p:style>
+          <a:lnRef idx="1">
+            <a:schemeClr val="accent1"/>
+          </a:lnRef>
+          <a:fillRef idx="3">
+            <a:schemeClr val="accent1"/>
+          </a:fillRef>
+          <a:effectRef idx="2">
+            <a:schemeClr val="accent1"/>
+          </a:effectRef>
+          <a:fontRef idx="minor">
+            <a:schemeClr val="lt1"/>
+          </a:fontRef>
+        </p:style>
+        <p:txBody>
+          <a:bodyPr rtlCol="0" anchor="ctr"/>
+          <a:lstStyle/>
+          <a:p>
+            <a:pPr algn="ctr"/>
+          </a:p>
+        </p:txBody>
+      </p:sp>
+      <p:sp>
+        <p:nvSpPr>
+          <p:cNvPr id="3" name="TextBox 2"/>
+          <p:cNvSpPr txBox="1"/>
+          <p:nvPr/>
+        </p:nvSpPr>
+        <p:spPr>
+          <a:xfrm>
+            <a:off x="10607040" y="320040"/>
+            <a:ext cx="1371600" cy="365760"/>
+          </a:xfrm>
+          <a:prstGeom prst="rect">
+            <a:avLst/>
+          </a:prstGeom>
+          <a:noFill/>
+        </p:spPr>
+        <p:txBody>
+          <a:bodyPr wrap="square">
+            <a:spAutoFit/>
+          </a:bodyPr>
+          <a:lstStyle/>
+          <a:p>
+            <a:pPr algn="r"/>
+            <a:r>
+              <a:rPr sz="1000" b="1" i="0">
+                <a:solidFill>
+                  <a:srgbClr val="64748B"/>
+                </a:solidFill>
+                <a:latin typeface="Montserrat"/>
+              </a:rPr>
+              <a:t>017 / 018</a:t>
+            </a:r>
+          </a:p>
+        </p:txBody>
+      </p:sp>
+      <p:sp>
+        <p:nvSpPr>
+          <p:cNvPr id="4" name="TextBox 3"/>
+          <p:cNvSpPr txBox="1"/>
+          <p:nvPr/>
+        </p:nvSpPr>
+        <p:spPr>
+          <a:xfrm>
+            <a:off x="457200" y="6419088"/>
+            <a:ext cx="8229600" cy="365760"/>
+          </a:xfrm>
+          <a:prstGeom prst="rect">
+            <a:avLst/>
+          </a:prstGeom>
+          <a:noFill/>
+        </p:spPr>
+        <p:txBody>
+          <a:bodyPr wrap="square">
+            <a:spAutoFit/>
+          </a:bodyPr>
+          <a:lstStyle/>
+          <a:p>
+            <a:r>
+              <a:rPr sz="900" b="0" i="0">
+                <a:solidFill>
+                  <a:srgbClr val="64748B"/>
+                </a:solidFill>
+                <a:latin typeface="Montserrat"/>
+              </a:rPr>
+              <a:t>Curso Gas B · Tema 11 · UNE 60670-4 · Diseño y construcción</a:t>
+            </a:r>
+          </a:p>
+        </p:txBody>
+      </p:sp>
+      <p:sp>
+        <p:nvSpPr>
+          <p:cNvPr id="5" name="TextBox 4"/>
+          <p:cNvSpPr txBox="1"/>
+          <p:nvPr/>
+        </p:nvSpPr>
+        <p:spPr>
+          <a:xfrm>
+            <a:off x="822960" y="457200"/>
+            <a:ext cx="10058400" cy="365760"/>
+          </a:xfrm>
+          <a:prstGeom prst="rect">
+            <a:avLst/>
+          </a:prstGeom>
+          <a:noFill/>
+        </p:spPr>
+        <p:txBody>
+          <a:bodyPr wrap="square">
+            <a:spAutoFit/>
+          </a:bodyPr>
+          <a:lstStyle/>
+          <a:p>
+            <a:r>
+              <a:rPr sz="1300" b="1" i="0">
+                <a:solidFill>
+                  <a:srgbClr val="E8801A"/>
+                </a:solidFill>
+                <a:latin typeface="Montserrat"/>
+              </a:rPr>
+              <a:t>DOCUMENTACIÓN Y PUESTA EN SERVICIO</a:t>
+            </a:r>
+          </a:p>
+        </p:txBody>
+      </p:sp>
+      <p:sp>
+        <p:nvSpPr>
+          <p:cNvPr id="6" name="TextBox 5"/>
+          <p:cNvSpPr txBox="1"/>
+          <p:nvPr/>
+        </p:nvSpPr>
+        <p:spPr>
+          <a:xfrm>
+            <a:off x="822960" y="868680"/>
+            <a:ext cx="10515600" cy="914400"/>
+          </a:xfrm>
+          <a:prstGeom prst="rect">
+            <a:avLst/>
+          </a:prstGeom>
+          <a:noFill/>
+        </p:spPr>
+        <p:txBody>
+          <a:bodyPr wrap="square">
+            <a:spAutoFit/>
+          </a:bodyPr>
+          <a:lstStyle/>
+          <a:p>
+            <a:r>
+              <a:rPr sz="2800" b="1" i="0">
+                <a:solidFill>
+                  <a:srgbClr val="1E2761"/>
+                </a:solidFill>
+                <a:latin typeface="Montserrat"/>
+              </a:rPr>
+              <a:t>Del certificado al gas abierto</a:t>
+            </a:r>
+          </a:p>
+        </p:txBody>
+      </p:sp>
+      <p:sp>
+        <p:nvSpPr>
+          <p:cNvPr id="7" name="Rounded Rectangle 6"/>
+          <p:cNvSpPr/>
+          <p:nvPr/>
+        </p:nvSpPr>
+        <p:spPr>
+          <a:xfrm>
+            <a:off x="868680" y="1627632"/>
+            <a:ext cx="2011680" cy="73152"/>
+          </a:xfrm>
+          <a:prstGeom prst="roundRect">
+            <a:avLst/>
+          </a:prstGeom>
+          <a:solidFill>
+            <a:srgbClr val="E8801A"/>
+          </a:solidFill>
+          <a:ln>
+            <a:noFill/>
+          </a:ln>
+          <a:effectLst/>
+        </p:spPr>
+        <p:style>
+          <a:lnRef idx="1">
+            <a:schemeClr val="accent1"/>
+          </a:lnRef>
+          <a:fillRef idx="3">
+            <a:schemeClr val="accent1"/>
+          </a:fillRef>
+          <a:effectRef idx="2">
+            <a:schemeClr val="accent1"/>
+          </a:effectRef>
+          <a:fontRef idx="minor">
+            <a:schemeClr val="lt1"/>
+          </a:fontRef>
+        </p:style>
+        <p:txBody>
+          <a:bodyPr rtlCol="0" anchor="ctr"/>
+          <a:lstStyle/>
+          <a:p>
+            <a:pPr algn="ctr"/>
+          </a:p>
+        </p:txBody>
+      </p:sp>
+      <p:sp>
+        <p:nvSpPr>
+          <p:cNvPr id="8" name="TextBox 7"/>
+          <p:cNvSpPr txBox="1"/>
+          <p:nvPr/>
+        </p:nvSpPr>
+        <p:spPr>
+          <a:xfrm>
+            <a:off x="822960" y="1965960"/>
+            <a:ext cx="4983480" cy="4206240"/>
+          </a:xfrm>
+          <a:prstGeom prst="rect">
+            <a:avLst/>
+          </a:prstGeom>
+          <a:noFill/>
+        </p:spPr>
+        <p:txBody>
+          <a:bodyPr wrap="square">
+            <a:spAutoFit/>
+          </a:bodyPr>
+          <a:lstStyle/>
+          <a:p>
+            <a:pPr>
+              <a:spcAft>
+                <a:spcPts val="1100"/>
+              </a:spcAft>
+            </a:pPr>
+            <a:r>
+              <a:rPr sz="1600" b="1" i="0">
+                <a:solidFill>
+                  <a:srgbClr val="E8801A"/>
+                </a:solidFill>
+                <a:latin typeface="Montserrat"/>
+              </a:rPr>
+              <a:t>▸  </a:t>
+            </a:r>
+            <a:r>
+              <a:rPr sz="1600" b="0" i="0">
+                <a:solidFill>
+                  <a:srgbClr val="1B2330"/>
+                </a:solidFill>
+                <a:latin typeface="Montserrat"/>
+              </a:rPr>
+              <a:t>La instaladora firma el certificado (IRG)</a:t>
+            </a:r>
+          </a:p>
+          <a:p>
+            <a:pPr>
+              <a:spcAft>
+                <a:spcPts val="1100"/>
+              </a:spcAft>
+            </a:pPr>
+            <a:r>
+              <a:rPr sz="1600" b="1" i="0">
+                <a:solidFill>
+                  <a:srgbClr val="E8801A"/>
+                </a:solidFill>
+                <a:latin typeface="Montserrat"/>
+              </a:rPr>
+              <a:t>▸  </a:t>
+            </a:r>
+            <a:r>
+              <a:rPr sz="1600" b="0" i="0">
+                <a:solidFill>
+                  <a:srgbClr val="1B2330"/>
+                </a:solidFill>
+                <a:latin typeface="Montserrat"/>
+              </a:rPr>
+              <a:t>Pruebas de estanquidad antes de dar gas</a:t>
+            </a:r>
+          </a:p>
+          <a:p>
+            <a:pPr>
+              <a:spcAft>
+                <a:spcPts val="1100"/>
+              </a:spcAft>
+            </a:pPr>
+            <a:r>
+              <a:rPr sz="1600" b="1" i="0">
+                <a:solidFill>
+                  <a:srgbClr val="E8801A"/>
+                </a:solidFill>
+                <a:latin typeface="Montserrat"/>
+              </a:rPr>
+              <a:t>▸  </a:t>
+            </a:r>
+            <a:r>
+              <a:rPr sz="1600" b="0" i="0">
+                <a:solidFill>
+                  <a:srgbClr val="1B2330"/>
+                </a:solidFill>
+                <a:latin typeface="Montserrat"/>
+              </a:rPr>
+              <a:t>La distribuidora hace la puesta en servicio</a:t>
+            </a:r>
+          </a:p>
+        </p:txBody>
+      </p:sp>
+      <p:sp>
+        <p:nvSpPr>
+          <p:cNvPr id="9" name="imgph" descr="IMGQ:gas installation certificate with signature"/>
+          <p:cNvSpPr/>
+          <p:nvPr/>
+        </p:nvSpPr>
+        <p:spPr>
+          <a:xfrm>
+            <a:off x="5806440" y="1051560"/>
+            <a:ext cx="5298947" cy="4629150"/>
+          </a:xfrm>
+          <a:prstGeom prst="roundRect">
+            <a:avLst/>
+          </a:prstGeom>
+          <a:solidFill>
+            <a:srgbClr val="F3F6FB"/>
+          </a:solidFill>
+          <a:ln w="12700">
+            <a:solidFill>
+              <a:srgbClr val="C7D2E6"/>
+            </a:solidFill>
+          </a:ln>
+          <a:effectLst/>
+        </p:spPr>
+        <p:style>
+          <a:lnRef idx="1">
+            <a:schemeClr val="accent1"/>
+          </a:lnRef>
+          <a:fillRef idx="3">
+            <a:schemeClr val="accent1"/>
+          </a:fillRef>
+          <a:effectRef idx="2">
+            <a:schemeClr val="accent1"/>
+          </a:effectRef>
+          <a:fontRef idx="minor">
+            <a:schemeClr val="lt1"/>
+          </a:fontRef>
+        </p:style>
+        <p:txBody>
+          <a:bodyPr rtlCol="0" anchor="ctr"/>
+          <a:lstStyle/>
+          <a:p>
+            <a:pPr algn="ctr"/>
+          </a:p>
+        </p:txBody>
+      </p:sp>
+      <p:sp>
+        <p:nvSpPr>
+          <p:cNvPr id="10" name="TextBox 9"/>
+          <p:cNvSpPr txBox="1"/>
+          <p:nvPr/>
+        </p:nvSpPr>
+        <p:spPr>
+          <a:xfrm>
+            <a:off x="6080760" y="2726055"/>
+            <a:ext cx="4750307" cy="1280160"/>
+          </a:xfrm>
+          <a:prstGeom prst="rect">
+            <a:avLst/>
+          </a:prstGeom>
+          <a:noFill/>
+        </p:spPr>
+        <p:txBody>
+          <a:bodyPr wrap="square">
+            <a:spAutoFit/>
+          </a:bodyPr>
+          <a:lstStyle/>
+          <a:p>
+            <a:pPr algn="ctr"/>
+            <a:r>
+              <a:rPr sz="1400" b="1" i="0">
+                <a:solidFill>
+                  <a:srgbClr val="64748B"/>
+                </a:solidFill>
+                <a:latin typeface="Montserrat"/>
+              </a:rPr>
+              <a:t>IMAGEN REALISTA</a:t>
+            </a:r>
+          </a:p>
+          <a:p>
+            <a:pPr algn="ctr"/>
+            <a:r>
+              <a:rPr sz="1100" b="0" i="1">
+                <a:solidFill>
+                  <a:srgbClr val="64748B"/>
+                </a:solidFill>
+                <a:latin typeface="Montserrat"/>
+              </a:rPr>
+              <a:t>gas installation certificate with signature</a:t>
+            </a:r>
+          </a:p>
+        </p:txBody>
+      </p:sp>
+    </p:spTree>
+  </p:cSld>
+  <p:clrMapOvr>
+    <a:masterClrMapping/>
+  </p:clrMapOvr>
+</p:sld>
+</file>
+
+<file path=ppt/slides/slide18.xml><?xml version="1.0" encoding="utf-8"?>
+<p:sld xmlns:a="http://schemas.openxmlformats.org/drawingml/2006/main" xmlns:p="http://schemas.openxmlformats.org/presentationml/2006/main" xmlns:r="http://schemas.openxmlformats.org/officeDocument/2006/relationships">
+  <p:cSld>
+    <p:spTree>
+      <p:nvGrpSpPr>
+        <p:cNvPr id="1" name=""/>
+        <p:cNvGrpSpPr/>
+        <p:nvPr/>
+      </p:nvGrpSpPr>
+      <p:grpSpPr/>
+      <p:sp>
+        <p:nvSpPr>
+          <p:cNvPr id="2" name="Rectangle 1"/>
+          <p:cNvSpPr/>
+          <p:nvPr/>
+        </p:nvSpPr>
+        <p:spPr>
+          <a:xfrm>
+            <a:off x="0" y="0"/>
+            <a:ext cx="12191695" cy="6858000"/>
+          </a:xfrm>
+          <a:prstGeom prst="rect">
+            <a:avLst/>
+          </a:prstGeom>
+          <a:solidFill>
             <a:srgbClr val="1E2761"/>
           </a:solidFill>
           <a:ln>
@@ -7713,7 +8566,7 @@
             <a:r>
               <a:rPr sz="1400" b="1" i="0">
                 <a:solidFill>
-                  <a:srgbClr val="CADCFC"/>
+                  <a:srgbClr val="F4A24C"/>
                 </a:solidFill>
                 <a:latin typeface="Montserrat"/>
               </a:rPr>
@@ -7724,13 +8577,57 @@
       </p:sp>
       <p:sp>
         <p:nvSpPr>
-          <p:cNvPr id="4" name="TextBox 3"/>
+          <p:cNvPr id="4" name="Rounded Rectangle 3"/>
+          <p:cNvSpPr/>
+          <p:nvPr/>
+        </p:nvSpPr>
+        <p:spPr>
+          <a:xfrm>
+            <a:off x="868680" y="1051560"/>
+            <a:ext cx="1463040" cy="82296"/>
+          </a:xfrm>
+          <a:prstGeom prst="roundRect">
+            <a:avLst/>
+          </a:prstGeom>
+          <a:solidFill>
+            <a:srgbClr val="E8801A"/>
+          </a:solidFill>
+          <a:ln>
+            <a:noFill/>
+          </a:ln>
+          <a:effectLst/>
+        </p:spPr>
+        <p:style>
+          <a:lnRef idx="1">
+            <a:schemeClr val="accent1"/>
+          </a:lnRef>
+          <a:fillRef idx="3">
+            <a:schemeClr val="accent1"/>
+          </a:fillRef>
+          <a:effectRef idx="2">
+            <a:schemeClr val="accent1"/>
+          </a:effectRef>
+          <a:fontRef idx="minor">
+            <a:schemeClr val="lt1"/>
+          </a:fontRef>
+        </p:style>
+        <p:txBody>
+          <a:bodyPr rtlCol="0" anchor="ctr"/>
+          <a:lstStyle/>
+          <a:p>
+            <a:pPr algn="ctr"/>
+          </a:p>
+        </p:txBody>
+      </p:sp>
+      <p:sp>
+        <p:nvSpPr>
+          <p:cNvPr id="5" name="TextBox 4"/>
           <p:cNvSpPr txBox="1"/>
           <p:nvPr/>
         </p:nvSpPr>
         <p:spPr>
           <a:xfrm>
-            <a:off x="822960" y="1143000"/>
+            <a:off x="822960" y="1234440"/>
             <a:ext cx="10515600" cy="1097280"/>
           </a:xfrm>
           <a:prstGeom prst="rect">
@@ -7758,14 +8655,14 @@
       </p:sp>
       <p:sp>
         <p:nvSpPr>
-          <p:cNvPr id="5" name="TextBox 4"/>
+          <p:cNvPr id="6" name="TextBox 5"/>
           <p:cNvSpPr txBox="1"/>
           <p:nvPr/>
         </p:nvSpPr>
         <p:spPr>
           <a:xfrm>
-            <a:off x="822960" y="2514600"/>
-            <a:ext cx="10515600" cy="2834640"/>
+            <a:off x="822960" y="2606040"/>
+            <a:ext cx="10515600" cy="2743200"/>
           </a:xfrm>
           <a:prstGeom prst="rect">
             <a:avLst/>
@@ -7786,7 +8683,7 @@
             <a:r>
               <a:rPr sz="2000" b="1" i="0">
                 <a:solidFill>
-                  <a:srgbClr val="CADCFC"/>
+                  <a:srgbClr val="F4A24C"/>
                 </a:solidFill>
                 <a:latin typeface="Montserrat"/>
               </a:rPr>
@@ -7811,7 +8708,7 @@
             <a:r>
               <a:rPr sz="2000" b="1" i="0">
                 <a:solidFill>
-                  <a:srgbClr val="CADCFC"/>
+                  <a:srgbClr val="F4A24C"/>
                 </a:solidFill>
                 <a:latin typeface="Montserrat"/>
               </a:rPr>
@@ -7836,7 +8733,7 @@
             <a:r>
               <a:rPr sz="2000" b="1" i="0">
                 <a:solidFill>
-                  <a:srgbClr val="CADCFC"/>
+                  <a:srgbClr val="F4A24C"/>
                 </a:solidFill>
                 <a:latin typeface="Montserrat"/>
               </a:rPr>
@@ -7861,7 +8758,7 @@
             <a:r>
               <a:rPr sz="2000" b="1" i="0">
                 <a:solidFill>
-                  <a:srgbClr val="CADCFC"/>
+                  <a:srgbClr val="F4A24C"/>
                 </a:solidFill>
                 <a:latin typeface="Montserrat"/>
               </a:rPr>
@@ -7881,20 +8778,20 @@
       </p:sp>
       <p:sp>
         <p:nvSpPr>
-          <p:cNvPr id="6" name="Rounded Rectangle 5"/>
+          <p:cNvPr id="7" name="Rounded Rectangle 6"/>
           <p:cNvSpPr/>
           <p:nvPr/>
         </p:nvSpPr>
         <p:spPr>
           <a:xfrm>
             <a:off x="822960" y="5532120"/>
-            <a:ext cx="10515600" cy="777240"/>
+            <a:ext cx="10515600" cy="822960"/>
           </a:xfrm>
           <a:prstGeom prst="roundRect">
             <a:avLst/>
           </a:prstGeom>
           <a:solidFill>
-            <a:srgbClr val="2E3A80"/>
+            <a:srgbClr val="E8801A"/>
           </a:solidFill>
           <a:ln>
             <a:noFill/>
@@ -7925,13 +8822,13 @@
       </p:sp>
       <p:sp>
         <p:nvSpPr>
-          <p:cNvPr id="7" name="TextBox 6"/>
+          <p:cNvPr id="8" name="TextBox 7"/>
           <p:cNvSpPr txBox="1"/>
           <p:nvPr/>
         </p:nvSpPr>
         <p:spPr>
           <a:xfrm>
-            <a:off x="1051560" y="5605272"/>
+            <a:off x="1051560" y="5623560"/>
             <a:ext cx="10058400" cy="640080"/>
           </a:xfrm>
           <a:prstGeom prst="rect">
@@ -7948,7 +8845,7 @@
             <a:r>
               <a:rPr sz="1500" b="1" i="1">
                 <a:solidFill>
-                  <a:srgbClr val="CADCFC"/>
+                  <a:srgbClr val="1E2761"/>
                 </a:solidFill>
                 <a:latin typeface="Montserrat"/>
               </a:rPr>
@@ -8049,7 +8946,7 @@
                 </a:solidFill>
                 <a:latin typeface="Montserrat"/>
               </a:rPr>
-              <a:t>002 / 017</a:t>
+              <a:t>002 / 018</a:t>
             </a:r>
           </a:p>
         </p:txBody>
@@ -8113,7 +9010,7 @@
             <a:r>
               <a:rPr sz="2700" b="1" i="0">
                 <a:solidFill>
-                  <a:srgbClr val="1E2761"/>
+                  <a:srgbClr val="E8801A"/>
                 </a:solidFill>
                 <a:latin typeface="Montserrat"/>
               </a:rPr>
@@ -8125,6 +9022,50 @@
       <p:sp>
         <p:nvSpPr>
           <p:cNvPr id="6" name="Rounded Rectangle 5"/>
+          <p:cNvSpPr/>
+          <p:nvPr/>
+        </p:nvSpPr>
+        <p:spPr>
+          <a:xfrm>
+            <a:off x="868680" y="1234440"/>
+            <a:ext cx="1463040" cy="73152"/>
+          </a:xfrm>
+          <a:prstGeom prst="roundRect">
+            <a:avLst/>
+          </a:prstGeom>
+          <a:solidFill>
+            <a:srgbClr val="1E2761"/>
+          </a:solidFill>
+          <a:ln>
+            <a:noFill/>
+          </a:ln>
+          <a:effectLst/>
+        </p:spPr>
+        <p:style>
+          <a:lnRef idx="1">
+            <a:schemeClr val="accent1"/>
+          </a:lnRef>
+          <a:fillRef idx="3">
+            <a:schemeClr val="accent1"/>
+          </a:fillRef>
+          <a:effectRef idx="2">
+            <a:schemeClr val="accent1"/>
+          </a:effectRef>
+          <a:fontRef idx="minor">
+            <a:schemeClr val="lt1"/>
+          </a:fontRef>
+        </p:style>
+        <p:txBody>
+          <a:bodyPr rtlCol="0" anchor="ctr"/>
+          <a:lstStyle/>
+          <a:p>
+            <a:pPr algn="ctr"/>
+          </a:p>
+        </p:txBody>
+      </p:sp>
+      <p:sp>
+        <p:nvSpPr>
+          <p:cNvPr id="7" name="Rounded Rectangle 6"/>
           <p:cNvSpPr/>
           <p:nvPr/>
         </p:nvSpPr>
@@ -8170,7 +9111,7 @@
       </p:sp>
       <p:sp>
         <p:nvSpPr>
-          <p:cNvPr id="7" name="TextBox 6"/>
+          <p:cNvPr id="8" name="TextBox 7"/>
           <p:cNvSpPr txBox="1"/>
           <p:nvPr/>
         </p:nvSpPr>
@@ -8205,7 +9146,7 @@
       </p:sp>
       <p:sp>
         <p:nvSpPr>
-          <p:cNvPr id="8" name="TextBox 7"/>
+          <p:cNvPr id="9" name="TextBox 8"/>
           <p:cNvSpPr txBox="1"/>
           <p:nvPr/>
         </p:nvSpPr>
@@ -8240,7 +9181,7 @@
       </p:sp>
       <p:sp>
         <p:nvSpPr>
-          <p:cNvPr id="9" name="Rounded Rectangle 8"/>
+          <p:cNvPr id="10" name="Rounded Rectangle 9"/>
           <p:cNvSpPr/>
           <p:nvPr/>
         </p:nvSpPr>
@@ -8286,7 +9227,7 @@
       </p:sp>
       <p:sp>
         <p:nvSpPr>
-          <p:cNvPr id="10" name="TextBox 9"/>
+          <p:cNvPr id="11" name="TextBox 10"/>
           <p:cNvSpPr txBox="1"/>
           <p:nvPr/>
         </p:nvSpPr>
@@ -8321,7 +9262,7 @@
       </p:sp>
       <p:sp>
         <p:nvSpPr>
-          <p:cNvPr id="11" name="TextBox 10"/>
+          <p:cNvPr id="12" name="TextBox 11"/>
           <p:cNvSpPr txBox="1"/>
           <p:nvPr/>
         </p:nvSpPr>
@@ -8356,7 +9297,7 @@
       </p:sp>
       <p:sp>
         <p:nvSpPr>
-          <p:cNvPr id="12" name="Rounded Rectangle 11"/>
+          <p:cNvPr id="13" name="Rounded Rectangle 12"/>
           <p:cNvSpPr/>
           <p:nvPr/>
         </p:nvSpPr>
@@ -8402,7 +9343,7 @@
       </p:sp>
       <p:sp>
         <p:nvSpPr>
-          <p:cNvPr id="13" name="TextBox 12"/>
+          <p:cNvPr id="14" name="TextBox 13"/>
           <p:cNvSpPr txBox="1"/>
           <p:nvPr/>
         </p:nvSpPr>
@@ -8437,7 +9378,7 @@
       </p:sp>
       <p:sp>
         <p:nvSpPr>
-          <p:cNvPr id="14" name="TextBox 13"/>
+          <p:cNvPr id="15" name="TextBox 14"/>
           <p:cNvSpPr txBox="1"/>
           <p:nvPr/>
         </p:nvSpPr>
@@ -8562,7 +9503,7 @@
                 </a:solidFill>
                 <a:latin typeface="Montserrat"/>
               </a:rPr>
-              <a:t>003 / 017</a:t>
+              <a:t>003 / 018</a:t>
             </a:r>
           </a:p>
         </p:txBody>
@@ -8609,7 +9550,7 @@
         </p:nvSpPr>
         <p:spPr>
           <a:xfrm>
-            <a:off x="822960" y="457200"/>
+            <a:off x="822960" y="502920"/>
             <a:ext cx="8229600" cy="365760"/>
           </a:xfrm>
           <a:prstGeom prst="rect">
@@ -8624,13 +9565,13 @@
           <a:lstStyle/>
           <a:p>
             <a:r>
-              <a:rPr sz="1200" b="1" i="0">
-                <a:solidFill>
-                  <a:srgbClr val="64748B"/>
-                </a:solidFill>
-                <a:latin typeface="Montserrat"/>
-              </a:rPr>
-              <a:t>APARTADO 5 · TOMAS DE PRESIÓN</a:t>
+              <a:rPr sz="1300" b="1" i="0">
+                <a:solidFill>
+                  <a:srgbClr val="E8801A"/>
+                </a:solidFill>
+                <a:latin typeface="Montserrat"/>
+              </a:rPr>
+              <a:t>PARTES DE ESTE VÍDEO</a:t>
             </a:r>
           </a:p>
         </p:txBody>
@@ -8643,7 +9584,7 @@
         </p:nvSpPr>
         <p:spPr>
           <a:xfrm>
-            <a:off x="822960" y="868680"/>
+            <a:off x="822960" y="914400"/>
             <a:ext cx="10515600" cy="914400"/>
           </a:xfrm>
           <a:prstGeom prst="rect">
@@ -8664,130 +9605,30 @@
                 </a:solidFill>
                 <a:latin typeface="Montserrat"/>
               </a:rPr>
-              <a:t>Los pinchos para medir el gas</a:t>
-            </a:r>
-          </a:p>
-        </p:txBody>
-      </p:sp>
-      <p:sp>
-        <p:nvSpPr>
-          <p:cNvPr id="7" name="TextBox 6"/>
-          <p:cNvSpPr txBox="1"/>
-          <p:nvPr/>
-        </p:nvSpPr>
-        <p:spPr>
-          <a:xfrm>
-            <a:off x="822960" y="1920240"/>
-            <a:ext cx="4983480" cy="4206240"/>
-          </a:xfrm>
-          <a:prstGeom prst="rect">
-            <a:avLst/>
-          </a:prstGeom>
-          <a:noFill/>
-        </p:spPr>
-        <p:txBody>
-          <a:bodyPr wrap="square">
-            <a:spAutoFit/>
-          </a:bodyPr>
-          <a:lstStyle/>
-          <a:p>
-            <a:pPr>
-              <a:spcAft>
-                <a:spcPts val="1000"/>
-              </a:spcAft>
-            </a:pPr>
-            <a:r>
-              <a:rPr sz="1600" b="1" i="0">
-                <a:solidFill>
-                  <a:srgbClr val="2E3A80"/>
-                </a:solidFill>
-                <a:latin typeface="Montserrat"/>
-              </a:rPr>
-              <a:t>•  </a:t>
-            </a:r>
-            <a:r>
-              <a:rPr sz="1600" b="0" i="0">
-                <a:solidFill>
-                  <a:srgbClr val="1B2330"/>
-                </a:solidFill>
-                <a:latin typeface="Montserrat"/>
-              </a:rPr>
-              <a:t>A la entrada y salida del regulador</a:t>
-            </a:r>
-          </a:p>
-          <a:p>
-            <a:pPr>
-              <a:spcAft>
-                <a:spcPts val="1000"/>
-              </a:spcAft>
-            </a:pPr>
-            <a:r>
-              <a:rPr sz="1600" b="1" i="0">
-                <a:solidFill>
-                  <a:srgbClr val="2E3A80"/>
-                </a:solidFill>
-                <a:latin typeface="Montserrat"/>
-              </a:rPr>
-              <a:t>•  </a:t>
-            </a:r>
-            <a:r>
-              <a:rPr sz="1600" b="0" i="0">
-                <a:solidFill>
-                  <a:srgbClr val="1B2330"/>
-                </a:solidFill>
-                <a:latin typeface="Montserrat"/>
-              </a:rPr>
-              <a:t>En el contador y tras la llave de vivienda</a:t>
-            </a:r>
-          </a:p>
-          <a:p>
-            <a:pPr>
-              <a:spcAft>
-                <a:spcPts val="1000"/>
-              </a:spcAft>
-            </a:pPr>
-            <a:r>
-              <a:rPr sz="1600" b="1" i="0">
-                <a:solidFill>
-                  <a:srgbClr val="2E3A80"/>
-                </a:solidFill>
-                <a:latin typeface="Montserrat"/>
-              </a:rPr>
-              <a:t>•  </a:t>
-            </a:r>
-            <a:r>
-              <a:rPr sz="1600" b="0" i="0">
-                <a:solidFill>
-                  <a:srgbClr val="1B2330"/>
-                </a:solidFill>
-                <a:latin typeface="Montserrat"/>
-              </a:rPr>
-              <a:t>Los conjuntos normalizados ya las traen</a:t>
-            </a:r>
-          </a:p>
-        </p:txBody>
-      </p:sp>
-      <p:sp>
-        <p:nvSpPr>
-          <p:cNvPr id="8" name="imgph" descr="IMGQ:pressure gauge manometer on gas installation"/>
+              <a:t>En este vídeo</a:t>
+            </a:r>
+          </a:p>
+        </p:txBody>
+      </p:sp>
+      <p:sp>
+        <p:nvSpPr>
+          <p:cNvPr id="7" name="Rounded Rectangle 6"/>
           <p:cNvSpPr/>
           <p:nvPr/>
         </p:nvSpPr>
         <p:spPr>
           <a:xfrm>
-            <a:off x="5806440" y="1051560"/>
-            <a:ext cx="5298947" cy="4629150"/>
+            <a:off x="868680" y="1673352"/>
+            <a:ext cx="2011680" cy="73152"/>
           </a:xfrm>
           <a:prstGeom prst="roundRect">
             <a:avLst/>
           </a:prstGeom>
           <a:solidFill>
-            <a:srgbClr val="F3F6FB"/>
+            <a:srgbClr val="E8801A"/>
           </a:solidFill>
-          <a:ln w="12700">
-            <a:solidFill>
-              <a:srgbClr val="C7D2E6"/>
-            </a:solidFill>
+          <a:ln>
+            <a:noFill/>
           </a:ln>
           <a:effectLst/>
         </p:spPr>
@@ -8815,14 +9656,14 @@
       </p:sp>
       <p:sp>
         <p:nvSpPr>
-          <p:cNvPr id="9" name="TextBox 8"/>
+          <p:cNvPr id="8" name="TextBox 7"/>
           <p:cNvSpPr txBox="1"/>
           <p:nvPr/>
         </p:nvSpPr>
         <p:spPr>
           <a:xfrm>
-            <a:off x="6080760" y="2726055"/>
-            <a:ext cx="4750307" cy="1280160"/>
+            <a:off x="822960" y="2103120"/>
+            <a:ext cx="10515600" cy="4023360"/>
           </a:xfrm>
           <a:prstGeom prst="rect">
             <a:avLst/>
@@ -8835,27 +9676,228 @@
           </a:bodyPr>
           <a:lstStyle/>
           <a:p>
-            <a:pPr algn="ctr"/>
-            <a:r>
-              <a:rPr sz="1400" b="1" i="0">
-                <a:solidFill>
-                  <a:srgbClr val="64748B"/>
-                </a:solidFill>
-                <a:latin typeface="Montserrat"/>
-              </a:rPr>
-              <a:t>IMAGEN REALISTA</a:t>
-            </a:r>
-          </a:p>
-          <a:p>
-            <a:pPr algn="ctr"/>
-            <a:r>
-              <a:rPr sz="1100" b="0" i="1">
-                <a:solidFill>
-                  <a:srgbClr val="64748B"/>
-                </a:solidFill>
-                <a:latin typeface="Montserrat"/>
-              </a:rPr>
-              <a:t>pressure gauge manometer on gas installation</a:t>
+            <a:pPr>
+              <a:spcAft>
+                <a:spcPts val="900"/>
+              </a:spcAft>
+            </a:pPr>
+            <a:r>
+              <a:rPr sz="1800" b="1" i="0">
+                <a:solidFill>
+                  <a:srgbClr val="E8801A"/>
+                </a:solidFill>
+                <a:latin typeface="Montserrat"/>
+              </a:rPr>
+              <a:t>01   </a:t>
+            </a:r>
+            <a:r>
+              <a:rPr sz="1700" b="0" i="0">
+                <a:solidFill>
+                  <a:srgbClr val="1B2330"/>
+                </a:solidFill>
+                <a:latin typeface="Montserrat"/>
+              </a:rPr>
+              <a:t>Apartado 5</a:t>
+            </a:r>
+          </a:p>
+          <a:p>
+            <a:pPr>
+              <a:spcAft>
+                <a:spcPts val="900"/>
+              </a:spcAft>
+            </a:pPr>
+            <a:r>
+              <a:rPr sz="1800" b="1" i="0">
+                <a:solidFill>
+                  <a:srgbClr val="E8801A"/>
+                </a:solidFill>
+                <a:latin typeface="Montserrat"/>
+              </a:rPr>
+              <a:t>02   </a:t>
+            </a:r>
+            <a:r>
+              <a:rPr sz="1700" b="0" i="0">
+                <a:solidFill>
+                  <a:srgbClr val="1B2330"/>
+                </a:solidFill>
+                <a:latin typeface="Montserrat"/>
+              </a:rPr>
+              <a:t>Apartado 6.1</a:t>
+            </a:r>
+          </a:p>
+          <a:p>
+            <a:pPr>
+              <a:spcAft>
+                <a:spcPts val="900"/>
+              </a:spcAft>
+            </a:pPr>
+            <a:r>
+              <a:rPr sz="1800" b="1" i="0">
+                <a:solidFill>
+                  <a:srgbClr val="E8801A"/>
+                </a:solidFill>
+                <a:latin typeface="Montserrat"/>
+              </a:rPr>
+              <a:t>03   </a:t>
+            </a:r>
+            <a:r>
+              <a:rPr sz="1700" b="0" i="0">
+                <a:solidFill>
+                  <a:srgbClr val="1B2330"/>
+                </a:solidFill>
+                <a:latin typeface="Montserrat"/>
+              </a:rPr>
+              <a:t>Apartado 6.1.1</a:t>
+            </a:r>
+          </a:p>
+          <a:p>
+            <a:pPr>
+              <a:spcAft>
+                <a:spcPts val="900"/>
+              </a:spcAft>
+            </a:pPr>
+            <a:r>
+              <a:rPr sz="1800" b="1" i="0">
+                <a:solidFill>
+                  <a:srgbClr val="E8801A"/>
+                </a:solidFill>
+                <a:latin typeface="Montserrat"/>
+              </a:rPr>
+              <a:t>04   </a:t>
+            </a:r>
+            <a:r>
+              <a:rPr sz="1700" b="0" i="0">
+                <a:solidFill>
+                  <a:srgbClr val="1B2330"/>
+                </a:solidFill>
+                <a:latin typeface="Montserrat"/>
+              </a:rPr>
+              <a:t>Apartado 6.1.2</a:t>
+            </a:r>
+          </a:p>
+          <a:p>
+            <a:pPr>
+              <a:spcAft>
+                <a:spcPts val="900"/>
+              </a:spcAft>
+            </a:pPr>
+            <a:r>
+              <a:rPr sz="1800" b="1" i="0">
+                <a:solidFill>
+                  <a:srgbClr val="E8801A"/>
+                </a:solidFill>
+                <a:latin typeface="Montserrat"/>
+              </a:rPr>
+              <a:t>05   </a:t>
+            </a:r>
+            <a:r>
+              <a:rPr sz="1700" b="0" i="0">
+                <a:solidFill>
+                  <a:srgbClr val="1B2330"/>
+                </a:solidFill>
+                <a:latin typeface="Montserrat"/>
+              </a:rPr>
+              <a:t>Apartado 6.2</a:t>
+            </a:r>
+          </a:p>
+          <a:p>
+            <a:pPr>
+              <a:spcAft>
+                <a:spcPts val="900"/>
+              </a:spcAft>
+            </a:pPr>
+            <a:r>
+              <a:rPr sz="1800" b="1" i="0">
+                <a:solidFill>
+                  <a:srgbClr val="E8801A"/>
+                </a:solidFill>
+                <a:latin typeface="Montserrat"/>
+              </a:rPr>
+              <a:t>06   </a:t>
+            </a:r>
+            <a:r>
+              <a:rPr sz="1700" b="0" i="0">
+                <a:solidFill>
+                  <a:srgbClr val="1B2330"/>
+                </a:solidFill>
+                <a:latin typeface="Montserrat"/>
+              </a:rPr>
+              <a:t>Apartado 7</a:t>
+            </a:r>
+          </a:p>
+          <a:p>
+            <a:pPr>
+              <a:spcAft>
+                <a:spcPts val="900"/>
+              </a:spcAft>
+            </a:pPr>
+            <a:r>
+              <a:rPr sz="1800" b="1" i="0">
+                <a:solidFill>
+                  <a:srgbClr val="E8801A"/>
+                </a:solidFill>
+                <a:latin typeface="Montserrat"/>
+              </a:rPr>
+              <a:t>07   </a:t>
+            </a:r>
+            <a:r>
+              <a:rPr sz="1700" b="0" i="0">
+                <a:solidFill>
+                  <a:srgbClr val="1B2330"/>
+                </a:solidFill>
+                <a:latin typeface="Montserrat"/>
+              </a:rPr>
+              <a:t>Apartados 7.1 y 7.2</a:t>
+            </a:r>
+          </a:p>
+          <a:p>
+            <a:pPr>
+              <a:spcAft>
+                <a:spcPts val="900"/>
+              </a:spcAft>
+            </a:pPr>
+            <a:r>
+              <a:rPr sz="1800" b="1" i="0">
+                <a:solidFill>
+                  <a:srgbClr val="E8801A"/>
+                </a:solidFill>
+                <a:latin typeface="Montserrat"/>
+              </a:rPr>
+              <a:t>08   </a:t>
+            </a:r>
+            <a:r>
+              <a:rPr sz="1700" b="0" i="0">
+                <a:solidFill>
+                  <a:srgbClr val="1B2330"/>
+                </a:solidFill>
+                <a:latin typeface="Montserrat"/>
+              </a:rPr>
+              <a:t>Apartado 7.3</a:t>
+            </a:r>
+          </a:p>
+          <a:p>
+            <a:pPr>
+              <a:spcAft>
+                <a:spcPts val="900"/>
+              </a:spcAft>
+            </a:pPr>
+            <a:r>
+              <a:rPr sz="1800" b="1" i="0">
+                <a:solidFill>
+                  <a:srgbClr val="E8801A"/>
+                </a:solidFill>
+                <a:latin typeface="Montserrat"/>
+              </a:rPr>
+              <a:t>09   </a:t>
+            </a:r>
+            <a:r>
+              <a:rPr sz="1700" b="0" i="0">
+                <a:solidFill>
+                  <a:srgbClr val="1B2330"/>
+                </a:solidFill>
+                <a:latin typeface="Montserrat"/>
+              </a:rPr>
+              <a:t>Apartados 7.4 y 7.5.1</a:t>
             </a:r>
           </a:p>
         </p:txBody>
@@ -8952,7 +9994,7 @@
                 </a:solidFill>
                 <a:latin typeface="Montserrat"/>
               </a:rPr>
-              <a:t>004 / 017</a:t>
+              <a:t>004 / 018</a:t>
             </a:r>
           </a:p>
         </p:txBody>
@@ -9000,7 +10042,7 @@
         <p:spPr>
           <a:xfrm>
             <a:off x="822960" y="457200"/>
-            <a:ext cx="8229600" cy="365760"/>
+            <a:ext cx="10058400" cy="365760"/>
           </a:xfrm>
           <a:prstGeom prst="rect">
             <a:avLst/>
@@ -9014,13 +10056,13 @@
           <a:lstStyle/>
           <a:p>
             <a:r>
-              <a:rPr sz="1200" b="1" i="0">
-                <a:solidFill>
-                  <a:srgbClr val="64748B"/>
-                </a:solidFill>
-                <a:latin typeface="Montserrat"/>
-              </a:rPr>
-              <a:t>APARTADO 6.1 · GAS NATURAL</a:t>
+              <a:rPr sz="1300" b="1" i="0">
+                <a:solidFill>
+                  <a:srgbClr val="E8801A"/>
+                </a:solidFill>
+                <a:latin typeface="Montserrat"/>
+              </a:rPr>
+              <a:t>APARTADO 5 · TOMAS DE PRESIÓN</a:t>
             </a:r>
           </a:p>
         </p:txBody>
@@ -9048,26 +10090,70 @@
           <a:lstStyle/>
           <a:p>
             <a:r>
-              <a:rPr sz="2700" b="1" i="0">
+              <a:rPr sz="2800" b="1" i="0">
                 <a:solidFill>
                   <a:srgbClr val="1E2761"/>
                 </a:solidFill>
                 <a:latin typeface="Montserrat"/>
               </a:rPr>
-              <a:t>A más presión, más seguridades</a:t>
-            </a:r>
-          </a:p>
-        </p:txBody>
-      </p:sp>
-      <p:sp>
-        <p:nvSpPr>
-          <p:cNvPr id="7" name="TextBox 6"/>
+              <a:t>Los pinchos para medir el gas</a:t>
+            </a:r>
+          </a:p>
+        </p:txBody>
+      </p:sp>
+      <p:sp>
+        <p:nvSpPr>
+          <p:cNvPr id="7" name="Rounded Rectangle 6"/>
+          <p:cNvSpPr/>
+          <p:nvPr/>
+        </p:nvSpPr>
+        <p:spPr>
+          <a:xfrm>
+            <a:off x="868680" y="1627632"/>
+            <a:ext cx="2011680" cy="73152"/>
+          </a:xfrm>
+          <a:prstGeom prst="roundRect">
+            <a:avLst/>
+          </a:prstGeom>
+          <a:solidFill>
+            <a:srgbClr val="E8801A"/>
+          </a:solidFill>
+          <a:ln>
+            <a:noFill/>
+          </a:ln>
+          <a:effectLst/>
+        </p:spPr>
+        <p:style>
+          <a:lnRef idx="1">
+            <a:schemeClr val="accent1"/>
+          </a:lnRef>
+          <a:fillRef idx="3">
+            <a:schemeClr val="accent1"/>
+          </a:fillRef>
+          <a:effectRef idx="2">
+            <a:schemeClr val="accent1"/>
+          </a:effectRef>
+          <a:fontRef idx="minor">
+            <a:schemeClr val="lt1"/>
+          </a:fontRef>
+        </p:style>
+        <p:txBody>
+          <a:bodyPr rtlCol="0" anchor="ctr"/>
+          <a:lstStyle/>
+          <a:p>
+            <a:pPr algn="ctr"/>
+          </a:p>
+        </p:txBody>
+      </p:sp>
+      <p:sp>
+        <p:nvSpPr>
+          <p:cNvPr id="8" name="TextBox 7"/>
           <p:cNvSpPr txBox="1"/>
           <p:nvPr/>
         </p:nvSpPr>
         <p:spPr>
           <a:xfrm>
-            <a:off x="822960" y="1920240"/>
+            <a:off x="822960" y="1965960"/>
             <a:ext cx="4983480" cy="4206240"/>
           </a:xfrm>
           <a:prstGeom prst="rect">
@@ -9083,17 +10169,17 @@
           <a:p>
             <a:pPr>
               <a:spcAft>
-                <a:spcPts val="1000"/>
+                <a:spcPts val="1100"/>
               </a:spcAft>
             </a:pPr>
             <a:r>
               <a:rPr sz="1600" b="1" i="0">
                 <a:solidFill>
-                  <a:srgbClr val="2E3A80"/>
-                </a:solidFill>
-                <a:latin typeface="Montserrat"/>
-              </a:rPr>
-              <a:t>•  </a:t>
+                  <a:srgbClr val="E8801A"/>
+                </a:solidFill>
+                <a:latin typeface="Montserrat"/>
+              </a:rPr>
+              <a:t>▸  </a:t>
             </a:r>
             <a:r>
               <a:rPr sz="1600" b="0" i="0">
@@ -9102,23 +10188,23 @@
                 </a:solidFill>
                 <a:latin typeface="Montserrat"/>
               </a:rPr>
-              <a:t>Más de 150 mbar: regulador + máxima + mínima</a:t>
+              <a:t>A la entrada y salida del regulador</a:t>
             </a:r>
           </a:p>
           <a:p>
             <a:pPr>
               <a:spcAft>
-                <a:spcPts val="1000"/>
+                <a:spcPts val="1100"/>
               </a:spcAft>
             </a:pPr>
             <a:r>
               <a:rPr sz="1600" b="1" i="0">
                 <a:solidFill>
-                  <a:srgbClr val="2E3A80"/>
-                </a:solidFill>
-                <a:latin typeface="Montserrat"/>
-              </a:rPr>
-              <a:t>•  </a:t>
+                  <a:srgbClr val="E8801A"/>
+                </a:solidFill>
+                <a:latin typeface="Montserrat"/>
+              </a:rPr>
+              <a:t>▸  </a:t>
             </a:r>
             <a:r>
               <a:rPr sz="1600" b="0" i="0">
@@ -9127,23 +10213,23 @@
                 </a:solidFill>
                 <a:latin typeface="Montserrat"/>
               </a:rPr>
-              <a:t>De 50 a 150 mbar: regulador + mínima</a:t>
+              <a:t>En el contador y tras la llave de vivienda</a:t>
             </a:r>
           </a:p>
           <a:p>
             <a:pPr>
               <a:spcAft>
-                <a:spcPts val="1000"/>
+                <a:spcPts val="1100"/>
               </a:spcAft>
             </a:pPr>
             <a:r>
               <a:rPr sz="1600" b="1" i="0">
                 <a:solidFill>
-                  <a:srgbClr val="2E3A80"/>
-                </a:solidFill>
-                <a:latin typeface="Montserrat"/>
-              </a:rPr>
-              <a:t>•  </a:t>
+                  <a:srgbClr val="E8801A"/>
+                </a:solidFill>
+                <a:latin typeface="Montserrat"/>
+              </a:rPr>
+              <a:t>▸  </a:t>
             </a:r>
             <a:r>
               <a:rPr sz="1600" b="0" i="0">
@@ -9152,14 +10238,14 @@
                 </a:solidFill>
                 <a:latin typeface="Montserrat"/>
               </a:rPr>
-              <a:t>Hasta 50 mbar: mínima si pasa de 25 mbar</a:t>
-            </a:r>
-          </a:p>
-        </p:txBody>
-      </p:sp>
-      <p:sp>
-        <p:nvSpPr>
-          <p:cNvPr id="8" name="imgph" descr="IMGQ:gas pressure regulator valve"/>
+              <a:t>Los conjuntos normalizados ya las traen</a:t>
+            </a:r>
+          </a:p>
+        </p:txBody>
+      </p:sp>
+      <p:sp>
+        <p:nvSpPr>
+          <p:cNvPr id="9" name="imgph" descr="IMGQ:pressure gauge manometer on gas installation"/>
           <p:cNvSpPr/>
           <p:nvPr/>
         </p:nvSpPr>
@@ -9205,7 +10291,7 @@
       </p:sp>
       <p:sp>
         <p:nvSpPr>
-          <p:cNvPr id="9" name="TextBox 8"/>
+          <p:cNvPr id="10" name="TextBox 9"/>
           <p:cNvSpPr txBox="1"/>
           <p:nvPr/>
         </p:nvSpPr>
@@ -9245,7 +10331,7 @@
                 </a:solidFill>
                 <a:latin typeface="Montserrat"/>
               </a:rPr>
-              <a:t>gas pressure regulator valve</a:t>
+              <a:t>pressure gauge manometer on gas installation</a:t>
             </a:r>
           </a:p>
         </p:txBody>
@@ -9342,7 +10428,7 @@
                 </a:solidFill>
                 <a:latin typeface="Montserrat"/>
               </a:rPr>
-              <a:t>005 / 017</a:t>
+              <a:t>005 / 018</a:t>
             </a:r>
           </a:p>
         </p:txBody>
@@ -9390,7 +10476,7 @@
         <p:spPr>
           <a:xfrm>
             <a:off x="822960" y="457200"/>
-            <a:ext cx="8229600" cy="365760"/>
+            <a:ext cx="10058400" cy="365760"/>
           </a:xfrm>
           <a:prstGeom prst="rect">
             <a:avLst/>
@@ -9404,13 +10490,13 @@
           <a:lstStyle/>
           <a:p>
             <a:r>
-              <a:rPr sz="1200" b="1" i="0">
-                <a:solidFill>
-                  <a:srgbClr val="64748B"/>
-                </a:solidFill>
-                <a:latin typeface="Montserrat"/>
-              </a:rPr>
-              <a:t>APARTADO 6.1.1 · UBICACIÓN</a:t>
+              <a:rPr sz="1300" b="1" i="0">
+                <a:solidFill>
+                  <a:srgbClr val="E8801A"/>
+                </a:solidFill>
+                <a:latin typeface="Montserrat"/>
+              </a:rPr>
+              <a:t>APARTADO 6.1 · GAS NATURAL</a:t>
             </a:r>
           </a:p>
         </p:txBody>
@@ -9438,26 +10524,70 @@
           <a:lstStyle/>
           <a:p>
             <a:r>
-              <a:rPr sz="2700" b="1" i="0">
+              <a:rPr sz="2800" b="1" i="0">
                 <a:solidFill>
                   <a:srgbClr val="1E2761"/>
                 </a:solidFill>
                 <a:latin typeface="Montserrat"/>
               </a:rPr>
-              <a:t>Conjuntos de alta: grado 2 y al exterior</a:t>
-            </a:r>
-          </a:p>
-        </p:txBody>
-      </p:sp>
-      <p:sp>
-        <p:nvSpPr>
-          <p:cNvPr id="7" name="TextBox 6"/>
+              <a:t>A más presión, más seguridades</a:t>
+            </a:r>
+          </a:p>
+        </p:txBody>
+      </p:sp>
+      <p:sp>
+        <p:nvSpPr>
+          <p:cNvPr id="7" name="Rounded Rectangle 6"/>
+          <p:cNvSpPr/>
+          <p:nvPr/>
+        </p:nvSpPr>
+        <p:spPr>
+          <a:xfrm>
+            <a:off x="868680" y="1627632"/>
+            <a:ext cx="2011680" cy="73152"/>
+          </a:xfrm>
+          <a:prstGeom prst="roundRect">
+            <a:avLst/>
+          </a:prstGeom>
+          <a:solidFill>
+            <a:srgbClr val="E8801A"/>
+          </a:solidFill>
+          <a:ln>
+            <a:noFill/>
+          </a:ln>
+          <a:effectLst/>
+        </p:spPr>
+        <p:style>
+          <a:lnRef idx="1">
+            <a:schemeClr val="accent1"/>
+          </a:lnRef>
+          <a:fillRef idx="3">
+            <a:schemeClr val="accent1"/>
+          </a:fillRef>
+          <a:effectRef idx="2">
+            <a:schemeClr val="accent1"/>
+          </a:effectRef>
+          <a:fontRef idx="minor">
+            <a:schemeClr val="lt1"/>
+          </a:fontRef>
+        </p:style>
+        <p:txBody>
+          <a:bodyPr rtlCol="0" anchor="ctr"/>
+          <a:lstStyle/>
+          <a:p>
+            <a:pPr algn="ctr"/>
+          </a:p>
+        </p:txBody>
+      </p:sp>
+      <p:sp>
+        <p:nvSpPr>
+          <p:cNvPr id="8" name="TextBox 7"/>
           <p:cNvSpPr txBox="1"/>
           <p:nvPr/>
         </p:nvSpPr>
         <p:spPr>
           <a:xfrm>
-            <a:off x="822960" y="1920240"/>
+            <a:off x="822960" y="1965960"/>
             <a:ext cx="4983480" cy="4206240"/>
           </a:xfrm>
           <a:prstGeom prst="rect">
@@ -9473,17 +10603,17 @@
           <a:p>
             <a:pPr>
               <a:spcAft>
-                <a:spcPts val="1000"/>
+                <a:spcPts val="1100"/>
               </a:spcAft>
             </a:pPr>
             <a:r>
               <a:rPr sz="1600" b="1" i="0">
                 <a:solidFill>
-                  <a:srgbClr val="2E3A80"/>
-                </a:solidFill>
-                <a:latin typeface="Montserrat"/>
-              </a:rPr>
-              <a:t>•  </a:t>
+                  <a:srgbClr val="E8801A"/>
+                </a:solidFill>
+                <a:latin typeface="Montserrat"/>
+              </a:rPr>
+              <a:t>▸  </a:t>
             </a:r>
             <a:r>
               <a:rPr sz="1600" b="0" i="0">
@@ -9492,23 +10622,23 @@
                 </a:solidFill>
                 <a:latin typeface="Montserrat"/>
               </a:rPr>
-              <a:t>Grado de accesibilidad 2</a:t>
+              <a:t>Más de 150 mbar: regulador + máxima + mínima</a:t>
             </a:r>
           </a:p>
           <a:p>
             <a:pPr>
               <a:spcAft>
-                <a:spcPts val="1000"/>
+                <a:spcPts val="1100"/>
               </a:spcAft>
             </a:pPr>
             <a:r>
               <a:rPr sz="1600" b="1" i="0">
                 <a:solidFill>
-                  <a:srgbClr val="2E3A80"/>
-                </a:solidFill>
-                <a:latin typeface="Montserrat"/>
-              </a:rPr>
-              <a:t>•  </a:t>
+                  <a:srgbClr val="E8801A"/>
+                </a:solidFill>
+                <a:latin typeface="Montserrat"/>
+              </a:rPr>
+              <a:t>▸  </a:t>
             </a:r>
             <a:r>
               <a:rPr sz="1600" b="0" i="0">
@@ -9517,23 +10647,23 @@
                 </a:solidFill>
                 <a:latin typeface="Montserrat"/>
               </a:rPr>
-              <a:t>Armario o nicho con pared al exterior</a:t>
+              <a:t>De 50 a 150 mbar: regulador + mínima</a:t>
             </a:r>
           </a:p>
           <a:p>
             <a:pPr>
               <a:spcAft>
-                <a:spcPts val="1000"/>
+                <a:spcPts val="1100"/>
               </a:spcAft>
             </a:pPr>
             <a:r>
               <a:rPr sz="1600" b="1" i="0">
                 <a:solidFill>
-                  <a:srgbClr val="2E3A80"/>
-                </a:solidFill>
-                <a:latin typeface="Montserrat"/>
-              </a:rPr>
-              <a:t>•  </a:t>
+                  <a:srgbClr val="E8801A"/>
+                </a:solidFill>
+                <a:latin typeface="Montserrat"/>
+              </a:rPr>
+              <a:t>▸  </a:t>
             </a:r>
             <a:r>
               <a:rPr sz="1600" b="0" i="0">
@@ -9542,14 +10672,14 @@
                 </a:solidFill>
                 <a:latin typeface="Montserrat"/>
               </a:rPr>
-              <a:t>Ventilación de al menos 5 cm²</a:t>
-            </a:r>
-          </a:p>
-        </p:txBody>
-      </p:sp>
-      <p:sp>
-        <p:nvSpPr>
-          <p:cNvPr id="8" name="imgph" descr="IMGQ:gas regulator cabinet on building exterior wall"/>
+              <a:t>Hasta 50 mbar: mínima si pasa de 25 mbar</a:t>
+            </a:r>
+          </a:p>
+        </p:txBody>
+      </p:sp>
+      <p:sp>
+        <p:nvSpPr>
+          <p:cNvPr id="9" name="imgph" descr="IMGQ:gas pressure regulator valve"/>
           <p:cNvSpPr/>
           <p:nvPr/>
         </p:nvSpPr>
@@ -9595,7 +10725,7 @@
       </p:sp>
       <p:sp>
         <p:nvSpPr>
-          <p:cNvPr id="9" name="TextBox 8"/>
+          <p:cNvPr id="10" name="TextBox 9"/>
           <p:cNvSpPr txBox="1"/>
           <p:nvPr/>
         </p:nvSpPr>
@@ -9635,7 +10765,7 @@
                 </a:solidFill>
                 <a:latin typeface="Montserrat"/>
               </a:rPr>
-              <a:t>gas regulator cabinet on building exterior wall</a:t>
+              <a:t>gas pressure regulator valve</a:t>
             </a:r>
           </a:p>
         </p:txBody>
@@ -9732,7 +10862,7 @@
                 </a:solidFill>
                 <a:latin typeface="Montserrat"/>
               </a:rPr>
-              <a:t>006 / 017</a:t>
+              <a:t>006 / 018</a:t>
             </a:r>
           </a:p>
         </p:txBody>
@@ -9780,7 +10910,7 @@
         <p:spPr>
           <a:xfrm>
             <a:off x="822960" y="457200"/>
-            <a:ext cx="8229600" cy="365760"/>
+            <a:ext cx="10058400" cy="365760"/>
           </a:xfrm>
           <a:prstGeom prst="rect">
             <a:avLst/>
@@ -9794,13 +10924,13 @@
           <a:lstStyle/>
           <a:p>
             <a:r>
-              <a:rPr sz="1200" b="1" i="0">
-                <a:solidFill>
-                  <a:srgbClr val="64748B"/>
-                </a:solidFill>
-                <a:latin typeface="Montserrat"/>
-              </a:rPr>
-              <a:t>APARTADO 6.1.2 · REGULADORES</a:t>
+              <a:rPr sz="1300" b="1" i="0">
+                <a:solidFill>
+                  <a:srgbClr val="E8801A"/>
+                </a:solidFill>
+                <a:latin typeface="Montserrat"/>
+              </a:rPr>
+              <a:t>APARTADO 6.1.1 · UBICACIÓN</a:t>
             </a:r>
           </a:p>
         </p:txBody>
@@ -9828,26 +10958,70 @@
           <a:lstStyle/>
           <a:p>
             <a:r>
-              <a:rPr sz="2700" b="1" i="0">
+              <a:rPr sz="2800" b="1" i="0">
                 <a:solidFill>
                   <a:srgbClr val="1E2761"/>
                 </a:solidFill>
                 <a:latin typeface="Montserrat"/>
               </a:rPr>
-              <a:t>El 4,8 y la rejilla del VAS</a:t>
-            </a:r>
-          </a:p>
-        </p:txBody>
-      </p:sp>
-      <p:sp>
-        <p:nvSpPr>
-          <p:cNvPr id="7" name="TextBox 6"/>
+              <a:t>Conjuntos de alta: grado 2 y al exterior</a:t>
+            </a:r>
+          </a:p>
+        </p:txBody>
+      </p:sp>
+      <p:sp>
+        <p:nvSpPr>
+          <p:cNvPr id="7" name="Rounded Rectangle 6"/>
+          <p:cNvSpPr/>
+          <p:nvPr/>
+        </p:nvSpPr>
+        <p:spPr>
+          <a:xfrm>
+            <a:off x="868680" y="1627632"/>
+            <a:ext cx="2011680" cy="73152"/>
+          </a:xfrm>
+          <a:prstGeom prst="roundRect">
+            <a:avLst/>
+          </a:prstGeom>
+          <a:solidFill>
+            <a:srgbClr val="E8801A"/>
+          </a:solidFill>
+          <a:ln>
+            <a:noFill/>
+          </a:ln>
+          <a:effectLst/>
+        </p:spPr>
+        <p:style>
+          <a:lnRef idx="1">
+            <a:schemeClr val="accent1"/>
+          </a:lnRef>
+          <a:fillRef idx="3">
+            <a:schemeClr val="accent1"/>
+          </a:fillRef>
+          <a:effectRef idx="2">
+            <a:schemeClr val="accent1"/>
+          </a:effectRef>
+          <a:fontRef idx="minor">
+            <a:schemeClr val="lt1"/>
+          </a:fontRef>
+        </p:style>
+        <p:txBody>
+          <a:bodyPr rtlCol="0" anchor="ctr"/>
+          <a:lstStyle/>
+          <a:p>
+            <a:pPr algn="ctr"/>
+          </a:p>
+        </p:txBody>
+      </p:sp>
+      <p:sp>
+        <p:nvSpPr>
+          <p:cNvPr id="8" name="TextBox 7"/>
           <p:cNvSpPr txBox="1"/>
           <p:nvPr/>
         </p:nvSpPr>
         <p:spPr>
           <a:xfrm>
-            <a:off x="822960" y="1920240"/>
+            <a:off x="822960" y="1965960"/>
             <a:ext cx="4983480" cy="4206240"/>
           </a:xfrm>
           <a:prstGeom prst="rect">
@@ -9863,17 +11037,17 @@
           <a:p>
             <a:pPr>
               <a:spcAft>
-                <a:spcPts val="1000"/>
+                <a:spcPts val="1100"/>
               </a:spcAft>
             </a:pPr>
             <a:r>
               <a:rPr sz="1600" b="1" i="0">
                 <a:solidFill>
-                  <a:srgbClr val="2E3A80"/>
-                </a:solidFill>
-                <a:latin typeface="Montserrat"/>
-              </a:rPr>
-              <a:t>•  </a:t>
+                  <a:srgbClr val="E8801A"/>
+                </a:solidFill>
+                <a:latin typeface="Montserrat"/>
+              </a:rPr>
+              <a:t>▸  </a:t>
             </a:r>
             <a:r>
               <a:rPr sz="1600" b="0" i="0">
@@ -9882,23 +11056,23 @@
                 </a:solidFill>
                 <a:latin typeface="Montserrat"/>
               </a:rPr>
-              <a:t>Hasta 4,8 m³/h: no es conjunto de regulación</a:t>
+              <a:t>Grado de accesibilidad 2</a:t>
             </a:r>
           </a:p>
           <a:p>
             <a:pPr>
               <a:spcAft>
-                <a:spcPts val="1000"/>
+                <a:spcPts val="1100"/>
               </a:spcAft>
             </a:pPr>
             <a:r>
               <a:rPr sz="1600" b="1" i="0">
                 <a:solidFill>
-                  <a:srgbClr val="2E3A80"/>
-                </a:solidFill>
-                <a:latin typeface="Montserrat"/>
-              </a:rPr>
-              <a:t>•  </a:t>
+                  <a:srgbClr val="E8801A"/>
+                </a:solidFill>
+                <a:latin typeface="Montserrat"/>
+              </a:rPr>
+              <a:t>▸  </a:t>
             </a:r>
             <a:r>
               <a:rPr sz="1600" b="0" i="0">
@@ -9907,23 +11081,23 @@
                 </a:solidFill>
                 <a:latin typeface="Montserrat"/>
               </a:rPr>
-              <a:t>VAS por dentro: 5 cm² permanentes</a:t>
+              <a:t>Armario o nicho con pared al exterior</a:t>
             </a:r>
           </a:p>
           <a:p>
             <a:pPr>
               <a:spcAft>
-                <a:spcPts val="1000"/>
+                <a:spcPts val="1100"/>
               </a:spcAft>
             </a:pPr>
             <a:r>
               <a:rPr sz="1600" b="1" i="0">
                 <a:solidFill>
-                  <a:srgbClr val="2E3A80"/>
-                </a:solidFill>
-                <a:latin typeface="Montserrat"/>
-              </a:rPr>
-              <a:t>•  </a:t>
+                  <a:srgbClr val="E8801A"/>
+                </a:solidFill>
+                <a:latin typeface="Montserrat"/>
+              </a:rPr>
+              <a:t>▸  </a:t>
             </a:r>
             <a:r>
               <a:rPr sz="1600" b="0" i="0">
@@ -9932,14 +11106,14 @@
                 </a:solidFill>
                 <a:latin typeface="Montserrat"/>
               </a:rPr>
-              <a:t>Arriba si es ligero, abajo si es pesado</a:t>
-            </a:r>
-          </a:p>
-        </p:txBody>
-      </p:sp>
-      <p:sp>
-        <p:nvSpPr>
-          <p:cNvPr id="8" name="imgph" descr="IMGQ:small gas regulator on meter"/>
+              <a:t>Ventilación de al menos 5 cm²</a:t>
+            </a:r>
+          </a:p>
+        </p:txBody>
+      </p:sp>
+      <p:sp>
+        <p:nvSpPr>
+          <p:cNvPr id="9" name="imgph" descr="IMGQ:gas regulator cabinet on building exterior wall"/>
           <p:cNvSpPr/>
           <p:nvPr/>
         </p:nvSpPr>
@@ -9985,7 +11159,7 @@
       </p:sp>
       <p:sp>
         <p:nvSpPr>
-          <p:cNvPr id="9" name="TextBox 8"/>
+          <p:cNvPr id="10" name="TextBox 9"/>
           <p:cNvSpPr txBox="1"/>
           <p:nvPr/>
         </p:nvSpPr>
@@ -10025,7 +11199,7 @@
                 </a:solidFill>
                 <a:latin typeface="Montserrat"/>
               </a:rPr>
-              <a:t>small gas regulator on meter</a:t>
+              <a:t>gas regulator cabinet on building exterior wall</a:t>
             </a:r>
           </a:p>
         </p:txBody>
@@ -10122,7 +11296,7 @@
                 </a:solidFill>
                 <a:latin typeface="Montserrat"/>
               </a:rPr>
-              <a:t>007 / 017</a:t>
+              <a:t>007 / 018</a:t>
             </a:r>
           </a:p>
         </p:txBody>
@@ -10170,7 +11344,7 @@
         <p:spPr>
           <a:xfrm>
             <a:off x="822960" y="457200"/>
-            <a:ext cx="8229600" cy="365760"/>
+            <a:ext cx="10058400" cy="365760"/>
           </a:xfrm>
           <a:prstGeom prst="rect">
             <a:avLst/>
@@ -10184,13 +11358,13 @@
           <a:lstStyle/>
           <a:p>
             <a:r>
-              <a:rPr sz="1200" b="1" i="0">
-                <a:solidFill>
-                  <a:srgbClr val="64748B"/>
-                </a:solidFill>
-                <a:latin typeface="Montserrat"/>
-              </a:rPr>
-              <a:t>APARTADO 6.2 · GLP</a:t>
+              <a:rPr sz="1300" b="1" i="0">
+                <a:solidFill>
+                  <a:srgbClr val="E8801A"/>
+                </a:solidFill>
+                <a:latin typeface="Montserrat"/>
+              </a:rPr>
+              <a:t>APARTADO 6.1.2 · REGULADORES</a:t>
             </a:r>
           </a:p>
         </p:txBody>
@@ -10218,26 +11392,70 @@
           <a:lstStyle/>
           <a:p>
             <a:r>
-              <a:rPr sz="2700" b="1" i="0">
+              <a:rPr sz="2800" b="1" i="0">
                 <a:solidFill>
                   <a:srgbClr val="1E2761"/>
                 </a:solidFill>
                 <a:latin typeface="Montserrat"/>
               </a:rPr>
-              <a:t>El GLP baja en dos escalones</a:t>
-            </a:r>
-          </a:p>
-        </p:txBody>
-      </p:sp>
-      <p:sp>
-        <p:nvSpPr>
-          <p:cNvPr id="7" name="TextBox 6"/>
+              <a:t>El 4,8 y la rejilla del VAS</a:t>
+            </a:r>
+          </a:p>
+        </p:txBody>
+      </p:sp>
+      <p:sp>
+        <p:nvSpPr>
+          <p:cNvPr id="7" name="Rounded Rectangle 6"/>
+          <p:cNvSpPr/>
+          <p:nvPr/>
+        </p:nvSpPr>
+        <p:spPr>
+          <a:xfrm>
+            <a:off x="868680" y="1627632"/>
+            <a:ext cx="2011680" cy="73152"/>
+          </a:xfrm>
+          <a:prstGeom prst="roundRect">
+            <a:avLst/>
+          </a:prstGeom>
+          <a:solidFill>
+            <a:srgbClr val="E8801A"/>
+          </a:solidFill>
+          <a:ln>
+            <a:noFill/>
+          </a:ln>
+          <a:effectLst/>
+        </p:spPr>
+        <p:style>
+          <a:lnRef idx="1">
+            <a:schemeClr val="accent1"/>
+          </a:lnRef>
+          <a:fillRef idx="3">
+            <a:schemeClr val="accent1"/>
+          </a:fillRef>
+          <a:effectRef idx="2">
+            <a:schemeClr val="accent1"/>
+          </a:effectRef>
+          <a:fontRef idx="minor">
+            <a:schemeClr val="lt1"/>
+          </a:fontRef>
+        </p:style>
+        <p:txBody>
+          <a:bodyPr rtlCol="0" anchor="ctr"/>
+          <a:lstStyle/>
+          <a:p>
+            <a:pPr algn="ctr"/>
+          </a:p>
+        </p:txBody>
+      </p:sp>
+      <p:sp>
+        <p:nvSpPr>
+          <p:cNvPr id="8" name="TextBox 7"/>
           <p:cNvSpPr txBox="1"/>
           <p:nvPr/>
         </p:nvSpPr>
         <p:spPr>
           <a:xfrm>
-            <a:off x="822960" y="1920240"/>
+            <a:off x="822960" y="1965960"/>
             <a:ext cx="4983480" cy="4206240"/>
           </a:xfrm>
           <a:prstGeom prst="rect">
@@ -10253,17 +11471,17 @@
           <a:p>
             <a:pPr>
               <a:spcAft>
-                <a:spcPts val="1000"/>
+                <a:spcPts val="1100"/>
               </a:spcAft>
             </a:pPr>
             <a:r>
               <a:rPr sz="1600" b="1" i="0">
                 <a:solidFill>
-                  <a:srgbClr val="2E3A80"/>
-                </a:solidFill>
-                <a:latin typeface="Montserrat"/>
-              </a:rPr>
-              <a:t>•  </a:t>
+                  <a:srgbClr val="E8801A"/>
+                </a:solidFill>
+                <a:latin typeface="Montserrat"/>
+              </a:rPr>
+              <a:t>▸  </a:t>
             </a:r>
             <a:r>
               <a:rPr sz="1600" b="0" i="0">
@@ -10272,23 +11490,23 @@
                 </a:solidFill>
                 <a:latin typeface="Montserrat"/>
               </a:rPr>
-              <a:t>Entrada de la receptora: entre 0,1 y 2 bar</a:t>
+              <a:t>Hasta 4,8 m³/h: no es conjunto de regulación</a:t>
             </a:r>
           </a:p>
           <a:p>
             <a:pPr>
               <a:spcAft>
-                <a:spcPts val="1000"/>
+                <a:spcPts val="1100"/>
               </a:spcAft>
             </a:pPr>
             <a:r>
               <a:rPr sz="1600" b="1" i="0">
                 <a:solidFill>
-                  <a:srgbClr val="2E3A80"/>
-                </a:solidFill>
-                <a:latin typeface="Montserrat"/>
-              </a:rPr>
-              <a:t>•  </a:t>
+                  <a:srgbClr val="E8801A"/>
+                </a:solidFill>
+                <a:latin typeface="Montserrat"/>
+              </a:rPr>
+              <a:t>▸  </a:t>
             </a:r>
             <a:r>
               <a:rPr sz="1600" b="0" i="0">
@@ -10297,23 +11515,23 @@
                 </a:solidFill>
                 <a:latin typeface="Montserrat"/>
               </a:rPr>
-              <a:t>Inversor automático en baterías de envases</a:t>
+              <a:t>VAS por dentro: 5 cm² permanentes</a:t>
             </a:r>
           </a:p>
           <a:p>
             <a:pPr>
               <a:spcAft>
-                <a:spcPts val="1000"/>
+                <a:spcPts val="1100"/>
               </a:spcAft>
             </a:pPr>
             <a:r>
               <a:rPr sz="1600" b="1" i="0">
                 <a:solidFill>
-                  <a:srgbClr val="2E3A80"/>
-                </a:solidFill>
-                <a:latin typeface="Montserrat"/>
-              </a:rPr>
-              <a:t>•  </a:t>
+                  <a:srgbClr val="E8801A"/>
+                </a:solidFill>
+                <a:latin typeface="Montserrat"/>
+              </a:rPr>
+              <a:t>▸  </a:t>
             </a:r>
             <a:r>
               <a:rPr sz="1600" b="0" i="0">
@@ -10322,14 +11540,14 @@
                 </a:solidFill>
                 <a:latin typeface="Montserrat"/>
               </a:rPr>
-              <a:t>Válvulas antirretorno entre bombonas</a:t>
-            </a:r>
-          </a:p>
-        </p:txBody>
-      </p:sp>
-      <p:sp>
-        <p:nvSpPr>
-          <p:cNvPr id="8" name="imgph" descr="IMGQ:propane gas cylinder with regulator"/>
+              <a:t>Arriba si es ligero, abajo si es pesado</a:t>
+            </a:r>
+          </a:p>
+        </p:txBody>
+      </p:sp>
+      <p:sp>
+        <p:nvSpPr>
+          <p:cNvPr id="9" name="imgph" descr="IMGQ:small gas regulator on meter"/>
           <p:cNvSpPr/>
           <p:nvPr/>
         </p:nvSpPr>
@@ -10375,7 +11593,7 @@
       </p:sp>
       <p:sp>
         <p:nvSpPr>
-          <p:cNvPr id="9" name="TextBox 8"/>
+          <p:cNvPr id="10" name="TextBox 9"/>
           <p:cNvSpPr txBox="1"/>
           <p:nvPr/>
         </p:nvSpPr>
@@ -10415,7 +11633,7 @@
                 </a:solidFill>
                 <a:latin typeface="Montserrat"/>
               </a:rPr>
-              <a:t>propane gas cylinder with regulator</a:t>
+              <a:t>small gas regulator on meter</a:t>
             </a:r>
           </a:p>
         </p:txBody>
@@ -10512,7 +11730,7 @@
                 </a:solidFill>
                 <a:latin typeface="Montserrat"/>
               </a:rPr>
-              <a:t>008 / 017</a:t>
+              <a:t>008 / 018</a:t>
             </a:r>
           </a:p>
         </p:txBody>
@@ -10560,7 +11778,7 @@
         <p:spPr>
           <a:xfrm>
             <a:off x="822960" y="457200"/>
-            <a:ext cx="8229600" cy="365760"/>
+            <a:ext cx="10058400" cy="365760"/>
           </a:xfrm>
           <a:prstGeom prst="rect">
             <a:avLst/>
@@ -10574,13 +11792,13 @@
           <a:lstStyle/>
           <a:p>
             <a:r>
-              <a:rPr sz="1200" b="1" i="0">
-                <a:solidFill>
-                  <a:srgbClr val="64748B"/>
-                </a:solidFill>
-                <a:latin typeface="Montserrat"/>
-              </a:rPr>
-              <a:t>APARTADO 7 · DISPOSITIVOS DE CORTE</a:t>
+              <a:rPr sz="1300" b="1" i="0">
+                <a:solidFill>
+                  <a:srgbClr val="E8801A"/>
+                </a:solidFill>
+                <a:latin typeface="Montserrat"/>
+              </a:rPr>
+              <a:t>APARTADO 6.2 · GLP</a:t>
             </a:r>
           </a:p>
         </p:txBody>
@@ -10608,26 +11826,70 @@
           <a:lstStyle/>
           <a:p>
             <a:r>
-              <a:rPr sz="2700" b="1" i="0">
+              <a:rPr sz="2800" b="1" i="0">
                 <a:solidFill>
                   <a:srgbClr val="1E2761"/>
                 </a:solidFill>
                 <a:latin typeface="Montserrat"/>
               </a:rPr>
-              <a:t>La cadena de llaves, en orden</a:t>
-            </a:r>
-          </a:p>
-        </p:txBody>
-      </p:sp>
-      <p:sp>
-        <p:nvSpPr>
-          <p:cNvPr id="7" name="TextBox 6"/>
+              <a:t>El GLP baja en dos escalones</a:t>
+            </a:r>
+          </a:p>
+        </p:txBody>
+      </p:sp>
+      <p:sp>
+        <p:nvSpPr>
+          <p:cNvPr id="7" name="Rounded Rectangle 6"/>
+          <p:cNvSpPr/>
+          <p:nvPr/>
+        </p:nvSpPr>
+        <p:spPr>
+          <a:xfrm>
+            <a:off x="868680" y="1627632"/>
+            <a:ext cx="2011680" cy="73152"/>
+          </a:xfrm>
+          <a:prstGeom prst="roundRect">
+            <a:avLst/>
+          </a:prstGeom>
+          <a:solidFill>
+            <a:srgbClr val="E8801A"/>
+          </a:solidFill>
+          <a:ln>
+            <a:noFill/>
+          </a:ln>
+          <a:effectLst/>
+        </p:spPr>
+        <p:style>
+          <a:lnRef idx="1">
+            <a:schemeClr val="accent1"/>
+          </a:lnRef>
+          <a:fillRef idx="3">
+            <a:schemeClr val="accent1"/>
+          </a:fillRef>
+          <a:effectRef idx="2">
+            <a:schemeClr val="accent1"/>
+          </a:effectRef>
+          <a:fontRef idx="minor">
+            <a:schemeClr val="lt1"/>
+          </a:fontRef>
+        </p:style>
+        <p:txBody>
+          <a:bodyPr rtlCol="0" anchor="ctr"/>
+          <a:lstStyle/>
+          <a:p>
+            <a:pPr algn="ctr"/>
+          </a:p>
+        </p:txBody>
+      </p:sp>
+      <p:sp>
+        <p:nvSpPr>
+          <p:cNvPr id="8" name="TextBox 7"/>
           <p:cNvSpPr txBox="1"/>
           <p:nvPr/>
         </p:nvSpPr>
         <p:spPr>
           <a:xfrm>
-            <a:off x="822960" y="1920240"/>
+            <a:off x="822960" y="1965960"/>
             <a:ext cx="4983480" cy="4206240"/>
           </a:xfrm>
           <a:prstGeom prst="rect">
@@ -10643,17 +11905,17 @@
           <a:p>
             <a:pPr>
               <a:spcAft>
-                <a:spcPts val="1000"/>
+                <a:spcPts val="1100"/>
               </a:spcAft>
             </a:pPr>
             <a:r>
               <a:rPr sz="1600" b="1" i="0">
                 <a:solidFill>
-                  <a:srgbClr val="2E3A80"/>
-                </a:solidFill>
-                <a:latin typeface="Montserrat"/>
-              </a:rPr>
-              <a:t>•  </a:t>
+                  <a:srgbClr val="E8801A"/>
+                </a:solidFill>
+                <a:latin typeface="Montserrat"/>
+              </a:rPr>
+              <a:t>▸  </a:t>
             </a:r>
             <a:r>
               <a:rPr sz="1600" b="0" i="0">
@@ -10662,23 +11924,23 @@
                 </a:solidFill>
                 <a:latin typeface="Montserrat"/>
               </a:rPr>
-              <a:t>Acometida → edificio → montante</a:t>
+              <a:t>Entrada de la receptora: entre 0,1 y 2 bar</a:t>
             </a:r>
           </a:p>
           <a:p>
             <a:pPr>
               <a:spcAft>
-                <a:spcPts val="1000"/>
+                <a:spcPts val="1100"/>
               </a:spcAft>
             </a:pPr>
             <a:r>
               <a:rPr sz="1600" b="1" i="0">
                 <a:solidFill>
-                  <a:srgbClr val="2E3A80"/>
-                </a:solidFill>
-                <a:latin typeface="Montserrat"/>
-              </a:rPr>
-              <a:t>•  </a:t>
+                  <a:srgbClr val="E8801A"/>
+                </a:solidFill>
+                <a:latin typeface="Montserrat"/>
+              </a:rPr>
+              <a:t>▸  </a:t>
             </a:r>
             <a:r>
               <a:rPr sz="1600" b="0" i="0">
@@ -10687,23 +11949,23 @@
                 </a:solidFill>
                 <a:latin typeface="Montserrat"/>
               </a:rPr>
-              <a:t>Usuario → contador → vivienda</a:t>
+              <a:t>Inversor automático en baterías de envases</a:t>
             </a:r>
           </a:p>
           <a:p>
             <a:pPr>
               <a:spcAft>
-                <a:spcPts val="1000"/>
+                <a:spcPts val="1100"/>
               </a:spcAft>
             </a:pPr>
             <a:r>
               <a:rPr sz="1600" b="1" i="0">
                 <a:solidFill>
-                  <a:srgbClr val="2E3A80"/>
-                </a:solidFill>
-                <a:latin typeface="Montserrat"/>
-              </a:rPr>
-              <a:t>•  </a:t>
+                  <a:srgbClr val="E8801A"/>
+                </a:solidFill>
+                <a:latin typeface="Montserrat"/>
+              </a:rPr>
+              <a:t>▸  </a:t>
             </a:r>
             <a:r>
               <a:rPr sz="1600" b="0" i="0">
@@ -10712,14 +11974,14 @@
                 </a:solidFill>
                 <a:latin typeface="Montserrat"/>
               </a:rPr>
-              <a:t>Y por último, la de cada aparato</a:t>
-            </a:r>
-          </a:p>
-        </p:txBody>
-      </p:sp>
-      <p:sp>
-        <p:nvSpPr>
-          <p:cNvPr id="8" name="imgph" descr="IMGQ:gas shut off valve with yellow handle"/>
+              <a:t>Válvulas antirretorno entre bombonas</a:t>
+            </a:r>
+          </a:p>
+        </p:txBody>
+      </p:sp>
+      <p:sp>
+        <p:nvSpPr>
+          <p:cNvPr id="9" name="imgph" descr="IMGQ:propane gas cylinder with regulator"/>
           <p:cNvSpPr/>
           <p:nvPr/>
         </p:nvSpPr>
@@ -10765,7 +12027,7 @@
       </p:sp>
       <p:sp>
         <p:nvSpPr>
-          <p:cNvPr id="9" name="TextBox 8"/>
+          <p:cNvPr id="10" name="TextBox 9"/>
           <p:cNvSpPr txBox="1"/>
           <p:nvPr/>
         </p:nvSpPr>
@@ -10805,7 +12067,7 @@
                 </a:solidFill>
                 <a:latin typeface="Montserrat"/>
               </a:rPr>
-              <a:t>gas shut off valve with yellow handle</a:t>
+              <a:t>propane gas cylinder with regulator</a:t>
             </a:r>
           </a:p>
         </p:txBody>
@@ -10902,7 +12164,7 @@
                 </a:solidFill>
                 <a:latin typeface="Montserrat"/>
               </a:rPr>
-              <a:t>009 / 017</a:t>
+              <a:t>009 / 018</a:t>
             </a:r>
           </a:p>
         </p:txBody>
@@ -10950,7 +12212,7 @@
         <p:spPr>
           <a:xfrm>
             <a:off x="822960" y="457200"/>
-            <a:ext cx="8229600" cy="365760"/>
+            <a:ext cx="10058400" cy="365760"/>
           </a:xfrm>
           <a:prstGeom prst="rect">
             <a:avLst/>
@@ -10964,13 +12226,13 @@
           <a:lstStyle/>
           <a:p>
             <a:r>
-              <a:rPr sz="1200" b="1" i="0">
-                <a:solidFill>
-                  <a:srgbClr val="64748B"/>
-                </a:solidFill>
-                <a:latin typeface="Montserrat"/>
-              </a:rPr>
-              <a:t>APARTADOS 7.1 Y 7.2</a:t>
+              <a:rPr sz="1300" b="1" i="0">
+                <a:solidFill>
+                  <a:srgbClr val="E8801A"/>
+                </a:solidFill>
+                <a:latin typeface="Montserrat"/>
+              </a:rPr>
+              <a:t>APARTADO 7 · DISPOSITIVOS DE CORTE</a:t>
             </a:r>
           </a:p>
         </p:txBody>
@@ -10998,26 +12260,70 @@
           <a:lstStyle/>
           <a:p>
             <a:r>
-              <a:rPr sz="2700" b="1" i="0">
+              <a:rPr sz="2800" b="1" i="0">
                 <a:solidFill>
                   <a:srgbClr val="1E2761"/>
                 </a:solidFill>
                 <a:latin typeface="Montserrat"/>
               </a:rPr>
-              <a:t>Acometida y edificio: 25 y 4</a:t>
-            </a:r>
-          </a:p>
-        </p:txBody>
-      </p:sp>
-      <p:sp>
-        <p:nvSpPr>
-          <p:cNvPr id="7" name="TextBox 6"/>
+              <a:t>La cadena de llaves, en orden</a:t>
+            </a:r>
+          </a:p>
+        </p:txBody>
+      </p:sp>
+      <p:sp>
+        <p:nvSpPr>
+          <p:cNvPr id="7" name="Rounded Rectangle 6"/>
+          <p:cNvSpPr/>
+          <p:nvPr/>
+        </p:nvSpPr>
+        <p:spPr>
+          <a:xfrm>
+            <a:off x="868680" y="1627632"/>
+            <a:ext cx="2011680" cy="73152"/>
+          </a:xfrm>
+          <a:prstGeom prst="roundRect">
+            <a:avLst/>
+          </a:prstGeom>
+          <a:solidFill>
+            <a:srgbClr val="E8801A"/>
+          </a:solidFill>
+          <a:ln>
+            <a:noFill/>
+          </a:ln>
+          <a:effectLst/>
+        </p:spPr>
+        <p:style>
+          <a:lnRef idx="1">
+            <a:schemeClr val="accent1"/>
+          </a:lnRef>
+          <a:fillRef idx="3">
+            <a:schemeClr val="accent1"/>
+          </a:fillRef>
+          <a:effectRef idx="2">
+            <a:schemeClr val="accent1"/>
+          </a:effectRef>
+          <a:fontRef idx="minor">
+            <a:schemeClr val="lt1"/>
+          </a:fontRef>
+        </p:style>
+        <p:txBody>
+          <a:bodyPr rtlCol="0" anchor="ctr"/>
+          <a:lstStyle/>
+          <a:p>
+            <a:pPr algn="ctr"/>
+          </a:p>
+        </p:txBody>
+      </p:sp>
+      <p:sp>
+        <p:nvSpPr>
+          <p:cNvPr id="8" name="TextBox 7"/>
           <p:cNvSpPr txBox="1"/>
           <p:nvPr/>
         </p:nvSpPr>
         <p:spPr>
           <a:xfrm>
-            <a:off x="822960" y="1920240"/>
+            <a:off x="822960" y="1965960"/>
             <a:ext cx="4983480" cy="4206240"/>
           </a:xfrm>
           <a:prstGeom prst="rect">
@@ -11033,17 +12339,17 @@
           <a:p>
             <a:pPr>
               <a:spcAft>
-                <a:spcPts val="1000"/>
+                <a:spcPts val="1100"/>
               </a:spcAft>
             </a:pPr>
             <a:r>
               <a:rPr sz="1600" b="1" i="0">
                 <a:solidFill>
-                  <a:srgbClr val="2E3A80"/>
-                </a:solidFill>
-                <a:latin typeface="Montserrat"/>
-              </a:rPr>
-              <a:t>•  </a:t>
+                  <a:srgbClr val="E8801A"/>
+                </a:solidFill>
+                <a:latin typeface="Montserrat"/>
+              </a:rPr>
+              <a:t>▸  </a:t>
             </a:r>
             <a:r>
               <a:rPr sz="1600" b="0" i="0">
@@ -11052,23 +12358,23 @@
                 </a:solidFill>
                 <a:latin typeface="Montserrat"/>
               </a:rPr>
-              <a:t>Acometida: siempre, la pone la distribuidora</a:t>
+              <a:t>Acometida → edificio → montante</a:t>
             </a:r>
           </a:p>
           <a:p>
             <a:pPr>
               <a:spcAft>
-                <a:spcPts val="1000"/>
+                <a:spcPts val="1100"/>
               </a:spcAft>
             </a:pPr>
             <a:r>
               <a:rPr sz="1600" b="1" i="0">
                 <a:solidFill>
-                  <a:srgbClr val="2E3A80"/>
-                </a:solidFill>
-                <a:latin typeface="Montserrat"/>
-              </a:rPr>
-              <a:t>•  </a:t>
+                  <a:srgbClr val="E8801A"/>
+                </a:solidFill>
+                <a:latin typeface="Montserrat"/>
+              </a:rPr>
+              <a:t>▸  </a:t>
             </a:r>
             <a:r>
               <a:rPr sz="1600" b="0" i="0">
@@ -11077,23 +12383,23 @@
                 </a:solidFill>
                 <a:latin typeface="Montserrat"/>
               </a:rPr>
-              <a:t>Edificio: solo si la acometida es larga</a:t>
+              <a:t>Usuario → contador → vivienda</a:t>
             </a:r>
           </a:p>
           <a:p>
             <a:pPr>
               <a:spcAft>
-                <a:spcPts val="1000"/>
+                <a:spcPts val="1100"/>
               </a:spcAft>
             </a:pPr>
             <a:r>
               <a:rPr sz="1600" b="1" i="0">
                 <a:solidFill>
-                  <a:srgbClr val="2E3A80"/>
-                </a:solidFill>
-                <a:latin typeface="Montserrat"/>
-              </a:rPr>
-              <a:t>•  </a:t>
+                  <a:srgbClr val="E8801A"/>
+                </a:solidFill>
+                <a:latin typeface="Montserrat"/>
+              </a:rPr>
+              <a:t>▸  </a:t>
             </a:r>
             <a:r>
               <a:rPr sz="1600" b="0" i="0">
@@ -11102,14 +12408,14 @@
                 </a:solidFill>
                 <a:latin typeface="Montserrat"/>
               </a:rPr>
-              <a:t>25 m si va vista o 4 m si va enterrada</a:t>
-            </a:r>
-          </a:p>
-        </p:txBody>
-      </p:sp>
-      <p:sp>
-        <p:nvSpPr>
-          <p:cNvPr id="8" name="imgph" descr="IMGQ:gas service valve on street pavement"/>
+              <a:t>Y por último, la de cada aparato</a:t>
+            </a:r>
+          </a:p>
+        </p:txBody>
+      </p:sp>
+      <p:sp>
+        <p:nvSpPr>
+          <p:cNvPr id="9" name="imgph" descr="IMGQ:gas shut off valve with yellow handle"/>
           <p:cNvSpPr/>
           <p:nvPr/>
         </p:nvSpPr>
@@ -11155,7 +12461,7 @@
       </p:sp>
       <p:sp>
         <p:nvSpPr>
-          <p:cNvPr id="9" name="TextBox 8"/>
+          <p:cNvPr id="10" name="TextBox 9"/>
           <p:cNvSpPr txBox="1"/>
           <p:nvPr/>
         </p:nvSpPr>
@@ -11195,7 +12501,7 @@
                 </a:solidFill>
                 <a:latin typeface="Montserrat"/>
               </a:rPr>
-              <a:t>gas service valve on street pavement</a:t>
+              <a:t>gas shut off valve with yellow handle</a:t>
             </a:r>
           </a:p>
         </p:txBody>

--- a/Curso Gas B/11 - UNE 60670 - Diseno y construccion/11 - UNE 60670 - Diseno y construccion - Vídeo 3.pptx
+++ b/Curso Gas B/11 - UNE 60670 - Diseno y construccion/11 - UNE 60670 - Diseno y construccion - Vídeo 3.pptx
@@ -23,6 +23,12 @@
     <p:sldId id="271" r:id="rId23"/>
     <p:sldId id="272" r:id="rId24"/>
     <p:sldId id="273" r:id="rId25"/>
+    <p:sldId id="274" r:id="rId26"/>
+    <p:sldId id="275" r:id="rId27"/>
+    <p:sldId id="276" r:id="rId28"/>
+    <p:sldId id="277" r:id="rId29"/>
+    <p:sldId id="278" r:id="rId30"/>
+    <p:sldId id="279" r:id="rId31"/>
   </p:sldIdLst>
   <p:sldSz cx="12191695" cy="6858000" type="screen4x3"/>
   <p:notesSz cx="6858000" cy="9144000"/>
@@ -594,12 +600,12 @@
           <a:lstStyle/>
           <a:p>
             <a:r>
-              <a:t>N1: ¿Cuándo hace falta llave de edificio?</a:t>
-            </a:r>
-          </a:p>
-          <a:p>
-            <a:r>
-              <a:t>N2: Empecemos por la de acometida: esa se instala siempre, es la que da inicio a la instalación receptora, y dónde va lo decide la compañía distribuidora, accesible desde la vía pública para ella y para los bomberos o la policía. Ahora, la de edificio no siempre hace falta. Solo se pone cuando la acometida interior, el tramo entre la llave de acometida y la fachada, es larga: veinticinco metros si el tubo va visto, o solo cuatro metros si va enterrado. ¿Por qué tan poco si va enterrado? Porque una fuga enterrada es mucho más difícil de detectar y de cerrar, así que la norma quiere una llave más cerca. También se pone la de edificio cuando la acometida da a más de un edificio. Y si la acometida es corta, no hace falta: la propia llave de acometida ya hace ese papel de cierre general.</a:t>
+              <a:t>N1: ¿Y el gas de bombona o de depósito, el GLP?</a:t>
+            </a:r>
+          </a:p>
+          <a:p>
+            <a:r>
+              <a:t>N2: El GLP, que es la tercera familia, o sea butano y propano, sale del depósito o de la bombona a mucha presión, así que se baja en dos escalones. Primero una etapa que lo deja entre una décima y dos bar a la entrada de la instalación receptora; esa cifra, de cero coma uno a dos bar, es la clave que cae. Y luego una segunda etapa que lo baja hasta la presión que necesita el aparato. Esa primera reducción se hace con dos reguladores en serie o con uno que lleve seguridad de alta. Si el suministro viene de una batería de bombonas, hay un inversor automático que cambia solo del grupo de bombonas vacío al lleno, para que no te quedes sin gas. Y con dos bombonas trabajando a la vez se ponen válvulas antirretorno, para que el gas no se trasvase de una bombona a la otra. Un apunte: si varias viviendas cuelgan del mismo depósito, cada una lleva su propia seguridad por mínima.</a:t>
             </a:r>
           </a:p>
         </p:txBody>
@@ -669,12 +675,12 @@
           <a:lstStyle/>
           <a:p>
             <a:r>
-              <a:t>N1: ¿Qué tiene de especial la llave de montante colectivo?</a:t>
-            </a:r>
-          </a:p>
-          <a:p>
-            <a:r>
-              <a:t>N2: Se pone cuando hay más de un montante colectivo, para poder cortar cada uno por separado. Pero lo interesante es la llave de montante adicional, que es una previsión de futuro. Imagina un edificio que se monta pensando en que algún día se ampliará con más viviendas: se deja el montante preparado con una llave al final que se queda cerrada, bloqueada y precintada, y con un tapón ciego detrás. El día que se amplíe el edificio, se conecta ahí sin tener que cortar el gas a los vecinos que ya viven. Es dejar la puerta preparada para crecer sin molestar a nadie. Y hay otro elemento: en receptoras nuevas con algún tramo aéreo, se pone una toma Peterson, que es un punto de purga y medición accesible desde la vía pública. Resumen: la llave adicional es para ampliar sin cortes, y va bien cerrada y precintada hasta que llegue ese día.</a:t>
+              <a:t>N1: ¿Cómo me aprendo todas las llaves sin liarme?</a:t>
+            </a:r>
+          </a:p>
+          <a:p>
+            <a:r>
+              <a:t>N2: Visualizando el recorrido del gas y las llaves que se va encontrando por el camino, en orden. Entra por la llave de acometida, que es la de la calle y la pone la compañía. Luego, si la acometida es larga, la llave de edificio, a pie de fachada. Después, la de montante colectivo, si hay más de un montante. A continuación, la llave de usuario, que aísla tu vivienda del resto. Luego la llave de contador. Después la llave de vivienda, que es la tuya, dentro de casa. Y al final, la llave de conexión de cada aparato, una por cada caldera, calentador o cocina. Si te aprendes el recorrido de fuera hacia dentro, colocas cada llave en su sitio sin fallar, porque cada una va donde el gas la encuentra. Vamos a verlas una a una.</a:t>
             </a:r>
           </a:p>
         </p:txBody>
@@ -744,12 +750,12 @@
           <a:lstStyle/>
           <a:p>
             <a:r>
-              <a:t>N1: ¿Para qué sirve la llave de usuario?</a:t>
-            </a:r>
-          </a:p>
-          <a:p>
-            <a:r>
-              <a:t>N2: La llave de usuario sirve para aislar cada instalación individual del resto, o sea para poder cortar el gas de una vivienda concreta sin tocar las demás. Se instala en todos los casos y tiene que ser fácilmente accesible, con grado dos para la distribuidora, desde la zona común o el límite de la propiedad. La llave de contador también se pone siempre, y va en el mismo recinto que el contador, lo más cerca posible de su entrada, para poder cortarle el gas al aparato de medida. Y hay un detalle práctico muy típico: cuando los contadores están centralizados, todos juntos en un cuarto, la propia llave de contador puede asumir la función de llave de usuario, porque cumple lo mismo. Así te ahorras una llave. En resumen, la de usuario aísla tu piso y, en centralizaciones, la del contador puede hacer ese doble papel.</a:t>
+              <a:t>N1: ¿Cuándo hace falta llave de edificio?</a:t>
+            </a:r>
+          </a:p>
+          <a:p>
+            <a:r>
+              <a:t>N2: Empecemos por la de acometida: esa se instala siempre, es la que da inicio a la instalación receptora, y dónde va lo decide la compañía distribuidora, accesible desde la vía pública para ella y para los bomberos o la policía. Ahora, la de edificio no siempre hace falta. Solo se pone cuando la acometida interior, el tramo entre la llave de acometida y la fachada, es larga: veinticinco metros si el tubo va visto, o solo cuatro metros si va enterrado. ¿Por qué tan poco si va enterrado? Porque una fuga enterrada es mucho más difícil de detectar y de cerrar, así que la norma quiere una llave más cerca. También se pone la de edificio cuando la acometida da a más de un edificio. Y si la acometida es corta, no hace falta: la propia llave de acometida ya hace ese papel de cierre general.</a:t>
             </a:r>
           </a:p>
         </p:txBody>
@@ -819,12 +825,12 @@
           <a:lstStyle/>
           <a:p>
             <a:r>
-              <a:t>N1: ¿Y la llave de vivienda en qué se diferencia?</a:t>
-            </a:r>
-          </a:p>
-          <a:p>
-            <a:r>
-              <a:t>N2: La llave de vivienda es la que tienes tú a mano para cortar el gas de toda tu casa, por ejemplo antes de irte de vacaciones o si hueles a gas. Por eso se instala siempre y con grado de accesibilidad uno, que significa que la puedes manejar tú directamente, sin pedir permiso a nadie. Se coloca normalmente en el exterior de la vivienda pero de forma que se pueda accionar desde dentro; también puede ir por dentro, y entonces se pone de manera que el tramo de tubo antes de ella, ya dentro de casa, sea lo más corto posible, para que quede el mínimo de tubería sin poder cortar. Un matiz que cae en examen: la llave de usuario solo puede hacer de llave de vivienda si es fácilmente accesible desde fuera, desde zona común, y con autorización expresa de la distribuidora. Si no, son llaves distintas.</a:t>
+              <a:t>N1: La llave de edificio no siempre hace falta. ¿A partir de qué longitud de acometida interior es obligatoria?</a:t>
+            </a:r>
+          </a:p>
+          <a:p>
+            <a:r>
+              <a:t>N2: Son dos cifras, una para vista y otra para enterrada. Y ojo, la enterrada obliga mucho antes. ¿Sabrías decir cuál va con cuál?</a:t>
             </a:r>
           </a:p>
         </p:txBody>
@@ -894,12 +900,12 @@
           <a:lstStyle/>
           <a:p>
             <a:r>
-              <a:t>N1: ¿Cada aparato lleva su propia llave?</a:t>
-            </a:r>
-          </a:p>
-          <a:p>
-            <a:r>
-              <a:t>N2: Sí, cada aparato de gas, la caldera, el calentador, la cocina, lleva su llave de conexión, colocada lo más cerca posible del aparato y en el mismo recinto, con grado uno para el usuario. La idea es poder cortarle el gas a un aparato concreto sin dejar la casa entera sin gas. Hay reglas importantes. Si un aparato está pendiente de instalar o de arrancar, su llave se deja cerrada, bloqueada y precintada, y además taponada si el aparato todavía no está puesto, para que nadie abra gas a un tubo que no va a ningún sitio. Y una seguridad clave en las cocinas domésticas: es obligatorio un limitador de exceso de flujo. ¿Qué hace? Si se suelta el tubo de la cocina y el gas empieza a salir a chorro, el limitador lo corta de golpe. Si la llave no lo trae de serie, se pone uno externo sellado con pasta endurecible. Es la seguridad típica del se ha soltado el tubo de la vitrocerámica.</a:t>
+              <a:t>N1: ¿Por qué la enterrada obliga con solo cuatro metros?</a:t>
+            </a:r>
+          </a:p>
+          <a:p>
+            <a:r>
+              <a:t>N2: Porque una fuga enterrada es mucho más difícil de detectar y de cerrar que una vista, así que la norma quiere una llave de corte más cerca. Por eso: vista, veinticinco metros o más; enterrada, cuatro metros o más. El truco para no fallar es no cruzar las cifras: el número grande, veinticinco, va con lo visto, que se ve y se controla; el pequeño, cuatro, con lo enterrado, que no se ve.</a:t>
             </a:r>
           </a:p>
         </p:txBody>
@@ -969,12 +975,12 @@
           <a:lstStyle/>
           <a:p>
             <a:r>
-              <a:t>N1: Me pierdo con los grados de accesibilidad. ¿Cómo los distingo?</a:t>
-            </a:r>
-          </a:p>
-          <a:p>
-            <a:r>
-              <a:t>N2: Es más fácil de lo que parece si piensas en quién tiene que poder llegar a la llave. El grado uno es a mano del usuario: la manejas tú directamente, como la llave de vivienda o la de cada aparato, que están dentro o justo al alcance. El grado dos es accesible desde la zona común o pública con cierta facilidad, y es el típico de la distribuidora o de los servicios de emergencia, como la llave de usuario. Y el grado tres es el menos accesible, hace falta más para llegar, por ejemplo con una escalera o herramientas. La regla para no fallar es: lo tuyo, lo de dentro de tu casa, grado uno; lo de la compañía, en zonas comunes, grado dos o tres. Piensa siempre quién necesita abrir esa llave y a qué distancia está de él.</a:t>
+              <a:t>N1: ¿Qué tiene de especial la llave de montante colectivo?</a:t>
+            </a:r>
+          </a:p>
+          <a:p>
+            <a:r>
+              <a:t>N2: Se pone cuando hay más de un montante colectivo, para poder cortar cada uno por separado. Pero lo interesante es la llave de montante adicional, que es una previsión de futuro. Imagina un edificio que se monta pensando en que algún día se ampliará con más viviendas: se deja el montante preparado con una llave al final que se queda cerrada, bloqueada y precintada, y con un tapón ciego detrás. El día que se amplíe el edificio, se conecta ahí sin tener que cortar el gas a los vecinos que ya viven. Es dejar la puerta preparada para crecer sin molestar a nadie. Y hay otro elemento: en receptoras nuevas con algún tramo aéreo, se pone una toma Peterson, que es un punto de purga y medición accesible desde la vía pública. Resumen: la llave adicional es para ampliar sin cortes, y va bien cerrada y precintada hasta que llegue ese día.</a:t>
             </a:r>
           </a:p>
         </p:txBody>
@@ -1044,12 +1050,12 @@
           <a:lstStyle/>
           <a:p>
             <a:r>
-              <a:t>N1: ¿Puede una misma llave hacer de varias?</a:t>
-            </a:r>
-          </a:p>
-          <a:p>
-            <a:r>
-              <a:t>N2: Sí, para ahorrar material, una misma llave puede cumplir la función de varias, pero solo si reúne todos los requisitos que se exigen a cada una de ellas. Ahora bien, graba dos prohibiciones que caen fijo en el examen. La primera: la llave de vivienda nunca puede hacer de llave de aparato. ¿Por qué? Porque si fueran la misma, no podrías aislar un solo aparato sin dejar toda la casa sin gas, y se perdería el sentido de tener una llave por aparato. La segunda: la llave que viene incorporada en un regulador no puede hacer de llave de usuario, salvo una excepción muy concreta, la de las instalaciones con envase de gas licuado de hasta quince kilos, donde si el regulador lleva corte incorporado, ese sí puede hacer de llave de usuario. Fuera de esos dos límites, el multiuso está permitido. Dos noes que memorizar: vivienda no es aparato, y regulador no es usuario salvo bombona pequeña.</a:t>
+              <a:t>N1: ¿Para qué sirve la llave de usuario?</a:t>
+            </a:r>
+          </a:p>
+          <a:p>
+            <a:r>
+              <a:t>N2: La llave de usuario sirve para aislar cada instalación individual del resto, o sea para poder cortar el gas de una vivienda concreta sin tocar las demás. Se instala en todos los casos y tiene que ser fácilmente accesible, con grado dos para la distribuidora, desde la zona común o el límite de la propiedad. La llave de contador también se pone siempre, y va en el mismo recinto que el contador, lo más cerca posible de su entrada, para poder cortarle el gas al aparato de medida. Y hay un detalle práctico muy típico: cuando los contadores están centralizados, todos juntos en un cuarto, la propia llave de contador puede asumir la función de llave de usuario, porque cumple lo mismo. Así te ahorras una llave. En resumen, la de usuario aísla tu piso y, en centralizaciones, la del contador puede hacer ese doble papel.</a:t>
             </a:r>
           </a:p>
         </p:txBody>
@@ -1119,12 +1125,12 @@
           <a:lstStyle/>
           <a:p>
             <a:r>
-              <a:t>N1: Una vez montado todo esto, ¿cómo se pone en marcha?</a:t>
-            </a:r>
-          </a:p>
-          <a:p>
-            <a:r>
-              <a:t>N2: Con la instalación terminada, se sigue un circuito de papeles y comprobaciones que no te puedes saltar. Primero, la empresa instaladora habilitada hace las pruebas de estanquidad, para comprobar que no se escapa nada, y firma el certificado de instalación, el modelo I erre ge. Con ese certificado, la empresa distribuidora hace la puesta en servicio, que es dar gas de forma legal. Y la puesta en marcha de cada aparato la certifica quien lo arranca, sea el servicio técnico del fabricante o el instalador habilitado. Un detalle práctico: del certificado, la copia es para el usuario y el original para la distribuidora. Sin ese circuito completo, la instalación no puede recibir gas legalmente, aunque esté perfectamente montada. El papel y la prueba son los que abren la llave.</a:t>
+              <a:t>N1: ¿Y la llave de vivienda en qué se diferencia?</a:t>
+            </a:r>
+          </a:p>
+          <a:p>
+            <a:r>
+              <a:t>N2: La llave de vivienda es la que tienes tú a mano para cortar el gas de toda tu casa, por ejemplo antes de irte de vacaciones o si hueles a gas. Por eso se instala siempre y con grado de accesibilidad uno, que significa que la puedes manejar tú directamente, sin pedir permiso a nadie. Se coloca normalmente en el exterior de la vivienda pero de forma que se pueda accionar desde dentro; también puede ir por dentro, y entonces se pone de manera que el tramo de tubo antes de ella, ya dentro de casa, sea lo más corto posible, para que quede el mínimo de tubería sin poder cortar. Un matiz que cae en examen: la llave de usuario solo puede hacer de llave de vivienda si es fácilmente accesible desde fuera, desde zona común, y con autorización expresa de la distribuidora. Si no, son llaves distintas.</a:t>
             </a:r>
           </a:p>
         </p:txBody>
@@ -1194,22 +1200,87 @@
           <a:lstStyle/>
           <a:p>
             <a:r>
-              <a:t>N1: Último empujón. ¿Cómo lo ato todo y cierro el tema?</a:t>
-            </a:r>
-          </a:p>
-          <a:p>
-            <a:r>
-              <a:t>N2: Reconstruyamos el hilo de los tres elementos que gobiernan el gas. Primero, dónde medir: las tomas de presión, colocadas a cada lado de los elementos importantes, para no trabajar a ciegas. Segundo, cómo regular: en gas natural, cuanta más presión de entrada, más seguridades, con el regulador más la máxima y la mínima; en GLP, dos etapas y la entrada de la receptora entre una décima y dos bar, con inversor y antirretorno en las bombonas. Y tercero, cómo cortar: la cadena de llaves de fuera hacia dentro, acometida, edificio, montante, usuario, contador, vivienda y aparato, cada una con su grado de accesibilidad, lo tuyo en grado uno y lo de la compañía en dos o tres.</a:t>
-            </a:r>
-          </a:p>
-          <a:p>
-            <a:r>
-              <a:t>N1: ¿Y cómo se pregunta y para qué me sirve de verdad?</a:t>
-            </a:r>
-          </a:p>
-          <a:p>
-            <a:r>
-              <a:t>N2: En el examen te clavan las cifras y las prohibiciones: los cinco centímetros cuadrados de ventilación, el cuatro coma ocho de frontera, los veinticinco metros y los cuatro metros de la llave de edificio, y los dos noes, vivienda no es aparato y regulador no es usuario. En la obra, esto es lo que más usarás: para diagnosticar por qué un aparato no rinde vas midiendo con las tomas de presión, y para cortar en una urgencia tienes que saber qué llave cerrar y dónde está. Con esto has cerrado la Parte cuatro entera: sabes dimensionar, sabes llevar el tubo y sabes medir, regular y cortar. Hoy eres mucho más gasista que al empezar el tema. Enhorabuena: ya piensas como un instalador.</a:t>
+              <a:t>N1: ¿Cada aparato lleva su propia llave?</a:t>
+            </a:r>
+          </a:p>
+          <a:p>
+            <a:r>
+              <a:t>N2: Sí, cada aparato de gas, la caldera, el calentador, la cocina, lleva su llave de conexión, colocada lo más cerca posible del aparato y en el mismo recinto, con grado uno para el usuario. La idea es poder cortarle el gas a un aparato concreto sin dejar la casa entera sin gas. Hay reglas importantes. Si un aparato está pendiente de instalar o de arrancar, su llave se deja cerrada, bloqueada y precintada, y además taponada si el aparato todavía no está puesto, para que nadie abra gas a un tubo que no va a ningún sitio. Y una seguridad clave en las cocinas domésticas: es obligatorio un limitador de exceso de flujo. ¿Qué hace? Si se suelta el tubo de la cocina y el gas empieza a salir a chorro, el limitador lo corta de golpe. Si la llave no lo trae de serie, se pone uno externo sellado con pasta endurecible. Es la seguridad típica del se ha soltado el tubo de la vitrocerámica.</a:t>
+            </a:r>
+          </a:p>
+        </p:txBody>
+      </p:sp>
+      <p:sp>
+        <p:nvSpPr>
+          <p:cNvPr id="4" name="Slide Number Placeholder 3"/>
+          <p:cNvSpPr>
+            <a:spLocks noGrp="1"/>
+          </p:cNvSpPr>
+          <p:nvPr>
+            <p:ph type="sldNum" idx="5" sz="quarter"/>
+          </p:nvPr>
+        </p:nvSpPr>
+        <p:spPr/>
+      </p:sp>
+    </p:spTree>
+  </p:cSld>
+  <p:clrMapOvr>
+    <a:masterClrMapping/>
+  </p:clrMapOvr>
+</p:notes>
+</file>
+
+<file path=ppt/notesSlides/notesSlide19.xml><?xml version="1.0" encoding="utf-8"?>
+<p:notes xmlns:a="http://schemas.openxmlformats.org/drawingml/2006/main" xmlns:p="http://schemas.openxmlformats.org/presentationml/2006/main" xmlns:r="http://schemas.openxmlformats.org/officeDocument/2006/relationships">
+  <p:cSld>
+    <p:spTree>
+      <p:nvGrpSpPr>
+        <p:cNvPr id="1" name=""/>
+        <p:cNvGrpSpPr/>
+        <p:nvPr/>
+      </p:nvGrpSpPr>
+      <p:grpSpPr>
+        <a:xfrm>
+          <a:off x="0" y="0"/>
+          <a:ext cx="0" cy="0"/>
+          <a:chOff x="0" y="0"/>
+          <a:chExt cx="0" cy="0"/>
+        </a:xfrm>
+      </p:grpSpPr>
+      <p:sp>
+        <p:nvSpPr>
+          <p:cNvPr id="2" name="Slide Image Placeholder 1"/>
+          <p:cNvSpPr>
+            <a:spLocks noGrp="1"/>
+          </p:cNvSpPr>
+          <p:nvPr>
+            <p:ph type="sldImg" idx="2"/>
+          </p:nvPr>
+        </p:nvSpPr>
+        <p:spPr/>
+      </p:sp>
+      <p:sp>
+        <p:nvSpPr>
+          <p:cNvPr id="3" name="Notes Placeholder 2"/>
+          <p:cNvSpPr>
+            <a:spLocks noGrp="1"/>
+          </p:cNvSpPr>
+          <p:nvPr>
+            <p:ph type="body" idx="3" sz="quarter"/>
+          </p:nvPr>
+        </p:nvSpPr>
+        <p:spPr/>
+        <p:txBody>
+          <a:bodyPr/>
+          <a:lstStyle/>
+          <a:p>
+            <a:r>
+              <a:t>N1: Me pierdo con los grados de accesibilidad. ¿Cómo los distingo?</a:t>
+            </a:r>
+          </a:p>
+          <a:p>
+            <a:r>
+              <a:t>N2: Es más fácil de lo que parece si piensas en quién tiene que poder llegar a la llave. El grado uno es a mano del usuario: la manejas tú directamente, como la llave de vivienda o la de cada aparato, que están dentro o justo al alcance. El grado dos es accesible desde la zona común o pública con cierta facilidad, y es el típico de la distribuidora o de los servicios de emergencia, como la llave de usuario. Y el grado tres es el menos accesible, hace falta más para llegar, por ejemplo con una escalera o herramientas. La regla para no fallar es: lo tuyo, lo de dentro de tu casa, grado uno; lo de la compañía, en zonas comunes, grado dos o tres. Piensa siempre quién necesita abrir esa llave y a qué distancia está de él.</a:t>
             </a:r>
           </a:p>
         </p:txBody>
@@ -1309,6 +1380,391 @@
 </p:notes>
 </file>
 
+<file path=ppt/notesSlides/notesSlide20.xml><?xml version="1.0" encoding="utf-8"?>
+<p:notes xmlns:a="http://schemas.openxmlformats.org/drawingml/2006/main" xmlns:p="http://schemas.openxmlformats.org/presentationml/2006/main" xmlns:r="http://schemas.openxmlformats.org/officeDocument/2006/relationships">
+  <p:cSld>
+    <p:spTree>
+      <p:nvGrpSpPr>
+        <p:cNvPr id="1" name=""/>
+        <p:cNvGrpSpPr/>
+        <p:nvPr/>
+      </p:nvGrpSpPr>
+      <p:grpSpPr>
+        <a:xfrm>
+          <a:off x="0" y="0"/>
+          <a:ext cx="0" cy="0"/>
+          <a:chOff x="0" y="0"/>
+          <a:chExt cx="0" cy="0"/>
+        </a:xfrm>
+      </p:grpSpPr>
+      <p:sp>
+        <p:nvSpPr>
+          <p:cNvPr id="2" name="Slide Image Placeholder 1"/>
+          <p:cNvSpPr>
+            <a:spLocks noGrp="1"/>
+          </p:cNvSpPr>
+          <p:nvPr>
+            <p:ph type="sldImg" idx="2"/>
+          </p:nvPr>
+        </p:nvSpPr>
+        <p:spPr/>
+      </p:sp>
+      <p:sp>
+        <p:nvSpPr>
+          <p:cNvPr id="3" name="Notes Placeholder 2"/>
+          <p:cNvSpPr>
+            <a:spLocks noGrp="1"/>
+          </p:cNvSpPr>
+          <p:nvPr>
+            <p:ph type="body" idx="3" sz="quarter"/>
+          </p:nvPr>
+        </p:nvSpPr>
+        <p:spPr/>
+        <p:txBody>
+          <a:bodyPr/>
+          <a:lstStyle/>
+          <a:p>
+            <a:r>
+              <a:t>N1: ¿Puede una misma llave hacer de varias?</a:t>
+            </a:r>
+          </a:p>
+          <a:p>
+            <a:r>
+              <a:t>N2: Sí, para ahorrar material, una misma llave puede cumplir la función de varias, pero solo si reúne todos los requisitos que se exigen a cada una de ellas. Ahora bien, graba dos prohibiciones que caen fijo en el examen. La primera: la llave de vivienda nunca puede hacer de llave de aparato. ¿Por qué? Porque si fueran la misma, no podrías aislar un solo aparato sin dejar toda la casa sin gas, y se perdería el sentido de tener una llave por aparato. La segunda: la llave que viene incorporada en un regulador no puede hacer de llave de usuario, salvo una excepción muy concreta, la de las instalaciones con envase de gas licuado de hasta quince kilos, donde si el regulador lleva corte incorporado, ese sí puede hacer de llave de usuario. Fuera de esos dos límites, el multiuso está permitido. Dos noes que memorizar: vivienda no es aparato, y regulador no es usuario salvo bombona pequeña.</a:t>
+            </a:r>
+          </a:p>
+        </p:txBody>
+      </p:sp>
+      <p:sp>
+        <p:nvSpPr>
+          <p:cNvPr id="4" name="Slide Number Placeholder 3"/>
+          <p:cNvSpPr>
+            <a:spLocks noGrp="1"/>
+          </p:cNvSpPr>
+          <p:nvPr>
+            <p:ph type="sldNum" idx="5" sz="quarter"/>
+          </p:nvPr>
+        </p:nvSpPr>
+        <p:spPr/>
+      </p:sp>
+    </p:spTree>
+  </p:cSld>
+  <p:clrMapOvr>
+    <a:masterClrMapping/>
+  </p:clrMapOvr>
+</p:notes>
+</file>
+
+<file path=ppt/notesSlides/notesSlide21.xml><?xml version="1.0" encoding="utf-8"?>
+<p:notes xmlns:a="http://schemas.openxmlformats.org/drawingml/2006/main" xmlns:p="http://schemas.openxmlformats.org/presentationml/2006/main" xmlns:r="http://schemas.openxmlformats.org/officeDocument/2006/relationships">
+  <p:cSld>
+    <p:spTree>
+      <p:nvGrpSpPr>
+        <p:cNvPr id="1" name=""/>
+        <p:cNvGrpSpPr/>
+        <p:nvPr/>
+      </p:nvGrpSpPr>
+      <p:grpSpPr>
+        <a:xfrm>
+          <a:off x="0" y="0"/>
+          <a:ext cx="0" cy="0"/>
+          <a:chOff x="0" y="0"/>
+          <a:chExt cx="0" cy="0"/>
+        </a:xfrm>
+      </p:grpSpPr>
+      <p:sp>
+        <p:nvSpPr>
+          <p:cNvPr id="2" name="Slide Image Placeholder 1"/>
+          <p:cNvSpPr>
+            <a:spLocks noGrp="1"/>
+          </p:cNvSpPr>
+          <p:nvPr>
+            <p:ph type="sldImg" idx="2"/>
+          </p:nvPr>
+        </p:nvSpPr>
+        <p:spPr/>
+      </p:sp>
+      <p:sp>
+        <p:nvSpPr>
+          <p:cNvPr id="3" name="Notes Placeholder 2"/>
+          <p:cNvSpPr>
+            <a:spLocks noGrp="1"/>
+          </p:cNvSpPr>
+          <p:nvPr>
+            <p:ph type="body" idx="3" sz="quarter"/>
+          </p:nvPr>
+        </p:nvSpPr>
+        <p:spPr/>
+        <p:txBody>
+          <a:bodyPr/>
+          <a:lstStyle/>
+          <a:p>
+            <a:r>
+              <a:t>N1: Dos noes que caen fijo. De estas cuatro combinaciones de llaves, ¿cuál está prohibida siempre?</a:t>
+            </a:r>
+          </a:p>
+          <a:p>
+            <a:r>
+              <a:t>N2: Recuerda que el multiuso se permite si una llave cumple todo lo exigido, pero hay una pareja que la norma prohíbe en todos los casos.</a:t>
+            </a:r>
+          </a:p>
+        </p:txBody>
+      </p:sp>
+      <p:sp>
+        <p:nvSpPr>
+          <p:cNvPr id="4" name="Slide Number Placeholder 3"/>
+          <p:cNvSpPr>
+            <a:spLocks noGrp="1"/>
+          </p:cNvSpPr>
+          <p:nvPr>
+            <p:ph type="sldNum" idx="5" sz="quarter"/>
+          </p:nvPr>
+        </p:nvSpPr>
+        <p:spPr/>
+      </p:sp>
+    </p:spTree>
+  </p:cSld>
+  <p:clrMapOvr>
+    <a:masterClrMapping/>
+  </p:clrMapOvr>
+</p:notes>
+</file>
+
+<file path=ppt/notesSlides/notesSlide22.xml><?xml version="1.0" encoding="utf-8"?>
+<p:notes xmlns:a="http://schemas.openxmlformats.org/drawingml/2006/main" xmlns:p="http://schemas.openxmlformats.org/presentationml/2006/main" xmlns:r="http://schemas.openxmlformats.org/officeDocument/2006/relationships">
+  <p:cSld>
+    <p:spTree>
+      <p:nvGrpSpPr>
+        <p:cNvPr id="1" name=""/>
+        <p:cNvGrpSpPr/>
+        <p:nvPr/>
+      </p:nvGrpSpPr>
+      <p:grpSpPr>
+        <a:xfrm>
+          <a:off x="0" y="0"/>
+          <a:ext cx="0" cy="0"/>
+          <a:chOff x="0" y="0"/>
+          <a:chExt cx="0" cy="0"/>
+        </a:xfrm>
+      </p:grpSpPr>
+      <p:sp>
+        <p:nvSpPr>
+          <p:cNvPr id="2" name="Slide Image Placeholder 1"/>
+          <p:cNvSpPr>
+            <a:spLocks noGrp="1"/>
+          </p:cNvSpPr>
+          <p:nvPr>
+            <p:ph type="sldImg" idx="2"/>
+          </p:nvPr>
+        </p:nvSpPr>
+        <p:spPr/>
+      </p:sp>
+      <p:sp>
+        <p:nvSpPr>
+          <p:cNvPr id="3" name="Notes Placeholder 2"/>
+          <p:cNvSpPr>
+            <a:spLocks noGrp="1"/>
+          </p:cNvSpPr>
+          <p:nvPr>
+            <p:ph type="body" idx="3" sz="quarter"/>
+          </p:nvPr>
+        </p:nvSpPr>
+        <p:spPr/>
+        <p:txBody>
+          <a:bodyPr/>
+          <a:lstStyle/>
+          <a:p>
+            <a:r>
+              <a:t>N1: ¿Por qué la vivienda no puede hacer de aparato?</a:t>
+            </a:r>
+          </a:p>
+          <a:p>
+            <a:r>
+              <a:t>N2: Porque si fueran la misma llave, no podrías cortar el gas de un solo aparato sin dejar toda la casa sin gas, y se perdería el sentido de tener una llave por aparato. Las otras tres sí se permiten: el contador puede hacer de usuario en centralizaciones, una llave puede ser multifunción si cumple todo, y en envases de gas licuado de hasta quince kilos el corte del regulador sí puede hacer de llave de usuario. El único no rotundo aquí es vivienda hace de aparato.</a:t>
+            </a:r>
+          </a:p>
+        </p:txBody>
+      </p:sp>
+      <p:sp>
+        <p:nvSpPr>
+          <p:cNvPr id="4" name="Slide Number Placeholder 3"/>
+          <p:cNvSpPr>
+            <a:spLocks noGrp="1"/>
+          </p:cNvSpPr>
+          <p:nvPr>
+            <p:ph type="sldNum" idx="5" sz="quarter"/>
+          </p:nvPr>
+        </p:nvSpPr>
+        <p:spPr/>
+      </p:sp>
+    </p:spTree>
+  </p:cSld>
+  <p:clrMapOvr>
+    <a:masterClrMapping/>
+  </p:clrMapOvr>
+</p:notes>
+</file>
+
+<file path=ppt/notesSlides/notesSlide23.xml><?xml version="1.0" encoding="utf-8"?>
+<p:notes xmlns:a="http://schemas.openxmlformats.org/drawingml/2006/main" xmlns:p="http://schemas.openxmlformats.org/presentationml/2006/main" xmlns:r="http://schemas.openxmlformats.org/officeDocument/2006/relationships">
+  <p:cSld>
+    <p:spTree>
+      <p:nvGrpSpPr>
+        <p:cNvPr id="1" name=""/>
+        <p:cNvGrpSpPr/>
+        <p:nvPr/>
+      </p:nvGrpSpPr>
+      <p:grpSpPr>
+        <a:xfrm>
+          <a:off x="0" y="0"/>
+          <a:ext cx="0" cy="0"/>
+          <a:chOff x="0" y="0"/>
+          <a:chExt cx="0" cy="0"/>
+        </a:xfrm>
+      </p:grpSpPr>
+      <p:sp>
+        <p:nvSpPr>
+          <p:cNvPr id="2" name="Slide Image Placeholder 1"/>
+          <p:cNvSpPr>
+            <a:spLocks noGrp="1"/>
+          </p:cNvSpPr>
+          <p:nvPr>
+            <p:ph type="sldImg" idx="2"/>
+          </p:nvPr>
+        </p:nvSpPr>
+        <p:spPr/>
+      </p:sp>
+      <p:sp>
+        <p:nvSpPr>
+          <p:cNvPr id="3" name="Notes Placeholder 2"/>
+          <p:cNvSpPr>
+            <a:spLocks noGrp="1"/>
+          </p:cNvSpPr>
+          <p:nvPr>
+            <p:ph type="body" idx="3" sz="quarter"/>
+          </p:nvPr>
+        </p:nvSpPr>
+        <p:spPr/>
+        <p:txBody>
+          <a:bodyPr/>
+          <a:lstStyle/>
+          <a:p>
+            <a:r>
+              <a:t>N1: Una vez montado todo esto, ¿cómo se pone en marcha?</a:t>
+            </a:r>
+          </a:p>
+          <a:p>
+            <a:r>
+              <a:t>N2: Con la instalación terminada, se sigue un circuito de papeles y comprobaciones que no te puedes saltar. Primero, la empresa instaladora habilitada hace las pruebas de estanquidad, para comprobar que no se escapa nada, y firma el certificado de instalación, el modelo I erre ge. Con ese certificado, la empresa distribuidora hace la puesta en servicio, que es dar gas de forma legal. Y la puesta en marcha de cada aparato la certifica quien lo arranca, sea el servicio técnico del fabricante o el instalador habilitado. Un detalle práctico: del certificado, la copia es para el usuario y el original para la distribuidora. Sin ese circuito completo, la instalación no puede recibir gas legalmente, aunque esté perfectamente montada. El papel y la prueba son los que abren la llave.</a:t>
+            </a:r>
+          </a:p>
+        </p:txBody>
+      </p:sp>
+      <p:sp>
+        <p:nvSpPr>
+          <p:cNvPr id="4" name="Slide Number Placeholder 3"/>
+          <p:cNvSpPr>
+            <a:spLocks noGrp="1"/>
+          </p:cNvSpPr>
+          <p:nvPr>
+            <p:ph type="sldNum" idx="5" sz="quarter"/>
+          </p:nvPr>
+        </p:nvSpPr>
+        <p:spPr/>
+      </p:sp>
+    </p:spTree>
+  </p:cSld>
+  <p:clrMapOvr>
+    <a:masterClrMapping/>
+  </p:clrMapOvr>
+</p:notes>
+</file>
+
+<file path=ppt/notesSlides/notesSlide24.xml><?xml version="1.0" encoding="utf-8"?>
+<p:notes xmlns:a="http://schemas.openxmlformats.org/drawingml/2006/main" xmlns:p="http://schemas.openxmlformats.org/presentationml/2006/main" xmlns:r="http://schemas.openxmlformats.org/officeDocument/2006/relationships">
+  <p:cSld>
+    <p:spTree>
+      <p:nvGrpSpPr>
+        <p:cNvPr id="1" name=""/>
+        <p:cNvGrpSpPr/>
+        <p:nvPr/>
+      </p:nvGrpSpPr>
+      <p:grpSpPr>
+        <a:xfrm>
+          <a:off x="0" y="0"/>
+          <a:ext cx="0" cy="0"/>
+          <a:chOff x="0" y="0"/>
+          <a:chExt cx="0" cy="0"/>
+        </a:xfrm>
+      </p:grpSpPr>
+      <p:sp>
+        <p:nvSpPr>
+          <p:cNvPr id="2" name="Slide Image Placeholder 1"/>
+          <p:cNvSpPr>
+            <a:spLocks noGrp="1"/>
+          </p:cNvSpPr>
+          <p:nvPr>
+            <p:ph type="sldImg" idx="2"/>
+          </p:nvPr>
+        </p:nvSpPr>
+        <p:spPr/>
+      </p:sp>
+      <p:sp>
+        <p:nvSpPr>
+          <p:cNvPr id="3" name="Notes Placeholder 2"/>
+          <p:cNvSpPr>
+            <a:spLocks noGrp="1"/>
+          </p:cNvSpPr>
+          <p:nvPr>
+            <p:ph type="body" idx="3" sz="quarter"/>
+          </p:nvPr>
+        </p:nvSpPr>
+        <p:spPr/>
+        <p:txBody>
+          <a:bodyPr/>
+          <a:lstStyle/>
+          <a:p>
+            <a:r>
+              <a:t>N1: Último empujón. ¿Cómo lo ato todo y cierro el tema?</a:t>
+            </a:r>
+          </a:p>
+          <a:p>
+            <a:r>
+              <a:t>N2: Reconstruyamos el hilo de los tres elementos que gobiernan el gas. Primero, dónde medir: las tomas de presión, colocadas a cada lado de los elementos importantes, para no trabajar a ciegas. Segundo, cómo regular: en gas natural, cuanta más presión de entrada, más seguridades, con el regulador más la máxima y la mínima; en GLP, dos etapas y la entrada de la receptora entre una décima y dos bar, con inversor y antirretorno en las bombonas. Y tercero, cómo cortar: la cadena de llaves de fuera hacia dentro, acometida, edificio, montante, usuario, contador, vivienda y aparato, cada una con su grado de accesibilidad, lo tuyo en grado uno y lo de la compañía en dos o tres.</a:t>
+            </a:r>
+          </a:p>
+          <a:p>
+            <a:r>
+              <a:t>N1: ¿Y cómo se pregunta y para qué me sirve de verdad?</a:t>
+            </a:r>
+          </a:p>
+          <a:p>
+            <a:r>
+              <a:t>N2: En el examen te clavan las cifras y las prohibiciones: los cinco centímetros cuadrados de ventilación, el cuatro coma ocho de frontera, los veinticinco metros y los cuatro metros de la llave de edificio, y los dos noes, vivienda no es aparato y regulador no es usuario. En la obra, esto es lo que más usarás: para diagnosticar por qué un aparato no rinde vas midiendo con las tomas de presión, y para cortar en una urgencia tienes que saber qué llave cerrar y dónde está. Con esto has cerrado la Parte cuatro entera: sabes dimensionar, sabes llevar el tubo y sabes medir, regular y cortar. Hoy eres mucho más gasista que al empezar el tema. Enhorabuena: ya piensas como un instalador.</a:t>
+            </a:r>
+          </a:p>
+        </p:txBody>
+      </p:sp>
+      <p:sp>
+        <p:nvSpPr>
+          <p:cNvPr id="4" name="Slide Number Placeholder 3"/>
+          <p:cNvSpPr>
+            <a:spLocks noGrp="1"/>
+          </p:cNvSpPr>
+          <p:nvPr>
+            <p:ph type="sldNum" idx="5" sz="quarter"/>
+          </p:nvPr>
+        </p:nvSpPr>
+        <p:spPr/>
+      </p:sp>
+    </p:spTree>
+  </p:cSld>
+  <p:clrMapOvr>
+    <a:masterClrMapping/>
+  </p:clrMapOvr>
+</p:notes>
+</file>
+
 <file path=ppt/notesSlides/notesSlide3.xml><?xml version="1.0" encoding="utf-8"?>
 <p:notes xmlns:a="http://schemas.openxmlformats.org/drawingml/2006/main" xmlns:p="http://schemas.openxmlformats.org/presentationml/2006/main" xmlns:r="http://schemas.openxmlformats.org/officeDocument/2006/relationships">
   <p:cSld>
@@ -1570,12 +2026,12 @@
           <a:lstStyle/>
           <a:p>
             <a:r>
-              <a:t>N1: ¿Dónde se coloca un conjunto de regulación de presión alta?</a:t>
-            </a:r>
-          </a:p>
-          <a:p>
-            <a:r>
-              <a:t>N2: Los conjuntos que trabajan entre cuatro décimas de bar y cinco bar tienen que ir en un sitio accesible desde zona común, lo que se llama grado de accesibilidad dos, y siempre con salida al exterior. En concreto, en armarios adosados o empotrados en paredes exteriores, en nichos que tengan al menos una pared que dé a la calle, en la centralización de contadores o en salas de máquinas. La razón de que dé al exterior es clara: si el conjunto tiene una fuga o su válvula de alivio suelta gas, que se vaya fuera y no se acumule dentro. Y una cifra que cae fijo: en los armarios y nichos hace falta una ventilación directa al exterior de al menos cinco centímetros cuadrados, y vale incluso la propia rendija entre la puerta y el armario si mide lo suficiente. Grábate el cinco: cinco centímetros cuadrados de ventilación.</a:t>
+              <a:t>N1: En gas natural, cuanta más presión de entrada, más seguridades. En el tramo más alto, de más de ciento cincuenta milibares hasta cinco bar, ¿qué te pide la norma?</a:t>
+            </a:r>
+          </a:p>
+          <a:p>
+            <a:r>
+              <a:t>N2: Piensa en la escalera de seguridad: arriba del todo se exige el paquete completo. ¿Cuántas seguridades caben además del regulador?</a:t>
             </a:r>
           </a:p>
         </p:txBody>
@@ -1645,12 +2101,12 @@
           <a:lstStyle/>
           <a:p>
             <a:r>
-              <a:t>N1: ¿Y los reguladores pequeños de una vivienda?</a:t>
-            </a:r>
-          </a:p>
-          <a:p>
-            <a:r>
-              <a:t>N2: Aquí hay dos cosas que memorizar. La primera, una frontera: un regulador de hasta cuatro coma ocho metros cúbicos por hora de aire es un regulador de a pie, no se considera conjunto de regulación, y se pincha directo a la entrada del contador o en línea. Por encima de ese caudal, si el regulador no trae seguridad por mínima incorporada, se la tienes que poner tú. La segunda cosa es la ventilación del regulador con válvula de alivio, la uve a ese, cuando va instalado por dentro. Necesita una ventilación permanente con el exterior de cinco centímetros cuadrados, y aquí está el truco de examen: la rejilla se pone arriba si el gas es más ligero que el aire, como el gas natural que sube, y abajo si el gas es más pesado, como el butano o el propano que bajan. Es de lógica: la rejilla se coloca por donde tiende a irse el gas. Otra vez el cinco, y el cuatro coma ocho como frontera.</a:t>
+              <a:t>N1: ¿Por qué las dos seguridades?</a:t>
+            </a:r>
+          </a:p>
+          <a:p>
+            <a:r>
+              <a:t>N2: Porque en el tramo más alto de presión una avería hace más daño, puede reventar membranas y estropear aparatos, así que se exige el paquete completo: regulador más seguridad por máxima presión más seguridad por mínima. El truco para no fallar: es la única banda que lleva la seguridad por máxima; en el tramo medio, de cincuenta a ciento cincuenta, ya solo regulador más mínima, y por debajo de cincuenta, regulador si hace falta y mínima solo si pasa de veinticinco.</a:t>
             </a:r>
           </a:p>
         </p:txBody>
@@ -1720,12 +2176,12 @@
           <a:lstStyle/>
           <a:p>
             <a:r>
-              <a:t>N1: ¿Y el gas de bombona o de depósito, el GLP?</a:t>
-            </a:r>
-          </a:p>
-          <a:p>
-            <a:r>
-              <a:t>N2: El GLP, que es la tercera familia, o sea butano y propano, sale del depósito o de la bombona a mucha presión, así que se baja en dos escalones. Primero una etapa que lo deja entre una décima y dos bar a la entrada de la instalación receptora; esa cifra, de cero coma uno a dos bar, es la clave que cae. Y luego una segunda etapa que lo baja hasta la presión que necesita el aparato. Esa primera reducción se hace con dos reguladores en serie o con uno que lleve seguridad de alta. Si el suministro viene de una batería de bombonas, hay un inversor automático que cambia solo del grupo de bombonas vacío al lleno, para que no te quedes sin gas. Y con dos bombonas trabajando a la vez se ponen válvulas antirretorno, para que el gas no se trasvase de una bombona a la otra. Un apunte: si varias viviendas cuelgan del mismo depósito, cada una lleva su propia seguridad por mínima.</a:t>
+              <a:t>N1: ¿Dónde se coloca un conjunto de regulación de presión alta?</a:t>
+            </a:r>
+          </a:p>
+          <a:p>
+            <a:r>
+              <a:t>N2: Los conjuntos que trabajan entre cuatro décimas de bar y cinco bar tienen que ir en un sitio accesible desde zona común, lo que se llama grado de accesibilidad dos, y siempre con salida al exterior. En concreto, en armarios adosados o empotrados en paredes exteriores, en nichos que tengan al menos una pared que dé a la calle, en la centralización de contadores o en salas de máquinas. La razón de que dé al exterior es clara: si el conjunto tiene una fuga o su válvula de alivio suelta gas, que se vaya fuera y no se acumule dentro. Y una cifra que cae fijo: en los armarios y nichos hace falta una ventilación directa al exterior de al menos cinco centímetros cuadrados, y vale incluso la propia rendija entre la puerta y el armario si mide lo suficiente. Grábate el cinco: cinco centímetros cuadrados de ventilación.</a:t>
             </a:r>
           </a:p>
         </p:txBody>
@@ -1795,12 +2251,12 @@
           <a:lstStyle/>
           <a:p>
             <a:r>
-              <a:t>N1: ¿Cómo me aprendo todas las llaves sin liarme?</a:t>
-            </a:r>
-          </a:p>
-          <a:p>
-            <a:r>
-              <a:t>N2: Visualizando el recorrido del gas y las llaves que se va encontrando por el camino, en orden. Entra por la llave de acometida, que es la de la calle y la pone la compañía. Luego, si la acometida es larga, la llave de edificio, a pie de fachada. Después, la de montante colectivo, si hay más de un montante. A continuación, la llave de usuario, que aísla tu vivienda del resto. Luego la llave de contador. Después la llave de vivienda, que es la tuya, dentro de casa. Y al final, la llave de conexión de cada aparato, una por cada caldera, calentador o cocina. Si te aprendes el recorrido de fuera hacia dentro, colocas cada llave en su sitio sin fallar, porque cada una va donde el gas la encuentra. Vamos a verlas una a una.</a:t>
+              <a:t>N1: ¿Y los reguladores pequeños de una vivienda?</a:t>
+            </a:r>
+          </a:p>
+          <a:p>
+            <a:r>
+              <a:t>N2: Aquí hay dos cosas que memorizar. La primera, una frontera: un regulador de hasta cuatro coma ocho metros cúbicos por hora de aire es un regulador de a pie, no se considera conjunto de regulación, y se pincha directo a la entrada del contador o en línea. Por encima de ese caudal, si el regulador no trae seguridad por mínima incorporada, se la tienes que poner tú. La segunda cosa es la ventilación del regulador con válvula de alivio, la uve a ese, cuando va instalado por dentro. Necesita una ventilación permanente con el exterior de cinco centímetros cuadrados, y aquí está el truco de examen: la rejilla se pone arriba si el gas es más ligero que el aire, como el gas natural que sube, y abajo si el gas es más pesado, como el butano o el propano que bajan. Es de lógica: la rejilla se coloca por donde tiende a irse el gas. Otra vez el cinco, y el cuatro coma ocho como frontera.</a:t>
             </a:r>
           </a:p>
         </p:txBody>
@@ -4886,7 +5342,7 @@
       </p:sp>
       <p:sp>
         <p:nvSpPr>
-          <p:cNvPr id="4" name="Rounded Rectangle 3"/>
+          <p:cNvPr id="4" name="Rectangle 3"/>
           <p:cNvSpPr/>
           <p:nvPr/>
         </p:nvSpPr>
@@ -4895,7 +5351,7 @@
             <a:off x="868680" y="2057400"/>
             <a:ext cx="1463040" cy="82296"/>
           </a:xfrm>
-          <a:prstGeom prst="roundRect">
+          <a:prstGeom prst="rect">
             <a:avLst/>
           </a:prstGeom>
           <a:solidFill>
@@ -5012,6 +5468,18 @@
   <p:clrMapOvr>
     <a:masterClrMapping/>
   </p:clrMapOvr>
+  <mc:AlternateContent xmlns:mc="http://schemas.openxmlformats.org/markup-compatibility/2006">
+    <mc:Choice xmlns:p14="http://schemas.microsoft.com/office/powerpoint/2010/main" Requires="p14">
+      <p:transition spd="med" p14:dur="700">
+        <p14:cube dir="l"/>
+      </p:transition>
+    </mc:Choice>
+    <mc:Fallback>
+      <p:transition spd="med">
+        <p:push dir="l"/>
+      </p:transition>
+    </mc:Fallback>
+  </mc:AlternateContent>
 </p:sld>
 </file>
 
@@ -5099,7 +5567,7 @@
                 </a:solidFill>
                 <a:latin typeface="Montserrat"/>
               </a:rPr>
-              <a:t>010 / 018</a:t>
+              <a:t>010 / 024</a:t>
             </a:r>
           </a:p>
         </p:txBody>
@@ -5167,7 +5635,7 @@
                 </a:solidFill>
                 <a:latin typeface="Montserrat"/>
               </a:rPr>
-              <a:t>APARTADOS 7.1 Y 7.2</a:t>
+              <a:t>APARTADO 6.2 · GLP</a:t>
             </a:r>
           </a:p>
         </p:txBody>
@@ -5201,14 +5669,14 @@
                 </a:solidFill>
                 <a:latin typeface="Montserrat"/>
               </a:rPr>
-              <a:t>Acometida y edificio: 25 y 4</a:t>
-            </a:r>
-          </a:p>
-        </p:txBody>
-      </p:sp>
-      <p:sp>
-        <p:nvSpPr>
-          <p:cNvPr id="7" name="Rounded Rectangle 6"/>
+              <a:t>El GLP baja en dos escalones</a:t>
+            </a:r>
+          </a:p>
+        </p:txBody>
+      </p:sp>
+      <p:sp>
+        <p:nvSpPr>
+          <p:cNvPr id="7" name="Rectangle 6"/>
           <p:cNvSpPr/>
           <p:nvPr/>
         </p:nvSpPr>
@@ -5217,7 +5685,7 @@
             <a:off x="868680" y="1627632"/>
             <a:ext cx="2011680" cy="73152"/>
           </a:xfrm>
-          <a:prstGeom prst="roundRect">
+          <a:prstGeom prst="rect">
             <a:avLst/>
           </a:prstGeom>
           <a:solidFill>
@@ -5259,7 +5727,7 @@
         <p:spPr>
           <a:xfrm>
             <a:off x="822960" y="1965960"/>
-            <a:ext cx="4983480" cy="4206240"/>
+            <a:ext cx="5029200" cy="4206240"/>
           </a:xfrm>
           <a:prstGeom prst="rect">
             <a:avLst/>
@@ -5293,7 +5761,7 @@
                 </a:solidFill>
                 <a:latin typeface="Montserrat"/>
               </a:rPr>
-              <a:t>Acometida: siempre, la pone la distribuidora</a:t>
+              <a:t>Entrada de la receptora: entre 0,1 y 2 bar</a:t>
             </a:r>
           </a:p>
           <a:p>
@@ -5318,7 +5786,7 @@
                 </a:solidFill>
                 <a:latin typeface="Montserrat"/>
               </a:rPr>
-              <a:t>Edificio: solo si la acometida es larga</a:t>
+              <a:t>Inversor automático en baterías de envases</a:t>
             </a:r>
           </a:p>
           <a:p>
@@ -5343,21 +5811,21 @@
                 </a:solidFill>
                 <a:latin typeface="Montserrat"/>
               </a:rPr>
-              <a:t>25 m si va vista o 4 m si va enterrada</a:t>
-            </a:r>
-          </a:p>
-        </p:txBody>
-      </p:sp>
-      <p:sp>
-        <p:nvSpPr>
-          <p:cNvPr id="9" name="imgph" descr="IMGQ:gas service valve on street pavement"/>
+              <a:t>Válvulas antirretorno entre bombonas</a:t>
+            </a:r>
+          </a:p>
+        </p:txBody>
+      </p:sp>
+      <p:sp>
+        <p:nvSpPr>
+          <p:cNvPr id="9" name="imgph" descr="IMGQ:propane gas cylinder with regulator"/>
           <p:cNvSpPr/>
           <p:nvPr/>
         </p:nvSpPr>
         <p:spPr>
           <a:xfrm>
-            <a:off x="5806440" y="1051560"/>
-            <a:ext cx="5298947" cy="4629150"/>
+            <a:off x="6080760" y="1965960"/>
+            <a:ext cx="5303520" cy="4572000"/>
           </a:xfrm>
           <a:prstGeom prst="roundRect">
             <a:avLst/>
@@ -5402,8 +5870,8 @@
         </p:nvSpPr>
         <p:spPr>
           <a:xfrm>
-            <a:off x="6080760" y="2726055"/>
-            <a:ext cx="4750307" cy="1280160"/>
+            <a:off x="6355080" y="3611880"/>
+            <a:ext cx="4754880" cy="1280160"/>
           </a:xfrm>
           <a:prstGeom prst="rect">
             <a:avLst/>
@@ -5424,7 +5892,7 @@
                 </a:solidFill>
                 <a:latin typeface="Montserrat"/>
               </a:rPr>
-              <a:t>IMAGEN REALISTA</a:t>
+              <a:t>IMAGEN</a:t>
             </a:r>
           </a:p>
           <a:p>
@@ -5436,7 +5904,7 @@
                 </a:solidFill>
                 <a:latin typeface="Montserrat"/>
               </a:rPr>
-              <a:t>gas service valve on street pavement</a:t>
+              <a:t>propane gas cylinder with regulator</a:t>
             </a:r>
           </a:p>
         </p:txBody>
@@ -5446,6 +5914,18 @@
   <p:clrMapOvr>
     <a:masterClrMapping/>
   </p:clrMapOvr>
+  <mc:AlternateContent xmlns:mc="http://schemas.openxmlformats.org/markup-compatibility/2006">
+    <mc:Choice xmlns:p14="http://schemas.microsoft.com/office/powerpoint/2010/main" Requires="p14">
+      <p:transition spd="med" p14:dur="700">
+        <p14:cube dir="r"/>
+      </p:transition>
+    </mc:Choice>
+    <mc:Fallback>
+      <p:transition spd="med">
+        <p:push dir="r"/>
+      </p:transition>
+    </mc:Fallback>
+  </mc:AlternateContent>
 </p:sld>
 </file>
 
@@ -5533,7 +6013,7 @@
                 </a:solidFill>
                 <a:latin typeface="Montserrat"/>
               </a:rPr>
-              <a:t>011 / 018</a:t>
+              <a:t>011 / 024</a:t>
             </a:r>
           </a:p>
         </p:txBody>
@@ -5601,7 +6081,7 @@
                 </a:solidFill>
                 <a:latin typeface="Montserrat"/>
               </a:rPr>
-              <a:t>APARTADO 7.3 · MONTANTE COLECTIVO</a:t>
+              <a:t>APARTADO 7 · DISPOSITIVOS DE CORTE</a:t>
             </a:r>
           </a:p>
         </p:txBody>
@@ -5635,14 +6115,14 @@
                 </a:solidFill>
                 <a:latin typeface="Montserrat"/>
               </a:rPr>
-              <a:t>La llave para poder crecer</a:t>
-            </a:r>
-          </a:p>
-        </p:txBody>
-      </p:sp>
-      <p:sp>
-        <p:nvSpPr>
-          <p:cNvPr id="7" name="Rounded Rectangle 6"/>
+              <a:t>La cadena de llaves, en orden</a:t>
+            </a:r>
+          </a:p>
+        </p:txBody>
+      </p:sp>
+      <p:sp>
+        <p:nvSpPr>
+          <p:cNvPr id="7" name="Rectangle 6"/>
           <p:cNvSpPr/>
           <p:nvPr/>
         </p:nvSpPr>
@@ -5651,7 +6131,7 @@
             <a:off x="868680" y="1627632"/>
             <a:ext cx="2011680" cy="73152"/>
           </a:xfrm>
-          <a:prstGeom prst="roundRect">
+          <a:prstGeom prst="rect">
             <a:avLst/>
           </a:prstGeom>
           <a:solidFill>
@@ -5692,8 +6172,8 @@
         </p:nvSpPr>
         <p:spPr>
           <a:xfrm>
-            <a:off x="822960" y="1965960"/>
-            <a:ext cx="4983480" cy="4206240"/>
+            <a:off x="6355080" y="1965960"/>
+            <a:ext cx="5029200" cy="4206240"/>
           </a:xfrm>
           <a:prstGeom prst="rect">
             <a:avLst/>
@@ -5727,7 +6207,7 @@
                 </a:solidFill>
                 <a:latin typeface="Montserrat"/>
               </a:rPr>
-              <a:t>Una si hay más de un montante</a:t>
+              <a:t>Acometida → edificio → montante</a:t>
             </a:r>
           </a:p>
           <a:p>
@@ -5752,7 +6232,7 @@
                 </a:solidFill>
                 <a:latin typeface="Montserrat"/>
               </a:rPr>
-              <a:t>Adicional: cerrada, bloqueada y precintada</a:t>
+              <a:t>Usuario → contador → vivienda</a:t>
             </a:r>
           </a:p>
           <a:p>
@@ -5777,21 +6257,21 @@
                 </a:solidFill>
                 <a:latin typeface="Montserrat"/>
               </a:rPr>
-              <a:t>Toma Peterson en tramos aéreos</a:t>
-            </a:r>
-          </a:p>
-        </p:txBody>
-      </p:sp>
-      <p:sp>
-        <p:nvSpPr>
-          <p:cNvPr id="9" name="imgph" descr="IMGQ:vertical gas riser pipe in stairwell"/>
+              <a:t>Y por último, la de cada aparato</a:t>
+            </a:r>
+          </a:p>
+        </p:txBody>
+      </p:sp>
+      <p:sp>
+        <p:nvSpPr>
+          <p:cNvPr id="9" name="imgph" descr="IMGQ:gas shut off valve with yellow handle"/>
           <p:cNvSpPr/>
           <p:nvPr/>
         </p:nvSpPr>
         <p:spPr>
           <a:xfrm>
-            <a:off x="5806440" y="1051560"/>
-            <a:ext cx="5298947" cy="4629150"/>
+            <a:off x="822960" y="1965960"/>
+            <a:ext cx="5303520" cy="4572000"/>
           </a:xfrm>
           <a:prstGeom prst="roundRect">
             <a:avLst/>
@@ -5836,8 +6316,8 @@
         </p:nvSpPr>
         <p:spPr>
           <a:xfrm>
-            <a:off x="6080760" y="2726055"/>
-            <a:ext cx="4750307" cy="1280160"/>
+            <a:off x="1097280" y="3611880"/>
+            <a:ext cx="4754880" cy="1280160"/>
           </a:xfrm>
           <a:prstGeom prst="rect">
             <a:avLst/>
@@ -5858,7 +6338,7 @@
                 </a:solidFill>
                 <a:latin typeface="Montserrat"/>
               </a:rPr>
-              <a:t>IMAGEN REALISTA</a:t>
+              <a:t>IMAGEN</a:t>
             </a:r>
           </a:p>
           <a:p>
@@ -5870,7 +6350,7 @@
                 </a:solidFill>
                 <a:latin typeface="Montserrat"/>
               </a:rPr>
-              <a:t>vertical gas riser pipe in stairwell</a:t>
+              <a:t>gas shut off valve with yellow handle</a:t>
             </a:r>
           </a:p>
         </p:txBody>
@@ -5880,6 +6360,18 @@
   <p:clrMapOvr>
     <a:masterClrMapping/>
   </p:clrMapOvr>
+  <mc:AlternateContent xmlns:mc="http://schemas.openxmlformats.org/markup-compatibility/2006">
+    <mc:Choice xmlns:p14="http://schemas.microsoft.com/office/powerpoint/2010/main" Requires="p14">
+      <p:transition spd="med" p14:dur="700">
+        <p14:cube dir="l"/>
+      </p:transition>
+    </mc:Choice>
+    <mc:Fallback>
+      <p:transition spd="med">
+        <p:push dir="l"/>
+      </p:transition>
+    </mc:Fallback>
+  </mc:AlternateContent>
 </p:sld>
 </file>
 
@@ -5967,7 +6459,7 @@
                 </a:solidFill>
                 <a:latin typeface="Montserrat"/>
               </a:rPr>
-              <a:t>012 / 018</a:t>
+              <a:t>012 / 024</a:t>
             </a:r>
           </a:p>
         </p:txBody>
@@ -6035,7 +6527,7 @@
                 </a:solidFill>
                 <a:latin typeface="Montserrat"/>
               </a:rPr>
-              <a:t>APARTADOS 7.4 Y 7.5.1</a:t>
+              <a:t>APARTADOS 7.1 Y 7.2</a:t>
             </a:r>
           </a:p>
         </p:txBody>
@@ -6069,14 +6561,14 @@
                 </a:solidFill>
                 <a:latin typeface="Montserrat"/>
               </a:rPr>
-              <a:t>Usuario y contador: aislar tu piso</a:t>
-            </a:r>
-          </a:p>
-        </p:txBody>
-      </p:sp>
-      <p:sp>
-        <p:nvSpPr>
-          <p:cNvPr id="7" name="Rounded Rectangle 6"/>
+              <a:t>Acometida y edificio: 25 y 4</a:t>
+            </a:r>
+          </a:p>
+        </p:txBody>
+      </p:sp>
+      <p:sp>
+        <p:nvSpPr>
+          <p:cNvPr id="7" name="Rectangle 6"/>
           <p:cNvSpPr/>
           <p:nvPr/>
         </p:nvSpPr>
@@ -6085,7 +6577,7 @@
             <a:off x="868680" y="1627632"/>
             <a:ext cx="2011680" cy="73152"/>
           </a:xfrm>
-          <a:prstGeom prst="roundRect">
+          <a:prstGeom prst="rect">
             <a:avLst/>
           </a:prstGeom>
           <a:solidFill>
@@ -6127,7 +6619,7 @@
         <p:spPr>
           <a:xfrm>
             <a:off x="822960" y="1965960"/>
-            <a:ext cx="4983480" cy="4206240"/>
+            <a:ext cx="5029200" cy="4206240"/>
           </a:xfrm>
           <a:prstGeom prst="rect">
             <a:avLst/>
@@ -6161,7 +6653,7 @@
                 </a:solidFill>
                 <a:latin typeface="Montserrat"/>
               </a:rPr>
-              <a:t>Usuario: aísla cada vivienda, grado 2</a:t>
+              <a:t>Acometida: siempre, la pone la distribuidora</a:t>
             </a:r>
           </a:p>
           <a:p>
@@ -6186,7 +6678,7 @@
                 </a:solidFill>
                 <a:latin typeface="Montserrat"/>
               </a:rPr>
-              <a:t>Contador: siempre, junto a su entrada</a:t>
+              <a:t>Edificio: solo si la acometida es larga</a:t>
             </a:r>
           </a:p>
           <a:p>
@@ -6211,21 +6703,21 @@
                 </a:solidFill>
                 <a:latin typeface="Montserrat"/>
               </a:rPr>
-              <a:t>El contador puede hacer de usuario</a:t>
-            </a:r>
-          </a:p>
-        </p:txBody>
-      </p:sp>
-      <p:sp>
-        <p:nvSpPr>
-          <p:cNvPr id="9" name="imgph" descr="IMGQ:gas meter with shut off valve"/>
+              <a:t>25 m si va vista o 4 m si va enterrada</a:t>
+            </a:r>
+          </a:p>
+        </p:txBody>
+      </p:sp>
+      <p:sp>
+        <p:nvSpPr>
+          <p:cNvPr id="9" name="imgph" descr="IMGQ:gas service valve on street pavement"/>
           <p:cNvSpPr/>
           <p:nvPr/>
         </p:nvSpPr>
         <p:spPr>
           <a:xfrm>
-            <a:off x="5806440" y="1051560"/>
-            <a:ext cx="5298947" cy="4629150"/>
+            <a:off x="6080760" y="1965960"/>
+            <a:ext cx="5303520" cy="4572000"/>
           </a:xfrm>
           <a:prstGeom prst="roundRect">
             <a:avLst/>
@@ -6270,8 +6762,8 @@
         </p:nvSpPr>
         <p:spPr>
           <a:xfrm>
-            <a:off x="6080760" y="2726055"/>
-            <a:ext cx="4750307" cy="1280160"/>
+            <a:off x="6355080" y="3611880"/>
+            <a:ext cx="4754880" cy="1280160"/>
           </a:xfrm>
           <a:prstGeom prst="rect">
             <a:avLst/>
@@ -6292,7 +6784,7 @@
                 </a:solidFill>
                 <a:latin typeface="Montserrat"/>
               </a:rPr>
-              <a:t>IMAGEN REALISTA</a:t>
+              <a:t>IMAGEN</a:t>
             </a:r>
           </a:p>
           <a:p>
@@ -6304,7 +6796,7 @@
                 </a:solidFill>
                 <a:latin typeface="Montserrat"/>
               </a:rPr>
-              <a:t>gas meter with shut off valve</a:t>
+              <a:t>gas service valve on street pavement</a:t>
             </a:r>
           </a:p>
         </p:txBody>
@@ -6314,6 +6806,18 @@
   <p:clrMapOvr>
     <a:masterClrMapping/>
   </p:clrMapOvr>
+  <mc:AlternateContent xmlns:mc="http://schemas.openxmlformats.org/markup-compatibility/2006">
+    <mc:Choice xmlns:p14="http://schemas.microsoft.com/office/powerpoint/2010/main" Requires="p14">
+      <p:transition spd="med" p14:dur="700">
+        <p14:cube dir="r"/>
+      </p:transition>
+    </mc:Choice>
+    <mc:Fallback>
+      <p:transition spd="med">
+        <p:push dir="r"/>
+      </p:transition>
+    </mc:Fallback>
+  </mc:AlternateContent>
 </p:sld>
 </file>
 
@@ -6401,7 +6905,7 @@
                 </a:solidFill>
                 <a:latin typeface="Montserrat"/>
               </a:rPr>
-              <a:t>013 / 018</a:t>
+              <a:t>013 / 024</a:t>
             </a:r>
           </a:p>
         </p:txBody>
@@ -6442,84 +6946,16 @@
       </p:sp>
       <p:sp>
         <p:nvSpPr>
-          <p:cNvPr id="5" name="TextBox 4"/>
-          <p:cNvSpPr txBox="1"/>
-          <p:nvPr/>
-        </p:nvSpPr>
-        <p:spPr>
-          <a:xfrm>
-            <a:off x="822960" y="457200"/>
-            <a:ext cx="10058400" cy="365760"/>
-          </a:xfrm>
-          <a:prstGeom prst="rect">
-            <a:avLst/>
-          </a:prstGeom>
-          <a:noFill/>
-        </p:spPr>
-        <p:txBody>
-          <a:bodyPr wrap="square">
-            <a:spAutoFit/>
-          </a:bodyPr>
-          <a:lstStyle/>
-          <a:p>
-            <a:r>
-              <a:rPr sz="1300" b="1" i="0">
-                <a:solidFill>
-                  <a:srgbClr val="E8801A"/>
-                </a:solidFill>
-                <a:latin typeface="Montserrat"/>
-              </a:rPr>
-              <a:t>APARTADO 7.5.2 · LLAVE DE VIVIENDA</a:t>
-            </a:r>
-          </a:p>
-        </p:txBody>
-      </p:sp>
-      <p:sp>
-        <p:nvSpPr>
-          <p:cNvPr id="6" name="TextBox 5"/>
-          <p:cNvSpPr txBox="1"/>
-          <p:nvPr/>
-        </p:nvSpPr>
-        <p:spPr>
-          <a:xfrm>
-            <a:off x="822960" y="868680"/>
-            <a:ext cx="10515600" cy="914400"/>
-          </a:xfrm>
-          <a:prstGeom prst="rect">
-            <a:avLst/>
-          </a:prstGeom>
-          <a:noFill/>
-        </p:spPr>
-        <p:txBody>
-          <a:bodyPr wrap="square">
-            <a:spAutoFit/>
-          </a:bodyPr>
-          <a:lstStyle/>
-          <a:p>
-            <a:r>
-              <a:rPr sz="2800" b="1" i="0">
-                <a:solidFill>
-                  <a:srgbClr val="1E2761"/>
-                </a:solidFill>
-                <a:latin typeface="Montserrat"/>
-              </a:rPr>
-              <a:t>La llave de vivienda es la tuya</a:t>
-            </a:r>
-          </a:p>
-        </p:txBody>
-      </p:sp>
-      <p:sp>
-        <p:nvSpPr>
-          <p:cNvPr id="7" name="Rounded Rectangle 6"/>
+          <p:cNvPr id="5" name="Rectangle 4"/>
           <p:cNvSpPr/>
           <p:nvPr/>
         </p:nvSpPr>
         <p:spPr>
           <a:xfrm>
-            <a:off x="868680" y="1627632"/>
-            <a:ext cx="2011680" cy="73152"/>
-          </a:xfrm>
-          <a:prstGeom prst="roundRect">
+            <a:off x="0" y="0"/>
+            <a:ext cx="12191695" cy="1143000"/>
+          </a:xfrm>
+          <a:prstGeom prst="rect">
             <a:avLst/>
           </a:prstGeom>
           <a:solidFill>
@@ -6554,14 +6990,14 @@
       </p:sp>
       <p:sp>
         <p:nvSpPr>
-          <p:cNvPr id="8" name="TextBox 7"/>
+          <p:cNvPr id="6" name="TextBox 5"/>
           <p:cNvSpPr txBox="1"/>
           <p:nvPr/>
         </p:nvSpPr>
         <p:spPr>
           <a:xfrm>
-            <a:off x="822960" y="1965960"/>
-            <a:ext cx="4983480" cy="4206240"/>
+            <a:off x="822960" y="274320"/>
+            <a:ext cx="10515600" cy="640080"/>
           </a:xfrm>
           <a:prstGeom prst="rect">
             <a:avLst/>
@@ -6574,92 +7010,62 @@
           </a:bodyPr>
           <a:lstStyle/>
           <a:p>
-            <a:pPr>
-              <a:spcAft>
-                <a:spcPts val="1100"/>
-              </a:spcAft>
-            </a:pPr>
-            <a:r>
-              <a:rPr sz="1600" b="1" i="0">
-                <a:solidFill>
-                  <a:srgbClr val="E8801A"/>
-                </a:solidFill>
-                <a:latin typeface="Montserrat"/>
-              </a:rPr>
-              <a:t>▸  </a:t>
-            </a:r>
-            <a:r>
-              <a:rPr sz="1600" b="0" i="0">
-                <a:solidFill>
-                  <a:srgbClr val="1B2330"/>
-                </a:solidFill>
-                <a:latin typeface="Montserrat"/>
-              </a:rPr>
-              <a:t>Siempre, con accesibilidad de grado 1</a:t>
-            </a:r>
-          </a:p>
-          <a:p>
-            <a:pPr>
-              <a:spcAft>
-                <a:spcPts val="1100"/>
-              </a:spcAft>
-            </a:pPr>
-            <a:r>
-              <a:rPr sz="1600" b="1" i="0">
-                <a:solidFill>
-                  <a:srgbClr val="E8801A"/>
-                </a:solidFill>
-                <a:latin typeface="Montserrat"/>
-              </a:rPr>
-              <a:t>▸  </a:t>
-            </a:r>
-            <a:r>
-              <a:rPr sz="1600" b="0" i="0">
-                <a:solidFill>
-                  <a:srgbClr val="1B2330"/>
-                </a:solidFill>
-                <a:latin typeface="Montserrat"/>
-              </a:rPr>
-              <a:t>Fuera de la vivienda pero accesible dentro</a:t>
-            </a:r>
-          </a:p>
-          <a:p>
-            <a:pPr>
-              <a:spcAft>
-                <a:spcPts val="1100"/>
-              </a:spcAft>
-            </a:pPr>
-            <a:r>
-              <a:rPr sz="1600" b="1" i="0">
-                <a:solidFill>
-                  <a:srgbClr val="E8801A"/>
-                </a:solidFill>
-                <a:latin typeface="Montserrat"/>
-              </a:rPr>
-              <a:t>▸  </a:t>
-            </a:r>
-            <a:r>
-              <a:rPr sz="1600" b="0" i="0">
-                <a:solidFill>
-                  <a:srgbClr val="1B2330"/>
-                </a:solidFill>
-                <a:latin typeface="Montserrat"/>
-              </a:rPr>
-              <a:t>Corta el gas de toda la casa</a:t>
-            </a:r>
-          </a:p>
-        </p:txBody>
-      </p:sp>
-      <p:sp>
-        <p:nvSpPr>
-          <p:cNvPr id="9" name="imgph" descr="IMGQ:gas valve inside home hallway"/>
+            <a:r>
+              <a:rPr sz="2400" b="1" i="0">
+                <a:solidFill>
+                  <a:srgbClr val="FFFFFF"/>
+                </a:solidFill>
+                <a:latin typeface="Montserrat"/>
+              </a:rPr>
+              <a:t>⚡  PREGUNTA RÁPIDA</a:t>
+            </a:r>
+          </a:p>
+        </p:txBody>
+      </p:sp>
+      <p:sp>
+        <p:nvSpPr>
+          <p:cNvPr id="7" name="TextBox 6"/>
+          <p:cNvSpPr txBox="1"/>
+          <p:nvPr/>
+        </p:nvSpPr>
+        <p:spPr>
+          <a:xfrm>
+            <a:off x="822960" y="1508760"/>
+            <a:ext cx="10515600" cy="1371600"/>
+          </a:xfrm>
+          <a:prstGeom prst="rect">
+            <a:avLst/>
+          </a:prstGeom>
+          <a:noFill/>
+        </p:spPr>
+        <p:txBody>
+          <a:bodyPr wrap="square">
+            <a:spAutoFit/>
+          </a:bodyPr>
+          <a:lstStyle/>
+          <a:p>
+            <a:r>
+              <a:rPr sz="2400" b="1" i="0">
+                <a:solidFill>
+                  <a:srgbClr val="1E2761"/>
+                </a:solidFill>
+                <a:latin typeface="Montserrat"/>
+              </a:rPr>
+              <a:t>¿Cuándo es obligatorio instalar llave de edificio por longitud de la acometida interior?</a:t>
+            </a:r>
+          </a:p>
+        </p:txBody>
+      </p:sp>
+      <p:sp>
+        <p:nvSpPr>
+          <p:cNvPr id="8" name="Rounded Rectangle 7"/>
           <p:cNvSpPr/>
           <p:nvPr/>
         </p:nvSpPr>
         <p:spPr>
           <a:xfrm>
-            <a:off x="5806440" y="1051560"/>
-            <a:ext cx="5298947" cy="4629150"/>
+            <a:off x="822960" y="3291840"/>
+            <a:ext cx="4983480" cy="1143000"/>
           </a:xfrm>
           <a:prstGeom prst="roundRect">
             <a:avLst/>
@@ -6698,14 +7104,58 @@
       </p:sp>
       <p:sp>
         <p:nvSpPr>
+          <p:cNvPr id="9" name="Rectangle 8"/>
+          <p:cNvSpPr/>
+          <p:nvPr/>
+        </p:nvSpPr>
+        <p:spPr>
+          <a:xfrm>
+            <a:off x="822960" y="3291840"/>
+            <a:ext cx="640080" cy="1143000"/>
+          </a:xfrm>
+          <a:prstGeom prst="rect">
+            <a:avLst/>
+          </a:prstGeom>
+          <a:solidFill>
+            <a:srgbClr val="1E2761"/>
+          </a:solidFill>
+          <a:ln>
+            <a:noFill/>
+          </a:ln>
+          <a:effectLst/>
+        </p:spPr>
+        <p:style>
+          <a:lnRef idx="1">
+            <a:schemeClr val="accent1"/>
+          </a:lnRef>
+          <a:fillRef idx="3">
+            <a:schemeClr val="accent1"/>
+          </a:fillRef>
+          <a:effectRef idx="2">
+            <a:schemeClr val="accent1"/>
+          </a:effectRef>
+          <a:fontRef idx="minor">
+            <a:schemeClr val="lt1"/>
+          </a:fontRef>
+        </p:style>
+        <p:txBody>
+          <a:bodyPr rtlCol="0" anchor="ctr"/>
+          <a:lstStyle/>
+          <a:p>
+            <a:pPr algn="ctr"/>
+          </a:p>
+        </p:txBody>
+      </p:sp>
+      <p:sp>
+        <p:nvSpPr>
           <p:cNvPr id="10" name="TextBox 9"/>
           <p:cNvSpPr txBox="1"/>
           <p:nvPr/>
         </p:nvSpPr>
         <p:spPr>
           <a:xfrm>
-            <a:off x="6080760" y="2726055"/>
-            <a:ext cx="4750307" cy="1280160"/>
+            <a:off x="822960" y="3611880"/>
+            <a:ext cx="640080" cy="548640"/>
           </a:xfrm>
           <a:prstGeom prst="rect">
             <a:avLst/>
@@ -6720,25 +7170,524 @@
           <a:p>
             <a:pPr algn="ctr"/>
             <a:r>
-              <a:rPr sz="1400" b="1" i="0">
-                <a:solidFill>
-                  <a:srgbClr val="64748B"/>
-                </a:solidFill>
-                <a:latin typeface="Montserrat"/>
-              </a:rPr>
-              <a:t>IMAGEN REALISTA</a:t>
-            </a:r>
-          </a:p>
+              <a:rPr sz="2200" b="1" i="0">
+                <a:solidFill>
+                  <a:srgbClr val="FFFFFF"/>
+                </a:solidFill>
+                <a:latin typeface="Montserrat"/>
+              </a:rPr>
+              <a:t>A</a:t>
+            </a:r>
+          </a:p>
+        </p:txBody>
+      </p:sp>
+      <p:sp>
+        <p:nvSpPr>
+          <p:cNvPr id="11" name="TextBox 10"/>
+          <p:cNvSpPr txBox="1"/>
+          <p:nvPr/>
+        </p:nvSpPr>
+        <p:spPr>
+          <a:xfrm>
+            <a:off x="1600200" y="3474720"/>
+            <a:ext cx="4114800" cy="868680"/>
+          </a:xfrm>
+          <a:prstGeom prst="rect">
+            <a:avLst/>
+          </a:prstGeom>
+          <a:noFill/>
+        </p:spPr>
+        <p:txBody>
+          <a:bodyPr wrap="square">
+            <a:spAutoFit/>
+          </a:bodyPr>
+          <a:lstStyle/>
+          <a:p>
+            <a:r>
+              <a:rPr sz="1400" b="0" i="0">
+                <a:solidFill>
+                  <a:srgbClr val="1B2330"/>
+                </a:solidFill>
+                <a:latin typeface="Montserrat"/>
+              </a:rPr>
+              <a:t>Vista de 25 m o más, o enterrada de 4 m o más</a:t>
+            </a:r>
+          </a:p>
+        </p:txBody>
+      </p:sp>
+      <p:sp>
+        <p:nvSpPr>
+          <p:cNvPr id="12" name="Rounded Rectangle 11"/>
+          <p:cNvSpPr/>
+          <p:nvPr/>
+        </p:nvSpPr>
+        <p:spPr>
+          <a:xfrm>
+            <a:off x="6355080" y="3291840"/>
+            <a:ext cx="4983480" cy="1143000"/>
+          </a:xfrm>
+          <a:prstGeom prst="roundRect">
+            <a:avLst/>
+          </a:prstGeom>
+          <a:solidFill>
+            <a:srgbClr val="F3F6FB"/>
+          </a:solidFill>
+          <a:ln w="12700">
+            <a:solidFill>
+              <a:srgbClr val="C7D2E6"/>
+            </a:solidFill>
+          </a:ln>
+          <a:effectLst/>
+        </p:spPr>
+        <p:style>
+          <a:lnRef idx="1">
+            <a:schemeClr val="accent1"/>
+          </a:lnRef>
+          <a:fillRef idx="3">
+            <a:schemeClr val="accent1"/>
+          </a:fillRef>
+          <a:effectRef idx="2">
+            <a:schemeClr val="accent1"/>
+          </a:effectRef>
+          <a:fontRef idx="minor">
+            <a:schemeClr val="lt1"/>
+          </a:fontRef>
+        </p:style>
+        <p:txBody>
+          <a:bodyPr rtlCol="0" anchor="ctr"/>
+          <a:lstStyle/>
           <a:p>
             <a:pPr algn="ctr"/>
-            <a:r>
-              <a:rPr sz="1100" b="0" i="1">
-                <a:solidFill>
-                  <a:srgbClr val="64748B"/>
-                </a:solidFill>
-                <a:latin typeface="Montserrat"/>
-              </a:rPr>
-              <a:t>gas valve inside home hallway</a:t>
+          </a:p>
+        </p:txBody>
+      </p:sp>
+      <p:sp>
+        <p:nvSpPr>
+          <p:cNvPr id="13" name="Rectangle 12"/>
+          <p:cNvSpPr/>
+          <p:nvPr/>
+        </p:nvSpPr>
+        <p:spPr>
+          <a:xfrm>
+            <a:off x="6355080" y="3291840"/>
+            <a:ext cx="640080" cy="1143000"/>
+          </a:xfrm>
+          <a:prstGeom prst="rect">
+            <a:avLst/>
+          </a:prstGeom>
+          <a:solidFill>
+            <a:srgbClr val="1E2761"/>
+          </a:solidFill>
+          <a:ln>
+            <a:noFill/>
+          </a:ln>
+          <a:effectLst/>
+        </p:spPr>
+        <p:style>
+          <a:lnRef idx="1">
+            <a:schemeClr val="accent1"/>
+          </a:lnRef>
+          <a:fillRef idx="3">
+            <a:schemeClr val="accent1"/>
+          </a:fillRef>
+          <a:effectRef idx="2">
+            <a:schemeClr val="accent1"/>
+          </a:effectRef>
+          <a:fontRef idx="minor">
+            <a:schemeClr val="lt1"/>
+          </a:fontRef>
+        </p:style>
+        <p:txBody>
+          <a:bodyPr rtlCol="0" anchor="ctr"/>
+          <a:lstStyle/>
+          <a:p>
+            <a:pPr algn="ctr"/>
+          </a:p>
+        </p:txBody>
+      </p:sp>
+      <p:sp>
+        <p:nvSpPr>
+          <p:cNvPr id="14" name="TextBox 13"/>
+          <p:cNvSpPr txBox="1"/>
+          <p:nvPr/>
+        </p:nvSpPr>
+        <p:spPr>
+          <a:xfrm>
+            <a:off x="6355080" y="3611880"/>
+            <a:ext cx="640080" cy="548640"/>
+          </a:xfrm>
+          <a:prstGeom prst="rect">
+            <a:avLst/>
+          </a:prstGeom>
+          <a:noFill/>
+        </p:spPr>
+        <p:txBody>
+          <a:bodyPr wrap="square">
+            <a:spAutoFit/>
+          </a:bodyPr>
+          <a:lstStyle/>
+          <a:p>
+            <a:pPr algn="ctr"/>
+            <a:r>
+              <a:rPr sz="2200" b="1" i="0">
+                <a:solidFill>
+                  <a:srgbClr val="FFFFFF"/>
+                </a:solidFill>
+                <a:latin typeface="Montserrat"/>
+              </a:rPr>
+              <a:t>B</a:t>
+            </a:r>
+          </a:p>
+        </p:txBody>
+      </p:sp>
+      <p:sp>
+        <p:nvSpPr>
+          <p:cNvPr id="15" name="TextBox 14"/>
+          <p:cNvSpPr txBox="1"/>
+          <p:nvPr/>
+        </p:nvSpPr>
+        <p:spPr>
+          <a:xfrm>
+            <a:off x="7132320" y="3474720"/>
+            <a:ext cx="4114800" cy="868680"/>
+          </a:xfrm>
+          <a:prstGeom prst="rect">
+            <a:avLst/>
+          </a:prstGeom>
+          <a:noFill/>
+        </p:spPr>
+        <p:txBody>
+          <a:bodyPr wrap="square">
+            <a:spAutoFit/>
+          </a:bodyPr>
+          <a:lstStyle/>
+          <a:p>
+            <a:r>
+              <a:rPr sz="1400" b="0" i="0">
+                <a:solidFill>
+                  <a:srgbClr val="1B2330"/>
+                </a:solidFill>
+                <a:latin typeface="Montserrat"/>
+              </a:rPr>
+              <a:t>Vista de 4 m o más, o enterrada de 25 m o más</a:t>
+            </a:r>
+          </a:p>
+        </p:txBody>
+      </p:sp>
+      <p:sp>
+        <p:nvSpPr>
+          <p:cNvPr id="16" name="Rounded Rectangle 15"/>
+          <p:cNvSpPr/>
+          <p:nvPr/>
+        </p:nvSpPr>
+        <p:spPr>
+          <a:xfrm>
+            <a:off x="822960" y="4617720"/>
+            <a:ext cx="4983480" cy="1143000"/>
+          </a:xfrm>
+          <a:prstGeom prst="roundRect">
+            <a:avLst/>
+          </a:prstGeom>
+          <a:solidFill>
+            <a:srgbClr val="F3F6FB"/>
+          </a:solidFill>
+          <a:ln w="12700">
+            <a:solidFill>
+              <a:srgbClr val="C7D2E6"/>
+            </a:solidFill>
+          </a:ln>
+          <a:effectLst/>
+        </p:spPr>
+        <p:style>
+          <a:lnRef idx="1">
+            <a:schemeClr val="accent1"/>
+          </a:lnRef>
+          <a:fillRef idx="3">
+            <a:schemeClr val="accent1"/>
+          </a:fillRef>
+          <a:effectRef idx="2">
+            <a:schemeClr val="accent1"/>
+          </a:effectRef>
+          <a:fontRef idx="minor">
+            <a:schemeClr val="lt1"/>
+          </a:fontRef>
+        </p:style>
+        <p:txBody>
+          <a:bodyPr rtlCol="0" anchor="ctr"/>
+          <a:lstStyle/>
+          <a:p>
+            <a:pPr algn="ctr"/>
+          </a:p>
+        </p:txBody>
+      </p:sp>
+      <p:sp>
+        <p:nvSpPr>
+          <p:cNvPr id="17" name="Rectangle 16"/>
+          <p:cNvSpPr/>
+          <p:nvPr/>
+        </p:nvSpPr>
+        <p:spPr>
+          <a:xfrm>
+            <a:off x="822960" y="4617720"/>
+            <a:ext cx="640080" cy="1143000"/>
+          </a:xfrm>
+          <a:prstGeom prst="rect">
+            <a:avLst/>
+          </a:prstGeom>
+          <a:solidFill>
+            <a:srgbClr val="1E2761"/>
+          </a:solidFill>
+          <a:ln>
+            <a:noFill/>
+          </a:ln>
+          <a:effectLst/>
+        </p:spPr>
+        <p:style>
+          <a:lnRef idx="1">
+            <a:schemeClr val="accent1"/>
+          </a:lnRef>
+          <a:fillRef idx="3">
+            <a:schemeClr val="accent1"/>
+          </a:fillRef>
+          <a:effectRef idx="2">
+            <a:schemeClr val="accent1"/>
+          </a:effectRef>
+          <a:fontRef idx="minor">
+            <a:schemeClr val="lt1"/>
+          </a:fontRef>
+        </p:style>
+        <p:txBody>
+          <a:bodyPr rtlCol="0" anchor="ctr"/>
+          <a:lstStyle/>
+          <a:p>
+            <a:pPr algn="ctr"/>
+          </a:p>
+        </p:txBody>
+      </p:sp>
+      <p:sp>
+        <p:nvSpPr>
+          <p:cNvPr id="18" name="TextBox 17"/>
+          <p:cNvSpPr txBox="1"/>
+          <p:nvPr/>
+        </p:nvSpPr>
+        <p:spPr>
+          <a:xfrm>
+            <a:off x="822960" y="4937760"/>
+            <a:ext cx="640080" cy="548640"/>
+          </a:xfrm>
+          <a:prstGeom prst="rect">
+            <a:avLst/>
+          </a:prstGeom>
+          <a:noFill/>
+        </p:spPr>
+        <p:txBody>
+          <a:bodyPr wrap="square">
+            <a:spAutoFit/>
+          </a:bodyPr>
+          <a:lstStyle/>
+          <a:p>
+            <a:pPr algn="ctr"/>
+            <a:r>
+              <a:rPr sz="2200" b="1" i="0">
+                <a:solidFill>
+                  <a:srgbClr val="FFFFFF"/>
+                </a:solidFill>
+                <a:latin typeface="Montserrat"/>
+              </a:rPr>
+              <a:t>C</a:t>
+            </a:r>
+          </a:p>
+        </p:txBody>
+      </p:sp>
+      <p:sp>
+        <p:nvSpPr>
+          <p:cNvPr id="19" name="TextBox 18"/>
+          <p:cNvSpPr txBox="1"/>
+          <p:nvPr/>
+        </p:nvSpPr>
+        <p:spPr>
+          <a:xfrm>
+            <a:off x="1600200" y="4800600"/>
+            <a:ext cx="4114800" cy="868680"/>
+          </a:xfrm>
+          <a:prstGeom prst="rect">
+            <a:avLst/>
+          </a:prstGeom>
+          <a:noFill/>
+        </p:spPr>
+        <p:txBody>
+          <a:bodyPr wrap="square">
+            <a:spAutoFit/>
+          </a:bodyPr>
+          <a:lstStyle/>
+          <a:p>
+            <a:r>
+              <a:rPr sz="1400" b="0" i="0">
+                <a:solidFill>
+                  <a:srgbClr val="1B2330"/>
+                </a:solidFill>
+                <a:latin typeface="Montserrat"/>
+              </a:rPr>
+              <a:t>Siempre, sea cual sea la longitud</a:t>
+            </a:r>
+          </a:p>
+        </p:txBody>
+      </p:sp>
+      <p:sp>
+        <p:nvSpPr>
+          <p:cNvPr id="20" name="Rounded Rectangle 19"/>
+          <p:cNvSpPr/>
+          <p:nvPr/>
+        </p:nvSpPr>
+        <p:spPr>
+          <a:xfrm>
+            <a:off x="6355080" y="4617720"/>
+            <a:ext cx="4983480" cy="1143000"/>
+          </a:xfrm>
+          <a:prstGeom prst="roundRect">
+            <a:avLst/>
+          </a:prstGeom>
+          <a:solidFill>
+            <a:srgbClr val="F3F6FB"/>
+          </a:solidFill>
+          <a:ln w="12700">
+            <a:solidFill>
+              <a:srgbClr val="C7D2E6"/>
+            </a:solidFill>
+          </a:ln>
+          <a:effectLst/>
+        </p:spPr>
+        <p:style>
+          <a:lnRef idx="1">
+            <a:schemeClr val="accent1"/>
+          </a:lnRef>
+          <a:fillRef idx="3">
+            <a:schemeClr val="accent1"/>
+          </a:fillRef>
+          <a:effectRef idx="2">
+            <a:schemeClr val="accent1"/>
+          </a:effectRef>
+          <a:fontRef idx="minor">
+            <a:schemeClr val="lt1"/>
+          </a:fontRef>
+        </p:style>
+        <p:txBody>
+          <a:bodyPr rtlCol="0" anchor="ctr"/>
+          <a:lstStyle/>
+          <a:p>
+            <a:pPr algn="ctr"/>
+          </a:p>
+        </p:txBody>
+      </p:sp>
+      <p:sp>
+        <p:nvSpPr>
+          <p:cNvPr id="21" name="Rectangle 20"/>
+          <p:cNvSpPr/>
+          <p:nvPr/>
+        </p:nvSpPr>
+        <p:spPr>
+          <a:xfrm>
+            <a:off x="6355080" y="4617720"/>
+            <a:ext cx="640080" cy="1143000"/>
+          </a:xfrm>
+          <a:prstGeom prst="rect">
+            <a:avLst/>
+          </a:prstGeom>
+          <a:solidFill>
+            <a:srgbClr val="1E2761"/>
+          </a:solidFill>
+          <a:ln>
+            <a:noFill/>
+          </a:ln>
+          <a:effectLst/>
+        </p:spPr>
+        <p:style>
+          <a:lnRef idx="1">
+            <a:schemeClr val="accent1"/>
+          </a:lnRef>
+          <a:fillRef idx="3">
+            <a:schemeClr val="accent1"/>
+          </a:fillRef>
+          <a:effectRef idx="2">
+            <a:schemeClr val="accent1"/>
+          </a:effectRef>
+          <a:fontRef idx="minor">
+            <a:schemeClr val="lt1"/>
+          </a:fontRef>
+        </p:style>
+        <p:txBody>
+          <a:bodyPr rtlCol="0" anchor="ctr"/>
+          <a:lstStyle/>
+          <a:p>
+            <a:pPr algn="ctr"/>
+          </a:p>
+        </p:txBody>
+      </p:sp>
+      <p:sp>
+        <p:nvSpPr>
+          <p:cNvPr id="22" name="TextBox 21"/>
+          <p:cNvSpPr txBox="1"/>
+          <p:nvPr/>
+        </p:nvSpPr>
+        <p:spPr>
+          <a:xfrm>
+            <a:off x="6355080" y="4937760"/>
+            <a:ext cx="640080" cy="548640"/>
+          </a:xfrm>
+          <a:prstGeom prst="rect">
+            <a:avLst/>
+          </a:prstGeom>
+          <a:noFill/>
+        </p:spPr>
+        <p:txBody>
+          <a:bodyPr wrap="square">
+            <a:spAutoFit/>
+          </a:bodyPr>
+          <a:lstStyle/>
+          <a:p>
+            <a:pPr algn="ctr"/>
+            <a:r>
+              <a:rPr sz="2200" b="1" i="0">
+                <a:solidFill>
+                  <a:srgbClr val="FFFFFF"/>
+                </a:solidFill>
+                <a:latin typeface="Montserrat"/>
+              </a:rPr>
+              <a:t>D</a:t>
+            </a:r>
+          </a:p>
+        </p:txBody>
+      </p:sp>
+      <p:sp>
+        <p:nvSpPr>
+          <p:cNvPr id="23" name="TextBox 22"/>
+          <p:cNvSpPr txBox="1"/>
+          <p:nvPr/>
+        </p:nvSpPr>
+        <p:spPr>
+          <a:xfrm>
+            <a:off x="7132320" y="4800600"/>
+            <a:ext cx="4114800" cy="868680"/>
+          </a:xfrm>
+          <a:prstGeom prst="rect">
+            <a:avLst/>
+          </a:prstGeom>
+          <a:noFill/>
+        </p:spPr>
+        <p:txBody>
+          <a:bodyPr wrap="square">
+            <a:spAutoFit/>
+          </a:bodyPr>
+          <a:lstStyle/>
+          <a:p>
+            <a:r>
+              <a:rPr sz="1400" b="0" i="0">
+                <a:solidFill>
+                  <a:srgbClr val="1B2330"/>
+                </a:solidFill>
+                <a:latin typeface="Montserrat"/>
+              </a:rPr>
+              <a:t>Solo si la acometida supera los 50 m</a:t>
             </a:r>
           </a:p>
         </p:txBody>
@@ -6748,6 +7697,18 @@
   <p:clrMapOvr>
     <a:masterClrMapping/>
   </p:clrMapOvr>
+  <mc:AlternateContent xmlns:mc="http://schemas.openxmlformats.org/markup-compatibility/2006">
+    <mc:Choice xmlns:p14="http://schemas.microsoft.com/office/powerpoint/2010/main" Requires="p14">
+      <p:transition spd="med" p14:dur="700">
+        <p14:cube dir="l"/>
+      </p:transition>
+    </mc:Choice>
+    <mc:Fallback>
+      <p:transition spd="med">
+        <p:push dir="l"/>
+      </p:transition>
+    </mc:Fallback>
+  </mc:AlternateContent>
 </p:sld>
 </file>
 
@@ -6835,7 +7796,7 @@
                 </a:solidFill>
                 <a:latin typeface="Montserrat"/>
               </a:rPr>
-              <a:t>014 / 018</a:t>
+              <a:t>014 / 024</a:t>
             </a:r>
           </a:p>
         </p:txBody>
@@ -6876,88 +7837,20 @@
       </p:sp>
       <p:sp>
         <p:nvSpPr>
-          <p:cNvPr id="5" name="TextBox 4"/>
-          <p:cNvSpPr txBox="1"/>
-          <p:nvPr/>
-        </p:nvSpPr>
-        <p:spPr>
-          <a:xfrm>
-            <a:off x="822960" y="457200"/>
-            <a:ext cx="10058400" cy="365760"/>
-          </a:xfrm>
-          <a:prstGeom prst="rect">
-            <a:avLst/>
-          </a:prstGeom>
-          <a:noFill/>
-        </p:spPr>
-        <p:txBody>
-          <a:bodyPr wrap="square">
-            <a:spAutoFit/>
-          </a:bodyPr>
-          <a:lstStyle/>
-          <a:p>
-            <a:r>
-              <a:rPr sz="1300" b="1" i="0">
-                <a:solidFill>
-                  <a:srgbClr val="E8801A"/>
-                </a:solidFill>
-                <a:latin typeface="Montserrat"/>
-              </a:rPr>
-              <a:t>APARTADO 7.5.3 · LLAVE DE APARATO</a:t>
-            </a:r>
-          </a:p>
-        </p:txBody>
-      </p:sp>
-      <p:sp>
-        <p:nvSpPr>
-          <p:cNvPr id="6" name="TextBox 5"/>
-          <p:cNvSpPr txBox="1"/>
-          <p:nvPr/>
-        </p:nvSpPr>
-        <p:spPr>
-          <a:xfrm>
-            <a:off x="822960" y="868680"/>
-            <a:ext cx="10515600" cy="914400"/>
-          </a:xfrm>
-          <a:prstGeom prst="rect">
-            <a:avLst/>
-          </a:prstGeom>
-          <a:noFill/>
-        </p:spPr>
-        <p:txBody>
-          <a:bodyPr wrap="square">
-            <a:spAutoFit/>
-          </a:bodyPr>
-          <a:lstStyle/>
-          <a:p>
-            <a:r>
-              <a:rPr sz="2800" b="1" i="0">
-                <a:solidFill>
-                  <a:srgbClr val="1E2761"/>
-                </a:solidFill>
-                <a:latin typeface="Montserrat"/>
-              </a:rPr>
-              <a:t>Una llave por cada aparato</a:t>
-            </a:r>
-          </a:p>
-        </p:txBody>
-      </p:sp>
-      <p:sp>
-        <p:nvSpPr>
-          <p:cNvPr id="7" name="Rounded Rectangle 6"/>
+          <p:cNvPr id="5" name="Rectangle 4"/>
           <p:cNvSpPr/>
           <p:nvPr/>
         </p:nvSpPr>
         <p:spPr>
           <a:xfrm>
-            <a:off x="868680" y="1627632"/>
-            <a:ext cx="2011680" cy="73152"/>
-          </a:xfrm>
-          <a:prstGeom prst="roundRect">
+            <a:off x="0" y="0"/>
+            <a:ext cx="12191695" cy="1143000"/>
+          </a:xfrm>
+          <a:prstGeom prst="rect">
             <a:avLst/>
           </a:prstGeom>
           <a:solidFill>
-            <a:srgbClr val="E8801A"/>
+            <a:srgbClr val="1E8E4B"/>
           </a:solidFill>
           <a:ln>
             <a:noFill/>
@@ -6988,14 +7881,14 @@
       </p:sp>
       <p:sp>
         <p:nvSpPr>
-          <p:cNvPr id="8" name="TextBox 7"/>
+          <p:cNvPr id="6" name="TextBox 5"/>
           <p:cNvSpPr txBox="1"/>
           <p:nvPr/>
         </p:nvSpPr>
         <p:spPr>
           <a:xfrm>
-            <a:off x="822960" y="1965960"/>
-            <a:ext cx="4983480" cy="4206240"/>
+            <a:off x="822960" y="274320"/>
+            <a:ext cx="10515600" cy="640080"/>
           </a:xfrm>
           <a:prstGeom prst="rect">
             <a:avLst/>
@@ -7008,102 +7901,72 @@
           </a:bodyPr>
           <a:lstStyle/>
           <a:p>
-            <a:pPr>
-              <a:spcAft>
-                <a:spcPts val="1100"/>
-              </a:spcAft>
-            </a:pPr>
-            <a:r>
-              <a:rPr sz="1600" b="1" i="0">
-                <a:solidFill>
-                  <a:srgbClr val="E8801A"/>
-                </a:solidFill>
-                <a:latin typeface="Montserrat"/>
-              </a:rPr>
-              <a:t>▸  </a:t>
-            </a:r>
-            <a:r>
-              <a:rPr sz="1600" b="0" i="0">
-                <a:solidFill>
-                  <a:srgbClr val="1B2330"/>
-                </a:solidFill>
-                <a:latin typeface="Montserrat"/>
-              </a:rPr>
-              <a:t>Junto al aparato, en el mismo recinto</a:t>
-            </a:r>
-          </a:p>
-          <a:p>
-            <a:pPr>
-              <a:spcAft>
-                <a:spcPts val="1100"/>
-              </a:spcAft>
-            </a:pPr>
-            <a:r>
-              <a:rPr sz="1600" b="1" i="0">
-                <a:solidFill>
-                  <a:srgbClr val="E8801A"/>
-                </a:solidFill>
-                <a:latin typeface="Montserrat"/>
-              </a:rPr>
-              <a:t>▸  </a:t>
-            </a:r>
-            <a:r>
-              <a:rPr sz="1600" b="0" i="0">
-                <a:solidFill>
-                  <a:srgbClr val="1B2330"/>
-                </a:solidFill>
-                <a:latin typeface="Montserrat"/>
-              </a:rPr>
-              <a:t>Pendientes: cerradas, bloqueadas, precintadas</a:t>
-            </a:r>
-          </a:p>
-          <a:p>
-            <a:pPr>
-              <a:spcAft>
-                <a:spcPts val="1100"/>
-              </a:spcAft>
-            </a:pPr>
-            <a:r>
-              <a:rPr sz="1600" b="1" i="0">
-                <a:solidFill>
-                  <a:srgbClr val="E8801A"/>
-                </a:solidFill>
-                <a:latin typeface="Montserrat"/>
-              </a:rPr>
-              <a:t>▸  </a:t>
-            </a:r>
-            <a:r>
-              <a:rPr sz="1600" b="0" i="0">
-                <a:solidFill>
-                  <a:srgbClr val="1B2330"/>
-                </a:solidFill>
-                <a:latin typeface="Montserrat"/>
-              </a:rPr>
-              <a:t>Cocina: limitador de exceso de flujo</a:t>
-            </a:r>
-          </a:p>
-        </p:txBody>
-      </p:sp>
-      <p:sp>
-        <p:nvSpPr>
-          <p:cNvPr id="9" name="imgph" descr="IMGQ:gas cooker connection valve in kitchen"/>
+            <a:r>
+              <a:rPr sz="2400" b="1" i="0">
+                <a:solidFill>
+                  <a:srgbClr val="FFFFFF"/>
+                </a:solidFill>
+                <a:latin typeface="Montserrat"/>
+              </a:rPr>
+              <a:t>✔  RESPUESTA:  A</a:t>
+            </a:r>
+          </a:p>
+        </p:txBody>
+      </p:sp>
+      <p:sp>
+        <p:nvSpPr>
+          <p:cNvPr id="7" name="TextBox 6"/>
+          <p:cNvSpPr txBox="1"/>
+          <p:nvPr/>
+        </p:nvSpPr>
+        <p:spPr>
+          <a:xfrm>
+            <a:off x="822960" y="1417320"/>
+            <a:ext cx="10515600" cy="914400"/>
+          </a:xfrm>
+          <a:prstGeom prst="rect">
+            <a:avLst/>
+          </a:prstGeom>
+          <a:noFill/>
+        </p:spPr>
+        <p:txBody>
+          <a:bodyPr wrap="square">
+            <a:spAutoFit/>
+          </a:bodyPr>
+          <a:lstStyle/>
+          <a:p>
+            <a:r>
+              <a:rPr sz="1800" b="1" i="0">
+                <a:solidFill>
+                  <a:srgbClr val="64748B"/>
+                </a:solidFill>
+                <a:latin typeface="Montserrat"/>
+              </a:rPr>
+              <a:t>¿Cuándo es obligatorio instalar llave de edificio por longitud de la acometida interior?</a:t>
+            </a:r>
+          </a:p>
+        </p:txBody>
+      </p:sp>
+      <p:sp>
+        <p:nvSpPr>
+          <p:cNvPr id="8" name="Rounded Rectangle 7"/>
           <p:cNvSpPr/>
           <p:nvPr/>
         </p:nvSpPr>
         <p:spPr>
           <a:xfrm>
-            <a:off x="5806440" y="1051560"/>
-            <a:ext cx="5298947" cy="4629150"/>
+            <a:off x="822960" y="2514600"/>
+            <a:ext cx="10515600" cy="914400"/>
           </a:xfrm>
           <a:prstGeom prst="roundRect">
             <a:avLst/>
           </a:prstGeom>
           <a:solidFill>
-            <a:srgbClr val="F3F6FB"/>
+            <a:srgbClr val="E9F6EE"/>
           </a:solidFill>
           <a:ln w="12700">
             <a:solidFill>
-              <a:srgbClr val="C7D2E6"/>
+              <a:srgbClr val="1E8E4B"/>
             </a:solidFill>
           </a:ln>
           <a:effectLst/>
@@ -7132,14 +7995,14 @@
       </p:sp>
       <p:sp>
         <p:nvSpPr>
-          <p:cNvPr id="10" name="TextBox 9"/>
+          <p:cNvPr id="9" name="TextBox 8"/>
           <p:cNvSpPr txBox="1"/>
           <p:nvPr/>
         </p:nvSpPr>
         <p:spPr>
           <a:xfrm>
-            <a:off x="6080760" y="2726055"/>
-            <a:ext cx="4750307" cy="1280160"/>
+            <a:off x="1097280" y="2697480"/>
+            <a:ext cx="10058400" cy="640080"/>
           </a:xfrm>
           <a:prstGeom prst="rect">
             <a:avLst/>
@@ -7152,27 +8015,66 @@
           </a:bodyPr>
           <a:lstStyle/>
           <a:p>
-            <a:pPr algn="ctr"/>
-            <a:r>
-              <a:rPr sz="1400" b="1" i="0">
-                <a:solidFill>
-                  <a:srgbClr val="64748B"/>
-                </a:solidFill>
-                <a:latin typeface="Montserrat"/>
-              </a:rPr>
-              <a:t>IMAGEN REALISTA</a:t>
-            </a:r>
-          </a:p>
-          <a:p>
-            <a:pPr algn="ctr"/>
-            <a:r>
-              <a:rPr sz="1100" b="0" i="1">
-                <a:solidFill>
-                  <a:srgbClr val="64748B"/>
-                </a:solidFill>
-                <a:latin typeface="Montserrat"/>
-              </a:rPr>
-              <a:t>gas cooker connection valve in kitchen</a:t>
+            <a:r>
+              <a:rPr sz="1800" b="1" i="0">
+                <a:solidFill>
+                  <a:srgbClr val="1E8E4B"/>
+                </a:solidFill>
+                <a:latin typeface="Montserrat"/>
+              </a:rPr>
+              <a:t>A.  </a:t>
+            </a:r>
+            <a:r>
+              <a:rPr sz="1800" b="1" i="0">
+                <a:solidFill>
+                  <a:srgbClr val="1E2761"/>
+                </a:solidFill>
+                <a:latin typeface="Montserrat"/>
+              </a:rPr>
+              <a:t>Vista de 25 m o más, o enterrada de 4 m o más</a:t>
+            </a:r>
+          </a:p>
+        </p:txBody>
+      </p:sp>
+      <p:sp>
+        <p:nvSpPr>
+          <p:cNvPr id="10" name="TextBox 9"/>
+          <p:cNvSpPr txBox="1"/>
+          <p:nvPr/>
+        </p:nvSpPr>
+        <p:spPr>
+          <a:xfrm>
+            <a:off x="822960" y="3749039"/>
+            <a:ext cx="10515600" cy="2194560"/>
+          </a:xfrm>
+          <a:prstGeom prst="rect">
+            <a:avLst/>
+          </a:prstGeom>
+          <a:noFill/>
+        </p:spPr>
+        <p:txBody>
+          <a:bodyPr wrap="square">
+            <a:spAutoFit/>
+          </a:bodyPr>
+          <a:lstStyle/>
+          <a:p>
+            <a:r>
+              <a:rPr sz="1500" b="1" i="0">
+                <a:solidFill>
+                  <a:srgbClr val="E8801A"/>
+                </a:solidFill>
+                <a:latin typeface="Montserrat"/>
+              </a:rPr>
+              <a:t>Por qué:  </a:t>
+            </a:r>
+            <a:r>
+              <a:rPr sz="1500" b="0" i="0">
+                <a:solidFill>
+                  <a:srgbClr val="1B2330"/>
+                </a:solidFill>
+                <a:latin typeface="Montserrat"/>
+              </a:rPr>
+              <a:t>Se exige llave de edificio con acometida interior vista de 25 m o más, o enterrada de 4 m o más; la enterrada obliga antes por ser más difícil de detectar.</a:t>
             </a:r>
           </a:p>
         </p:txBody>
@@ -7182,6 +8084,18 @@
   <p:clrMapOvr>
     <a:masterClrMapping/>
   </p:clrMapOvr>
+  <mc:AlternateContent xmlns:mc="http://schemas.openxmlformats.org/markup-compatibility/2006">
+    <mc:Choice xmlns:p14="http://schemas.microsoft.com/office/powerpoint/2010/main" Requires="p14">
+      <p:transition spd="med" p14:dur="700">
+        <p14:cube dir="r"/>
+      </p:transition>
+    </mc:Choice>
+    <mc:Fallback>
+      <p:transition spd="med">
+        <p:push dir="r"/>
+      </p:transition>
+    </mc:Fallback>
+  </mc:AlternateContent>
 </p:sld>
 </file>
 
@@ -7269,7 +8183,7 @@
                 </a:solidFill>
                 <a:latin typeface="Montserrat"/>
               </a:rPr>
-              <a:t>015 / 018</a:t>
+              <a:t>015 / 024</a:t>
             </a:r>
           </a:p>
         </p:txBody>
@@ -7337,7 +8251,7 @@
                 </a:solidFill>
                 <a:latin typeface="Montserrat"/>
               </a:rPr>
-              <a:t>GRADOS DE ACCESIBILIDAD</a:t>
+              <a:t>APARTADO 7.3 · MONTANTE COLECTIVO</a:t>
             </a:r>
           </a:p>
         </p:txBody>
@@ -7371,14 +8285,14 @@
                 </a:solidFill>
                 <a:latin typeface="Montserrat"/>
               </a:rPr>
-              <a:t>Quién llega a cada llave</a:t>
-            </a:r>
-          </a:p>
-        </p:txBody>
-      </p:sp>
-      <p:sp>
-        <p:nvSpPr>
-          <p:cNvPr id="7" name="Rounded Rectangle 6"/>
+              <a:t>La llave para poder crecer</a:t>
+            </a:r>
+          </a:p>
+        </p:txBody>
+      </p:sp>
+      <p:sp>
+        <p:nvSpPr>
+          <p:cNvPr id="7" name="Rectangle 6"/>
           <p:cNvSpPr/>
           <p:nvPr/>
         </p:nvSpPr>
@@ -7387,7 +8301,7 @@
             <a:off x="868680" y="1627632"/>
             <a:ext cx="2011680" cy="73152"/>
           </a:xfrm>
-          <a:prstGeom prst="roundRect">
+          <a:prstGeom prst="rect">
             <a:avLst/>
           </a:prstGeom>
           <a:solidFill>
@@ -7428,8 +8342,8 @@
         </p:nvSpPr>
         <p:spPr>
           <a:xfrm>
-            <a:off x="822960" y="1965960"/>
-            <a:ext cx="4983480" cy="4206240"/>
+            <a:off x="6355080" y="1965960"/>
+            <a:ext cx="5029200" cy="4206240"/>
           </a:xfrm>
           <a:prstGeom prst="rect">
             <a:avLst/>
@@ -7463,7 +8377,7 @@
                 </a:solidFill>
                 <a:latin typeface="Montserrat"/>
               </a:rPr>
-              <a:t>Grado 1: a mano del usuario</a:t>
+              <a:t>Una si hay más de un montante</a:t>
             </a:r>
           </a:p>
           <a:p>
@@ -7488,7 +8402,7 @@
                 </a:solidFill>
                 <a:latin typeface="Montserrat"/>
               </a:rPr>
-              <a:t>Grado 2: desde zona común, la distribuidora</a:t>
+              <a:t>Adicional: cerrada, bloqueada y precintada</a:t>
             </a:r>
           </a:p>
           <a:p>
@@ -7513,21 +8427,21 @@
                 </a:solidFill>
                 <a:latin typeface="Montserrat"/>
               </a:rPr>
-              <a:t>Grado 3: el menos accesible</a:t>
-            </a:r>
-          </a:p>
-        </p:txBody>
-      </p:sp>
-      <p:sp>
-        <p:nvSpPr>
-          <p:cNvPr id="9" name="imgph" descr="IMGQ:gas valve behind access panel"/>
+              <a:t>Toma Peterson en tramos aéreos</a:t>
+            </a:r>
+          </a:p>
+        </p:txBody>
+      </p:sp>
+      <p:sp>
+        <p:nvSpPr>
+          <p:cNvPr id="9" name="imgph" descr="IMGQ:vertical gas riser pipe in stairwell"/>
           <p:cNvSpPr/>
           <p:nvPr/>
         </p:nvSpPr>
         <p:spPr>
           <a:xfrm>
-            <a:off x="5806440" y="1051560"/>
-            <a:ext cx="5298947" cy="4629150"/>
+            <a:off x="822960" y="1965960"/>
+            <a:ext cx="5303520" cy="4572000"/>
           </a:xfrm>
           <a:prstGeom prst="roundRect">
             <a:avLst/>
@@ -7572,8 +8486,8 @@
         </p:nvSpPr>
         <p:spPr>
           <a:xfrm>
-            <a:off x="6080760" y="2726055"/>
-            <a:ext cx="4750307" cy="1280160"/>
+            <a:off x="1097280" y="3611880"/>
+            <a:ext cx="4754880" cy="1280160"/>
           </a:xfrm>
           <a:prstGeom prst="rect">
             <a:avLst/>
@@ -7594,7 +8508,7 @@
                 </a:solidFill>
                 <a:latin typeface="Montserrat"/>
               </a:rPr>
-              <a:t>IMAGEN REALISTA</a:t>
+              <a:t>IMAGEN</a:t>
             </a:r>
           </a:p>
           <a:p>
@@ -7606,7 +8520,7 @@
                 </a:solidFill>
                 <a:latin typeface="Montserrat"/>
               </a:rPr>
-              <a:t>gas valve behind access panel</a:t>
+              <a:t>vertical gas riser pipe in stairwell</a:t>
             </a:r>
           </a:p>
         </p:txBody>
@@ -7616,6 +8530,18 @@
   <p:clrMapOvr>
     <a:masterClrMapping/>
   </p:clrMapOvr>
+  <mc:AlternateContent xmlns:mc="http://schemas.openxmlformats.org/markup-compatibility/2006">
+    <mc:Choice xmlns:p14="http://schemas.microsoft.com/office/powerpoint/2010/main" Requires="p14">
+      <p:transition spd="med" p14:dur="700">
+        <p14:cube dir="l"/>
+      </p:transition>
+    </mc:Choice>
+    <mc:Fallback>
+      <p:transition spd="med">
+        <p:push dir="l"/>
+      </p:transition>
+    </mc:Fallback>
+  </mc:AlternateContent>
 </p:sld>
 </file>
 
@@ -7703,7 +8629,7 @@
                 </a:solidFill>
                 <a:latin typeface="Montserrat"/>
               </a:rPr>
-              <a:t>016 / 018</a:t>
+              <a:t>016 / 024</a:t>
             </a:r>
           </a:p>
         </p:txBody>
@@ -7771,7 +8697,7 @@
                 </a:solidFill>
                 <a:latin typeface="Montserrat"/>
               </a:rPr>
-              <a:t>APARTADO 7.6 · MULTIFUNCIÓN</a:t>
+              <a:t>APARTADOS 7.4 Y 7.5.1</a:t>
             </a:r>
           </a:p>
         </p:txBody>
@@ -7805,14 +8731,14 @@
                 </a:solidFill>
                 <a:latin typeface="Montserrat"/>
               </a:rPr>
-              <a:t>Una llave, varios sombreros</a:t>
-            </a:r>
-          </a:p>
-        </p:txBody>
-      </p:sp>
-      <p:sp>
-        <p:nvSpPr>
-          <p:cNvPr id="7" name="Rounded Rectangle 6"/>
+              <a:t>Usuario y contador: aislar tu piso</a:t>
+            </a:r>
+          </a:p>
+        </p:txBody>
+      </p:sp>
+      <p:sp>
+        <p:nvSpPr>
+          <p:cNvPr id="7" name="Rectangle 6"/>
           <p:cNvSpPr/>
           <p:nvPr/>
         </p:nvSpPr>
@@ -7821,7 +8747,7 @@
             <a:off x="868680" y="1627632"/>
             <a:ext cx="2011680" cy="73152"/>
           </a:xfrm>
-          <a:prstGeom prst="roundRect">
+          <a:prstGeom prst="rect">
             <a:avLst/>
           </a:prstGeom>
           <a:solidFill>
@@ -7863,7 +8789,7 @@
         <p:spPr>
           <a:xfrm>
             <a:off x="822960" y="1965960"/>
-            <a:ext cx="4983480" cy="4206240"/>
+            <a:ext cx="5029200" cy="4206240"/>
           </a:xfrm>
           <a:prstGeom prst="rect">
             <a:avLst/>
@@ -7897,7 +8823,7 @@
                 </a:solidFill>
                 <a:latin typeface="Montserrat"/>
               </a:rPr>
-              <a:t>Multiuso si cumple todo lo exigido</a:t>
+              <a:t>Usuario: aísla cada vivienda, grado 2</a:t>
             </a:r>
           </a:p>
           <a:p>
@@ -7922,7 +8848,7 @@
                 </a:solidFill>
                 <a:latin typeface="Montserrat"/>
               </a:rPr>
-              <a:t>Vivienda NUNCA hace de aparato</a:t>
+              <a:t>Contador: siempre, junto a su entrada</a:t>
             </a:r>
           </a:p>
           <a:p>
@@ -7947,21 +8873,21 @@
                 </a:solidFill>
                 <a:latin typeface="Montserrat"/>
               </a:rPr>
-              <a:t>Regulador no hace de usuario (salvo GLP ≤ 15 kg)</a:t>
-            </a:r>
-          </a:p>
-        </p:txBody>
-      </p:sp>
-      <p:sp>
-        <p:nvSpPr>
-          <p:cNvPr id="9" name="imgph" descr="IMGQ:brass gas ball valve close up"/>
+              <a:t>El contador puede hacer de usuario</a:t>
+            </a:r>
+          </a:p>
+        </p:txBody>
+      </p:sp>
+      <p:sp>
+        <p:nvSpPr>
+          <p:cNvPr id="9" name="imgph" descr="IMGQ:gas meter with shut off valve"/>
           <p:cNvSpPr/>
           <p:nvPr/>
         </p:nvSpPr>
         <p:spPr>
           <a:xfrm>
-            <a:off x="5806440" y="1051560"/>
-            <a:ext cx="5298947" cy="4629150"/>
+            <a:off x="6080760" y="1965960"/>
+            <a:ext cx="5303520" cy="4572000"/>
           </a:xfrm>
           <a:prstGeom prst="roundRect">
             <a:avLst/>
@@ -8006,8 +8932,8 @@
         </p:nvSpPr>
         <p:spPr>
           <a:xfrm>
-            <a:off x="6080760" y="2726055"/>
-            <a:ext cx="4750307" cy="1280160"/>
+            <a:off x="6355080" y="3611880"/>
+            <a:ext cx="4754880" cy="1280160"/>
           </a:xfrm>
           <a:prstGeom prst="rect">
             <a:avLst/>
@@ -8028,7 +8954,7 @@
                 </a:solidFill>
                 <a:latin typeface="Montserrat"/>
               </a:rPr>
-              <a:t>IMAGEN REALISTA</a:t>
+              <a:t>IMAGEN</a:t>
             </a:r>
           </a:p>
           <a:p>
@@ -8040,7 +8966,7 @@
                 </a:solidFill>
                 <a:latin typeface="Montserrat"/>
               </a:rPr>
-              <a:t>brass gas ball valve close up</a:t>
+              <a:t>gas meter with shut off valve</a:t>
             </a:r>
           </a:p>
         </p:txBody>
@@ -8050,6 +8976,18 @@
   <p:clrMapOvr>
     <a:masterClrMapping/>
   </p:clrMapOvr>
+  <mc:AlternateContent xmlns:mc="http://schemas.openxmlformats.org/markup-compatibility/2006">
+    <mc:Choice xmlns:p14="http://schemas.microsoft.com/office/powerpoint/2010/main" Requires="p14">
+      <p:transition spd="med" p14:dur="700">
+        <p14:cube dir="r"/>
+      </p:transition>
+    </mc:Choice>
+    <mc:Fallback>
+      <p:transition spd="med">
+        <p:push dir="r"/>
+      </p:transition>
+    </mc:Fallback>
+  </mc:AlternateContent>
 </p:sld>
 </file>
 
@@ -8137,7 +9075,7 @@
                 </a:solidFill>
                 <a:latin typeface="Montserrat"/>
               </a:rPr>
-              <a:t>017 / 018</a:t>
+              <a:t>017 / 024</a:t>
             </a:r>
           </a:p>
         </p:txBody>
@@ -8205,7 +9143,7 @@
                 </a:solidFill>
                 <a:latin typeface="Montserrat"/>
               </a:rPr>
-              <a:t>DOCUMENTACIÓN Y PUESTA EN SERVICIO</a:t>
+              <a:t>APARTADO 7.5.2 · LLAVE DE VIVIENDA</a:t>
             </a:r>
           </a:p>
         </p:txBody>
@@ -8239,14 +9177,14 @@
                 </a:solidFill>
                 <a:latin typeface="Montserrat"/>
               </a:rPr>
-              <a:t>Del certificado al gas abierto</a:t>
-            </a:r>
-          </a:p>
-        </p:txBody>
-      </p:sp>
-      <p:sp>
-        <p:nvSpPr>
-          <p:cNvPr id="7" name="Rounded Rectangle 6"/>
+              <a:t>La llave de vivienda es la tuya</a:t>
+            </a:r>
+          </a:p>
+        </p:txBody>
+      </p:sp>
+      <p:sp>
+        <p:nvSpPr>
+          <p:cNvPr id="7" name="Rectangle 6"/>
           <p:cNvSpPr/>
           <p:nvPr/>
         </p:nvSpPr>
@@ -8255,7 +9193,7 @@
             <a:off x="868680" y="1627632"/>
             <a:ext cx="2011680" cy="73152"/>
           </a:xfrm>
-          <a:prstGeom prst="roundRect">
+          <a:prstGeom prst="rect">
             <a:avLst/>
           </a:prstGeom>
           <a:solidFill>
@@ -8296,8 +9234,8 @@
         </p:nvSpPr>
         <p:spPr>
           <a:xfrm>
-            <a:off x="822960" y="1965960"/>
-            <a:ext cx="4983480" cy="4206240"/>
+            <a:off x="6355080" y="1965960"/>
+            <a:ext cx="5029200" cy="4206240"/>
           </a:xfrm>
           <a:prstGeom prst="rect">
             <a:avLst/>
@@ -8331,7 +9269,7 @@
                 </a:solidFill>
                 <a:latin typeface="Montserrat"/>
               </a:rPr>
-              <a:t>La instaladora firma el certificado (IRG)</a:t>
+              <a:t>Siempre, con accesibilidad de grado 1</a:t>
             </a:r>
           </a:p>
           <a:p>
@@ -8356,7 +9294,7 @@
                 </a:solidFill>
                 <a:latin typeface="Montserrat"/>
               </a:rPr>
-              <a:t>Pruebas de estanquidad antes de dar gas</a:t>
+              <a:t>Fuera de la vivienda pero accesible dentro</a:t>
             </a:r>
           </a:p>
           <a:p>
@@ -8381,21 +9319,21 @@
                 </a:solidFill>
                 <a:latin typeface="Montserrat"/>
               </a:rPr>
-              <a:t>La distribuidora hace la puesta en servicio</a:t>
-            </a:r>
-          </a:p>
-        </p:txBody>
-      </p:sp>
-      <p:sp>
-        <p:nvSpPr>
-          <p:cNvPr id="9" name="imgph" descr="IMGQ:gas installation certificate with signature"/>
+              <a:t>Corta el gas de toda la casa</a:t>
+            </a:r>
+          </a:p>
+        </p:txBody>
+      </p:sp>
+      <p:sp>
+        <p:nvSpPr>
+          <p:cNvPr id="9" name="imgph" descr="IMGQ:gas valve inside home hallway"/>
           <p:cNvSpPr/>
           <p:nvPr/>
         </p:nvSpPr>
         <p:spPr>
           <a:xfrm>
-            <a:off x="5806440" y="1051560"/>
-            <a:ext cx="5298947" cy="4629150"/>
+            <a:off x="822960" y="1965960"/>
+            <a:ext cx="5303520" cy="4572000"/>
           </a:xfrm>
           <a:prstGeom prst="roundRect">
             <a:avLst/>
@@ -8440,8 +9378,8 @@
         </p:nvSpPr>
         <p:spPr>
           <a:xfrm>
-            <a:off x="6080760" y="2726055"/>
-            <a:ext cx="4750307" cy="1280160"/>
+            <a:off x="1097280" y="3611880"/>
+            <a:ext cx="4754880" cy="1280160"/>
           </a:xfrm>
           <a:prstGeom prst="rect">
             <a:avLst/>
@@ -8462,7 +9400,7 @@
                 </a:solidFill>
                 <a:latin typeface="Montserrat"/>
               </a:rPr>
-              <a:t>IMAGEN REALISTA</a:t>
+              <a:t>IMAGEN</a:t>
             </a:r>
           </a:p>
           <a:p>
@@ -8474,7 +9412,7 @@
                 </a:solidFill>
                 <a:latin typeface="Montserrat"/>
               </a:rPr>
-              <a:t>gas installation certificate with signature</a:t>
+              <a:t>gas valve inside home hallway</a:t>
             </a:r>
           </a:p>
         </p:txBody>
@@ -8484,6 +9422,18 @@
   <p:clrMapOvr>
     <a:masterClrMapping/>
   </p:clrMapOvr>
+  <mc:AlternateContent xmlns:mc="http://schemas.openxmlformats.org/markup-compatibility/2006">
+    <mc:Choice xmlns:p14="http://schemas.microsoft.com/office/powerpoint/2010/main" Requires="p14">
+      <p:transition spd="med" p14:dur="700">
+        <p14:cube dir="l"/>
+      </p:transition>
+    </mc:Choice>
+    <mc:Fallback>
+      <p:transition spd="med">
+        <p:push dir="l"/>
+      </p:transition>
+    </mc:Fallback>
+  </mc:AlternateContent>
 </p:sld>
 </file>
 
@@ -8512,7 +9462,7 @@
             <a:avLst/>
           </a:prstGeom>
           <a:solidFill>
-            <a:srgbClr val="1E2761"/>
+            <a:srgbClr val="FFFFFF"/>
           </a:solidFill>
           <a:ln>
             <a:noFill/>
@@ -8549,8 +9499,8 @@
         </p:nvSpPr>
         <p:spPr>
           <a:xfrm>
-            <a:off x="822960" y="640080"/>
-            <a:ext cx="10515600" cy="457200"/>
+            <a:off x="10607040" y="320040"/>
+            <a:ext cx="1371600" cy="365760"/>
           </a:xfrm>
           <a:prstGeom prst="rect">
             <a:avLst/>
@@ -8563,30 +9513,133 @@
           </a:bodyPr>
           <a:lstStyle/>
           <a:p>
-            <a:r>
-              <a:rPr sz="1400" b="1" i="0">
-                <a:solidFill>
-                  <a:srgbClr val="F4A24C"/>
-                </a:solidFill>
-                <a:latin typeface="Montserrat"/>
-              </a:rPr>
-              <a:t>LO QUE YA DOMINAS</a:t>
-            </a:r>
-          </a:p>
-        </p:txBody>
-      </p:sp>
-      <p:sp>
-        <p:nvSpPr>
-          <p:cNvPr id="4" name="Rounded Rectangle 3"/>
+            <a:pPr algn="r"/>
+            <a:r>
+              <a:rPr sz="1000" b="1" i="0">
+                <a:solidFill>
+                  <a:srgbClr val="64748B"/>
+                </a:solidFill>
+                <a:latin typeface="Montserrat"/>
+              </a:rPr>
+              <a:t>018 / 024</a:t>
+            </a:r>
+          </a:p>
+        </p:txBody>
+      </p:sp>
+      <p:sp>
+        <p:nvSpPr>
+          <p:cNvPr id="4" name="TextBox 3"/>
+          <p:cNvSpPr txBox="1"/>
+          <p:nvPr/>
+        </p:nvSpPr>
+        <p:spPr>
+          <a:xfrm>
+            <a:off x="457200" y="6419088"/>
+            <a:ext cx="8229600" cy="365760"/>
+          </a:xfrm>
+          <a:prstGeom prst="rect">
+            <a:avLst/>
+          </a:prstGeom>
+          <a:noFill/>
+        </p:spPr>
+        <p:txBody>
+          <a:bodyPr wrap="square">
+            <a:spAutoFit/>
+          </a:bodyPr>
+          <a:lstStyle/>
+          <a:p>
+            <a:r>
+              <a:rPr sz="900" b="0" i="0">
+                <a:solidFill>
+                  <a:srgbClr val="64748B"/>
+                </a:solidFill>
+                <a:latin typeface="Montserrat"/>
+              </a:rPr>
+              <a:t>Curso Gas B · Tema 11 · UNE 60670-4 · Diseño y construcción</a:t>
+            </a:r>
+          </a:p>
+        </p:txBody>
+      </p:sp>
+      <p:sp>
+        <p:nvSpPr>
+          <p:cNvPr id="5" name="TextBox 4"/>
+          <p:cNvSpPr txBox="1"/>
+          <p:nvPr/>
+        </p:nvSpPr>
+        <p:spPr>
+          <a:xfrm>
+            <a:off x="822960" y="457200"/>
+            <a:ext cx="10058400" cy="365760"/>
+          </a:xfrm>
+          <a:prstGeom prst="rect">
+            <a:avLst/>
+          </a:prstGeom>
+          <a:noFill/>
+        </p:spPr>
+        <p:txBody>
+          <a:bodyPr wrap="square">
+            <a:spAutoFit/>
+          </a:bodyPr>
+          <a:lstStyle/>
+          <a:p>
+            <a:r>
+              <a:rPr sz="1300" b="1" i="0">
+                <a:solidFill>
+                  <a:srgbClr val="E8801A"/>
+                </a:solidFill>
+                <a:latin typeface="Montserrat"/>
+              </a:rPr>
+              <a:t>APARTADO 7.5.3 · LLAVE DE APARATO</a:t>
+            </a:r>
+          </a:p>
+        </p:txBody>
+      </p:sp>
+      <p:sp>
+        <p:nvSpPr>
+          <p:cNvPr id="6" name="TextBox 5"/>
+          <p:cNvSpPr txBox="1"/>
+          <p:nvPr/>
+        </p:nvSpPr>
+        <p:spPr>
+          <a:xfrm>
+            <a:off x="822960" y="868680"/>
+            <a:ext cx="10515600" cy="914400"/>
+          </a:xfrm>
+          <a:prstGeom prst="rect">
+            <a:avLst/>
+          </a:prstGeom>
+          <a:noFill/>
+        </p:spPr>
+        <p:txBody>
+          <a:bodyPr wrap="square">
+            <a:spAutoFit/>
+          </a:bodyPr>
+          <a:lstStyle/>
+          <a:p>
+            <a:r>
+              <a:rPr sz="2800" b="1" i="0">
+                <a:solidFill>
+                  <a:srgbClr val="1E2761"/>
+                </a:solidFill>
+                <a:latin typeface="Montserrat"/>
+              </a:rPr>
+              <a:t>Una llave por cada aparato</a:t>
+            </a:r>
+          </a:p>
+        </p:txBody>
+      </p:sp>
+      <p:sp>
+        <p:nvSpPr>
+          <p:cNvPr id="7" name="Rectangle 6"/>
           <p:cNvSpPr/>
           <p:nvPr/>
         </p:nvSpPr>
         <p:spPr>
           <a:xfrm>
-            <a:off x="868680" y="1051560"/>
-            <a:ext cx="1463040" cy="82296"/>
-          </a:xfrm>
-          <a:prstGeom prst="roundRect">
+            <a:off x="868680" y="1627632"/>
+            <a:ext cx="2011680" cy="73152"/>
+          </a:xfrm>
+          <a:prstGeom prst="rect">
             <a:avLst/>
           </a:prstGeom>
           <a:solidFill>
@@ -8621,14 +9674,14 @@
       </p:sp>
       <p:sp>
         <p:nvSpPr>
-          <p:cNvPr id="5" name="TextBox 4"/>
+          <p:cNvPr id="8" name="TextBox 7"/>
           <p:cNvSpPr txBox="1"/>
           <p:nvPr/>
         </p:nvSpPr>
         <p:spPr>
           <a:xfrm>
-            <a:off x="822960" y="1234440"/>
-            <a:ext cx="10515600" cy="1097280"/>
+            <a:off x="822960" y="1965960"/>
+            <a:ext cx="5029200" cy="4206240"/>
           </a:xfrm>
           <a:prstGeom prst="rect">
             <a:avLst/>
@@ -8641,28 +9694,138 @@
           </a:bodyPr>
           <a:lstStyle/>
           <a:p>
-            <a:r>
-              <a:rPr sz="3400" b="1" i="0">
-                <a:solidFill>
-                  <a:srgbClr val="FFFFFF"/>
-                </a:solidFill>
-                <a:latin typeface="Montserrat"/>
-              </a:rPr>
-              <a:t>Ya sabes medir, regular y cortar el gas</a:t>
-            </a:r>
-          </a:p>
-        </p:txBody>
-      </p:sp>
-      <p:sp>
-        <p:nvSpPr>
-          <p:cNvPr id="6" name="TextBox 5"/>
+            <a:pPr>
+              <a:spcAft>
+                <a:spcPts val="1100"/>
+              </a:spcAft>
+            </a:pPr>
+            <a:r>
+              <a:rPr sz="1600" b="1" i="0">
+                <a:solidFill>
+                  <a:srgbClr val="E8801A"/>
+                </a:solidFill>
+                <a:latin typeface="Montserrat"/>
+              </a:rPr>
+              <a:t>▸  </a:t>
+            </a:r>
+            <a:r>
+              <a:rPr sz="1600" b="0" i="0">
+                <a:solidFill>
+                  <a:srgbClr val="1B2330"/>
+                </a:solidFill>
+                <a:latin typeface="Montserrat"/>
+              </a:rPr>
+              <a:t>Junto al aparato, en el mismo recinto</a:t>
+            </a:r>
+          </a:p>
+          <a:p>
+            <a:pPr>
+              <a:spcAft>
+                <a:spcPts val="1100"/>
+              </a:spcAft>
+            </a:pPr>
+            <a:r>
+              <a:rPr sz="1600" b="1" i="0">
+                <a:solidFill>
+                  <a:srgbClr val="E8801A"/>
+                </a:solidFill>
+                <a:latin typeface="Montserrat"/>
+              </a:rPr>
+              <a:t>▸  </a:t>
+            </a:r>
+            <a:r>
+              <a:rPr sz="1600" b="0" i="0">
+                <a:solidFill>
+                  <a:srgbClr val="1B2330"/>
+                </a:solidFill>
+                <a:latin typeface="Montserrat"/>
+              </a:rPr>
+              <a:t>Pendientes: cerradas, bloqueadas, precintadas</a:t>
+            </a:r>
+          </a:p>
+          <a:p>
+            <a:pPr>
+              <a:spcAft>
+                <a:spcPts val="1100"/>
+              </a:spcAft>
+            </a:pPr>
+            <a:r>
+              <a:rPr sz="1600" b="1" i="0">
+                <a:solidFill>
+                  <a:srgbClr val="E8801A"/>
+                </a:solidFill>
+                <a:latin typeface="Montserrat"/>
+              </a:rPr>
+              <a:t>▸  </a:t>
+            </a:r>
+            <a:r>
+              <a:rPr sz="1600" b="0" i="0">
+                <a:solidFill>
+                  <a:srgbClr val="1B2330"/>
+                </a:solidFill>
+                <a:latin typeface="Montserrat"/>
+              </a:rPr>
+              <a:t>Cocina: limitador de exceso de flujo</a:t>
+            </a:r>
+          </a:p>
+        </p:txBody>
+      </p:sp>
+      <p:sp>
+        <p:nvSpPr>
+          <p:cNvPr id="9" name="imgph" descr="IMGQ:gas cooker connection valve in kitchen"/>
+          <p:cNvSpPr/>
+          <p:nvPr/>
+        </p:nvSpPr>
+        <p:spPr>
+          <a:xfrm>
+            <a:off x="6080760" y="1965960"/>
+            <a:ext cx="5303520" cy="4572000"/>
+          </a:xfrm>
+          <a:prstGeom prst="roundRect">
+            <a:avLst/>
+          </a:prstGeom>
+          <a:solidFill>
+            <a:srgbClr val="F3F6FB"/>
+          </a:solidFill>
+          <a:ln w="12700">
+            <a:solidFill>
+              <a:srgbClr val="C7D2E6"/>
+            </a:solidFill>
+          </a:ln>
+          <a:effectLst/>
+        </p:spPr>
+        <p:style>
+          <a:lnRef idx="1">
+            <a:schemeClr val="accent1"/>
+          </a:lnRef>
+          <a:fillRef idx="3">
+            <a:schemeClr val="accent1"/>
+          </a:fillRef>
+          <a:effectRef idx="2">
+            <a:schemeClr val="accent1"/>
+          </a:effectRef>
+          <a:fontRef idx="minor">
+            <a:schemeClr val="lt1"/>
+          </a:fontRef>
+        </p:style>
+        <p:txBody>
+          <a:bodyPr rtlCol="0" anchor="ctr"/>
+          <a:lstStyle/>
+          <a:p>
+            <a:pPr algn="ctr"/>
+          </a:p>
+        </p:txBody>
+      </p:sp>
+      <p:sp>
+        <p:nvSpPr>
+          <p:cNvPr id="10" name="TextBox 9"/>
           <p:cNvSpPr txBox="1"/>
           <p:nvPr/>
         </p:nvSpPr>
         <p:spPr>
           <a:xfrm>
-            <a:off x="822960" y="2606040"/>
-            <a:ext cx="10515600" cy="2743200"/>
+            <a:off x="6355080" y="3611880"/>
+            <a:ext cx="4754880" cy="1280160"/>
           </a:xfrm>
           <a:prstGeom prst="rect">
             <a:avLst/>
@@ -8675,119 +9838,254 @@
           </a:bodyPr>
           <a:lstStyle/>
           <a:p>
-            <a:pPr>
-              <a:spcAft>
-                <a:spcPts val="1200"/>
-              </a:spcAft>
-            </a:pPr>
-            <a:r>
-              <a:rPr sz="2000" b="1" i="0">
-                <a:solidFill>
-                  <a:srgbClr val="F4A24C"/>
-                </a:solidFill>
-                <a:latin typeface="Montserrat"/>
-              </a:rPr>
-              <a:t>✓  </a:t>
-            </a:r>
-            <a:r>
-              <a:rPr sz="1900" b="0" i="0">
-                <a:solidFill>
-                  <a:srgbClr val="FFFFFF"/>
-                </a:solidFill>
-                <a:latin typeface="Montserrat"/>
-              </a:rPr>
-              <a:t>Tomas de presión: medir a cada lado del elemento</a:t>
-            </a:r>
-          </a:p>
-          <a:p>
-            <a:pPr>
-              <a:spcAft>
-                <a:spcPts val="1200"/>
-              </a:spcAft>
-            </a:pPr>
-            <a:r>
-              <a:rPr sz="2000" b="1" i="0">
-                <a:solidFill>
-                  <a:srgbClr val="F4A24C"/>
-                </a:solidFill>
-                <a:latin typeface="Montserrat"/>
-              </a:rPr>
-              <a:t>✓  </a:t>
-            </a:r>
-            <a:r>
-              <a:rPr sz="1900" b="0" i="0">
-                <a:solidFill>
-                  <a:srgbClr val="FFFFFF"/>
-                </a:solidFill>
-                <a:latin typeface="Montserrat"/>
-              </a:rPr>
-              <a:t>Gas natural: a más MOP, más seguridades</a:t>
-            </a:r>
-          </a:p>
-          <a:p>
-            <a:pPr>
-              <a:spcAft>
-                <a:spcPts val="1200"/>
-              </a:spcAft>
-            </a:pPr>
-            <a:r>
-              <a:rPr sz="2000" b="1" i="0">
-                <a:solidFill>
-                  <a:srgbClr val="F4A24C"/>
-                </a:solidFill>
-                <a:latin typeface="Montserrat"/>
-              </a:rPr>
-              <a:t>✓  </a:t>
-            </a:r>
-            <a:r>
-              <a:rPr sz="1900" b="0" i="0">
-                <a:solidFill>
-                  <a:srgbClr val="FFFFFF"/>
-                </a:solidFill>
-                <a:latin typeface="Montserrat"/>
-              </a:rPr>
-              <a:t>GLP: dos etapas y 0,1 a 2 bar a la entrada</a:t>
-            </a:r>
-          </a:p>
-          <a:p>
-            <a:pPr>
-              <a:spcAft>
-                <a:spcPts val="1200"/>
-              </a:spcAft>
-            </a:pPr>
-            <a:r>
-              <a:rPr sz="2000" b="1" i="0">
-                <a:solidFill>
-                  <a:srgbClr val="F4A24C"/>
-                </a:solidFill>
-                <a:latin typeface="Montserrat"/>
-              </a:rPr>
-              <a:t>✓  </a:t>
-            </a:r>
-            <a:r>
-              <a:rPr sz="1900" b="0" i="0">
-                <a:solidFill>
-                  <a:srgbClr val="FFFFFF"/>
-                </a:solidFill>
-                <a:latin typeface="Montserrat"/>
-              </a:rPr>
-              <a:t>La cadena de llaves y sus grados de acceso</a:t>
-            </a:r>
-          </a:p>
-        </p:txBody>
-      </p:sp>
-      <p:sp>
-        <p:nvSpPr>
-          <p:cNvPr id="7" name="Rounded Rectangle 6"/>
+            <a:pPr algn="ctr"/>
+            <a:r>
+              <a:rPr sz="1400" b="1" i="0">
+                <a:solidFill>
+                  <a:srgbClr val="64748B"/>
+                </a:solidFill>
+                <a:latin typeface="Montserrat"/>
+              </a:rPr>
+              <a:t>IMAGEN</a:t>
+            </a:r>
+          </a:p>
+          <a:p>
+            <a:pPr algn="ctr"/>
+            <a:r>
+              <a:rPr sz="1100" b="0" i="1">
+                <a:solidFill>
+                  <a:srgbClr val="64748B"/>
+                </a:solidFill>
+                <a:latin typeface="Montserrat"/>
+              </a:rPr>
+              <a:t>gas cooker connection valve in kitchen</a:t>
+            </a:r>
+          </a:p>
+        </p:txBody>
+      </p:sp>
+    </p:spTree>
+  </p:cSld>
+  <p:clrMapOvr>
+    <a:masterClrMapping/>
+  </p:clrMapOvr>
+  <mc:AlternateContent xmlns:mc="http://schemas.openxmlformats.org/markup-compatibility/2006">
+    <mc:Choice xmlns:p14="http://schemas.microsoft.com/office/powerpoint/2010/main" Requires="p14">
+      <p:transition spd="med" p14:dur="700">
+        <p14:cube dir="r"/>
+      </p:transition>
+    </mc:Choice>
+    <mc:Fallback>
+      <p:transition spd="med">
+        <p:push dir="r"/>
+      </p:transition>
+    </mc:Fallback>
+  </mc:AlternateContent>
+</p:sld>
+</file>
+
+<file path=ppt/slides/slide19.xml><?xml version="1.0" encoding="utf-8"?>
+<p:sld xmlns:a="http://schemas.openxmlformats.org/drawingml/2006/main" xmlns:p="http://schemas.openxmlformats.org/presentationml/2006/main" xmlns:r="http://schemas.openxmlformats.org/officeDocument/2006/relationships">
+  <p:cSld>
+    <p:spTree>
+      <p:nvGrpSpPr>
+        <p:cNvPr id="1" name=""/>
+        <p:cNvGrpSpPr/>
+        <p:nvPr/>
+      </p:nvGrpSpPr>
+      <p:grpSpPr/>
+      <p:sp>
+        <p:nvSpPr>
+          <p:cNvPr id="2" name="Rectangle 1"/>
           <p:cNvSpPr/>
           <p:nvPr/>
         </p:nvSpPr>
         <p:spPr>
           <a:xfrm>
-            <a:off x="822960" y="5532120"/>
-            <a:ext cx="10515600" cy="822960"/>
-          </a:xfrm>
-          <a:prstGeom prst="roundRect">
+            <a:off x="0" y="0"/>
+            <a:ext cx="12191695" cy="6858000"/>
+          </a:xfrm>
+          <a:prstGeom prst="rect">
+            <a:avLst/>
+          </a:prstGeom>
+          <a:solidFill>
+            <a:srgbClr val="FFFFFF"/>
+          </a:solidFill>
+          <a:ln>
+            <a:noFill/>
+          </a:ln>
+          <a:effectLst/>
+        </p:spPr>
+        <p:style>
+          <a:lnRef idx="1">
+            <a:schemeClr val="accent1"/>
+          </a:lnRef>
+          <a:fillRef idx="3">
+            <a:schemeClr val="accent1"/>
+          </a:fillRef>
+          <a:effectRef idx="2">
+            <a:schemeClr val="accent1"/>
+          </a:effectRef>
+          <a:fontRef idx="minor">
+            <a:schemeClr val="lt1"/>
+          </a:fontRef>
+        </p:style>
+        <p:txBody>
+          <a:bodyPr rtlCol="0" anchor="ctr"/>
+          <a:lstStyle/>
+          <a:p>
+            <a:pPr algn="ctr"/>
+          </a:p>
+        </p:txBody>
+      </p:sp>
+      <p:sp>
+        <p:nvSpPr>
+          <p:cNvPr id="3" name="TextBox 2"/>
+          <p:cNvSpPr txBox="1"/>
+          <p:nvPr/>
+        </p:nvSpPr>
+        <p:spPr>
+          <a:xfrm>
+            <a:off x="10607040" y="320040"/>
+            <a:ext cx="1371600" cy="365760"/>
+          </a:xfrm>
+          <a:prstGeom prst="rect">
+            <a:avLst/>
+          </a:prstGeom>
+          <a:noFill/>
+        </p:spPr>
+        <p:txBody>
+          <a:bodyPr wrap="square">
+            <a:spAutoFit/>
+          </a:bodyPr>
+          <a:lstStyle/>
+          <a:p>
+            <a:pPr algn="r"/>
+            <a:r>
+              <a:rPr sz="1000" b="1" i="0">
+                <a:solidFill>
+                  <a:srgbClr val="64748B"/>
+                </a:solidFill>
+                <a:latin typeface="Montserrat"/>
+              </a:rPr>
+              <a:t>019 / 024</a:t>
+            </a:r>
+          </a:p>
+        </p:txBody>
+      </p:sp>
+      <p:sp>
+        <p:nvSpPr>
+          <p:cNvPr id="4" name="TextBox 3"/>
+          <p:cNvSpPr txBox="1"/>
+          <p:nvPr/>
+        </p:nvSpPr>
+        <p:spPr>
+          <a:xfrm>
+            <a:off x="457200" y="6419088"/>
+            <a:ext cx="8229600" cy="365760"/>
+          </a:xfrm>
+          <a:prstGeom prst="rect">
+            <a:avLst/>
+          </a:prstGeom>
+          <a:noFill/>
+        </p:spPr>
+        <p:txBody>
+          <a:bodyPr wrap="square">
+            <a:spAutoFit/>
+          </a:bodyPr>
+          <a:lstStyle/>
+          <a:p>
+            <a:r>
+              <a:rPr sz="900" b="0" i="0">
+                <a:solidFill>
+                  <a:srgbClr val="64748B"/>
+                </a:solidFill>
+                <a:latin typeface="Montserrat"/>
+              </a:rPr>
+              <a:t>Curso Gas B · Tema 11 · UNE 60670-4 · Diseño y construcción</a:t>
+            </a:r>
+          </a:p>
+        </p:txBody>
+      </p:sp>
+      <p:sp>
+        <p:nvSpPr>
+          <p:cNvPr id="5" name="TextBox 4"/>
+          <p:cNvSpPr txBox="1"/>
+          <p:nvPr/>
+        </p:nvSpPr>
+        <p:spPr>
+          <a:xfrm>
+            <a:off x="822960" y="457200"/>
+            <a:ext cx="10058400" cy="365760"/>
+          </a:xfrm>
+          <a:prstGeom prst="rect">
+            <a:avLst/>
+          </a:prstGeom>
+          <a:noFill/>
+        </p:spPr>
+        <p:txBody>
+          <a:bodyPr wrap="square">
+            <a:spAutoFit/>
+          </a:bodyPr>
+          <a:lstStyle/>
+          <a:p>
+            <a:r>
+              <a:rPr sz="1300" b="1" i="0">
+                <a:solidFill>
+                  <a:srgbClr val="E8801A"/>
+                </a:solidFill>
+                <a:latin typeface="Montserrat"/>
+              </a:rPr>
+              <a:t>GRADOS DE ACCESIBILIDAD</a:t>
+            </a:r>
+          </a:p>
+        </p:txBody>
+      </p:sp>
+      <p:sp>
+        <p:nvSpPr>
+          <p:cNvPr id="6" name="TextBox 5"/>
+          <p:cNvSpPr txBox="1"/>
+          <p:nvPr/>
+        </p:nvSpPr>
+        <p:spPr>
+          <a:xfrm>
+            <a:off x="822960" y="868680"/>
+            <a:ext cx="10515600" cy="914400"/>
+          </a:xfrm>
+          <a:prstGeom prst="rect">
+            <a:avLst/>
+          </a:prstGeom>
+          <a:noFill/>
+        </p:spPr>
+        <p:txBody>
+          <a:bodyPr wrap="square">
+            <a:spAutoFit/>
+          </a:bodyPr>
+          <a:lstStyle/>
+          <a:p>
+            <a:r>
+              <a:rPr sz="2800" b="1" i="0">
+                <a:solidFill>
+                  <a:srgbClr val="1E2761"/>
+                </a:solidFill>
+                <a:latin typeface="Montserrat"/>
+              </a:rPr>
+              <a:t>Quién llega a cada llave</a:t>
+            </a:r>
+          </a:p>
+        </p:txBody>
+      </p:sp>
+      <p:sp>
+        <p:nvSpPr>
+          <p:cNvPr id="7" name="Rectangle 6"/>
+          <p:cNvSpPr/>
+          <p:nvPr/>
+        </p:nvSpPr>
+        <p:spPr>
+          <a:xfrm>
+            <a:off x="868680" y="1627632"/>
+            <a:ext cx="2011680" cy="73152"/>
+          </a:xfrm>
+          <a:prstGeom prst="rect">
             <a:avLst/>
           </a:prstGeom>
           <a:solidFill>
@@ -8828,8 +10126,8 @@
         </p:nvSpPr>
         <p:spPr>
           <a:xfrm>
-            <a:off x="1051560" y="5623560"/>
-            <a:ext cx="10058400" cy="640080"/>
+            <a:off x="6355080" y="1965960"/>
+            <a:ext cx="5029200" cy="4206240"/>
           </a:xfrm>
           <a:prstGeom prst="rect">
             <a:avLst/>
@@ -8842,14 +10140,171 @@
           </a:bodyPr>
           <a:lstStyle/>
           <a:p>
-            <a:r>
-              <a:rPr sz="1500" b="1" i="1">
-                <a:solidFill>
-                  <a:srgbClr val="1E2761"/>
-                </a:solidFill>
-                <a:latin typeface="Montserrat"/>
-              </a:rPr>
-              <a:t>Con esto diagnosticas una avería y cierras en una urgencia. Has cerrado la Parte 4 entera.</a:t>
+            <a:pPr>
+              <a:spcAft>
+                <a:spcPts val="1100"/>
+              </a:spcAft>
+            </a:pPr>
+            <a:r>
+              <a:rPr sz="1600" b="1" i="0">
+                <a:solidFill>
+                  <a:srgbClr val="E8801A"/>
+                </a:solidFill>
+                <a:latin typeface="Montserrat"/>
+              </a:rPr>
+              <a:t>▸  </a:t>
+            </a:r>
+            <a:r>
+              <a:rPr sz="1600" b="0" i="0">
+                <a:solidFill>
+                  <a:srgbClr val="1B2330"/>
+                </a:solidFill>
+                <a:latin typeface="Montserrat"/>
+              </a:rPr>
+              <a:t>Grado 1: a mano del usuario</a:t>
+            </a:r>
+          </a:p>
+          <a:p>
+            <a:pPr>
+              <a:spcAft>
+                <a:spcPts val="1100"/>
+              </a:spcAft>
+            </a:pPr>
+            <a:r>
+              <a:rPr sz="1600" b="1" i="0">
+                <a:solidFill>
+                  <a:srgbClr val="E8801A"/>
+                </a:solidFill>
+                <a:latin typeface="Montserrat"/>
+              </a:rPr>
+              <a:t>▸  </a:t>
+            </a:r>
+            <a:r>
+              <a:rPr sz="1600" b="0" i="0">
+                <a:solidFill>
+                  <a:srgbClr val="1B2330"/>
+                </a:solidFill>
+                <a:latin typeface="Montserrat"/>
+              </a:rPr>
+              <a:t>Grado 2: desde zona común, la distribuidora</a:t>
+            </a:r>
+          </a:p>
+          <a:p>
+            <a:pPr>
+              <a:spcAft>
+                <a:spcPts val="1100"/>
+              </a:spcAft>
+            </a:pPr>
+            <a:r>
+              <a:rPr sz="1600" b="1" i="0">
+                <a:solidFill>
+                  <a:srgbClr val="E8801A"/>
+                </a:solidFill>
+                <a:latin typeface="Montserrat"/>
+              </a:rPr>
+              <a:t>▸  </a:t>
+            </a:r>
+            <a:r>
+              <a:rPr sz="1600" b="0" i="0">
+                <a:solidFill>
+                  <a:srgbClr val="1B2330"/>
+                </a:solidFill>
+                <a:latin typeface="Montserrat"/>
+              </a:rPr>
+              <a:t>Grado 3: el menos accesible</a:t>
+            </a:r>
+          </a:p>
+        </p:txBody>
+      </p:sp>
+      <p:sp>
+        <p:nvSpPr>
+          <p:cNvPr id="9" name="imgph" descr="IMGQ:gas valve behind access panel"/>
+          <p:cNvSpPr/>
+          <p:nvPr/>
+        </p:nvSpPr>
+        <p:spPr>
+          <a:xfrm>
+            <a:off x="822960" y="1965960"/>
+            <a:ext cx="5303520" cy="4572000"/>
+          </a:xfrm>
+          <a:prstGeom prst="roundRect">
+            <a:avLst/>
+          </a:prstGeom>
+          <a:solidFill>
+            <a:srgbClr val="F3F6FB"/>
+          </a:solidFill>
+          <a:ln w="12700">
+            <a:solidFill>
+              <a:srgbClr val="C7D2E6"/>
+            </a:solidFill>
+          </a:ln>
+          <a:effectLst/>
+        </p:spPr>
+        <p:style>
+          <a:lnRef idx="1">
+            <a:schemeClr val="accent1"/>
+          </a:lnRef>
+          <a:fillRef idx="3">
+            <a:schemeClr val="accent1"/>
+          </a:fillRef>
+          <a:effectRef idx="2">
+            <a:schemeClr val="accent1"/>
+          </a:effectRef>
+          <a:fontRef idx="minor">
+            <a:schemeClr val="lt1"/>
+          </a:fontRef>
+        </p:style>
+        <p:txBody>
+          <a:bodyPr rtlCol="0" anchor="ctr"/>
+          <a:lstStyle/>
+          <a:p>
+            <a:pPr algn="ctr"/>
+          </a:p>
+        </p:txBody>
+      </p:sp>
+      <p:sp>
+        <p:nvSpPr>
+          <p:cNvPr id="10" name="TextBox 9"/>
+          <p:cNvSpPr txBox="1"/>
+          <p:nvPr/>
+        </p:nvSpPr>
+        <p:spPr>
+          <a:xfrm>
+            <a:off x="1097280" y="3611880"/>
+            <a:ext cx="4754880" cy="1280160"/>
+          </a:xfrm>
+          <a:prstGeom prst="rect">
+            <a:avLst/>
+          </a:prstGeom>
+          <a:noFill/>
+        </p:spPr>
+        <p:txBody>
+          <a:bodyPr wrap="square">
+            <a:spAutoFit/>
+          </a:bodyPr>
+          <a:lstStyle/>
+          <a:p>
+            <a:pPr algn="ctr"/>
+            <a:r>
+              <a:rPr sz="1400" b="1" i="0">
+                <a:solidFill>
+                  <a:srgbClr val="64748B"/>
+                </a:solidFill>
+                <a:latin typeface="Montserrat"/>
+              </a:rPr>
+              <a:t>IMAGEN</a:t>
+            </a:r>
+          </a:p>
+          <a:p>
+            <a:pPr algn="ctr"/>
+            <a:r>
+              <a:rPr sz="1100" b="0" i="1">
+                <a:solidFill>
+                  <a:srgbClr val="64748B"/>
+                </a:solidFill>
+                <a:latin typeface="Montserrat"/>
+              </a:rPr>
+              <a:t>gas valve behind access panel</a:t>
             </a:r>
           </a:p>
         </p:txBody>
@@ -8859,6 +10314,18 @@
   <p:clrMapOvr>
     <a:masterClrMapping/>
   </p:clrMapOvr>
+  <mc:AlternateContent xmlns:mc="http://schemas.openxmlformats.org/markup-compatibility/2006">
+    <mc:Choice xmlns:p14="http://schemas.microsoft.com/office/powerpoint/2010/main" Requires="p14">
+      <p:transition spd="med" p14:dur="700">
+        <p14:cube dir="l"/>
+      </p:transition>
+    </mc:Choice>
+    <mc:Fallback>
+      <p:transition spd="med">
+        <p:push dir="l"/>
+      </p:transition>
+    </mc:Fallback>
+  </mc:AlternateContent>
 </p:sld>
 </file>
 
@@ -8946,7 +10413,7 @@
                 </a:solidFill>
                 <a:latin typeface="Montserrat"/>
               </a:rPr>
-              <a:t>002 / 018</a:t>
+              <a:t>002 / 024</a:t>
             </a:r>
           </a:p>
         </p:txBody>
@@ -9021,7 +10488,7 @@
       </p:sp>
       <p:sp>
         <p:nvSpPr>
-          <p:cNvPr id="6" name="Rounded Rectangle 5"/>
+          <p:cNvPr id="6" name="Rectangle 5"/>
           <p:cNvSpPr/>
           <p:nvPr/>
         </p:nvSpPr>
@@ -9030,7 +10497,7 @@
             <a:off x="868680" y="1234440"/>
             <a:ext cx="1463040" cy="73152"/>
           </a:xfrm>
-          <a:prstGeom prst="roundRect">
+          <a:prstGeom prst="rect">
             <a:avLst/>
           </a:prstGeom>
           <a:solidFill>
@@ -9111,14 +10578,58 @@
       </p:sp>
       <p:sp>
         <p:nvSpPr>
-          <p:cNvPr id="8" name="TextBox 7"/>
+          <p:cNvPr id="8" name="Rectangle 7"/>
+          <p:cNvSpPr/>
+          <p:nvPr/>
+        </p:nvSpPr>
+        <p:spPr>
+          <a:xfrm>
+            <a:off x="822960" y="2011680"/>
+            <a:ext cx="3017520" cy="128016"/>
+          </a:xfrm>
+          <a:prstGeom prst="rect">
+            <a:avLst/>
+          </a:prstGeom>
+          <a:solidFill>
+            <a:srgbClr val="E8801A"/>
+          </a:solidFill>
+          <a:ln>
+            <a:noFill/>
+          </a:ln>
+          <a:effectLst/>
+        </p:spPr>
+        <p:style>
+          <a:lnRef idx="1">
+            <a:schemeClr val="accent1"/>
+          </a:lnRef>
+          <a:fillRef idx="3">
+            <a:schemeClr val="accent1"/>
+          </a:fillRef>
+          <a:effectRef idx="2">
+            <a:schemeClr val="accent1"/>
+          </a:effectRef>
+          <a:fontRef idx="minor">
+            <a:schemeClr val="lt1"/>
+          </a:fontRef>
+        </p:style>
+        <p:txBody>
+          <a:bodyPr rtlCol="0" anchor="ctr"/>
+          <a:lstStyle/>
+          <a:p>
+            <a:pPr algn="ctr"/>
+          </a:p>
+        </p:txBody>
+      </p:sp>
+      <p:sp>
+        <p:nvSpPr>
+          <p:cNvPr id="9" name="TextBox 8"/>
           <p:cNvSpPr txBox="1"/>
           <p:nvPr/>
         </p:nvSpPr>
         <p:spPr>
           <a:xfrm>
-            <a:off x="822960" y="2331720"/>
-            <a:ext cx="3017520" cy="1463040"/>
+            <a:off x="822960" y="2377440"/>
+            <a:ext cx="3017520" cy="1371600"/>
           </a:xfrm>
           <a:prstGeom prst="rect">
             <a:avLst/>
@@ -9133,7 +10644,7 @@
           <a:p>
             <a:pPr algn="ctr"/>
             <a:r>
-              <a:rPr sz="6000" b="1" i="0">
+              <a:rPr sz="5800" b="1" i="0">
                 <a:solidFill>
                   <a:srgbClr val="1E2761"/>
                 </a:solidFill>
@@ -9146,13 +10657,13 @@
       </p:sp>
       <p:sp>
         <p:nvSpPr>
-          <p:cNvPr id="9" name="TextBox 8"/>
+          <p:cNvPr id="10" name="TextBox 9"/>
           <p:cNvSpPr txBox="1"/>
           <p:nvPr/>
         </p:nvSpPr>
         <p:spPr>
           <a:xfrm>
-            <a:off x="1051560" y="3611880"/>
+            <a:off x="1051560" y="3657600"/>
             <a:ext cx="2560320" cy="1005840"/>
           </a:xfrm>
           <a:prstGeom prst="rect">
@@ -9181,7 +10692,7 @@
       </p:sp>
       <p:sp>
         <p:nvSpPr>
-          <p:cNvPr id="10" name="Rounded Rectangle 9"/>
+          <p:cNvPr id="11" name="Rounded Rectangle 10"/>
           <p:cNvSpPr/>
           <p:nvPr/>
         </p:nvSpPr>
@@ -9227,14 +10738,58 @@
       </p:sp>
       <p:sp>
         <p:nvSpPr>
-          <p:cNvPr id="11" name="TextBox 10"/>
+          <p:cNvPr id="12" name="Rectangle 11"/>
+          <p:cNvSpPr/>
+          <p:nvPr/>
+        </p:nvSpPr>
+        <p:spPr>
+          <a:xfrm>
+            <a:off x="4617720" y="2011680"/>
+            <a:ext cx="3017520" cy="128016"/>
+          </a:xfrm>
+          <a:prstGeom prst="rect">
+            <a:avLst/>
+          </a:prstGeom>
+          <a:solidFill>
+            <a:srgbClr val="E8801A"/>
+          </a:solidFill>
+          <a:ln>
+            <a:noFill/>
+          </a:ln>
+          <a:effectLst/>
+        </p:spPr>
+        <p:style>
+          <a:lnRef idx="1">
+            <a:schemeClr val="accent1"/>
+          </a:lnRef>
+          <a:fillRef idx="3">
+            <a:schemeClr val="accent1"/>
+          </a:fillRef>
+          <a:effectRef idx="2">
+            <a:schemeClr val="accent1"/>
+          </a:effectRef>
+          <a:fontRef idx="minor">
+            <a:schemeClr val="lt1"/>
+          </a:fontRef>
+        </p:style>
+        <p:txBody>
+          <a:bodyPr rtlCol="0" anchor="ctr"/>
+          <a:lstStyle/>
+          <a:p>
+            <a:pPr algn="ctr"/>
+          </a:p>
+        </p:txBody>
+      </p:sp>
+      <p:sp>
+        <p:nvSpPr>
+          <p:cNvPr id="13" name="TextBox 12"/>
           <p:cNvSpPr txBox="1"/>
           <p:nvPr/>
         </p:nvSpPr>
         <p:spPr>
           <a:xfrm>
-            <a:off x="4617720" y="2331720"/>
-            <a:ext cx="3017520" cy="1463040"/>
+            <a:off x="4617720" y="2377440"/>
+            <a:ext cx="3017520" cy="1371600"/>
           </a:xfrm>
           <a:prstGeom prst="rect">
             <a:avLst/>
@@ -9249,7 +10804,7 @@
           <a:p>
             <a:pPr algn="ctr"/>
             <a:r>
-              <a:rPr sz="6000" b="1" i="0">
+              <a:rPr sz="5800" b="1" i="0">
                 <a:solidFill>
                   <a:srgbClr val="1E2761"/>
                 </a:solidFill>
@@ -9262,13 +10817,13 @@
       </p:sp>
       <p:sp>
         <p:nvSpPr>
-          <p:cNvPr id="12" name="TextBox 11"/>
+          <p:cNvPr id="14" name="TextBox 13"/>
           <p:cNvSpPr txBox="1"/>
           <p:nvPr/>
         </p:nvSpPr>
         <p:spPr>
           <a:xfrm>
-            <a:off x="4846320" y="3611880"/>
+            <a:off x="4846320" y="3657600"/>
             <a:ext cx="2560320" cy="1005840"/>
           </a:xfrm>
           <a:prstGeom prst="rect">
@@ -9297,7 +10852,7 @@
       </p:sp>
       <p:sp>
         <p:nvSpPr>
-          <p:cNvPr id="13" name="Rounded Rectangle 12"/>
+          <p:cNvPr id="15" name="Rounded Rectangle 14"/>
           <p:cNvSpPr/>
           <p:nvPr/>
         </p:nvSpPr>
@@ -9343,14 +10898,58 @@
       </p:sp>
       <p:sp>
         <p:nvSpPr>
-          <p:cNvPr id="14" name="TextBox 13"/>
+          <p:cNvPr id="16" name="Rectangle 15"/>
+          <p:cNvSpPr/>
+          <p:nvPr/>
+        </p:nvSpPr>
+        <p:spPr>
+          <a:xfrm>
+            <a:off x="8412480" y="2011680"/>
+            <a:ext cx="3017520" cy="128016"/>
+          </a:xfrm>
+          <a:prstGeom prst="rect">
+            <a:avLst/>
+          </a:prstGeom>
+          <a:solidFill>
+            <a:srgbClr val="E8801A"/>
+          </a:solidFill>
+          <a:ln>
+            <a:noFill/>
+          </a:ln>
+          <a:effectLst/>
+        </p:spPr>
+        <p:style>
+          <a:lnRef idx="1">
+            <a:schemeClr val="accent1"/>
+          </a:lnRef>
+          <a:fillRef idx="3">
+            <a:schemeClr val="accent1"/>
+          </a:fillRef>
+          <a:effectRef idx="2">
+            <a:schemeClr val="accent1"/>
+          </a:effectRef>
+          <a:fontRef idx="minor">
+            <a:schemeClr val="lt1"/>
+          </a:fontRef>
+        </p:style>
+        <p:txBody>
+          <a:bodyPr rtlCol="0" anchor="ctr"/>
+          <a:lstStyle/>
+          <a:p>
+            <a:pPr algn="ctr"/>
+          </a:p>
+        </p:txBody>
+      </p:sp>
+      <p:sp>
+        <p:nvSpPr>
+          <p:cNvPr id="17" name="TextBox 16"/>
           <p:cNvSpPr txBox="1"/>
           <p:nvPr/>
         </p:nvSpPr>
         <p:spPr>
           <a:xfrm>
-            <a:off x="8412480" y="2331720"/>
-            <a:ext cx="3017520" cy="1463040"/>
+            <a:off x="8412480" y="2377440"/>
+            <a:ext cx="3017520" cy="1371600"/>
           </a:xfrm>
           <a:prstGeom prst="rect">
             <a:avLst/>
@@ -9365,7 +10964,7 @@
           <a:p>
             <a:pPr algn="ctr"/>
             <a:r>
-              <a:rPr sz="6000" b="1" i="0">
+              <a:rPr sz="5800" b="1" i="0">
                 <a:solidFill>
                   <a:srgbClr val="1E2761"/>
                 </a:solidFill>
@@ -9378,13 +10977,13 @@
       </p:sp>
       <p:sp>
         <p:nvSpPr>
-          <p:cNvPr id="15" name="TextBox 14"/>
+          <p:cNvPr id="18" name="TextBox 17"/>
           <p:cNvSpPr txBox="1"/>
           <p:nvPr/>
         </p:nvSpPr>
         <p:spPr>
           <a:xfrm>
-            <a:off x="8641080" y="3611880"/>
+            <a:off x="8641080" y="3657600"/>
             <a:ext cx="2560320" cy="1005840"/>
           </a:xfrm>
           <a:prstGeom prst="rect">
@@ -9416,6 +11015,2575 @@
   <p:clrMapOvr>
     <a:masterClrMapping/>
   </p:clrMapOvr>
+  <mc:AlternateContent xmlns:mc="http://schemas.openxmlformats.org/markup-compatibility/2006">
+    <mc:Choice xmlns:p14="http://schemas.microsoft.com/office/powerpoint/2010/main" Requires="p14">
+      <p:transition spd="med" p14:dur="700">
+        <p14:cube dir="r"/>
+      </p:transition>
+    </mc:Choice>
+    <mc:Fallback>
+      <p:transition spd="med">
+        <p:push dir="r"/>
+      </p:transition>
+    </mc:Fallback>
+  </mc:AlternateContent>
+</p:sld>
+</file>
+
+<file path=ppt/slides/slide20.xml><?xml version="1.0" encoding="utf-8"?>
+<p:sld xmlns:a="http://schemas.openxmlformats.org/drawingml/2006/main" xmlns:p="http://schemas.openxmlformats.org/presentationml/2006/main" xmlns:r="http://schemas.openxmlformats.org/officeDocument/2006/relationships">
+  <p:cSld>
+    <p:spTree>
+      <p:nvGrpSpPr>
+        <p:cNvPr id="1" name=""/>
+        <p:cNvGrpSpPr/>
+        <p:nvPr/>
+      </p:nvGrpSpPr>
+      <p:grpSpPr/>
+      <p:sp>
+        <p:nvSpPr>
+          <p:cNvPr id="2" name="Rectangle 1"/>
+          <p:cNvSpPr/>
+          <p:nvPr/>
+        </p:nvSpPr>
+        <p:spPr>
+          <a:xfrm>
+            <a:off x="0" y="0"/>
+            <a:ext cx="12191695" cy="6858000"/>
+          </a:xfrm>
+          <a:prstGeom prst="rect">
+            <a:avLst/>
+          </a:prstGeom>
+          <a:solidFill>
+            <a:srgbClr val="FFFFFF"/>
+          </a:solidFill>
+          <a:ln>
+            <a:noFill/>
+          </a:ln>
+          <a:effectLst/>
+        </p:spPr>
+        <p:style>
+          <a:lnRef idx="1">
+            <a:schemeClr val="accent1"/>
+          </a:lnRef>
+          <a:fillRef idx="3">
+            <a:schemeClr val="accent1"/>
+          </a:fillRef>
+          <a:effectRef idx="2">
+            <a:schemeClr val="accent1"/>
+          </a:effectRef>
+          <a:fontRef idx="minor">
+            <a:schemeClr val="lt1"/>
+          </a:fontRef>
+        </p:style>
+        <p:txBody>
+          <a:bodyPr rtlCol="0" anchor="ctr"/>
+          <a:lstStyle/>
+          <a:p>
+            <a:pPr algn="ctr"/>
+          </a:p>
+        </p:txBody>
+      </p:sp>
+      <p:sp>
+        <p:nvSpPr>
+          <p:cNvPr id="3" name="TextBox 2"/>
+          <p:cNvSpPr txBox="1"/>
+          <p:nvPr/>
+        </p:nvSpPr>
+        <p:spPr>
+          <a:xfrm>
+            <a:off x="10607040" y="320040"/>
+            <a:ext cx="1371600" cy="365760"/>
+          </a:xfrm>
+          <a:prstGeom prst="rect">
+            <a:avLst/>
+          </a:prstGeom>
+          <a:noFill/>
+        </p:spPr>
+        <p:txBody>
+          <a:bodyPr wrap="square">
+            <a:spAutoFit/>
+          </a:bodyPr>
+          <a:lstStyle/>
+          <a:p>
+            <a:pPr algn="r"/>
+            <a:r>
+              <a:rPr sz="1000" b="1" i="0">
+                <a:solidFill>
+                  <a:srgbClr val="64748B"/>
+                </a:solidFill>
+                <a:latin typeface="Montserrat"/>
+              </a:rPr>
+              <a:t>020 / 024</a:t>
+            </a:r>
+          </a:p>
+        </p:txBody>
+      </p:sp>
+      <p:sp>
+        <p:nvSpPr>
+          <p:cNvPr id="4" name="TextBox 3"/>
+          <p:cNvSpPr txBox="1"/>
+          <p:nvPr/>
+        </p:nvSpPr>
+        <p:spPr>
+          <a:xfrm>
+            <a:off x="457200" y="6419088"/>
+            <a:ext cx="8229600" cy="365760"/>
+          </a:xfrm>
+          <a:prstGeom prst="rect">
+            <a:avLst/>
+          </a:prstGeom>
+          <a:noFill/>
+        </p:spPr>
+        <p:txBody>
+          <a:bodyPr wrap="square">
+            <a:spAutoFit/>
+          </a:bodyPr>
+          <a:lstStyle/>
+          <a:p>
+            <a:r>
+              <a:rPr sz="900" b="0" i="0">
+                <a:solidFill>
+                  <a:srgbClr val="64748B"/>
+                </a:solidFill>
+                <a:latin typeface="Montserrat"/>
+              </a:rPr>
+              <a:t>Curso Gas B · Tema 11 · UNE 60670-4 · Diseño y construcción</a:t>
+            </a:r>
+          </a:p>
+        </p:txBody>
+      </p:sp>
+      <p:sp>
+        <p:nvSpPr>
+          <p:cNvPr id="5" name="TextBox 4"/>
+          <p:cNvSpPr txBox="1"/>
+          <p:nvPr/>
+        </p:nvSpPr>
+        <p:spPr>
+          <a:xfrm>
+            <a:off x="822960" y="457200"/>
+            <a:ext cx="10058400" cy="365760"/>
+          </a:xfrm>
+          <a:prstGeom prst="rect">
+            <a:avLst/>
+          </a:prstGeom>
+          <a:noFill/>
+        </p:spPr>
+        <p:txBody>
+          <a:bodyPr wrap="square">
+            <a:spAutoFit/>
+          </a:bodyPr>
+          <a:lstStyle/>
+          <a:p>
+            <a:r>
+              <a:rPr sz="1300" b="1" i="0">
+                <a:solidFill>
+                  <a:srgbClr val="E8801A"/>
+                </a:solidFill>
+                <a:latin typeface="Montserrat"/>
+              </a:rPr>
+              <a:t>APARTADO 7.6 · MULTIFUNCIÓN</a:t>
+            </a:r>
+          </a:p>
+        </p:txBody>
+      </p:sp>
+      <p:sp>
+        <p:nvSpPr>
+          <p:cNvPr id="6" name="TextBox 5"/>
+          <p:cNvSpPr txBox="1"/>
+          <p:nvPr/>
+        </p:nvSpPr>
+        <p:spPr>
+          <a:xfrm>
+            <a:off x="822960" y="868680"/>
+            <a:ext cx="10515600" cy="914400"/>
+          </a:xfrm>
+          <a:prstGeom prst="rect">
+            <a:avLst/>
+          </a:prstGeom>
+          <a:noFill/>
+        </p:spPr>
+        <p:txBody>
+          <a:bodyPr wrap="square">
+            <a:spAutoFit/>
+          </a:bodyPr>
+          <a:lstStyle/>
+          <a:p>
+            <a:r>
+              <a:rPr sz="2800" b="1" i="0">
+                <a:solidFill>
+                  <a:srgbClr val="1E2761"/>
+                </a:solidFill>
+                <a:latin typeface="Montserrat"/>
+              </a:rPr>
+              <a:t>Una llave, varios sombreros</a:t>
+            </a:r>
+          </a:p>
+        </p:txBody>
+      </p:sp>
+      <p:sp>
+        <p:nvSpPr>
+          <p:cNvPr id="7" name="Rectangle 6"/>
+          <p:cNvSpPr/>
+          <p:nvPr/>
+        </p:nvSpPr>
+        <p:spPr>
+          <a:xfrm>
+            <a:off x="868680" y="1627632"/>
+            <a:ext cx="2011680" cy="73152"/>
+          </a:xfrm>
+          <a:prstGeom prst="rect">
+            <a:avLst/>
+          </a:prstGeom>
+          <a:solidFill>
+            <a:srgbClr val="E8801A"/>
+          </a:solidFill>
+          <a:ln>
+            <a:noFill/>
+          </a:ln>
+          <a:effectLst/>
+        </p:spPr>
+        <p:style>
+          <a:lnRef idx="1">
+            <a:schemeClr val="accent1"/>
+          </a:lnRef>
+          <a:fillRef idx="3">
+            <a:schemeClr val="accent1"/>
+          </a:fillRef>
+          <a:effectRef idx="2">
+            <a:schemeClr val="accent1"/>
+          </a:effectRef>
+          <a:fontRef idx="minor">
+            <a:schemeClr val="lt1"/>
+          </a:fontRef>
+        </p:style>
+        <p:txBody>
+          <a:bodyPr rtlCol="0" anchor="ctr"/>
+          <a:lstStyle/>
+          <a:p>
+            <a:pPr algn="ctr"/>
+          </a:p>
+        </p:txBody>
+      </p:sp>
+      <p:sp>
+        <p:nvSpPr>
+          <p:cNvPr id="8" name="TextBox 7"/>
+          <p:cNvSpPr txBox="1"/>
+          <p:nvPr/>
+        </p:nvSpPr>
+        <p:spPr>
+          <a:xfrm>
+            <a:off x="822960" y="1965960"/>
+            <a:ext cx="5029200" cy="4206240"/>
+          </a:xfrm>
+          <a:prstGeom prst="rect">
+            <a:avLst/>
+          </a:prstGeom>
+          <a:noFill/>
+        </p:spPr>
+        <p:txBody>
+          <a:bodyPr wrap="square">
+            <a:spAutoFit/>
+          </a:bodyPr>
+          <a:lstStyle/>
+          <a:p>
+            <a:pPr>
+              <a:spcAft>
+                <a:spcPts val="1100"/>
+              </a:spcAft>
+            </a:pPr>
+            <a:r>
+              <a:rPr sz="1600" b="1" i="0">
+                <a:solidFill>
+                  <a:srgbClr val="E8801A"/>
+                </a:solidFill>
+                <a:latin typeface="Montserrat"/>
+              </a:rPr>
+              <a:t>▸  </a:t>
+            </a:r>
+            <a:r>
+              <a:rPr sz="1600" b="0" i="0">
+                <a:solidFill>
+                  <a:srgbClr val="1B2330"/>
+                </a:solidFill>
+                <a:latin typeface="Montserrat"/>
+              </a:rPr>
+              <a:t>Multiuso si cumple todo lo exigido</a:t>
+            </a:r>
+          </a:p>
+          <a:p>
+            <a:pPr>
+              <a:spcAft>
+                <a:spcPts val="1100"/>
+              </a:spcAft>
+            </a:pPr>
+            <a:r>
+              <a:rPr sz="1600" b="1" i="0">
+                <a:solidFill>
+                  <a:srgbClr val="E8801A"/>
+                </a:solidFill>
+                <a:latin typeface="Montserrat"/>
+              </a:rPr>
+              <a:t>▸  </a:t>
+            </a:r>
+            <a:r>
+              <a:rPr sz="1600" b="0" i="0">
+                <a:solidFill>
+                  <a:srgbClr val="1B2330"/>
+                </a:solidFill>
+                <a:latin typeface="Montserrat"/>
+              </a:rPr>
+              <a:t>Vivienda NUNCA hace de aparato</a:t>
+            </a:r>
+          </a:p>
+          <a:p>
+            <a:pPr>
+              <a:spcAft>
+                <a:spcPts val="1100"/>
+              </a:spcAft>
+            </a:pPr>
+            <a:r>
+              <a:rPr sz="1600" b="1" i="0">
+                <a:solidFill>
+                  <a:srgbClr val="E8801A"/>
+                </a:solidFill>
+                <a:latin typeface="Montserrat"/>
+              </a:rPr>
+              <a:t>▸  </a:t>
+            </a:r>
+            <a:r>
+              <a:rPr sz="1600" b="0" i="0">
+                <a:solidFill>
+                  <a:srgbClr val="1B2330"/>
+                </a:solidFill>
+                <a:latin typeface="Montserrat"/>
+              </a:rPr>
+              <a:t>Regulador no hace de usuario (salvo GLP ≤ 15 kg)</a:t>
+            </a:r>
+          </a:p>
+        </p:txBody>
+      </p:sp>
+      <p:sp>
+        <p:nvSpPr>
+          <p:cNvPr id="9" name="imgph" descr="IMGQ:brass gas ball valve close up"/>
+          <p:cNvSpPr/>
+          <p:nvPr/>
+        </p:nvSpPr>
+        <p:spPr>
+          <a:xfrm>
+            <a:off x="6080760" y="1965960"/>
+            <a:ext cx="5303520" cy="4572000"/>
+          </a:xfrm>
+          <a:prstGeom prst="roundRect">
+            <a:avLst/>
+          </a:prstGeom>
+          <a:solidFill>
+            <a:srgbClr val="F3F6FB"/>
+          </a:solidFill>
+          <a:ln w="12700">
+            <a:solidFill>
+              <a:srgbClr val="C7D2E6"/>
+            </a:solidFill>
+          </a:ln>
+          <a:effectLst/>
+        </p:spPr>
+        <p:style>
+          <a:lnRef idx="1">
+            <a:schemeClr val="accent1"/>
+          </a:lnRef>
+          <a:fillRef idx="3">
+            <a:schemeClr val="accent1"/>
+          </a:fillRef>
+          <a:effectRef idx="2">
+            <a:schemeClr val="accent1"/>
+          </a:effectRef>
+          <a:fontRef idx="minor">
+            <a:schemeClr val="lt1"/>
+          </a:fontRef>
+        </p:style>
+        <p:txBody>
+          <a:bodyPr rtlCol="0" anchor="ctr"/>
+          <a:lstStyle/>
+          <a:p>
+            <a:pPr algn="ctr"/>
+          </a:p>
+        </p:txBody>
+      </p:sp>
+      <p:sp>
+        <p:nvSpPr>
+          <p:cNvPr id="10" name="TextBox 9"/>
+          <p:cNvSpPr txBox="1"/>
+          <p:nvPr/>
+        </p:nvSpPr>
+        <p:spPr>
+          <a:xfrm>
+            <a:off x="6355080" y="3611880"/>
+            <a:ext cx="4754880" cy="1280160"/>
+          </a:xfrm>
+          <a:prstGeom prst="rect">
+            <a:avLst/>
+          </a:prstGeom>
+          <a:noFill/>
+        </p:spPr>
+        <p:txBody>
+          <a:bodyPr wrap="square">
+            <a:spAutoFit/>
+          </a:bodyPr>
+          <a:lstStyle/>
+          <a:p>
+            <a:pPr algn="ctr"/>
+            <a:r>
+              <a:rPr sz="1400" b="1" i="0">
+                <a:solidFill>
+                  <a:srgbClr val="64748B"/>
+                </a:solidFill>
+                <a:latin typeface="Montserrat"/>
+              </a:rPr>
+              <a:t>IMAGEN</a:t>
+            </a:r>
+          </a:p>
+          <a:p>
+            <a:pPr algn="ctr"/>
+            <a:r>
+              <a:rPr sz="1100" b="0" i="1">
+                <a:solidFill>
+                  <a:srgbClr val="64748B"/>
+                </a:solidFill>
+                <a:latin typeface="Montserrat"/>
+              </a:rPr>
+              <a:t>brass gas ball valve close up</a:t>
+            </a:r>
+          </a:p>
+        </p:txBody>
+      </p:sp>
+    </p:spTree>
+  </p:cSld>
+  <p:clrMapOvr>
+    <a:masterClrMapping/>
+  </p:clrMapOvr>
+  <mc:AlternateContent xmlns:mc="http://schemas.openxmlformats.org/markup-compatibility/2006">
+    <mc:Choice xmlns:p14="http://schemas.microsoft.com/office/powerpoint/2010/main" Requires="p14">
+      <p:transition spd="med" p14:dur="700">
+        <p14:cube dir="r"/>
+      </p:transition>
+    </mc:Choice>
+    <mc:Fallback>
+      <p:transition spd="med">
+        <p:push dir="r"/>
+      </p:transition>
+    </mc:Fallback>
+  </mc:AlternateContent>
+</p:sld>
+</file>
+
+<file path=ppt/slides/slide21.xml><?xml version="1.0" encoding="utf-8"?>
+<p:sld xmlns:a="http://schemas.openxmlformats.org/drawingml/2006/main" xmlns:p="http://schemas.openxmlformats.org/presentationml/2006/main" xmlns:r="http://schemas.openxmlformats.org/officeDocument/2006/relationships">
+  <p:cSld>
+    <p:spTree>
+      <p:nvGrpSpPr>
+        <p:cNvPr id="1" name=""/>
+        <p:cNvGrpSpPr/>
+        <p:nvPr/>
+      </p:nvGrpSpPr>
+      <p:grpSpPr/>
+      <p:sp>
+        <p:nvSpPr>
+          <p:cNvPr id="2" name="Rectangle 1"/>
+          <p:cNvSpPr/>
+          <p:nvPr/>
+        </p:nvSpPr>
+        <p:spPr>
+          <a:xfrm>
+            <a:off x="0" y="0"/>
+            <a:ext cx="12191695" cy="6858000"/>
+          </a:xfrm>
+          <a:prstGeom prst="rect">
+            <a:avLst/>
+          </a:prstGeom>
+          <a:solidFill>
+            <a:srgbClr val="FFFFFF"/>
+          </a:solidFill>
+          <a:ln>
+            <a:noFill/>
+          </a:ln>
+          <a:effectLst/>
+        </p:spPr>
+        <p:style>
+          <a:lnRef idx="1">
+            <a:schemeClr val="accent1"/>
+          </a:lnRef>
+          <a:fillRef idx="3">
+            <a:schemeClr val="accent1"/>
+          </a:fillRef>
+          <a:effectRef idx="2">
+            <a:schemeClr val="accent1"/>
+          </a:effectRef>
+          <a:fontRef idx="minor">
+            <a:schemeClr val="lt1"/>
+          </a:fontRef>
+        </p:style>
+        <p:txBody>
+          <a:bodyPr rtlCol="0" anchor="ctr"/>
+          <a:lstStyle/>
+          <a:p>
+            <a:pPr algn="ctr"/>
+          </a:p>
+        </p:txBody>
+      </p:sp>
+      <p:sp>
+        <p:nvSpPr>
+          <p:cNvPr id="3" name="TextBox 2"/>
+          <p:cNvSpPr txBox="1"/>
+          <p:nvPr/>
+        </p:nvSpPr>
+        <p:spPr>
+          <a:xfrm>
+            <a:off x="10607040" y="320040"/>
+            <a:ext cx="1371600" cy="365760"/>
+          </a:xfrm>
+          <a:prstGeom prst="rect">
+            <a:avLst/>
+          </a:prstGeom>
+          <a:noFill/>
+        </p:spPr>
+        <p:txBody>
+          <a:bodyPr wrap="square">
+            <a:spAutoFit/>
+          </a:bodyPr>
+          <a:lstStyle/>
+          <a:p>
+            <a:pPr algn="r"/>
+            <a:r>
+              <a:rPr sz="1000" b="1" i="0">
+                <a:solidFill>
+                  <a:srgbClr val="64748B"/>
+                </a:solidFill>
+                <a:latin typeface="Montserrat"/>
+              </a:rPr>
+              <a:t>021 / 024</a:t>
+            </a:r>
+          </a:p>
+        </p:txBody>
+      </p:sp>
+      <p:sp>
+        <p:nvSpPr>
+          <p:cNvPr id="4" name="TextBox 3"/>
+          <p:cNvSpPr txBox="1"/>
+          <p:nvPr/>
+        </p:nvSpPr>
+        <p:spPr>
+          <a:xfrm>
+            <a:off x="457200" y="6419088"/>
+            <a:ext cx="8229600" cy="365760"/>
+          </a:xfrm>
+          <a:prstGeom prst="rect">
+            <a:avLst/>
+          </a:prstGeom>
+          <a:noFill/>
+        </p:spPr>
+        <p:txBody>
+          <a:bodyPr wrap="square">
+            <a:spAutoFit/>
+          </a:bodyPr>
+          <a:lstStyle/>
+          <a:p>
+            <a:r>
+              <a:rPr sz="900" b="0" i="0">
+                <a:solidFill>
+                  <a:srgbClr val="64748B"/>
+                </a:solidFill>
+                <a:latin typeface="Montserrat"/>
+              </a:rPr>
+              <a:t>Curso Gas B · Tema 11 · UNE 60670-4 · Diseño y construcción</a:t>
+            </a:r>
+          </a:p>
+        </p:txBody>
+      </p:sp>
+      <p:sp>
+        <p:nvSpPr>
+          <p:cNvPr id="5" name="Rectangle 4"/>
+          <p:cNvSpPr/>
+          <p:nvPr/>
+        </p:nvSpPr>
+        <p:spPr>
+          <a:xfrm>
+            <a:off x="0" y="0"/>
+            <a:ext cx="12191695" cy="1143000"/>
+          </a:xfrm>
+          <a:prstGeom prst="rect">
+            <a:avLst/>
+          </a:prstGeom>
+          <a:solidFill>
+            <a:srgbClr val="E8801A"/>
+          </a:solidFill>
+          <a:ln>
+            <a:noFill/>
+          </a:ln>
+          <a:effectLst/>
+        </p:spPr>
+        <p:style>
+          <a:lnRef idx="1">
+            <a:schemeClr val="accent1"/>
+          </a:lnRef>
+          <a:fillRef idx="3">
+            <a:schemeClr val="accent1"/>
+          </a:fillRef>
+          <a:effectRef idx="2">
+            <a:schemeClr val="accent1"/>
+          </a:effectRef>
+          <a:fontRef idx="minor">
+            <a:schemeClr val="lt1"/>
+          </a:fontRef>
+        </p:style>
+        <p:txBody>
+          <a:bodyPr rtlCol="0" anchor="ctr"/>
+          <a:lstStyle/>
+          <a:p>
+            <a:pPr algn="ctr"/>
+          </a:p>
+        </p:txBody>
+      </p:sp>
+      <p:sp>
+        <p:nvSpPr>
+          <p:cNvPr id="6" name="TextBox 5"/>
+          <p:cNvSpPr txBox="1"/>
+          <p:nvPr/>
+        </p:nvSpPr>
+        <p:spPr>
+          <a:xfrm>
+            <a:off x="822960" y="274320"/>
+            <a:ext cx="10515600" cy="640080"/>
+          </a:xfrm>
+          <a:prstGeom prst="rect">
+            <a:avLst/>
+          </a:prstGeom>
+          <a:noFill/>
+        </p:spPr>
+        <p:txBody>
+          <a:bodyPr wrap="square">
+            <a:spAutoFit/>
+          </a:bodyPr>
+          <a:lstStyle/>
+          <a:p>
+            <a:r>
+              <a:rPr sz="2400" b="1" i="0">
+                <a:solidFill>
+                  <a:srgbClr val="FFFFFF"/>
+                </a:solidFill>
+                <a:latin typeface="Montserrat"/>
+              </a:rPr>
+              <a:t>⚡  PREGUNTA RÁPIDA</a:t>
+            </a:r>
+          </a:p>
+        </p:txBody>
+      </p:sp>
+      <p:sp>
+        <p:nvSpPr>
+          <p:cNvPr id="7" name="TextBox 6"/>
+          <p:cNvSpPr txBox="1"/>
+          <p:nvPr/>
+        </p:nvSpPr>
+        <p:spPr>
+          <a:xfrm>
+            <a:off x="822960" y="1508760"/>
+            <a:ext cx="10515600" cy="1371600"/>
+          </a:xfrm>
+          <a:prstGeom prst="rect">
+            <a:avLst/>
+          </a:prstGeom>
+          <a:noFill/>
+        </p:spPr>
+        <p:txBody>
+          <a:bodyPr wrap="square">
+            <a:spAutoFit/>
+          </a:bodyPr>
+          <a:lstStyle/>
+          <a:p>
+            <a:r>
+              <a:rPr sz="2400" b="1" i="0">
+                <a:solidFill>
+                  <a:srgbClr val="1E2761"/>
+                </a:solidFill>
+                <a:latin typeface="Montserrat"/>
+              </a:rPr>
+              <a:t>Según la norma, ¿cuál de estas combinaciones de funciones NUNCA se permite?</a:t>
+            </a:r>
+          </a:p>
+        </p:txBody>
+      </p:sp>
+      <p:sp>
+        <p:nvSpPr>
+          <p:cNvPr id="8" name="Rounded Rectangle 7"/>
+          <p:cNvSpPr/>
+          <p:nvPr/>
+        </p:nvSpPr>
+        <p:spPr>
+          <a:xfrm>
+            <a:off x="822960" y="3291840"/>
+            <a:ext cx="4983480" cy="1143000"/>
+          </a:xfrm>
+          <a:prstGeom prst="roundRect">
+            <a:avLst/>
+          </a:prstGeom>
+          <a:solidFill>
+            <a:srgbClr val="F3F6FB"/>
+          </a:solidFill>
+          <a:ln w="12700">
+            <a:solidFill>
+              <a:srgbClr val="C7D2E6"/>
+            </a:solidFill>
+          </a:ln>
+          <a:effectLst/>
+        </p:spPr>
+        <p:style>
+          <a:lnRef idx="1">
+            <a:schemeClr val="accent1"/>
+          </a:lnRef>
+          <a:fillRef idx="3">
+            <a:schemeClr val="accent1"/>
+          </a:fillRef>
+          <a:effectRef idx="2">
+            <a:schemeClr val="accent1"/>
+          </a:effectRef>
+          <a:fontRef idx="minor">
+            <a:schemeClr val="lt1"/>
+          </a:fontRef>
+        </p:style>
+        <p:txBody>
+          <a:bodyPr rtlCol="0" anchor="ctr"/>
+          <a:lstStyle/>
+          <a:p>
+            <a:pPr algn="ctr"/>
+          </a:p>
+        </p:txBody>
+      </p:sp>
+      <p:sp>
+        <p:nvSpPr>
+          <p:cNvPr id="9" name="Rectangle 8"/>
+          <p:cNvSpPr/>
+          <p:nvPr/>
+        </p:nvSpPr>
+        <p:spPr>
+          <a:xfrm>
+            <a:off x="822960" y="3291840"/>
+            <a:ext cx="640080" cy="1143000"/>
+          </a:xfrm>
+          <a:prstGeom prst="rect">
+            <a:avLst/>
+          </a:prstGeom>
+          <a:solidFill>
+            <a:srgbClr val="1E2761"/>
+          </a:solidFill>
+          <a:ln>
+            <a:noFill/>
+          </a:ln>
+          <a:effectLst/>
+        </p:spPr>
+        <p:style>
+          <a:lnRef idx="1">
+            <a:schemeClr val="accent1"/>
+          </a:lnRef>
+          <a:fillRef idx="3">
+            <a:schemeClr val="accent1"/>
+          </a:fillRef>
+          <a:effectRef idx="2">
+            <a:schemeClr val="accent1"/>
+          </a:effectRef>
+          <a:fontRef idx="minor">
+            <a:schemeClr val="lt1"/>
+          </a:fontRef>
+        </p:style>
+        <p:txBody>
+          <a:bodyPr rtlCol="0" anchor="ctr"/>
+          <a:lstStyle/>
+          <a:p>
+            <a:pPr algn="ctr"/>
+          </a:p>
+        </p:txBody>
+      </p:sp>
+      <p:sp>
+        <p:nvSpPr>
+          <p:cNvPr id="10" name="TextBox 9"/>
+          <p:cNvSpPr txBox="1"/>
+          <p:nvPr/>
+        </p:nvSpPr>
+        <p:spPr>
+          <a:xfrm>
+            <a:off x="822960" y="3611880"/>
+            <a:ext cx="640080" cy="548640"/>
+          </a:xfrm>
+          <a:prstGeom prst="rect">
+            <a:avLst/>
+          </a:prstGeom>
+          <a:noFill/>
+        </p:spPr>
+        <p:txBody>
+          <a:bodyPr wrap="square">
+            <a:spAutoFit/>
+          </a:bodyPr>
+          <a:lstStyle/>
+          <a:p>
+            <a:pPr algn="ctr"/>
+            <a:r>
+              <a:rPr sz="2200" b="1" i="0">
+                <a:solidFill>
+                  <a:srgbClr val="FFFFFF"/>
+                </a:solidFill>
+                <a:latin typeface="Montserrat"/>
+              </a:rPr>
+              <a:t>A</a:t>
+            </a:r>
+          </a:p>
+        </p:txBody>
+      </p:sp>
+      <p:sp>
+        <p:nvSpPr>
+          <p:cNvPr id="11" name="TextBox 10"/>
+          <p:cNvSpPr txBox="1"/>
+          <p:nvPr/>
+        </p:nvSpPr>
+        <p:spPr>
+          <a:xfrm>
+            <a:off x="1600200" y="3474720"/>
+            <a:ext cx="4114800" cy="868680"/>
+          </a:xfrm>
+          <a:prstGeom prst="rect">
+            <a:avLst/>
+          </a:prstGeom>
+          <a:noFill/>
+        </p:spPr>
+        <p:txBody>
+          <a:bodyPr wrap="square">
+            <a:spAutoFit/>
+          </a:bodyPr>
+          <a:lstStyle/>
+          <a:p>
+            <a:r>
+              <a:rPr sz="1400" b="0" i="0">
+                <a:solidFill>
+                  <a:srgbClr val="1B2330"/>
+                </a:solidFill>
+                <a:latin typeface="Montserrat"/>
+              </a:rPr>
+              <a:t>Que la llave de contador haga de llave de usuario</a:t>
+            </a:r>
+          </a:p>
+        </p:txBody>
+      </p:sp>
+      <p:sp>
+        <p:nvSpPr>
+          <p:cNvPr id="12" name="Rounded Rectangle 11"/>
+          <p:cNvSpPr/>
+          <p:nvPr/>
+        </p:nvSpPr>
+        <p:spPr>
+          <a:xfrm>
+            <a:off x="6355080" y="3291840"/>
+            <a:ext cx="4983480" cy="1143000"/>
+          </a:xfrm>
+          <a:prstGeom prst="roundRect">
+            <a:avLst/>
+          </a:prstGeom>
+          <a:solidFill>
+            <a:srgbClr val="F3F6FB"/>
+          </a:solidFill>
+          <a:ln w="12700">
+            <a:solidFill>
+              <a:srgbClr val="C7D2E6"/>
+            </a:solidFill>
+          </a:ln>
+          <a:effectLst/>
+        </p:spPr>
+        <p:style>
+          <a:lnRef idx="1">
+            <a:schemeClr val="accent1"/>
+          </a:lnRef>
+          <a:fillRef idx="3">
+            <a:schemeClr val="accent1"/>
+          </a:fillRef>
+          <a:effectRef idx="2">
+            <a:schemeClr val="accent1"/>
+          </a:effectRef>
+          <a:fontRef idx="minor">
+            <a:schemeClr val="lt1"/>
+          </a:fontRef>
+        </p:style>
+        <p:txBody>
+          <a:bodyPr rtlCol="0" anchor="ctr"/>
+          <a:lstStyle/>
+          <a:p>
+            <a:pPr algn="ctr"/>
+          </a:p>
+        </p:txBody>
+      </p:sp>
+      <p:sp>
+        <p:nvSpPr>
+          <p:cNvPr id="13" name="Rectangle 12"/>
+          <p:cNvSpPr/>
+          <p:nvPr/>
+        </p:nvSpPr>
+        <p:spPr>
+          <a:xfrm>
+            <a:off x="6355080" y="3291840"/>
+            <a:ext cx="640080" cy="1143000"/>
+          </a:xfrm>
+          <a:prstGeom prst="rect">
+            <a:avLst/>
+          </a:prstGeom>
+          <a:solidFill>
+            <a:srgbClr val="1E2761"/>
+          </a:solidFill>
+          <a:ln>
+            <a:noFill/>
+          </a:ln>
+          <a:effectLst/>
+        </p:spPr>
+        <p:style>
+          <a:lnRef idx="1">
+            <a:schemeClr val="accent1"/>
+          </a:lnRef>
+          <a:fillRef idx="3">
+            <a:schemeClr val="accent1"/>
+          </a:fillRef>
+          <a:effectRef idx="2">
+            <a:schemeClr val="accent1"/>
+          </a:effectRef>
+          <a:fontRef idx="minor">
+            <a:schemeClr val="lt1"/>
+          </a:fontRef>
+        </p:style>
+        <p:txBody>
+          <a:bodyPr rtlCol="0" anchor="ctr"/>
+          <a:lstStyle/>
+          <a:p>
+            <a:pPr algn="ctr"/>
+          </a:p>
+        </p:txBody>
+      </p:sp>
+      <p:sp>
+        <p:nvSpPr>
+          <p:cNvPr id="14" name="TextBox 13"/>
+          <p:cNvSpPr txBox="1"/>
+          <p:nvPr/>
+        </p:nvSpPr>
+        <p:spPr>
+          <a:xfrm>
+            <a:off x="6355080" y="3611880"/>
+            <a:ext cx="640080" cy="548640"/>
+          </a:xfrm>
+          <a:prstGeom prst="rect">
+            <a:avLst/>
+          </a:prstGeom>
+          <a:noFill/>
+        </p:spPr>
+        <p:txBody>
+          <a:bodyPr wrap="square">
+            <a:spAutoFit/>
+          </a:bodyPr>
+          <a:lstStyle/>
+          <a:p>
+            <a:pPr algn="ctr"/>
+            <a:r>
+              <a:rPr sz="2200" b="1" i="0">
+                <a:solidFill>
+                  <a:srgbClr val="FFFFFF"/>
+                </a:solidFill>
+                <a:latin typeface="Montserrat"/>
+              </a:rPr>
+              <a:t>B</a:t>
+            </a:r>
+          </a:p>
+        </p:txBody>
+      </p:sp>
+      <p:sp>
+        <p:nvSpPr>
+          <p:cNvPr id="15" name="TextBox 14"/>
+          <p:cNvSpPr txBox="1"/>
+          <p:nvPr/>
+        </p:nvSpPr>
+        <p:spPr>
+          <a:xfrm>
+            <a:off x="7132320" y="3474720"/>
+            <a:ext cx="4114800" cy="868680"/>
+          </a:xfrm>
+          <a:prstGeom prst="rect">
+            <a:avLst/>
+          </a:prstGeom>
+          <a:noFill/>
+        </p:spPr>
+        <p:txBody>
+          <a:bodyPr wrap="square">
+            <a:spAutoFit/>
+          </a:bodyPr>
+          <a:lstStyle/>
+          <a:p>
+            <a:r>
+              <a:rPr sz="1400" b="0" i="0">
+                <a:solidFill>
+                  <a:srgbClr val="1B2330"/>
+                </a:solidFill>
+                <a:latin typeface="Montserrat"/>
+              </a:rPr>
+              <a:t>Que la llave de vivienda haga de llave de aparato</a:t>
+            </a:r>
+          </a:p>
+        </p:txBody>
+      </p:sp>
+      <p:sp>
+        <p:nvSpPr>
+          <p:cNvPr id="16" name="Rounded Rectangle 15"/>
+          <p:cNvSpPr/>
+          <p:nvPr/>
+        </p:nvSpPr>
+        <p:spPr>
+          <a:xfrm>
+            <a:off x="822960" y="4617720"/>
+            <a:ext cx="4983480" cy="1143000"/>
+          </a:xfrm>
+          <a:prstGeom prst="roundRect">
+            <a:avLst/>
+          </a:prstGeom>
+          <a:solidFill>
+            <a:srgbClr val="F3F6FB"/>
+          </a:solidFill>
+          <a:ln w="12700">
+            <a:solidFill>
+              <a:srgbClr val="C7D2E6"/>
+            </a:solidFill>
+          </a:ln>
+          <a:effectLst/>
+        </p:spPr>
+        <p:style>
+          <a:lnRef idx="1">
+            <a:schemeClr val="accent1"/>
+          </a:lnRef>
+          <a:fillRef idx="3">
+            <a:schemeClr val="accent1"/>
+          </a:fillRef>
+          <a:effectRef idx="2">
+            <a:schemeClr val="accent1"/>
+          </a:effectRef>
+          <a:fontRef idx="minor">
+            <a:schemeClr val="lt1"/>
+          </a:fontRef>
+        </p:style>
+        <p:txBody>
+          <a:bodyPr rtlCol="0" anchor="ctr"/>
+          <a:lstStyle/>
+          <a:p>
+            <a:pPr algn="ctr"/>
+          </a:p>
+        </p:txBody>
+      </p:sp>
+      <p:sp>
+        <p:nvSpPr>
+          <p:cNvPr id="17" name="Rectangle 16"/>
+          <p:cNvSpPr/>
+          <p:nvPr/>
+        </p:nvSpPr>
+        <p:spPr>
+          <a:xfrm>
+            <a:off x="822960" y="4617720"/>
+            <a:ext cx="640080" cy="1143000"/>
+          </a:xfrm>
+          <a:prstGeom prst="rect">
+            <a:avLst/>
+          </a:prstGeom>
+          <a:solidFill>
+            <a:srgbClr val="1E2761"/>
+          </a:solidFill>
+          <a:ln>
+            <a:noFill/>
+          </a:ln>
+          <a:effectLst/>
+        </p:spPr>
+        <p:style>
+          <a:lnRef idx="1">
+            <a:schemeClr val="accent1"/>
+          </a:lnRef>
+          <a:fillRef idx="3">
+            <a:schemeClr val="accent1"/>
+          </a:fillRef>
+          <a:effectRef idx="2">
+            <a:schemeClr val="accent1"/>
+          </a:effectRef>
+          <a:fontRef idx="minor">
+            <a:schemeClr val="lt1"/>
+          </a:fontRef>
+        </p:style>
+        <p:txBody>
+          <a:bodyPr rtlCol="0" anchor="ctr"/>
+          <a:lstStyle/>
+          <a:p>
+            <a:pPr algn="ctr"/>
+          </a:p>
+        </p:txBody>
+      </p:sp>
+      <p:sp>
+        <p:nvSpPr>
+          <p:cNvPr id="18" name="TextBox 17"/>
+          <p:cNvSpPr txBox="1"/>
+          <p:nvPr/>
+        </p:nvSpPr>
+        <p:spPr>
+          <a:xfrm>
+            <a:off x="822960" y="4937760"/>
+            <a:ext cx="640080" cy="548640"/>
+          </a:xfrm>
+          <a:prstGeom prst="rect">
+            <a:avLst/>
+          </a:prstGeom>
+          <a:noFill/>
+        </p:spPr>
+        <p:txBody>
+          <a:bodyPr wrap="square">
+            <a:spAutoFit/>
+          </a:bodyPr>
+          <a:lstStyle/>
+          <a:p>
+            <a:pPr algn="ctr"/>
+            <a:r>
+              <a:rPr sz="2200" b="1" i="0">
+                <a:solidFill>
+                  <a:srgbClr val="FFFFFF"/>
+                </a:solidFill>
+                <a:latin typeface="Montserrat"/>
+              </a:rPr>
+              <a:t>C</a:t>
+            </a:r>
+          </a:p>
+        </p:txBody>
+      </p:sp>
+      <p:sp>
+        <p:nvSpPr>
+          <p:cNvPr id="19" name="TextBox 18"/>
+          <p:cNvSpPr txBox="1"/>
+          <p:nvPr/>
+        </p:nvSpPr>
+        <p:spPr>
+          <a:xfrm>
+            <a:off x="1600200" y="4800600"/>
+            <a:ext cx="4114800" cy="868680"/>
+          </a:xfrm>
+          <a:prstGeom prst="rect">
+            <a:avLst/>
+          </a:prstGeom>
+          <a:noFill/>
+        </p:spPr>
+        <p:txBody>
+          <a:bodyPr wrap="square">
+            <a:spAutoFit/>
+          </a:bodyPr>
+          <a:lstStyle/>
+          <a:p>
+            <a:r>
+              <a:rPr sz="1400" b="0" i="0">
+                <a:solidFill>
+                  <a:srgbClr val="1B2330"/>
+                </a:solidFill>
+                <a:latin typeface="Montserrat"/>
+              </a:rPr>
+              <a:t>Que una llave ejerza varias funciones si cumple todos los requisitos</a:t>
+            </a:r>
+          </a:p>
+        </p:txBody>
+      </p:sp>
+      <p:sp>
+        <p:nvSpPr>
+          <p:cNvPr id="20" name="Rounded Rectangle 19"/>
+          <p:cNvSpPr/>
+          <p:nvPr/>
+        </p:nvSpPr>
+        <p:spPr>
+          <a:xfrm>
+            <a:off x="6355080" y="4617720"/>
+            <a:ext cx="4983480" cy="1143000"/>
+          </a:xfrm>
+          <a:prstGeom prst="roundRect">
+            <a:avLst/>
+          </a:prstGeom>
+          <a:solidFill>
+            <a:srgbClr val="F3F6FB"/>
+          </a:solidFill>
+          <a:ln w="12700">
+            <a:solidFill>
+              <a:srgbClr val="C7D2E6"/>
+            </a:solidFill>
+          </a:ln>
+          <a:effectLst/>
+        </p:spPr>
+        <p:style>
+          <a:lnRef idx="1">
+            <a:schemeClr val="accent1"/>
+          </a:lnRef>
+          <a:fillRef idx="3">
+            <a:schemeClr val="accent1"/>
+          </a:fillRef>
+          <a:effectRef idx="2">
+            <a:schemeClr val="accent1"/>
+          </a:effectRef>
+          <a:fontRef idx="minor">
+            <a:schemeClr val="lt1"/>
+          </a:fontRef>
+        </p:style>
+        <p:txBody>
+          <a:bodyPr rtlCol="0" anchor="ctr"/>
+          <a:lstStyle/>
+          <a:p>
+            <a:pPr algn="ctr"/>
+          </a:p>
+        </p:txBody>
+      </p:sp>
+      <p:sp>
+        <p:nvSpPr>
+          <p:cNvPr id="21" name="Rectangle 20"/>
+          <p:cNvSpPr/>
+          <p:nvPr/>
+        </p:nvSpPr>
+        <p:spPr>
+          <a:xfrm>
+            <a:off x="6355080" y="4617720"/>
+            <a:ext cx="640080" cy="1143000"/>
+          </a:xfrm>
+          <a:prstGeom prst="rect">
+            <a:avLst/>
+          </a:prstGeom>
+          <a:solidFill>
+            <a:srgbClr val="1E2761"/>
+          </a:solidFill>
+          <a:ln>
+            <a:noFill/>
+          </a:ln>
+          <a:effectLst/>
+        </p:spPr>
+        <p:style>
+          <a:lnRef idx="1">
+            <a:schemeClr val="accent1"/>
+          </a:lnRef>
+          <a:fillRef idx="3">
+            <a:schemeClr val="accent1"/>
+          </a:fillRef>
+          <a:effectRef idx="2">
+            <a:schemeClr val="accent1"/>
+          </a:effectRef>
+          <a:fontRef idx="minor">
+            <a:schemeClr val="lt1"/>
+          </a:fontRef>
+        </p:style>
+        <p:txBody>
+          <a:bodyPr rtlCol="0" anchor="ctr"/>
+          <a:lstStyle/>
+          <a:p>
+            <a:pPr algn="ctr"/>
+          </a:p>
+        </p:txBody>
+      </p:sp>
+      <p:sp>
+        <p:nvSpPr>
+          <p:cNvPr id="22" name="TextBox 21"/>
+          <p:cNvSpPr txBox="1"/>
+          <p:nvPr/>
+        </p:nvSpPr>
+        <p:spPr>
+          <a:xfrm>
+            <a:off x="6355080" y="4937760"/>
+            <a:ext cx="640080" cy="548640"/>
+          </a:xfrm>
+          <a:prstGeom prst="rect">
+            <a:avLst/>
+          </a:prstGeom>
+          <a:noFill/>
+        </p:spPr>
+        <p:txBody>
+          <a:bodyPr wrap="square">
+            <a:spAutoFit/>
+          </a:bodyPr>
+          <a:lstStyle/>
+          <a:p>
+            <a:pPr algn="ctr"/>
+            <a:r>
+              <a:rPr sz="2200" b="1" i="0">
+                <a:solidFill>
+                  <a:srgbClr val="FFFFFF"/>
+                </a:solidFill>
+                <a:latin typeface="Montserrat"/>
+              </a:rPr>
+              <a:t>D</a:t>
+            </a:r>
+          </a:p>
+        </p:txBody>
+      </p:sp>
+      <p:sp>
+        <p:nvSpPr>
+          <p:cNvPr id="23" name="TextBox 22"/>
+          <p:cNvSpPr txBox="1"/>
+          <p:nvPr/>
+        </p:nvSpPr>
+        <p:spPr>
+          <a:xfrm>
+            <a:off x="7132320" y="4800600"/>
+            <a:ext cx="4114800" cy="868680"/>
+          </a:xfrm>
+          <a:prstGeom prst="rect">
+            <a:avLst/>
+          </a:prstGeom>
+          <a:noFill/>
+        </p:spPr>
+        <p:txBody>
+          <a:bodyPr wrap="square">
+            <a:spAutoFit/>
+          </a:bodyPr>
+          <a:lstStyle/>
+          <a:p>
+            <a:r>
+              <a:rPr sz="1400" b="0" i="0">
+                <a:solidFill>
+                  <a:srgbClr val="1B2330"/>
+                </a:solidFill>
+                <a:latin typeface="Montserrat"/>
+              </a:rPr>
+              <a:t>Que el corte del regulador de un envase de GLP ≤ 15 kg haga de llave de usuario</a:t>
+            </a:r>
+          </a:p>
+        </p:txBody>
+      </p:sp>
+    </p:spTree>
+  </p:cSld>
+  <p:clrMapOvr>
+    <a:masterClrMapping/>
+  </p:clrMapOvr>
+  <mc:AlternateContent xmlns:mc="http://schemas.openxmlformats.org/markup-compatibility/2006">
+    <mc:Choice xmlns:p14="http://schemas.microsoft.com/office/powerpoint/2010/main" Requires="p14">
+      <p:transition spd="med" p14:dur="700">
+        <p14:cube dir="l"/>
+      </p:transition>
+    </mc:Choice>
+    <mc:Fallback>
+      <p:transition spd="med">
+        <p:push dir="l"/>
+      </p:transition>
+    </mc:Fallback>
+  </mc:AlternateContent>
+</p:sld>
+</file>
+
+<file path=ppt/slides/slide22.xml><?xml version="1.0" encoding="utf-8"?>
+<p:sld xmlns:a="http://schemas.openxmlformats.org/drawingml/2006/main" xmlns:p="http://schemas.openxmlformats.org/presentationml/2006/main" xmlns:r="http://schemas.openxmlformats.org/officeDocument/2006/relationships">
+  <p:cSld>
+    <p:spTree>
+      <p:nvGrpSpPr>
+        <p:cNvPr id="1" name=""/>
+        <p:cNvGrpSpPr/>
+        <p:nvPr/>
+      </p:nvGrpSpPr>
+      <p:grpSpPr/>
+      <p:sp>
+        <p:nvSpPr>
+          <p:cNvPr id="2" name="Rectangle 1"/>
+          <p:cNvSpPr/>
+          <p:nvPr/>
+        </p:nvSpPr>
+        <p:spPr>
+          <a:xfrm>
+            <a:off x="0" y="0"/>
+            <a:ext cx="12191695" cy="6858000"/>
+          </a:xfrm>
+          <a:prstGeom prst="rect">
+            <a:avLst/>
+          </a:prstGeom>
+          <a:solidFill>
+            <a:srgbClr val="FFFFFF"/>
+          </a:solidFill>
+          <a:ln>
+            <a:noFill/>
+          </a:ln>
+          <a:effectLst/>
+        </p:spPr>
+        <p:style>
+          <a:lnRef idx="1">
+            <a:schemeClr val="accent1"/>
+          </a:lnRef>
+          <a:fillRef idx="3">
+            <a:schemeClr val="accent1"/>
+          </a:fillRef>
+          <a:effectRef idx="2">
+            <a:schemeClr val="accent1"/>
+          </a:effectRef>
+          <a:fontRef idx="minor">
+            <a:schemeClr val="lt1"/>
+          </a:fontRef>
+        </p:style>
+        <p:txBody>
+          <a:bodyPr rtlCol="0" anchor="ctr"/>
+          <a:lstStyle/>
+          <a:p>
+            <a:pPr algn="ctr"/>
+          </a:p>
+        </p:txBody>
+      </p:sp>
+      <p:sp>
+        <p:nvSpPr>
+          <p:cNvPr id="3" name="TextBox 2"/>
+          <p:cNvSpPr txBox="1"/>
+          <p:nvPr/>
+        </p:nvSpPr>
+        <p:spPr>
+          <a:xfrm>
+            <a:off x="10607040" y="320040"/>
+            <a:ext cx="1371600" cy="365760"/>
+          </a:xfrm>
+          <a:prstGeom prst="rect">
+            <a:avLst/>
+          </a:prstGeom>
+          <a:noFill/>
+        </p:spPr>
+        <p:txBody>
+          <a:bodyPr wrap="square">
+            <a:spAutoFit/>
+          </a:bodyPr>
+          <a:lstStyle/>
+          <a:p>
+            <a:pPr algn="r"/>
+            <a:r>
+              <a:rPr sz="1000" b="1" i="0">
+                <a:solidFill>
+                  <a:srgbClr val="64748B"/>
+                </a:solidFill>
+                <a:latin typeface="Montserrat"/>
+              </a:rPr>
+              <a:t>022 / 024</a:t>
+            </a:r>
+          </a:p>
+        </p:txBody>
+      </p:sp>
+      <p:sp>
+        <p:nvSpPr>
+          <p:cNvPr id="4" name="TextBox 3"/>
+          <p:cNvSpPr txBox="1"/>
+          <p:nvPr/>
+        </p:nvSpPr>
+        <p:spPr>
+          <a:xfrm>
+            <a:off x="457200" y="6419088"/>
+            <a:ext cx="8229600" cy="365760"/>
+          </a:xfrm>
+          <a:prstGeom prst="rect">
+            <a:avLst/>
+          </a:prstGeom>
+          <a:noFill/>
+        </p:spPr>
+        <p:txBody>
+          <a:bodyPr wrap="square">
+            <a:spAutoFit/>
+          </a:bodyPr>
+          <a:lstStyle/>
+          <a:p>
+            <a:r>
+              <a:rPr sz="900" b="0" i="0">
+                <a:solidFill>
+                  <a:srgbClr val="64748B"/>
+                </a:solidFill>
+                <a:latin typeface="Montserrat"/>
+              </a:rPr>
+              <a:t>Curso Gas B · Tema 11 · UNE 60670-4 · Diseño y construcción</a:t>
+            </a:r>
+          </a:p>
+        </p:txBody>
+      </p:sp>
+      <p:sp>
+        <p:nvSpPr>
+          <p:cNvPr id="5" name="Rectangle 4"/>
+          <p:cNvSpPr/>
+          <p:nvPr/>
+        </p:nvSpPr>
+        <p:spPr>
+          <a:xfrm>
+            <a:off x="0" y="0"/>
+            <a:ext cx="12191695" cy="1143000"/>
+          </a:xfrm>
+          <a:prstGeom prst="rect">
+            <a:avLst/>
+          </a:prstGeom>
+          <a:solidFill>
+            <a:srgbClr val="1E8E4B"/>
+          </a:solidFill>
+          <a:ln>
+            <a:noFill/>
+          </a:ln>
+          <a:effectLst/>
+        </p:spPr>
+        <p:style>
+          <a:lnRef idx="1">
+            <a:schemeClr val="accent1"/>
+          </a:lnRef>
+          <a:fillRef idx="3">
+            <a:schemeClr val="accent1"/>
+          </a:fillRef>
+          <a:effectRef idx="2">
+            <a:schemeClr val="accent1"/>
+          </a:effectRef>
+          <a:fontRef idx="minor">
+            <a:schemeClr val="lt1"/>
+          </a:fontRef>
+        </p:style>
+        <p:txBody>
+          <a:bodyPr rtlCol="0" anchor="ctr"/>
+          <a:lstStyle/>
+          <a:p>
+            <a:pPr algn="ctr"/>
+          </a:p>
+        </p:txBody>
+      </p:sp>
+      <p:sp>
+        <p:nvSpPr>
+          <p:cNvPr id="6" name="TextBox 5"/>
+          <p:cNvSpPr txBox="1"/>
+          <p:nvPr/>
+        </p:nvSpPr>
+        <p:spPr>
+          <a:xfrm>
+            <a:off x="822960" y="274320"/>
+            <a:ext cx="10515600" cy="640080"/>
+          </a:xfrm>
+          <a:prstGeom prst="rect">
+            <a:avLst/>
+          </a:prstGeom>
+          <a:noFill/>
+        </p:spPr>
+        <p:txBody>
+          <a:bodyPr wrap="square">
+            <a:spAutoFit/>
+          </a:bodyPr>
+          <a:lstStyle/>
+          <a:p>
+            <a:r>
+              <a:rPr sz="2400" b="1" i="0">
+                <a:solidFill>
+                  <a:srgbClr val="FFFFFF"/>
+                </a:solidFill>
+                <a:latin typeface="Montserrat"/>
+              </a:rPr>
+              <a:t>✔  RESPUESTA:  B</a:t>
+            </a:r>
+          </a:p>
+        </p:txBody>
+      </p:sp>
+      <p:sp>
+        <p:nvSpPr>
+          <p:cNvPr id="7" name="TextBox 6"/>
+          <p:cNvSpPr txBox="1"/>
+          <p:nvPr/>
+        </p:nvSpPr>
+        <p:spPr>
+          <a:xfrm>
+            <a:off x="822960" y="1417320"/>
+            <a:ext cx="10515600" cy="914400"/>
+          </a:xfrm>
+          <a:prstGeom prst="rect">
+            <a:avLst/>
+          </a:prstGeom>
+          <a:noFill/>
+        </p:spPr>
+        <p:txBody>
+          <a:bodyPr wrap="square">
+            <a:spAutoFit/>
+          </a:bodyPr>
+          <a:lstStyle/>
+          <a:p>
+            <a:r>
+              <a:rPr sz="1800" b="1" i="0">
+                <a:solidFill>
+                  <a:srgbClr val="64748B"/>
+                </a:solidFill>
+                <a:latin typeface="Montserrat"/>
+              </a:rPr>
+              <a:t>Según la norma, ¿cuál de estas combinaciones de funciones NUNCA se permite?</a:t>
+            </a:r>
+          </a:p>
+        </p:txBody>
+      </p:sp>
+      <p:sp>
+        <p:nvSpPr>
+          <p:cNvPr id="8" name="Rounded Rectangle 7"/>
+          <p:cNvSpPr/>
+          <p:nvPr/>
+        </p:nvSpPr>
+        <p:spPr>
+          <a:xfrm>
+            <a:off x="822960" y="2514600"/>
+            <a:ext cx="10515600" cy="914400"/>
+          </a:xfrm>
+          <a:prstGeom prst="roundRect">
+            <a:avLst/>
+          </a:prstGeom>
+          <a:solidFill>
+            <a:srgbClr val="E9F6EE"/>
+          </a:solidFill>
+          <a:ln w="12700">
+            <a:solidFill>
+              <a:srgbClr val="1E8E4B"/>
+            </a:solidFill>
+          </a:ln>
+          <a:effectLst/>
+        </p:spPr>
+        <p:style>
+          <a:lnRef idx="1">
+            <a:schemeClr val="accent1"/>
+          </a:lnRef>
+          <a:fillRef idx="3">
+            <a:schemeClr val="accent1"/>
+          </a:fillRef>
+          <a:effectRef idx="2">
+            <a:schemeClr val="accent1"/>
+          </a:effectRef>
+          <a:fontRef idx="minor">
+            <a:schemeClr val="lt1"/>
+          </a:fontRef>
+        </p:style>
+        <p:txBody>
+          <a:bodyPr rtlCol="0" anchor="ctr"/>
+          <a:lstStyle/>
+          <a:p>
+            <a:pPr algn="ctr"/>
+          </a:p>
+        </p:txBody>
+      </p:sp>
+      <p:sp>
+        <p:nvSpPr>
+          <p:cNvPr id="9" name="TextBox 8"/>
+          <p:cNvSpPr txBox="1"/>
+          <p:nvPr/>
+        </p:nvSpPr>
+        <p:spPr>
+          <a:xfrm>
+            <a:off x="1097280" y="2697480"/>
+            <a:ext cx="10058400" cy="640080"/>
+          </a:xfrm>
+          <a:prstGeom prst="rect">
+            <a:avLst/>
+          </a:prstGeom>
+          <a:noFill/>
+        </p:spPr>
+        <p:txBody>
+          <a:bodyPr wrap="square">
+            <a:spAutoFit/>
+          </a:bodyPr>
+          <a:lstStyle/>
+          <a:p>
+            <a:r>
+              <a:rPr sz="1800" b="1" i="0">
+                <a:solidFill>
+                  <a:srgbClr val="1E8E4B"/>
+                </a:solidFill>
+                <a:latin typeface="Montserrat"/>
+              </a:rPr>
+              <a:t>B.  </a:t>
+            </a:r>
+            <a:r>
+              <a:rPr sz="1800" b="1" i="0">
+                <a:solidFill>
+                  <a:srgbClr val="1E2761"/>
+                </a:solidFill>
+                <a:latin typeface="Montserrat"/>
+              </a:rPr>
+              <a:t>Que la llave de vivienda haga de llave de aparato</a:t>
+            </a:r>
+          </a:p>
+        </p:txBody>
+      </p:sp>
+      <p:sp>
+        <p:nvSpPr>
+          <p:cNvPr id="10" name="TextBox 9"/>
+          <p:cNvSpPr txBox="1"/>
+          <p:nvPr/>
+        </p:nvSpPr>
+        <p:spPr>
+          <a:xfrm>
+            <a:off x="822960" y="3749039"/>
+            <a:ext cx="10515600" cy="2194560"/>
+          </a:xfrm>
+          <a:prstGeom prst="rect">
+            <a:avLst/>
+          </a:prstGeom>
+          <a:noFill/>
+        </p:spPr>
+        <p:txBody>
+          <a:bodyPr wrap="square">
+            <a:spAutoFit/>
+          </a:bodyPr>
+          <a:lstStyle/>
+          <a:p>
+            <a:r>
+              <a:rPr sz="1500" b="1" i="0">
+                <a:solidFill>
+                  <a:srgbClr val="E8801A"/>
+                </a:solidFill>
+                <a:latin typeface="Montserrat"/>
+              </a:rPr>
+              <a:t>Por qué:  </a:t>
+            </a:r>
+            <a:r>
+              <a:rPr sz="1500" b="0" i="0">
+                <a:solidFill>
+                  <a:srgbClr val="1B2330"/>
+                </a:solidFill>
+                <a:latin typeface="Montserrat"/>
+              </a:rPr>
+              <a:t>La norma prohíbe expresamente que la llave de vivienda haga la función de llave de aparato; las otras combinaciones sí se admiten.</a:t>
+            </a:r>
+          </a:p>
+        </p:txBody>
+      </p:sp>
+    </p:spTree>
+  </p:cSld>
+  <p:clrMapOvr>
+    <a:masterClrMapping/>
+  </p:clrMapOvr>
+  <mc:AlternateContent xmlns:mc="http://schemas.openxmlformats.org/markup-compatibility/2006">
+    <mc:Choice xmlns:p14="http://schemas.microsoft.com/office/powerpoint/2010/main" Requires="p14">
+      <p:transition spd="med" p14:dur="700">
+        <p14:cube dir="r"/>
+      </p:transition>
+    </mc:Choice>
+    <mc:Fallback>
+      <p:transition spd="med">
+        <p:push dir="r"/>
+      </p:transition>
+    </mc:Fallback>
+  </mc:AlternateContent>
+</p:sld>
+</file>
+
+<file path=ppt/slides/slide23.xml><?xml version="1.0" encoding="utf-8"?>
+<p:sld xmlns:a="http://schemas.openxmlformats.org/drawingml/2006/main" xmlns:p="http://schemas.openxmlformats.org/presentationml/2006/main" xmlns:r="http://schemas.openxmlformats.org/officeDocument/2006/relationships">
+  <p:cSld>
+    <p:spTree>
+      <p:nvGrpSpPr>
+        <p:cNvPr id="1" name=""/>
+        <p:cNvGrpSpPr/>
+        <p:nvPr/>
+      </p:nvGrpSpPr>
+      <p:grpSpPr/>
+      <p:sp>
+        <p:nvSpPr>
+          <p:cNvPr id="2" name="Rectangle 1"/>
+          <p:cNvSpPr/>
+          <p:nvPr/>
+        </p:nvSpPr>
+        <p:spPr>
+          <a:xfrm>
+            <a:off x="0" y="0"/>
+            <a:ext cx="12191695" cy="6858000"/>
+          </a:xfrm>
+          <a:prstGeom prst="rect">
+            <a:avLst/>
+          </a:prstGeom>
+          <a:solidFill>
+            <a:srgbClr val="FFFFFF"/>
+          </a:solidFill>
+          <a:ln>
+            <a:noFill/>
+          </a:ln>
+          <a:effectLst/>
+        </p:spPr>
+        <p:style>
+          <a:lnRef idx="1">
+            <a:schemeClr val="accent1"/>
+          </a:lnRef>
+          <a:fillRef idx="3">
+            <a:schemeClr val="accent1"/>
+          </a:fillRef>
+          <a:effectRef idx="2">
+            <a:schemeClr val="accent1"/>
+          </a:effectRef>
+          <a:fontRef idx="minor">
+            <a:schemeClr val="lt1"/>
+          </a:fontRef>
+        </p:style>
+        <p:txBody>
+          <a:bodyPr rtlCol="0" anchor="ctr"/>
+          <a:lstStyle/>
+          <a:p>
+            <a:pPr algn="ctr"/>
+          </a:p>
+        </p:txBody>
+      </p:sp>
+      <p:sp>
+        <p:nvSpPr>
+          <p:cNvPr id="3" name="TextBox 2"/>
+          <p:cNvSpPr txBox="1"/>
+          <p:nvPr/>
+        </p:nvSpPr>
+        <p:spPr>
+          <a:xfrm>
+            <a:off x="10607040" y="320040"/>
+            <a:ext cx="1371600" cy="365760"/>
+          </a:xfrm>
+          <a:prstGeom prst="rect">
+            <a:avLst/>
+          </a:prstGeom>
+          <a:noFill/>
+        </p:spPr>
+        <p:txBody>
+          <a:bodyPr wrap="square">
+            <a:spAutoFit/>
+          </a:bodyPr>
+          <a:lstStyle/>
+          <a:p>
+            <a:pPr algn="r"/>
+            <a:r>
+              <a:rPr sz="1000" b="1" i="0">
+                <a:solidFill>
+                  <a:srgbClr val="64748B"/>
+                </a:solidFill>
+                <a:latin typeface="Montserrat"/>
+              </a:rPr>
+              <a:t>023 / 024</a:t>
+            </a:r>
+          </a:p>
+        </p:txBody>
+      </p:sp>
+      <p:sp>
+        <p:nvSpPr>
+          <p:cNvPr id="4" name="TextBox 3"/>
+          <p:cNvSpPr txBox="1"/>
+          <p:nvPr/>
+        </p:nvSpPr>
+        <p:spPr>
+          <a:xfrm>
+            <a:off x="457200" y="6419088"/>
+            <a:ext cx="8229600" cy="365760"/>
+          </a:xfrm>
+          <a:prstGeom prst="rect">
+            <a:avLst/>
+          </a:prstGeom>
+          <a:noFill/>
+        </p:spPr>
+        <p:txBody>
+          <a:bodyPr wrap="square">
+            <a:spAutoFit/>
+          </a:bodyPr>
+          <a:lstStyle/>
+          <a:p>
+            <a:r>
+              <a:rPr sz="900" b="0" i="0">
+                <a:solidFill>
+                  <a:srgbClr val="64748B"/>
+                </a:solidFill>
+                <a:latin typeface="Montserrat"/>
+              </a:rPr>
+              <a:t>Curso Gas B · Tema 11 · UNE 60670-4 · Diseño y construcción</a:t>
+            </a:r>
+          </a:p>
+        </p:txBody>
+      </p:sp>
+      <p:sp>
+        <p:nvSpPr>
+          <p:cNvPr id="5" name="TextBox 4"/>
+          <p:cNvSpPr txBox="1"/>
+          <p:nvPr/>
+        </p:nvSpPr>
+        <p:spPr>
+          <a:xfrm>
+            <a:off x="822960" y="457200"/>
+            <a:ext cx="10058400" cy="365760"/>
+          </a:xfrm>
+          <a:prstGeom prst="rect">
+            <a:avLst/>
+          </a:prstGeom>
+          <a:noFill/>
+        </p:spPr>
+        <p:txBody>
+          <a:bodyPr wrap="square">
+            <a:spAutoFit/>
+          </a:bodyPr>
+          <a:lstStyle/>
+          <a:p>
+            <a:r>
+              <a:rPr sz="1300" b="1" i="0">
+                <a:solidFill>
+                  <a:srgbClr val="E8801A"/>
+                </a:solidFill>
+                <a:latin typeface="Montserrat"/>
+              </a:rPr>
+              <a:t>DOCUMENTACIÓN Y PUESTA EN SERVICIO</a:t>
+            </a:r>
+          </a:p>
+        </p:txBody>
+      </p:sp>
+      <p:sp>
+        <p:nvSpPr>
+          <p:cNvPr id="6" name="TextBox 5"/>
+          <p:cNvSpPr txBox="1"/>
+          <p:nvPr/>
+        </p:nvSpPr>
+        <p:spPr>
+          <a:xfrm>
+            <a:off x="822960" y="868680"/>
+            <a:ext cx="10515600" cy="914400"/>
+          </a:xfrm>
+          <a:prstGeom prst="rect">
+            <a:avLst/>
+          </a:prstGeom>
+          <a:noFill/>
+        </p:spPr>
+        <p:txBody>
+          <a:bodyPr wrap="square">
+            <a:spAutoFit/>
+          </a:bodyPr>
+          <a:lstStyle/>
+          <a:p>
+            <a:r>
+              <a:rPr sz="2800" b="1" i="0">
+                <a:solidFill>
+                  <a:srgbClr val="1E2761"/>
+                </a:solidFill>
+                <a:latin typeface="Montserrat"/>
+              </a:rPr>
+              <a:t>Del certificado al gas abierto</a:t>
+            </a:r>
+          </a:p>
+        </p:txBody>
+      </p:sp>
+      <p:sp>
+        <p:nvSpPr>
+          <p:cNvPr id="7" name="Rectangle 6"/>
+          <p:cNvSpPr/>
+          <p:nvPr/>
+        </p:nvSpPr>
+        <p:spPr>
+          <a:xfrm>
+            <a:off x="868680" y="1627632"/>
+            <a:ext cx="2011680" cy="73152"/>
+          </a:xfrm>
+          <a:prstGeom prst="rect">
+            <a:avLst/>
+          </a:prstGeom>
+          <a:solidFill>
+            <a:srgbClr val="E8801A"/>
+          </a:solidFill>
+          <a:ln>
+            <a:noFill/>
+          </a:ln>
+          <a:effectLst/>
+        </p:spPr>
+        <p:style>
+          <a:lnRef idx="1">
+            <a:schemeClr val="accent1"/>
+          </a:lnRef>
+          <a:fillRef idx="3">
+            <a:schemeClr val="accent1"/>
+          </a:fillRef>
+          <a:effectRef idx="2">
+            <a:schemeClr val="accent1"/>
+          </a:effectRef>
+          <a:fontRef idx="minor">
+            <a:schemeClr val="lt1"/>
+          </a:fontRef>
+        </p:style>
+        <p:txBody>
+          <a:bodyPr rtlCol="0" anchor="ctr"/>
+          <a:lstStyle/>
+          <a:p>
+            <a:pPr algn="ctr"/>
+          </a:p>
+        </p:txBody>
+      </p:sp>
+      <p:sp>
+        <p:nvSpPr>
+          <p:cNvPr id="8" name="TextBox 7"/>
+          <p:cNvSpPr txBox="1"/>
+          <p:nvPr/>
+        </p:nvSpPr>
+        <p:spPr>
+          <a:xfrm>
+            <a:off x="6355080" y="1965960"/>
+            <a:ext cx="5029200" cy="4206240"/>
+          </a:xfrm>
+          <a:prstGeom prst="rect">
+            <a:avLst/>
+          </a:prstGeom>
+          <a:noFill/>
+        </p:spPr>
+        <p:txBody>
+          <a:bodyPr wrap="square">
+            <a:spAutoFit/>
+          </a:bodyPr>
+          <a:lstStyle/>
+          <a:p>
+            <a:pPr>
+              <a:spcAft>
+                <a:spcPts val="1100"/>
+              </a:spcAft>
+            </a:pPr>
+            <a:r>
+              <a:rPr sz="1600" b="1" i="0">
+                <a:solidFill>
+                  <a:srgbClr val="E8801A"/>
+                </a:solidFill>
+                <a:latin typeface="Montserrat"/>
+              </a:rPr>
+              <a:t>▸  </a:t>
+            </a:r>
+            <a:r>
+              <a:rPr sz="1600" b="0" i="0">
+                <a:solidFill>
+                  <a:srgbClr val="1B2330"/>
+                </a:solidFill>
+                <a:latin typeface="Montserrat"/>
+              </a:rPr>
+              <a:t>La instaladora firma el certificado (IRG)</a:t>
+            </a:r>
+          </a:p>
+          <a:p>
+            <a:pPr>
+              <a:spcAft>
+                <a:spcPts val="1100"/>
+              </a:spcAft>
+            </a:pPr>
+            <a:r>
+              <a:rPr sz="1600" b="1" i="0">
+                <a:solidFill>
+                  <a:srgbClr val="E8801A"/>
+                </a:solidFill>
+                <a:latin typeface="Montserrat"/>
+              </a:rPr>
+              <a:t>▸  </a:t>
+            </a:r>
+            <a:r>
+              <a:rPr sz="1600" b="0" i="0">
+                <a:solidFill>
+                  <a:srgbClr val="1B2330"/>
+                </a:solidFill>
+                <a:latin typeface="Montserrat"/>
+              </a:rPr>
+              <a:t>Pruebas de estanquidad antes de dar gas</a:t>
+            </a:r>
+          </a:p>
+          <a:p>
+            <a:pPr>
+              <a:spcAft>
+                <a:spcPts val="1100"/>
+              </a:spcAft>
+            </a:pPr>
+            <a:r>
+              <a:rPr sz="1600" b="1" i="0">
+                <a:solidFill>
+                  <a:srgbClr val="E8801A"/>
+                </a:solidFill>
+                <a:latin typeface="Montserrat"/>
+              </a:rPr>
+              <a:t>▸  </a:t>
+            </a:r>
+            <a:r>
+              <a:rPr sz="1600" b="0" i="0">
+                <a:solidFill>
+                  <a:srgbClr val="1B2330"/>
+                </a:solidFill>
+                <a:latin typeface="Montserrat"/>
+              </a:rPr>
+              <a:t>La distribuidora hace la puesta en servicio</a:t>
+            </a:r>
+          </a:p>
+        </p:txBody>
+      </p:sp>
+      <p:sp>
+        <p:nvSpPr>
+          <p:cNvPr id="9" name="imgph" descr="IMGQ:gas installation certificate with signature"/>
+          <p:cNvSpPr/>
+          <p:nvPr/>
+        </p:nvSpPr>
+        <p:spPr>
+          <a:xfrm>
+            <a:off x="822960" y="1965960"/>
+            <a:ext cx="5303520" cy="4572000"/>
+          </a:xfrm>
+          <a:prstGeom prst="roundRect">
+            <a:avLst/>
+          </a:prstGeom>
+          <a:solidFill>
+            <a:srgbClr val="F3F6FB"/>
+          </a:solidFill>
+          <a:ln w="12700">
+            <a:solidFill>
+              <a:srgbClr val="C7D2E6"/>
+            </a:solidFill>
+          </a:ln>
+          <a:effectLst/>
+        </p:spPr>
+        <p:style>
+          <a:lnRef idx="1">
+            <a:schemeClr val="accent1"/>
+          </a:lnRef>
+          <a:fillRef idx="3">
+            <a:schemeClr val="accent1"/>
+          </a:fillRef>
+          <a:effectRef idx="2">
+            <a:schemeClr val="accent1"/>
+          </a:effectRef>
+          <a:fontRef idx="minor">
+            <a:schemeClr val="lt1"/>
+          </a:fontRef>
+        </p:style>
+        <p:txBody>
+          <a:bodyPr rtlCol="0" anchor="ctr"/>
+          <a:lstStyle/>
+          <a:p>
+            <a:pPr algn="ctr"/>
+          </a:p>
+        </p:txBody>
+      </p:sp>
+      <p:sp>
+        <p:nvSpPr>
+          <p:cNvPr id="10" name="TextBox 9"/>
+          <p:cNvSpPr txBox="1"/>
+          <p:nvPr/>
+        </p:nvSpPr>
+        <p:spPr>
+          <a:xfrm>
+            <a:off x="1097280" y="3611880"/>
+            <a:ext cx="4754880" cy="1280160"/>
+          </a:xfrm>
+          <a:prstGeom prst="rect">
+            <a:avLst/>
+          </a:prstGeom>
+          <a:noFill/>
+        </p:spPr>
+        <p:txBody>
+          <a:bodyPr wrap="square">
+            <a:spAutoFit/>
+          </a:bodyPr>
+          <a:lstStyle/>
+          <a:p>
+            <a:pPr algn="ctr"/>
+            <a:r>
+              <a:rPr sz="1400" b="1" i="0">
+                <a:solidFill>
+                  <a:srgbClr val="64748B"/>
+                </a:solidFill>
+                <a:latin typeface="Montserrat"/>
+              </a:rPr>
+              <a:t>IMAGEN</a:t>
+            </a:r>
+          </a:p>
+          <a:p>
+            <a:pPr algn="ctr"/>
+            <a:r>
+              <a:rPr sz="1100" b="0" i="1">
+                <a:solidFill>
+                  <a:srgbClr val="64748B"/>
+                </a:solidFill>
+                <a:latin typeface="Montserrat"/>
+              </a:rPr>
+              <a:t>gas installation certificate with signature</a:t>
+            </a:r>
+          </a:p>
+        </p:txBody>
+      </p:sp>
+    </p:spTree>
+  </p:cSld>
+  <p:clrMapOvr>
+    <a:masterClrMapping/>
+  </p:clrMapOvr>
+  <mc:AlternateContent xmlns:mc="http://schemas.openxmlformats.org/markup-compatibility/2006">
+    <mc:Choice xmlns:p14="http://schemas.microsoft.com/office/powerpoint/2010/main" Requires="p14">
+      <p:transition spd="med" p14:dur="700">
+        <p14:cube dir="l"/>
+      </p:transition>
+    </mc:Choice>
+    <mc:Fallback>
+      <p:transition spd="med">
+        <p:push dir="l"/>
+      </p:transition>
+    </mc:Fallback>
+  </mc:AlternateContent>
+</p:sld>
+</file>
+
+<file path=ppt/slides/slide24.xml><?xml version="1.0" encoding="utf-8"?>
+<p:sld xmlns:a="http://schemas.openxmlformats.org/drawingml/2006/main" xmlns:p="http://schemas.openxmlformats.org/presentationml/2006/main" xmlns:r="http://schemas.openxmlformats.org/officeDocument/2006/relationships">
+  <p:cSld>
+    <p:spTree>
+      <p:nvGrpSpPr>
+        <p:cNvPr id="1" name=""/>
+        <p:cNvGrpSpPr/>
+        <p:nvPr/>
+      </p:nvGrpSpPr>
+      <p:grpSpPr/>
+      <p:sp>
+        <p:nvSpPr>
+          <p:cNvPr id="2" name="Rectangle 1"/>
+          <p:cNvSpPr/>
+          <p:nvPr/>
+        </p:nvSpPr>
+        <p:spPr>
+          <a:xfrm>
+            <a:off x="0" y="0"/>
+            <a:ext cx="12191695" cy="6858000"/>
+          </a:xfrm>
+          <a:prstGeom prst="rect">
+            <a:avLst/>
+          </a:prstGeom>
+          <a:solidFill>
+            <a:srgbClr val="1E2761"/>
+          </a:solidFill>
+          <a:ln>
+            <a:noFill/>
+          </a:ln>
+          <a:effectLst/>
+        </p:spPr>
+        <p:style>
+          <a:lnRef idx="1">
+            <a:schemeClr val="accent1"/>
+          </a:lnRef>
+          <a:fillRef idx="3">
+            <a:schemeClr val="accent1"/>
+          </a:fillRef>
+          <a:effectRef idx="2">
+            <a:schemeClr val="accent1"/>
+          </a:effectRef>
+          <a:fontRef idx="minor">
+            <a:schemeClr val="lt1"/>
+          </a:fontRef>
+        </p:style>
+        <p:txBody>
+          <a:bodyPr rtlCol="0" anchor="ctr"/>
+          <a:lstStyle/>
+          <a:p>
+            <a:pPr algn="ctr"/>
+          </a:p>
+        </p:txBody>
+      </p:sp>
+      <p:sp>
+        <p:nvSpPr>
+          <p:cNvPr id="3" name="TextBox 2"/>
+          <p:cNvSpPr txBox="1"/>
+          <p:nvPr/>
+        </p:nvSpPr>
+        <p:spPr>
+          <a:xfrm>
+            <a:off x="822960" y="640080"/>
+            <a:ext cx="10515600" cy="457200"/>
+          </a:xfrm>
+          <a:prstGeom prst="rect">
+            <a:avLst/>
+          </a:prstGeom>
+          <a:noFill/>
+        </p:spPr>
+        <p:txBody>
+          <a:bodyPr wrap="square">
+            <a:spAutoFit/>
+          </a:bodyPr>
+          <a:lstStyle/>
+          <a:p>
+            <a:r>
+              <a:rPr sz="1400" b="1" i="0">
+                <a:solidFill>
+                  <a:srgbClr val="F4A24C"/>
+                </a:solidFill>
+                <a:latin typeface="Montserrat"/>
+              </a:rPr>
+              <a:t>LO QUE YA DOMINAS</a:t>
+            </a:r>
+          </a:p>
+        </p:txBody>
+      </p:sp>
+      <p:sp>
+        <p:nvSpPr>
+          <p:cNvPr id="4" name="Rectangle 3"/>
+          <p:cNvSpPr/>
+          <p:nvPr/>
+        </p:nvSpPr>
+        <p:spPr>
+          <a:xfrm>
+            <a:off x="868680" y="1051560"/>
+            <a:ext cx="1463040" cy="82296"/>
+          </a:xfrm>
+          <a:prstGeom prst="rect">
+            <a:avLst/>
+          </a:prstGeom>
+          <a:solidFill>
+            <a:srgbClr val="E8801A"/>
+          </a:solidFill>
+          <a:ln>
+            <a:noFill/>
+          </a:ln>
+          <a:effectLst/>
+        </p:spPr>
+        <p:style>
+          <a:lnRef idx="1">
+            <a:schemeClr val="accent1"/>
+          </a:lnRef>
+          <a:fillRef idx="3">
+            <a:schemeClr val="accent1"/>
+          </a:fillRef>
+          <a:effectRef idx="2">
+            <a:schemeClr val="accent1"/>
+          </a:effectRef>
+          <a:fontRef idx="minor">
+            <a:schemeClr val="lt1"/>
+          </a:fontRef>
+        </p:style>
+        <p:txBody>
+          <a:bodyPr rtlCol="0" anchor="ctr"/>
+          <a:lstStyle/>
+          <a:p>
+            <a:pPr algn="ctr"/>
+          </a:p>
+        </p:txBody>
+      </p:sp>
+      <p:sp>
+        <p:nvSpPr>
+          <p:cNvPr id="5" name="TextBox 4"/>
+          <p:cNvSpPr txBox="1"/>
+          <p:nvPr/>
+        </p:nvSpPr>
+        <p:spPr>
+          <a:xfrm>
+            <a:off x="822960" y="1234440"/>
+            <a:ext cx="10515600" cy="1097280"/>
+          </a:xfrm>
+          <a:prstGeom prst="rect">
+            <a:avLst/>
+          </a:prstGeom>
+          <a:noFill/>
+        </p:spPr>
+        <p:txBody>
+          <a:bodyPr wrap="square">
+            <a:spAutoFit/>
+          </a:bodyPr>
+          <a:lstStyle/>
+          <a:p>
+            <a:r>
+              <a:rPr sz="3400" b="1" i="0">
+                <a:solidFill>
+                  <a:srgbClr val="FFFFFF"/>
+                </a:solidFill>
+                <a:latin typeface="Montserrat"/>
+              </a:rPr>
+              <a:t>Ya sabes medir, regular y cortar el gas</a:t>
+            </a:r>
+          </a:p>
+        </p:txBody>
+      </p:sp>
+      <p:sp>
+        <p:nvSpPr>
+          <p:cNvPr id="6" name="TextBox 5"/>
+          <p:cNvSpPr txBox="1"/>
+          <p:nvPr/>
+        </p:nvSpPr>
+        <p:spPr>
+          <a:xfrm>
+            <a:off x="822960" y="2606040"/>
+            <a:ext cx="10515600" cy="2743200"/>
+          </a:xfrm>
+          <a:prstGeom prst="rect">
+            <a:avLst/>
+          </a:prstGeom>
+          <a:noFill/>
+        </p:spPr>
+        <p:txBody>
+          <a:bodyPr wrap="square">
+            <a:spAutoFit/>
+          </a:bodyPr>
+          <a:lstStyle/>
+          <a:p>
+            <a:pPr>
+              <a:spcAft>
+                <a:spcPts val="1200"/>
+              </a:spcAft>
+            </a:pPr>
+            <a:r>
+              <a:rPr sz="2000" b="1" i="0">
+                <a:solidFill>
+                  <a:srgbClr val="F4A24C"/>
+                </a:solidFill>
+                <a:latin typeface="Montserrat"/>
+              </a:rPr>
+              <a:t>✓  </a:t>
+            </a:r>
+            <a:r>
+              <a:rPr sz="1900" b="0" i="0">
+                <a:solidFill>
+                  <a:srgbClr val="FFFFFF"/>
+                </a:solidFill>
+                <a:latin typeface="Montserrat"/>
+              </a:rPr>
+              <a:t>Tomas de presión: medir a cada lado del elemento</a:t>
+            </a:r>
+          </a:p>
+          <a:p>
+            <a:pPr>
+              <a:spcAft>
+                <a:spcPts val="1200"/>
+              </a:spcAft>
+            </a:pPr>
+            <a:r>
+              <a:rPr sz="2000" b="1" i="0">
+                <a:solidFill>
+                  <a:srgbClr val="F4A24C"/>
+                </a:solidFill>
+                <a:latin typeface="Montserrat"/>
+              </a:rPr>
+              <a:t>✓  </a:t>
+            </a:r>
+            <a:r>
+              <a:rPr sz="1900" b="0" i="0">
+                <a:solidFill>
+                  <a:srgbClr val="FFFFFF"/>
+                </a:solidFill>
+                <a:latin typeface="Montserrat"/>
+              </a:rPr>
+              <a:t>Gas natural: a más MOP, más seguridades</a:t>
+            </a:r>
+          </a:p>
+          <a:p>
+            <a:pPr>
+              <a:spcAft>
+                <a:spcPts val="1200"/>
+              </a:spcAft>
+            </a:pPr>
+            <a:r>
+              <a:rPr sz="2000" b="1" i="0">
+                <a:solidFill>
+                  <a:srgbClr val="F4A24C"/>
+                </a:solidFill>
+                <a:latin typeface="Montserrat"/>
+              </a:rPr>
+              <a:t>✓  </a:t>
+            </a:r>
+            <a:r>
+              <a:rPr sz="1900" b="0" i="0">
+                <a:solidFill>
+                  <a:srgbClr val="FFFFFF"/>
+                </a:solidFill>
+                <a:latin typeface="Montserrat"/>
+              </a:rPr>
+              <a:t>GLP: dos etapas y 0,1 a 2 bar a la entrada</a:t>
+            </a:r>
+          </a:p>
+          <a:p>
+            <a:pPr>
+              <a:spcAft>
+                <a:spcPts val="1200"/>
+              </a:spcAft>
+            </a:pPr>
+            <a:r>
+              <a:rPr sz="2000" b="1" i="0">
+                <a:solidFill>
+                  <a:srgbClr val="F4A24C"/>
+                </a:solidFill>
+                <a:latin typeface="Montserrat"/>
+              </a:rPr>
+              <a:t>✓  </a:t>
+            </a:r>
+            <a:r>
+              <a:rPr sz="1900" b="0" i="0">
+                <a:solidFill>
+                  <a:srgbClr val="FFFFFF"/>
+                </a:solidFill>
+                <a:latin typeface="Montserrat"/>
+              </a:rPr>
+              <a:t>La cadena de llaves y sus grados de acceso</a:t>
+            </a:r>
+          </a:p>
+        </p:txBody>
+      </p:sp>
+      <p:sp>
+        <p:nvSpPr>
+          <p:cNvPr id="7" name="Rounded Rectangle 6"/>
+          <p:cNvSpPr/>
+          <p:nvPr/>
+        </p:nvSpPr>
+        <p:spPr>
+          <a:xfrm>
+            <a:off x="822960" y="5532120"/>
+            <a:ext cx="10515600" cy="822960"/>
+          </a:xfrm>
+          <a:prstGeom prst="roundRect">
+            <a:avLst/>
+          </a:prstGeom>
+          <a:solidFill>
+            <a:srgbClr val="E8801A"/>
+          </a:solidFill>
+          <a:ln>
+            <a:noFill/>
+          </a:ln>
+          <a:effectLst/>
+        </p:spPr>
+        <p:style>
+          <a:lnRef idx="1">
+            <a:schemeClr val="accent1"/>
+          </a:lnRef>
+          <a:fillRef idx="3">
+            <a:schemeClr val="accent1"/>
+          </a:fillRef>
+          <a:effectRef idx="2">
+            <a:schemeClr val="accent1"/>
+          </a:effectRef>
+          <a:fontRef idx="minor">
+            <a:schemeClr val="lt1"/>
+          </a:fontRef>
+        </p:style>
+        <p:txBody>
+          <a:bodyPr rtlCol="0" anchor="ctr"/>
+          <a:lstStyle/>
+          <a:p>
+            <a:pPr algn="ctr"/>
+          </a:p>
+        </p:txBody>
+      </p:sp>
+      <p:sp>
+        <p:nvSpPr>
+          <p:cNvPr id="8" name="TextBox 7"/>
+          <p:cNvSpPr txBox="1"/>
+          <p:nvPr/>
+        </p:nvSpPr>
+        <p:spPr>
+          <a:xfrm>
+            <a:off x="1051560" y="5623560"/>
+            <a:ext cx="10058400" cy="640080"/>
+          </a:xfrm>
+          <a:prstGeom prst="rect">
+            <a:avLst/>
+          </a:prstGeom>
+          <a:noFill/>
+        </p:spPr>
+        <p:txBody>
+          <a:bodyPr wrap="square">
+            <a:spAutoFit/>
+          </a:bodyPr>
+          <a:lstStyle/>
+          <a:p>
+            <a:r>
+              <a:rPr sz="1500" b="1" i="1">
+                <a:solidFill>
+                  <a:srgbClr val="1E2761"/>
+                </a:solidFill>
+                <a:latin typeface="Montserrat"/>
+              </a:rPr>
+              <a:t>Con esto diagnosticas una avería y cierras en una urgencia. Has cerrado la Parte 4 entera.</a:t>
+            </a:r>
+          </a:p>
+        </p:txBody>
+      </p:sp>
+    </p:spTree>
+  </p:cSld>
+  <p:clrMapOvr>
+    <a:masterClrMapping/>
+  </p:clrMapOvr>
+  <mc:AlternateContent xmlns:mc="http://schemas.openxmlformats.org/markup-compatibility/2006">
+    <mc:Choice xmlns:p14="http://schemas.microsoft.com/office/powerpoint/2010/main" Requires="p14">
+      <p:transition spd="med" p14:dur="700">
+        <p14:cube dir="r"/>
+      </p:transition>
+    </mc:Choice>
+    <mc:Fallback>
+      <p:transition spd="med">
+        <p:push dir="r"/>
+      </p:transition>
+    </mc:Fallback>
+  </mc:AlternateContent>
 </p:sld>
 </file>
 
@@ -9503,7 +13671,7 @@
                 </a:solidFill>
                 <a:latin typeface="Montserrat"/>
               </a:rPr>
-              <a:t>003 / 018</a:t>
+              <a:t>003 / 024</a:t>
             </a:r>
           </a:p>
         </p:txBody>
@@ -9612,7 +13780,7 @@
       </p:sp>
       <p:sp>
         <p:nvSpPr>
-          <p:cNvPr id="7" name="Rounded Rectangle 6"/>
+          <p:cNvPr id="7" name="Rectangle 6"/>
           <p:cNvSpPr/>
           <p:nvPr/>
         </p:nvSpPr>
@@ -9621,7 +13789,7 @@
             <a:off x="868680" y="1673352"/>
             <a:ext cx="2011680" cy="73152"/>
           </a:xfrm>
-          <a:prstGeom prst="roundRect">
+          <a:prstGeom prst="rect">
             <a:avLst/>
           </a:prstGeom>
           <a:solidFill>
@@ -9907,6 +14075,18 @@
   <p:clrMapOvr>
     <a:masterClrMapping/>
   </p:clrMapOvr>
+  <mc:AlternateContent xmlns:mc="http://schemas.openxmlformats.org/markup-compatibility/2006">
+    <mc:Choice xmlns:p14="http://schemas.microsoft.com/office/powerpoint/2010/main" Requires="p14">
+      <p:transition spd="med" p14:dur="700">
+        <p14:cube dir="l"/>
+      </p:transition>
+    </mc:Choice>
+    <mc:Fallback>
+      <p:transition spd="med">
+        <p:push dir="l"/>
+      </p:transition>
+    </mc:Fallback>
+  </mc:AlternateContent>
 </p:sld>
 </file>
 
@@ -9994,7 +14174,7 @@
                 </a:solidFill>
                 <a:latin typeface="Montserrat"/>
               </a:rPr>
-              <a:t>004 / 018</a:t>
+              <a:t>004 / 024</a:t>
             </a:r>
           </a:p>
         </p:txBody>
@@ -10103,7 +14283,7 @@
       </p:sp>
       <p:sp>
         <p:nvSpPr>
-          <p:cNvPr id="7" name="Rounded Rectangle 6"/>
+          <p:cNvPr id="7" name="Rectangle 6"/>
           <p:cNvSpPr/>
           <p:nvPr/>
         </p:nvSpPr>
@@ -10112,7 +14292,7 @@
             <a:off x="868680" y="1627632"/>
             <a:ext cx="2011680" cy="73152"/>
           </a:xfrm>
-          <a:prstGeom prst="roundRect">
+          <a:prstGeom prst="rect">
             <a:avLst/>
           </a:prstGeom>
           <a:solidFill>
@@ -10154,7 +14334,7 @@
         <p:spPr>
           <a:xfrm>
             <a:off x="822960" y="1965960"/>
-            <a:ext cx="4983480" cy="4206240"/>
+            <a:ext cx="5029200" cy="4206240"/>
           </a:xfrm>
           <a:prstGeom prst="rect">
             <a:avLst/>
@@ -10251,8 +14431,8 @@
         </p:nvSpPr>
         <p:spPr>
           <a:xfrm>
-            <a:off x="5806440" y="1051560"/>
-            <a:ext cx="5298947" cy="4629150"/>
+            <a:off x="6080760" y="1965960"/>
+            <a:ext cx="5303520" cy="4572000"/>
           </a:xfrm>
           <a:prstGeom prst="roundRect">
             <a:avLst/>
@@ -10297,8 +14477,8 @@
         </p:nvSpPr>
         <p:spPr>
           <a:xfrm>
-            <a:off x="6080760" y="2726055"/>
-            <a:ext cx="4750307" cy="1280160"/>
+            <a:off x="6355080" y="3611880"/>
+            <a:ext cx="4754880" cy="1280160"/>
           </a:xfrm>
           <a:prstGeom prst="rect">
             <a:avLst/>
@@ -10319,7 +14499,7 @@
                 </a:solidFill>
                 <a:latin typeface="Montserrat"/>
               </a:rPr>
-              <a:t>IMAGEN REALISTA</a:t>
+              <a:t>IMAGEN</a:t>
             </a:r>
           </a:p>
           <a:p>
@@ -10341,6 +14521,18 @@
   <p:clrMapOvr>
     <a:masterClrMapping/>
   </p:clrMapOvr>
+  <mc:AlternateContent xmlns:mc="http://schemas.openxmlformats.org/markup-compatibility/2006">
+    <mc:Choice xmlns:p14="http://schemas.microsoft.com/office/powerpoint/2010/main" Requires="p14">
+      <p:transition spd="med" p14:dur="700">
+        <p14:cube dir="r"/>
+      </p:transition>
+    </mc:Choice>
+    <mc:Fallback>
+      <p:transition spd="med">
+        <p:push dir="r"/>
+      </p:transition>
+    </mc:Fallback>
+  </mc:AlternateContent>
 </p:sld>
 </file>
 
@@ -10428,7 +14620,7 @@
                 </a:solidFill>
                 <a:latin typeface="Montserrat"/>
               </a:rPr>
-              <a:t>005 / 018</a:t>
+              <a:t>005 / 024</a:t>
             </a:r>
           </a:p>
         </p:txBody>
@@ -10537,7 +14729,7 @@
       </p:sp>
       <p:sp>
         <p:nvSpPr>
-          <p:cNvPr id="7" name="Rounded Rectangle 6"/>
+          <p:cNvPr id="7" name="Rectangle 6"/>
           <p:cNvSpPr/>
           <p:nvPr/>
         </p:nvSpPr>
@@ -10546,7 +14738,7 @@
             <a:off x="868680" y="1627632"/>
             <a:ext cx="2011680" cy="73152"/>
           </a:xfrm>
-          <a:prstGeom prst="roundRect">
+          <a:prstGeom prst="rect">
             <a:avLst/>
           </a:prstGeom>
           <a:solidFill>
@@ -10587,8 +14779,8 @@
         </p:nvSpPr>
         <p:spPr>
           <a:xfrm>
-            <a:off x="822960" y="1965960"/>
-            <a:ext cx="4983480" cy="4206240"/>
+            <a:off x="6355080" y="1965960"/>
+            <a:ext cx="5029200" cy="4206240"/>
           </a:xfrm>
           <a:prstGeom prst="rect">
             <a:avLst/>
@@ -10685,8 +14877,8 @@
         </p:nvSpPr>
         <p:spPr>
           <a:xfrm>
-            <a:off x="5806440" y="1051560"/>
-            <a:ext cx="5298947" cy="4629150"/>
+            <a:off x="822960" y="1965960"/>
+            <a:ext cx="5303520" cy="4572000"/>
           </a:xfrm>
           <a:prstGeom prst="roundRect">
             <a:avLst/>
@@ -10731,8 +14923,8 @@
         </p:nvSpPr>
         <p:spPr>
           <a:xfrm>
-            <a:off x="6080760" y="2726055"/>
-            <a:ext cx="4750307" cy="1280160"/>
+            <a:off x="1097280" y="3611880"/>
+            <a:ext cx="4754880" cy="1280160"/>
           </a:xfrm>
           <a:prstGeom prst="rect">
             <a:avLst/>
@@ -10753,7 +14945,7 @@
                 </a:solidFill>
                 <a:latin typeface="Montserrat"/>
               </a:rPr>
-              <a:t>IMAGEN REALISTA</a:t>
+              <a:t>IMAGEN</a:t>
             </a:r>
           </a:p>
           <a:p>
@@ -10775,6 +14967,18 @@
   <p:clrMapOvr>
     <a:masterClrMapping/>
   </p:clrMapOvr>
+  <mc:AlternateContent xmlns:mc="http://schemas.openxmlformats.org/markup-compatibility/2006">
+    <mc:Choice xmlns:p14="http://schemas.microsoft.com/office/powerpoint/2010/main" Requires="p14">
+      <p:transition spd="med" p14:dur="700">
+        <p14:cube dir="l"/>
+      </p:transition>
+    </mc:Choice>
+    <mc:Fallback>
+      <p:transition spd="med">
+        <p:push dir="l"/>
+      </p:transition>
+    </mc:Fallback>
+  </mc:AlternateContent>
 </p:sld>
 </file>
 
@@ -10862,7 +15066,7 @@
                 </a:solidFill>
                 <a:latin typeface="Montserrat"/>
               </a:rPr>
-              <a:t>006 / 018</a:t>
+              <a:t>006 / 024</a:t>
             </a:r>
           </a:p>
         </p:txBody>
@@ -10903,84 +15107,16 @@
       </p:sp>
       <p:sp>
         <p:nvSpPr>
-          <p:cNvPr id="5" name="TextBox 4"/>
-          <p:cNvSpPr txBox="1"/>
-          <p:nvPr/>
-        </p:nvSpPr>
-        <p:spPr>
-          <a:xfrm>
-            <a:off x="822960" y="457200"/>
-            <a:ext cx="10058400" cy="365760"/>
-          </a:xfrm>
-          <a:prstGeom prst="rect">
-            <a:avLst/>
-          </a:prstGeom>
-          <a:noFill/>
-        </p:spPr>
-        <p:txBody>
-          <a:bodyPr wrap="square">
-            <a:spAutoFit/>
-          </a:bodyPr>
-          <a:lstStyle/>
-          <a:p>
-            <a:r>
-              <a:rPr sz="1300" b="1" i="0">
-                <a:solidFill>
-                  <a:srgbClr val="E8801A"/>
-                </a:solidFill>
-                <a:latin typeface="Montserrat"/>
-              </a:rPr>
-              <a:t>APARTADO 6.1.1 · UBICACIÓN</a:t>
-            </a:r>
-          </a:p>
-        </p:txBody>
-      </p:sp>
-      <p:sp>
-        <p:nvSpPr>
-          <p:cNvPr id="6" name="TextBox 5"/>
-          <p:cNvSpPr txBox="1"/>
-          <p:nvPr/>
-        </p:nvSpPr>
-        <p:spPr>
-          <a:xfrm>
-            <a:off x="822960" y="868680"/>
-            <a:ext cx="10515600" cy="914400"/>
-          </a:xfrm>
-          <a:prstGeom prst="rect">
-            <a:avLst/>
-          </a:prstGeom>
-          <a:noFill/>
-        </p:spPr>
-        <p:txBody>
-          <a:bodyPr wrap="square">
-            <a:spAutoFit/>
-          </a:bodyPr>
-          <a:lstStyle/>
-          <a:p>
-            <a:r>
-              <a:rPr sz="2800" b="1" i="0">
-                <a:solidFill>
-                  <a:srgbClr val="1E2761"/>
-                </a:solidFill>
-                <a:latin typeface="Montserrat"/>
-              </a:rPr>
-              <a:t>Conjuntos de alta: grado 2 y al exterior</a:t>
-            </a:r>
-          </a:p>
-        </p:txBody>
-      </p:sp>
-      <p:sp>
-        <p:nvSpPr>
-          <p:cNvPr id="7" name="Rounded Rectangle 6"/>
+          <p:cNvPr id="5" name="Rectangle 4"/>
           <p:cNvSpPr/>
           <p:nvPr/>
         </p:nvSpPr>
         <p:spPr>
           <a:xfrm>
-            <a:off x="868680" y="1627632"/>
-            <a:ext cx="2011680" cy="73152"/>
-          </a:xfrm>
-          <a:prstGeom prst="roundRect">
+            <a:off x="0" y="0"/>
+            <a:ext cx="12191695" cy="1143000"/>
+          </a:xfrm>
+          <a:prstGeom prst="rect">
             <a:avLst/>
           </a:prstGeom>
           <a:solidFill>
@@ -11015,14 +15151,14 @@
       </p:sp>
       <p:sp>
         <p:nvSpPr>
-          <p:cNvPr id="8" name="TextBox 7"/>
+          <p:cNvPr id="6" name="TextBox 5"/>
           <p:cNvSpPr txBox="1"/>
           <p:nvPr/>
         </p:nvSpPr>
         <p:spPr>
           <a:xfrm>
-            <a:off x="822960" y="1965960"/>
-            <a:ext cx="4983480" cy="4206240"/>
+            <a:off x="822960" y="274320"/>
+            <a:ext cx="10515600" cy="640080"/>
           </a:xfrm>
           <a:prstGeom prst="rect">
             <a:avLst/>
@@ -11035,92 +15171,62 @@
           </a:bodyPr>
           <a:lstStyle/>
           <a:p>
-            <a:pPr>
-              <a:spcAft>
-                <a:spcPts val="1100"/>
-              </a:spcAft>
-            </a:pPr>
-            <a:r>
-              <a:rPr sz="1600" b="1" i="0">
-                <a:solidFill>
-                  <a:srgbClr val="E8801A"/>
-                </a:solidFill>
-                <a:latin typeface="Montserrat"/>
-              </a:rPr>
-              <a:t>▸  </a:t>
-            </a:r>
-            <a:r>
-              <a:rPr sz="1600" b="0" i="0">
-                <a:solidFill>
-                  <a:srgbClr val="1B2330"/>
-                </a:solidFill>
-                <a:latin typeface="Montserrat"/>
-              </a:rPr>
-              <a:t>Grado de accesibilidad 2</a:t>
-            </a:r>
-          </a:p>
-          <a:p>
-            <a:pPr>
-              <a:spcAft>
-                <a:spcPts val="1100"/>
-              </a:spcAft>
-            </a:pPr>
-            <a:r>
-              <a:rPr sz="1600" b="1" i="0">
-                <a:solidFill>
-                  <a:srgbClr val="E8801A"/>
-                </a:solidFill>
-                <a:latin typeface="Montserrat"/>
-              </a:rPr>
-              <a:t>▸  </a:t>
-            </a:r>
-            <a:r>
-              <a:rPr sz="1600" b="0" i="0">
-                <a:solidFill>
-                  <a:srgbClr val="1B2330"/>
-                </a:solidFill>
-                <a:latin typeface="Montserrat"/>
-              </a:rPr>
-              <a:t>Armario o nicho con pared al exterior</a:t>
-            </a:r>
-          </a:p>
-          <a:p>
-            <a:pPr>
-              <a:spcAft>
-                <a:spcPts val="1100"/>
-              </a:spcAft>
-            </a:pPr>
-            <a:r>
-              <a:rPr sz="1600" b="1" i="0">
-                <a:solidFill>
-                  <a:srgbClr val="E8801A"/>
-                </a:solidFill>
-                <a:latin typeface="Montserrat"/>
-              </a:rPr>
-              <a:t>▸  </a:t>
-            </a:r>
-            <a:r>
-              <a:rPr sz="1600" b="0" i="0">
-                <a:solidFill>
-                  <a:srgbClr val="1B2330"/>
-                </a:solidFill>
-                <a:latin typeface="Montserrat"/>
-              </a:rPr>
-              <a:t>Ventilación de al menos 5 cm²</a:t>
-            </a:r>
-          </a:p>
-        </p:txBody>
-      </p:sp>
-      <p:sp>
-        <p:nvSpPr>
-          <p:cNvPr id="9" name="imgph" descr="IMGQ:gas regulator cabinet on building exterior wall"/>
+            <a:r>
+              <a:rPr sz="2400" b="1" i="0">
+                <a:solidFill>
+                  <a:srgbClr val="FFFFFF"/>
+                </a:solidFill>
+                <a:latin typeface="Montserrat"/>
+              </a:rPr>
+              <a:t>⚡  PREGUNTA RÁPIDA</a:t>
+            </a:r>
+          </a:p>
+        </p:txBody>
+      </p:sp>
+      <p:sp>
+        <p:nvSpPr>
+          <p:cNvPr id="7" name="TextBox 6"/>
+          <p:cNvSpPr txBox="1"/>
+          <p:nvPr/>
+        </p:nvSpPr>
+        <p:spPr>
+          <a:xfrm>
+            <a:off x="822960" y="1508760"/>
+            <a:ext cx="10515600" cy="1371600"/>
+          </a:xfrm>
+          <a:prstGeom prst="rect">
+            <a:avLst/>
+          </a:prstGeom>
+          <a:noFill/>
+        </p:spPr>
+        <p:txBody>
+          <a:bodyPr wrap="square">
+            <a:spAutoFit/>
+          </a:bodyPr>
+          <a:lstStyle/>
+          <a:p>
+            <a:r>
+              <a:rPr sz="2400" b="1" i="0">
+                <a:solidFill>
+                  <a:srgbClr val="1E2761"/>
+                </a:solidFill>
+                <a:latin typeface="Montserrat"/>
+              </a:rPr>
+              <a:t>En gas natural con MOP superior a 150 mbar y hasta 5 bar, ¿qué sistema de regulación exige la norma?</a:t>
+            </a:r>
+          </a:p>
+        </p:txBody>
+      </p:sp>
+      <p:sp>
+        <p:nvSpPr>
+          <p:cNvPr id="8" name="Rounded Rectangle 7"/>
           <p:cNvSpPr/>
           <p:nvPr/>
         </p:nvSpPr>
         <p:spPr>
           <a:xfrm>
-            <a:off x="5806440" y="1051560"/>
-            <a:ext cx="5298947" cy="4629150"/>
+            <a:off x="822960" y="3291840"/>
+            <a:ext cx="4983480" cy="1143000"/>
           </a:xfrm>
           <a:prstGeom prst="roundRect">
             <a:avLst/>
@@ -11159,14 +15265,58 @@
       </p:sp>
       <p:sp>
         <p:nvSpPr>
+          <p:cNvPr id="9" name="Rectangle 8"/>
+          <p:cNvSpPr/>
+          <p:nvPr/>
+        </p:nvSpPr>
+        <p:spPr>
+          <a:xfrm>
+            <a:off x="822960" y="3291840"/>
+            <a:ext cx="640080" cy="1143000"/>
+          </a:xfrm>
+          <a:prstGeom prst="rect">
+            <a:avLst/>
+          </a:prstGeom>
+          <a:solidFill>
+            <a:srgbClr val="1E2761"/>
+          </a:solidFill>
+          <a:ln>
+            <a:noFill/>
+          </a:ln>
+          <a:effectLst/>
+        </p:spPr>
+        <p:style>
+          <a:lnRef idx="1">
+            <a:schemeClr val="accent1"/>
+          </a:lnRef>
+          <a:fillRef idx="3">
+            <a:schemeClr val="accent1"/>
+          </a:fillRef>
+          <a:effectRef idx="2">
+            <a:schemeClr val="accent1"/>
+          </a:effectRef>
+          <a:fontRef idx="minor">
+            <a:schemeClr val="lt1"/>
+          </a:fontRef>
+        </p:style>
+        <p:txBody>
+          <a:bodyPr rtlCol="0" anchor="ctr"/>
+          <a:lstStyle/>
+          <a:p>
+            <a:pPr algn="ctr"/>
+          </a:p>
+        </p:txBody>
+      </p:sp>
+      <p:sp>
+        <p:nvSpPr>
           <p:cNvPr id="10" name="TextBox 9"/>
           <p:cNvSpPr txBox="1"/>
           <p:nvPr/>
         </p:nvSpPr>
         <p:spPr>
           <a:xfrm>
-            <a:off x="6080760" y="2726055"/>
-            <a:ext cx="4750307" cy="1280160"/>
+            <a:off x="822960" y="3611880"/>
+            <a:ext cx="640080" cy="548640"/>
           </a:xfrm>
           <a:prstGeom prst="rect">
             <a:avLst/>
@@ -11181,25 +15331,524 @@
           <a:p>
             <a:pPr algn="ctr"/>
             <a:r>
-              <a:rPr sz="1400" b="1" i="0">
-                <a:solidFill>
-                  <a:srgbClr val="64748B"/>
-                </a:solidFill>
-                <a:latin typeface="Montserrat"/>
-              </a:rPr>
-              <a:t>IMAGEN REALISTA</a:t>
-            </a:r>
-          </a:p>
+              <a:rPr sz="2200" b="1" i="0">
+                <a:solidFill>
+                  <a:srgbClr val="FFFFFF"/>
+                </a:solidFill>
+                <a:latin typeface="Montserrat"/>
+              </a:rPr>
+              <a:t>A</a:t>
+            </a:r>
+          </a:p>
+        </p:txBody>
+      </p:sp>
+      <p:sp>
+        <p:nvSpPr>
+          <p:cNvPr id="11" name="TextBox 10"/>
+          <p:cNvSpPr txBox="1"/>
+          <p:nvPr/>
+        </p:nvSpPr>
+        <p:spPr>
+          <a:xfrm>
+            <a:off x="1600200" y="3474720"/>
+            <a:ext cx="4114800" cy="868680"/>
+          </a:xfrm>
+          <a:prstGeom prst="rect">
+            <a:avLst/>
+          </a:prstGeom>
+          <a:noFill/>
+        </p:spPr>
+        <p:txBody>
+          <a:bodyPr wrap="square">
+            <a:spAutoFit/>
+          </a:bodyPr>
+          <a:lstStyle/>
+          <a:p>
+            <a:r>
+              <a:rPr sz="1400" b="0" i="0">
+                <a:solidFill>
+                  <a:srgbClr val="1B2330"/>
+                </a:solidFill>
+                <a:latin typeface="Montserrat"/>
+              </a:rPr>
+              <a:t>Solo regulador de presión</a:t>
+            </a:r>
+          </a:p>
+        </p:txBody>
+      </p:sp>
+      <p:sp>
+        <p:nvSpPr>
+          <p:cNvPr id="12" name="Rounded Rectangle 11"/>
+          <p:cNvSpPr/>
+          <p:nvPr/>
+        </p:nvSpPr>
+        <p:spPr>
+          <a:xfrm>
+            <a:off x="6355080" y="3291840"/>
+            <a:ext cx="4983480" cy="1143000"/>
+          </a:xfrm>
+          <a:prstGeom prst="roundRect">
+            <a:avLst/>
+          </a:prstGeom>
+          <a:solidFill>
+            <a:srgbClr val="F3F6FB"/>
+          </a:solidFill>
+          <a:ln w="12700">
+            <a:solidFill>
+              <a:srgbClr val="C7D2E6"/>
+            </a:solidFill>
+          </a:ln>
+          <a:effectLst/>
+        </p:spPr>
+        <p:style>
+          <a:lnRef idx="1">
+            <a:schemeClr val="accent1"/>
+          </a:lnRef>
+          <a:fillRef idx="3">
+            <a:schemeClr val="accent1"/>
+          </a:fillRef>
+          <a:effectRef idx="2">
+            <a:schemeClr val="accent1"/>
+          </a:effectRef>
+          <a:fontRef idx="minor">
+            <a:schemeClr val="lt1"/>
+          </a:fontRef>
+        </p:style>
+        <p:txBody>
+          <a:bodyPr rtlCol="0" anchor="ctr"/>
+          <a:lstStyle/>
           <a:p>
             <a:pPr algn="ctr"/>
-            <a:r>
-              <a:rPr sz="1100" b="0" i="1">
-                <a:solidFill>
-                  <a:srgbClr val="64748B"/>
-                </a:solidFill>
-                <a:latin typeface="Montserrat"/>
-              </a:rPr>
-              <a:t>gas regulator cabinet on building exterior wall</a:t>
+          </a:p>
+        </p:txBody>
+      </p:sp>
+      <p:sp>
+        <p:nvSpPr>
+          <p:cNvPr id="13" name="Rectangle 12"/>
+          <p:cNvSpPr/>
+          <p:nvPr/>
+        </p:nvSpPr>
+        <p:spPr>
+          <a:xfrm>
+            <a:off x="6355080" y="3291840"/>
+            <a:ext cx="640080" cy="1143000"/>
+          </a:xfrm>
+          <a:prstGeom prst="rect">
+            <a:avLst/>
+          </a:prstGeom>
+          <a:solidFill>
+            <a:srgbClr val="1E2761"/>
+          </a:solidFill>
+          <a:ln>
+            <a:noFill/>
+          </a:ln>
+          <a:effectLst/>
+        </p:spPr>
+        <p:style>
+          <a:lnRef idx="1">
+            <a:schemeClr val="accent1"/>
+          </a:lnRef>
+          <a:fillRef idx="3">
+            <a:schemeClr val="accent1"/>
+          </a:fillRef>
+          <a:effectRef idx="2">
+            <a:schemeClr val="accent1"/>
+          </a:effectRef>
+          <a:fontRef idx="minor">
+            <a:schemeClr val="lt1"/>
+          </a:fontRef>
+        </p:style>
+        <p:txBody>
+          <a:bodyPr rtlCol="0" anchor="ctr"/>
+          <a:lstStyle/>
+          <a:p>
+            <a:pPr algn="ctr"/>
+          </a:p>
+        </p:txBody>
+      </p:sp>
+      <p:sp>
+        <p:nvSpPr>
+          <p:cNvPr id="14" name="TextBox 13"/>
+          <p:cNvSpPr txBox="1"/>
+          <p:nvPr/>
+        </p:nvSpPr>
+        <p:spPr>
+          <a:xfrm>
+            <a:off x="6355080" y="3611880"/>
+            <a:ext cx="640080" cy="548640"/>
+          </a:xfrm>
+          <a:prstGeom prst="rect">
+            <a:avLst/>
+          </a:prstGeom>
+          <a:noFill/>
+        </p:spPr>
+        <p:txBody>
+          <a:bodyPr wrap="square">
+            <a:spAutoFit/>
+          </a:bodyPr>
+          <a:lstStyle/>
+          <a:p>
+            <a:pPr algn="ctr"/>
+            <a:r>
+              <a:rPr sz="2200" b="1" i="0">
+                <a:solidFill>
+                  <a:srgbClr val="FFFFFF"/>
+                </a:solidFill>
+                <a:latin typeface="Montserrat"/>
+              </a:rPr>
+              <a:t>B</a:t>
+            </a:r>
+          </a:p>
+        </p:txBody>
+      </p:sp>
+      <p:sp>
+        <p:nvSpPr>
+          <p:cNvPr id="15" name="TextBox 14"/>
+          <p:cNvSpPr txBox="1"/>
+          <p:nvPr/>
+        </p:nvSpPr>
+        <p:spPr>
+          <a:xfrm>
+            <a:off x="7132320" y="3474720"/>
+            <a:ext cx="4114800" cy="868680"/>
+          </a:xfrm>
+          <a:prstGeom prst="rect">
+            <a:avLst/>
+          </a:prstGeom>
+          <a:noFill/>
+        </p:spPr>
+        <p:txBody>
+          <a:bodyPr wrap="square">
+            <a:spAutoFit/>
+          </a:bodyPr>
+          <a:lstStyle/>
+          <a:p>
+            <a:r>
+              <a:rPr sz="1400" b="0" i="0">
+                <a:solidFill>
+                  <a:srgbClr val="1B2330"/>
+                </a:solidFill>
+                <a:latin typeface="Montserrat"/>
+              </a:rPr>
+              <a:t>Regulador más válvula de seguridad por mínima</a:t>
+            </a:r>
+          </a:p>
+        </p:txBody>
+      </p:sp>
+      <p:sp>
+        <p:nvSpPr>
+          <p:cNvPr id="16" name="Rounded Rectangle 15"/>
+          <p:cNvSpPr/>
+          <p:nvPr/>
+        </p:nvSpPr>
+        <p:spPr>
+          <a:xfrm>
+            <a:off x="822960" y="4617720"/>
+            <a:ext cx="4983480" cy="1143000"/>
+          </a:xfrm>
+          <a:prstGeom prst="roundRect">
+            <a:avLst/>
+          </a:prstGeom>
+          <a:solidFill>
+            <a:srgbClr val="F3F6FB"/>
+          </a:solidFill>
+          <a:ln w="12700">
+            <a:solidFill>
+              <a:srgbClr val="C7D2E6"/>
+            </a:solidFill>
+          </a:ln>
+          <a:effectLst/>
+        </p:spPr>
+        <p:style>
+          <a:lnRef idx="1">
+            <a:schemeClr val="accent1"/>
+          </a:lnRef>
+          <a:fillRef idx="3">
+            <a:schemeClr val="accent1"/>
+          </a:fillRef>
+          <a:effectRef idx="2">
+            <a:schemeClr val="accent1"/>
+          </a:effectRef>
+          <a:fontRef idx="minor">
+            <a:schemeClr val="lt1"/>
+          </a:fontRef>
+        </p:style>
+        <p:txBody>
+          <a:bodyPr rtlCol="0" anchor="ctr"/>
+          <a:lstStyle/>
+          <a:p>
+            <a:pPr algn="ctr"/>
+          </a:p>
+        </p:txBody>
+      </p:sp>
+      <p:sp>
+        <p:nvSpPr>
+          <p:cNvPr id="17" name="Rectangle 16"/>
+          <p:cNvSpPr/>
+          <p:nvPr/>
+        </p:nvSpPr>
+        <p:spPr>
+          <a:xfrm>
+            <a:off x="822960" y="4617720"/>
+            <a:ext cx="640080" cy="1143000"/>
+          </a:xfrm>
+          <a:prstGeom prst="rect">
+            <a:avLst/>
+          </a:prstGeom>
+          <a:solidFill>
+            <a:srgbClr val="1E2761"/>
+          </a:solidFill>
+          <a:ln>
+            <a:noFill/>
+          </a:ln>
+          <a:effectLst/>
+        </p:spPr>
+        <p:style>
+          <a:lnRef idx="1">
+            <a:schemeClr val="accent1"/>
+          </a:lnRef>
+          <a:fillRef idx="3">
+            <a:schemeClr val="accent1"/>
+          </a:fillRef>
+          <a:effectRef idx="2">
+            <a:schemeClr val="accent1"/>
+          </a:effectRef>
+          <a:fontRef idx="minor">
+            <a:schemeClr val="lt1"/>
+          </a:fontRef>
+        </p:style>
+        <p:txBody>
+          <a:bodyPr rtlCol="0" anchor="ctr"/>
+          <a:lstStyle/>
+          <a:p>
+            <a:pPr algn="ctr"/>
+          </a:p>
+        </p:txBody>
+      </p:sp>
+      <p:sp>
+        <p:nvSpPr>
+          <p:cNvPr id="18" name="TextBox 17"/>
+          <p:cNvSpPr txBox="1"/>
+          <p:nvPr/>
+        </p:nvSpPr>
+        <p:spPr>
+          <a:xfrm>
+            <a:off x="822960" y="4937760"/>
+            <a:ext cx="640080" cy="548640"/>
+          </a:xfrm>
+          <a:prstGeom prst="rect">
+            <a:avLst/>
+          </a:prstGeom>
+          <a:noFill/>
+        </p:spPr>
+        <p:txBody>
+          <a:bodyPr wrap="square">
+            <a:spAutoFit/>
+          </a:bodyPr>
+          <a:lstStyle/>
+          <a:p>
+            <a:pPr algn="ctr"/>
+            <a:r>
+              <a:rPr sz="2200" b="1" i="0">
+                <a:solidFill>
+                  <a:srgbClr val="FFFFFF"/>
+                </a:solidFill>
+                <a:latin typeface="Montserrat"/>
+              </a:rPr>
+              <a:t>C</a:t>
+            </a:r>
+          </a:p>
+        </p:txBody>
+      </p:sp>
+      <p:sp>
+        <p:nvSpPr>
+          <p:cNvPr id="19" name="TextBox 18"/>
+          <p:cNvSpPr txBox="1"/>
+          <p:nvPr/>
+        </p:nvSpPr>
+        <p:spPr>
+          <a:xfrm>
+            <a:off x="1600200" y="4800600"/>
+            <a:ext cx="4114800" cy="868680"/>
+          </a:xfrm>
+          <a:prstGeom prst="rect">
+            <a:avLst/>
+          </a:prstGeom>
+          <a:noFill/>
+        </p:spPr>
+        <p:txBody>
+          <a:bodyPr wrap="square">
+            <a:spAutoFit/>
+          </a:bodyPr>
+          <a:lstStyle/>
+          <a:p>
+            <a:r>
+              <a:rPr sz="1400" b="0" i="0">
+                <a:solidFill>
+                  <a:srgbClr val="1B2330"/>
+                </a:solidFill>
+                <a:latin typeface="Montserrat"/>
+              </a:rPr>
+              <a:t>Regulador más válvula de seguridad por máxima y por mínima</a:t>
+            </a:r>
+          </a:p>
+        </p:txBody>
+      </p:sp>
+      <p:sp>
+        <p:nvSpPr>
+          <p:cNvPr id="20" name="Rounded Rectangle 19"/>
+          <p:cNvSpPr/>
+          <p:nvPr/>
+        </p:nvSpPr>
+        <p:spPr>
+          <a:xfrm>
+            <a:off x="6355080" y="4617720"/>
+            <a:ext cx="4983480" cy="1143000"/>
+          </a:xfrm>
+          <a:prstGeom prst="roundRect">
+            <a:avLst/>
+          </a:prstGeom>
+          <a:solidFill>
+            <a:srgbClr val="F3F6FB"/>
+          </a:solidFill>
+          <a:ln w="12700">
+            <a:solidFill>
+              <a:srgbClr val="C7D2E6"/>
+            </a:solidFill>
+          </a:ln>
+          <a:effectLst/>
+        </p:spPr>
+        <p:style>
+          <a:lnRef idx="1">
+            <a:schemeClr val="accent1"/>
+          </a:lnRef>
+          <a:fillRef idx="3">
+            <a:schemeClr val="accent1"/>
+          </a:fillRef>
+          <a:effectRef idx="2">
+            <a:schemeClr val="accent1"/>
+          </a:effectRef>
+          <a:fontRef idx="minor">
+            <a:schemeClr val="lt1"/>
+          </a:fontRef>
+        </p:style>
+        <p:txBody>
+          <a:bodyPr rtlCol="0" anchor="ctr"/>
+          <a:lstStyle/>
+          <a:p>
+            <a:pPr algn="ctr"/>
+          </a:p>
+        </p:txBody>
+      </p:sp>
+      <p:sp>
+        <p:nvSpPr>
+          <p:cNvPr id="21" name="Rectangle 20"/>
+          <p:cNvSpPr/>
+          <p:nvPr/>
+        </p:nvSpPr>
+        <p:spPr>
+          <a:xfrm>
+            <a:off x="6355080" y="4617720"/>
+            <a:ext cx="640080" cy="1143000"/>
+          </a:xfrm>
+          <a:prstGeom prst="rect">
+            <a:avLst/>
+          </a:prstGeom>
+          <a:solidFill>
+            <a:srgbClr val="1E2761"/>
+          </a:solidFill>
+          <a:ln>
+            <a:noFill/>
+          </a:ln>
+          <a:effectLst/>
+        </p:spPr>
+        <p:style>
+          <a:lnRef idx="1">
+            <a:schemeClr val="accent1"/>
+          </a:lnRef>
+          <a:fillRef idx="3">
+            <a:schemeClr val="accent1"/>
+          </a:fillRef>
+          <a:effectRef idx="2">
+            <a:schemeClr val="accent1"/>
+          </a:effectRef>
+          <a:fontRef idx="minor">
+            <a:schemeClr val="lt1"/>
+          </a:fontRef>
+        </p:style>
+        <p:txBody>
+          <a:bodyPr rtlCol="0" anchor="ctr"/>
+          <a:lstStyle/>
+          <a:p>
+            <a:pPr algn="ctr"/>
+          </a:p>
+        </p:txBody>
+      </p:sp>
+      <p:sp>
+        <p:nvSpPr>
+          <p:cNvPr id="22" name="TextBox 21"/>
+          <p:cNvSpPr txBox="1"/>
+          <p:nvPr/>
+        </p:nvSpPr>
+        <p:spPr>
+          <a:xfrm>
+            <a:off x="6355080" y="4937760"/>
+            <a:ext cx="640080" cy="548640"/>
+          </a:xfrm>
+          <a:prstGeom prst="rect">
+            <a:avLst/>
+          </a:prstGeom>
+          <a:noFill/>
+        </p:spPr>
+        <p:txBody>
+          <a:bodyPr wrap="square">
+            <a:spAutoFit/>
+          </a:bodyPr>
+          <a:lstStyle/>
+          <a:p>
+            <a:pPr algn="ctr"/>
+            <a:r>
+              <a:rPr sz="2200" b="1" i="0">
+                <a:solidFill>
+                  <a:srgbClr val="FFFFFF"/>
+                </a:solidFill>
+                <a:latin typeface="Montserrat"/>
+              </a:rPr>
+              <a:t>D</a:t>
+            </a:r>
+          </a:p>
+        </p:txBody>
+      </p:sp>
+      <p:sp>
+        <p:nvSpPr>
+          <p:cNvPr id="23" name="TextBox 22"/>
+          <p:cNvSpPr txBox="1"/>
+          <p:nvPr/>
+        </p:nvSpPr>
+        <p:spPr>
+          <a:xfrm>
+            <a:off x="7132320" y="4800600"/>
+            <a:ext cx="4114800" cy="868680"/>
+          </a:xfrm>
+          <a:prstGeom prst="rect">
+            <a:avLst/>
+          </a:prstGeom>
+          <a:noFill/>
+        </p:spPr>
+        <p:txBody>
+          <a:bodyPr wrap="square">
+            <a:spAutoFit/>
+          </a:bodyPr>
+          <a:lstStyle/>
+          <a:p>
+            <a:r>
+              <a:rPr sz="1400" b="0" i="0">
+                <a:solidFill>
+                  <a:srgbClr val="1B2330"/>
+                </a:solidFill>
+                <a:latin typeface="Montserrat"/>
+              </a:rPr>
+              <a:t>Solo válvula de seguridad por máxima presión</a:t>
             </a:r>
           </a:p>
         </p:txBody>
@@ -11209,6 +15858,18 @@
   <p:clrMapOvr>
     <a:masterClrMapping/>
   </p:clrMapOvr>
+  <mc:AlternateContent xmlns:mc="http://schemas.openxmlformats.org/markup-compatibility/2006">
+    <mc:Choice xmlns:p14="http://schemas.microsoft.com/office/powerpoint/2010/main" Requires="p14">
+      <p:transition spd="med" p14:dur="700">
+        <p14:cube dir="r"/>
+      </p:transition>
+    </mc:Choice>
+    <mc:Fallback>
+      <p:transition spd="med">
+        <p:push dir="r"/>
+      </p:transition>
+    </mc:Fallback>
+  </mc:AlternateContent>
 </p:sld>
 </file>
 
@@ -11296,7 +15957,7 @@
                 </a:solidFill>
                 <a:latin typeface="Montserrat"/>
               </a:rPr>
-              <a:t>007 / 018</a:t>
+              <a:t>007 / 024</a:t>
             </a:r>
           </a:p>
         </p:txBody>
@@ -11337,88 +15998,20 @@
       </p:sp>
       <p:sp>
         <p:nvSpPr>
-          <p:cNvPr id="5" name="TextBox 4"/>
-          <p:cNvSpPr txBox="1"/>
-          <p:nvPr/>
-        </p:nvSpPr>
-        <p:spPr>
-          <a:xfrm>
-            <a:off x="822960" y="457200"/>
-            <a:ext cx="10058400" cy="365760"/>
-          </a:xfrm>
-          <a:prstGeom prst="rect">
-            <a:avLst/>
-          </a:prstGeom>
-          <a:noFill/>
-        </p:spPr>
-        <p:txBody>
-          <a:bodyPr wrap="square">
-            <a:spAutoFit/>
-          </a:bodyPr>
-          <a:lstStyle/>
-          <a:p>
-            <a:r>
-              <a:rPr sz="1300" b="1" i="0">
-                <a:solidFill>
-                  <a:srgbClr val="E8801A"/>
-                </a:solidFill>
-                <a:latin typeface="Montserrat"/>
-              </a:rPr>
-              <a:t>APARTADO 6.1.2 · REGULADORES</a:t>
-            </a:r>
-          </a:p>
-        </p:txBody>
-      </p:sp>
-      <p:sp>
-        <p:nvSpPr>
-          <p:cNvPr id="6" name="TextBox 5"/>
-          <p:cNvSpPr txBox="1"/>
-          <p:nvPr/>
-        </p:nvSpPr>
-        <p:spPr>
-          <a:xfrm>
-            <a:off x="822960" y="868680"/>
-            <a:ext cx="10515600" cy="914400"/>
-          </a:xfrm>
-          <a:prstGeom prst="rect">
-            <a:avLst/>
-          </a:prstGeom>
-          <a:noFill/>
-        </p:spPr>
-        <p:txBody>
-          <a:bodyPr wrap="square">
-            <a:spAutoFit/>
-          </a:bodyPr>
-          <a:lstStyle/>
-          <a:p>
-            <a:r>
-              <a:rPr sz="2800" b="1" i="0">
-                <a:solidFill>
-                  <a:srgbClr val="1E2761"/>
-                </a:solidFill>
-                <a:latin typeface="Montserrat"/>
-              </a:rPr>
-              <a:t>El 4,8 y la rejilla del VAS</a:t>
-            </a:r>
-          </a:p>
-        </p:txBody>
-      </p:sp>
-      <p:sp>
-        <p:nvSpPr>
-          <p:cNvPr id="7" name="Rounded Rectangle 6"/>
+          <p:cNvPr id="5" name="Rectangle 4"/>
           <p:cNvSpPr/>
           <p:nvPr/>
         </p:nvSpPr>
         <p:spPr>
           <a:xfrm>
-            <a:off x="868680" y="1627632"/>
-            <a:ext cx="2011680" cy="73152"/>
-          </a:xfrm>
-          <a:prstGeom prst="roundRect">
+            <a:off x="0" y="0"/>
+            <a:ext cx="12191695" cy="1143000"/>
+          </a:xfrm>
+          <a:prstGeom prst="rect">
             <a:avLst/>
           </a:prstGeom>
           <a:solidFill>
-            <a:srgbClr val="E8801A"/>
+            <a:srgbClr val="1E8E4B"/>
           </a:solidFill>
           <a:ln>
             <a:noFill/>
@@ -11449,14 +16042,14 @@
       </p:sp>
       <p:sp>
         <p:nvSpPr>
-          <p:cNvPr id="8" name="TextBox 7"/>
+          <p:cNvPr id="6" name="TextBox 5"/>
           <p:cNvSpPr txBox="1"/>
           <p:nvPr/>
         </p:nvSpPr>
         <p:spPr>
           <a:xfrm>
-            <a:off x="822960" y="1965960"/>
-            <a:ext cx="4983480" cy="4206240"/>
+            <a:off x="822960" y="274320"/>
+            <a:ext cx="10515600" cy="640080"/>
           </a:xfrm>
           <a:prstGeom prst="rect">
             <a:avLst/>
@@ -11469,102 +16062,72 @@
           </a:bodyPr>
           <a:lstStyle/>
           <a:p>
-            <a:pPr>
-              <a:spcAft>
-                <a:spcPts val="1100"/>
-              </a:spcAft>
-            </a:pPr>
-            <a:r>
-              <a:rPr sz="1600" b="1" i="0">
-                <a:solidFill>
-                  <a:srgbClr val="E8801A"/>
-                </a:solidFill>
-                <a:latin typeface="Montserrat"/>
-              </a:rPr>
-              <a:t>▸  </a:t>
-            </a:r>
-            <a:r>
-              <a:rPr sz="1600" b="0" i="0">
-                <a:solidFill>
-                  <a:srgbClr val="1B2330"/>
-                </a:solidFill>
-                <a:latin typeface="Montserrat"/>
-              </a:rPr>
-              <a:t>Hasta 4,8 m³/h: no es conjunto de regulación</a:t>
-            </a:r>
-          </a:p>
-          <a:p>
-            <a:pPr>
-              <a:spcAft>
-                <a:spcPts val="1100"/>
-              </a:spcAft>
-            </a:pPr>
-            <a:r>
-              <a:rPr sz="1600" b="1" i="0">
-                <a:solidFill>
-                  <a:srgbClr val="E8801A"/>
-                </a:solidFill>
-                <a:latin typeface="Montserrat"/>
-              </a:rPr>
-              <a:t>▸  </a:t>
-            </a:r>
-            <a:r>
-              <a:rPr sz="1600" b="0" i="0">
-                <a:solidFill>
-                  <a:srgbClr val="1B2330"/>
-                </a:solidFill>
-                <a:latin typeface="Montserrat"/>
-              </a:rPr>
-              <a:t>VAS por dentro: 5 cm² permanentes</a:t>
-            </a:r>
-          </a:p>
-          <a:p>
-            <a:pPr>
-              <a:spcAft>
-                <a:spcPts val="1100"/>
-              </a:spcAft>
-            </a:pPr>
-            <a:r>
-              <a:rPr sz="1600" b="1" i="0">
-                <a:solidFill>
-                  <a:srgbClr val="E8801A"/>
-                </a:solidFill>
-                <a:latin typeface="Montserrat"/>
-              </a:rPr>
-              <a:t>▸  </a:t>
-            </a:r>
-            <a:r>
-              <a:rPr sz="1600" b="0" i="0">
-                <a:solidFill>
-                  <a:srgbClr val="1B2330"/>
-                </a:solidFill>
-                <a:latin typeface="Montserrat"/>
-              </a:rPr>
-              <a:t>Arriba si es ligero, abajo si es pesado</a:t>
-            </a:r>
-          </a:p>
-        </p:txBody>
-      </p:sp>
-      <p:sp>
-        <p:nvSpPr>
-          <p:cNvPr id="9" name="imgph" descr="IMGQ:small gas regulator on meter"/>
+            <a:r>
+              <a:rPr sz="2400" b="1" i="0">
+                <a:solidFill>
+                  <a:srgbClr val="FFFFFF"/>
+                </a:solidFill>
+                <a:latin typeface="Montserrat"/>
+              </a:rPr>
+              <a:t>✔  RESPUESTA:  C</a:t>
+            </a:r>
+          </a:p>
+        </p:txBody>
+      </p:sp>
+      <p:sp>
+        <p:nvSpPr>
+          <p:cNvPr id="7" name="TextBox 6"/>
+          <p:cNvSpPr txBox="1"/>
+          <p:nvPr/>
+        </p:nvSpPr>
+        <p:spPr>
+          <a:xfrm>
+            <a:off x="822960" y="1417320"/>
+            <a:ext cx="10515600" cy="914400"/>
+          </a:xfrm>
+          <a:prstGeom prst="rect">
+            <a:avLst/>
+          </a:prstGeom>
+          <a:noFill/>
+        </p:spPr>
+        <p:txBody>
+          <a:bodyPr wrap="square">
+            <a:spAutoFit/>
+          </a:bodyPr>
+          <a:lstStyle/>
+          <a:p>
+            <a:r>
+              <a:rPr sz="1800" b="1" i="0">
+                <a:solidFill>
+                  <a:srgbClr val="64748B"/>
+                </a:solidFill>
+                <a:latin typeface="Montserrat"/>
+              </a:rPr>
+              <a:t>En gas natural con MOP superior a 150 mbar y hasta 5 bar, ¿qué sistema de regulación exige la norma?</a:t>
+            </a:r>
+          </a:p>
+        </p:txBody>
+      </p:sp>
+      <p:sp>
+        <p:nvSpPr>
+          <p:cNvPr id="8" name="Rounded Rectangle 7"/>
           <p:cNvSpPr/>
           <p:nvPr/>
         </p:nvSpPr>
         <p:spPr>
           <a:xfrm>
-            <a:off x="5806440" y="1051560"/>
-            <a:ext cx="5298947" cy="4629150"/>
+            <a:off x="822960" y="2514600"/>
+            <a:ext cx="10515600" cy="914400"/>
           </a:xfrm>
           <a:prstGeom prst="roundRect">
             <a:avLst/>
           </a:prstGeom>
           <a:solidFill>
-            <a:srgbClr val="F3F6FB"/>
+            <a:srgbClr val="E9F6EE"/>
           </a:solidFill>
           <a:ln w="12700">
             <a:solidFill>
-              <a:srgbClr val="C7D2E6"/>
+              <a:srgbClr val="1E8E4B"/>
             </a:solidFill>
           </a:ln>
           <a:effectLst/>
@@ -11593,14 +16156,14 @@
       </p:sp>
       <p:sp>
         <p:nvSpPr>
-          <p:cNvPr id="10" name="TextBox 9"/>
+          <p:cNvPr id="9" name="TextBox 8"/>
           <p:cNvSpPr txBox="1"/>
           <p:nvPr/>
         </p:nvSpPr>
         <p:spPr>
           <a:xfrm>
-            <a:off x="6080760" y="2726055"/>
-            <a:ext cx="4750307" cy="1280160"/>
+            <a:off x="1097280" y="2697480"/>
+            <a:ext cx="10058400" cy="640080"/>
           </a:xfrm>
           <a:prstGeom prst="rect">
             <a:avLst/>
@@ -11613,27 +16176,66 @@
           </a:bodyPr>
           <a:lstStyle/>
           <a:p>
-            <a:pPr algn="ctr"/>
-            <a:r>
-              <a:rPr sz="1400" b="1" i="0">
-                <a:solidFill>
-                  <a:srgbClr val="64748B"/>
-                </a:solidFill>
-                <a:latin typeface="Montserrat"/>
-              </a:rPr>
-              <a:t>IMAGEN REALISTA</a:t>
-            </a:r>
-          </a:p>
-          <a:p>
-            <a:pPr algn="ctr"/>
-            <a:r>
-              <a:rPr sz="1100" b="0" i="1">
-                <a:solidFill>
-                  <a:srgbClr val="64748B"/>
-                </a:solidFill>
-                <a:latin typeface="Montserrat"/>
-              </a:rPr>
-              <a:t>small gas regulator on meter</a:t>
+            <a:r>
+              <a:rPr sz="1800" b="1" i="0">
+                <a:solidFill>
+                  <a:srgbClr val="1E8E4B"/>
+                </a:solidFill>
+                <a:latin typeface="Montserrat"/>
+              </a:rPr>
+              <a:t>C.  </a:t>
+            </a:r>
+            <a:r>
+              <a:rPr sz="1800" b="1" i="0">
+                <a:solidFill>
+                  <a:srgbClr val="1E2761"/>
+                </a:solidFill>
+                <a:latin typeface="Montserrat"/>
+              </a:rPr>
+              <a:t>Regulador más válvula de seguridad por máxima y por mínima</a:t>
+            </a:r>
+          </a:p>
+        </p:txBody>
+      </p:sp>
+      <p:sp>
+        <p:nvSpPr>
+          <p:cNvPr id="10" name="TextBox 9"/>
+          <p:cNvSpPr txBox="1"/>
+          <p:nvPr/>
+        </p:nvSpPr>
+        <p:spPr>
+          <a:xfrm>
+            <a:off x="822960" y="3749039"/>
+            <a:ext cx="10515600" cy="2194560"/>
+          </a:xfrm>
+          <a:prstGeom prst="rect">
+            <a:avLst/>
+          </a:prstGeom>
+          <a:noFill/>
+        </p:spPr>
+        <p:txBody>
+          <a:bodyPr wrap="square">
+            <a:spAutoFit/>
+          </a:bodyPr>
+          <a:lstStyle/>
+          <a:p>
+            <a:r>
+              <a:rPr sz="1500" b="1" i="0">
+                <a:solidFill>
+                  <a:srgbClr val="E8801A"/>
+                </a:solidFill>
+                <a:latin typeface="Montserrat"/>
+              </a:rPr>
+              <a:t>Por qué:  </a:t>
+            </a:r>
+            <a:r>
+              <a:rPr sz="1500" b="0" i="0">
+                <a:solidFill>
+                  <a:srgbClr val="1B2330"/>
+                </a:solidFill>
+                <a:latin typeface="Montserrat"/>
+              </a:rPr>
+              <a:t>En el tramo de mayor presión se exige lo máximo: regulador más seguridad por máxima presión más seguridad por mínima presión.</a:t>
             </a:r>
           </a:p>
         </p:txBody>
@@ -11643,6 +16245,18 @@
   <p:clrMapOvr>
     <a:masterClrMapping/>
   </p:clrMapOvr>
+  <mc:AlternateContent xmlns:mc="http://schemas.openxmlformats.org/markup-compatibility/2006">
+    <mc:Choice xmlns:p14="http://schemas.microsoft.com/office/powerpoint/2010/main" Requires="p14">
+      <p:transition spd="med" p14:dur="700">
+        <p14:cube dir="l"/>
+      </p:transition>
+    </mc:Choice>
+    <mc:Fallback>
+      <p:transition spd="med">
+        <p:push dir="l"/>
+      </p:transition>
+    </mc:Fallback>
+  </mc:AlternateContent>
 </p:sld>
 </file>
 
@@ -11730,7 +16344,7 @@
                 </a:solidFill>
                 <a:latin typeface="Montserrat"/>
               </a:rPr>
-              <a:t>008 / 018</a:t>
+              <a:t>008 / 024</a:t>
             </a:r>
           </a:p>
         </p:txBody>
@@ -11798,7 +16412,7 @@
                 </a:solidFill>
                 <a:latin typeface="Montserrat"/>
               </a:rPr>
-              <a:t>APARTADO 6.2 · GLP</a:t>
+              <a:t>APARTADO 6.1.1 · UBICACIÓN</a:t>
             </a:r>
           </a:p>
         </p:txBody>
@@ -11832,14 +16446,14 @@
                 </a:solidFill>
                 <a:latin typeface="Montserrat"/>
               </a:rPr>
-              <a:t>El GLP baja en dos escalones</a:t>
-            </a:r>
-          </a:p>
-        </p:txBody>
-      </p:sp>
-      <p:sp>
-        <p:nvSpPr>
-          <p:cNvPr id="7" name="Rounded Rectangle 6"/>
+              <a:t>Conjuntos de alta: grado 2 y al exterior</a:t>
+            </a:r>
+          </a:p>
+        </p:txBody>
+      </p:sp>
+      <p:sp>
+        <p:nvSpPr>
+          <p:cNvPr id="7" name="Rectangle 6"/>
           <p:cNvSpPr/>
           <p:nvPr/>
         </p:nvSpPr>
@@ -11848,7 +16462,7 @@
             <a:off x="868680" y="1627632"/>
             <a:ext cx="2011680" cy="73152"/>
           </a:xfrm>
-          <a:prstGeom prst="roundRect">
+          <a:prstGeom prst="rect">
             <a:avLst/>
           </a:prstGeom>
           <a:solidFill>
@@ -11890,7 +16504,7 @@
         <p:spPr>
           <a:xfrm>
             <a:off x="822960" y="1965960"/>
-            <a:ext cx="4983480" cy="4206240"/>
+            <a:ext cx="5029200" cy="4206240"/>
           </a:xfrm>
           <a:prstGeom prst="rect">
             <a:avLst/>
@@ -11924,7 +16538,7 @@
                 </a:solidFill>
                 <a:latin typeface="Montserrat"/>
               </a:rPr>
-              <a:t>Entrada de la receptora: entre 0,1 y 2 bar</a:t>
+              <a:t>Grado de accesibilidad 2</a:t>
             </a:r>
           </a:p>
           <a:p>
@@ -11949,7 +16563,7 @@
                 </a:solidFill>
                 <a:latin typeface="Montserrat"/>
               </a:rPr>
-              <a:t>Inversor automático en baterías de envases</a:t>
+              <a:t>Armario o nicho con pared al exterior</a:t>
             </a:r>
           </a:p>
           <a:p>
@@ -11974,21 +16588,21 @@
                 </a:solidFill>
                 <a:latin typeface="Montserrat"/>
               </a:rPr>
-              <a:t>Válvulas antirretorno entre bombonas</a:t>
-            </a:r>
-          </a:p>
-        </p:txBody>
-      </p:sp>
-      <p:sp>
-        <p:nvSpPr>
-          <p:cNvPr id="9" name="imgph" descr="IMGQ:propane gas cylinder with regulator"/>
+              <a:t>Ventilación de al menos 5 cm²</a:t>
+            </a:r>
+          </a:p>
+        </p:txBody>
+      </p:sp>
+      <p:sp>
+        <p:nvSpPr>
+          <p:cNvPr id="9" name="imgph" descr="IMGQ:gas regulator cabinet on building exterior wall"/>
           <p:cNvSpPr/>
           <p:nvPr/>
         </p:nvSpPr>
         <p:spPr>
           <a:xfrm>
-            <a:off x="5806440" y="1051560"/>
-            <a:ext cx="5298947" cy="4629150"/>
+            <a:off x="6080760" y="1965960"/>
+            <a:ext cx="5303520" cy="4572000"/>
           </a:xfrm>
           <a:prstGeom prst="roundRect">
             <a:avLst/>
@@ -12033,8 +16647,8 @@
         </p:nvSpPr>
         <p:spPr>
           <a:xfrm>
-            <a:off x="6080760" y="2726055"/>
-            <a:ext cx="4750307" cy="1280160"/>
+            <a:off x="6355080" y="3611880"/>
+            <a:ext cx="4754880" cy="1280160"/>
           </a:xfrm>
           <a:prstGeom prst="rect">
             <a:avLst/>
@@ -12055,7 +16669,7 @@
                 </a:solidFill>
                 <a:latin typeface="Montserrat"/>
               </a:rPr>
-              <a:t>IMAGEN REALISTA</a:t>
+              <a:t>IMAGEN</a:t>
             </a:r>
           </a:p>
           <a:p>
@@ -12067,7 +16681,7 @@
                 </a:solidFill>
                 <a:latin typeface="Montserrat"/>
               </a:rPr>
-              <a:t>propane gas cylinder with regulator</a:t>
+              <a:t>gas regulator cabinet on building exterior wall</a:t>
             </a:r>
           </a:p>
         </p:txBody>
@@ -12077,6 +16691,18 @@
   <p:clrMapOvr>
     <a:masterClrMapping/>
   </p:clrMapOvr>
+  <mc:AlternateContent xmlns:mc="http://schemas.openxmlformats.org/markup-compatibility/2006">
+    <mc:Choice xmlns:p14="http://schemas.microsoft.com/office/powerpoint/2010/main" Requires="p14">
+      <p:transition spd="med" p14:dur="700">
+        <p14:cube dir="r"/>
+      </p:transition>
+    </mc:Choice>
+    <mc:Fallback>
+      <p:transition spd="med">
+        <p:push dir="r"/>
+      </p:transition>
+    </mc:Fallback>
+  </mc:AlternateContent>
 </p:sld>
 </file>
 
@@ -12164,7 +16790,7 @@
                 </a:solidFill>
                 <a:latin typeface="Montserrat"/>
               </a:rPr>
-              <a:t>009 / 018</a:t>
+              <a:t>009 / 024</a:t>
             </a:r>
           </a:p>
         </p:txBody>
@@ -12232,7 +16858,7 @@
                 </a:solidFill>
                 <a:latin typeface="Montserrat"/>
               </a:rPr>
-              <a:t>APARTADO 7 · DISPOSITIVOS DE CORTE</a:t>
+              <a:t>APARTADO 6.1.2 · REGULADORES</a:t>
             </a:r>
           </a:p>
         </p:txBody>
@@ -12266,14 +16892,14 @@
                 </a:solidFill>
                 <a:latin typeface="Montserrat"/>
               </a:rPr>
-              <a:t>La cadena de llaves, en orden</a:t>
-            </a:r>
-          </a:p>
-        </p:txBody>
-      </p:sp>
-      <p:sp>
-        <p:nvSpPr>
-          <p:cNvPr id="7" name="Rounded Rectangle 6"/>
+              <a:t>El 4,8 y la rejilla del VAS</a:t>
+            </a:r>
+          </a:p>
+        </p:txBody>
+      </p:sp>
+      <p:sp>
+        <p:nvSpPr>
+          <p:cNvPr id="7" name="Rectangle 6"/>
           <p:cNvSpPr/>
           <p:nvPr/>
         </p:nvSpPr>
@@ -12282,7 +16908,7 @@
             <a:off x="868680" y="1627632"/>
             <a:ext cx="2011680" cy="73152"/>
           </a:xfrm>
-          <a:prstGeom prst="roundRect">
+          <a:prstGeom prst="rect">
             <a:avLst/>
           </a:prstGeom>
           <a:solidFill>
@@ -12323,8 +16949,8 @@
         </p:nvSpPr>
         <p:spPr>
           <a:xfrm>
-            <a:off x="822960" y="1965960"/>
-            <a:ext cx="4983480" cy="4206240"/>
+            <a:off x="6355080" y="1965960"/>
+            <a:ext cx="5029200" cy="4206240"/>
           </a:xfrm>
           <a:prstGeom prst="rect">
             <a:avLst/>
@@ -12358,7 +16984,7 @@
                 </a:solidFill>
                 <a:latin typeface="Montserrat"/>
               </a:rPr>
-              <a:t>Acometida → edificio → montante</a:t>
+              <a:t>Hasta 4,8 m³/h: no es conjunto de regulación</a:t>
             </a:r>
           </a:p>
           <a:p>
@@ -12383,7 +17009,7 @@
                 </a:solidFill>
                 <a:latin typeface="Montserrat"/>
               </a:rPr>
-              <a:t>Usuario → contador → vivienda</a:t>
+              <a:t>VAS por dentro: 5 cm² permanentes</a:t>
             </a:r>
           </a:p>
           <a:p>
@@ -12408,21 +17034,21 @@
                 </a:solidFill>
                 <a:latin typeface="Montserrat"/>
               </a:rPr>
-              <a:t>Y por último, la de cada aparato</a:t>
-            </a:r>
-          </a:p>
-        </p:txBody>
-      </p:sp>
-      <p:sp>
-        <p:nvSpPr>
-          <p:cNvPr id="9" name="imgph" descr="IMGQ:gas shut off valve with yellow handle"/>
+              <a:t>Arriba si es ligero, abajo si es pesado</a:t>
+            </a:r>
+          </a:p>
+        </p:txBody>
+      </p:sp>
+      <p:sp>
+        <p:nvSpPr>
+          <p:cNvPr id="9" name="imgph" descr="IMGQ:small gas regulator on meter"/>
           <p:cNvSpPr/>
           <p:nvPr/>
         </p:nvSpPr>
         <p:spPr>
           <a:xfrm>
-            <a:off x="5806440" y="1051560"/>
-            <a:ext cx="5298947" cy="4629150"/>
+            <a:off x="822960" y="1965960"/>
+            <a:ext cx="5303520" cy="4572000"/>
           </a:xfrm>
           <a:prstGeom prst="roundRect">
             <a:avLst/>
@@ -12467,8 +17093,8 @@
         </p:nvSpPr>
         <p:spPr>
           <a:xfrm>
-            <a:off x="6080760" y="2726055"/>
-            <a:ext cx="4750307" cy="1280160"/>
+            <a:off x="1097280" y="3611880"/>
+            <a:ext cx="4754880" cy="1280160"/>
           </a:xfrm>
           <a:prstGeom prst="rect">
             <a:avLst/>
@@ -12489,7 +17115,7 @@
                 </a:solidFill>
                 <a:latin typeface="Montserrat"/>
               </a:rPr>
-              <a:t>IMAGEN REALISTA</a:t>
+              <a:t>IMAGEN</a:t>
             </a:r>
           </a:p>
           <a:p>
@@ -12501,7 +17127,7 @@
                 </a:solidFill>
                 <a:latin typeface="Montserrat"/>
               </a:rPr>
-              <a:t>gas shut off valve with yellow handle</a:t>
+              <a:t>small gas regulator on meter</a:t>
             </a:r>
           </a:p>
         </p:txBody>
@@ -12511,6 +17137,18 @@
   <p:clrMapOvr>
     <a:masterClrMapping/>
   </p:clrMapOvr>
+  <mc:AlternateContent xmlns:mc="http://schemas.openxmlformats.org/markup-compatibility/2006">
+    <mc:Choice xmlns:p14="http://schemas.microsoft.com/office/powerpoint/2010/main" Requires="p14">
+      <p:transition spd="med" p14:dur="700">
+        <p14:cube dir="l"/>
+      </p:transition>
+    </mc:Choice>
+    <mc:Fallback>
+      <p:transition spd="med">
+        <p:push dir="l"/>
+      </p:transition>
+    </mc:Fallback>
+  </mc:AlternateContent>
 </p:sld>
 </file>
 

--- a/Curso Gas B/11 - UNE 60670 - Diseno y construccion/11 - UNE 60670 - Diseno y construccion - Vídeo 3.pptx
+++ b/Curso Gas B/11 - UNE 60670 - Diseno y construccion/11 - UNE 60670 - Diseno y construccion - Vídeo 3.pptx
@@ -825,12 +825,12 @@
           <a:lstStyle/>
           <a:p>
             <a:r>
-              <a:t>N1: La llave de edificio no siempre hace falta. ¿A partir de qué longitud de acometida interior es obligatoria?</a:t>
-            </a:r>
-          </a:p>
-          <a:p>
-            <a:r>
-              <a:t>N2: Son dos cifras, una para vista y otra para enterrada. Y ojo, la enterrada obliga mucho antes. ¿Sabrías decir cuál va con cuál?</a:t>
+              <a:t>N1: La llave de edificio no siempre hace falta. Escucha la pregunta entera. ¿Cuándo es obligatorio instalar llave de edificio por la longitud de la acometida interior? Te leo las cuatro opciones. Opción A, con acometida vista de veinticinco metros o más, o enterrada de cuatro metros o más. Opción B, con acometida vista de cuatro metros o más, o enterrada de veinticinco metros o más. Opción C, siempre, sea cual sea la longitud. Opción D, solo si la acometida supera los cincuenta metros. Párala y decide.</a:t>
+            </a:r>
+          </a:p>
+          <a:p>
+            <a:r>
+              <a:t>N2: Una pista: son dos cifras, veinticinco y cuatro, una para vista y otra para enterrada. Y ojo, la enterrada obliga mucho antes. La duda está entre la opción A y la B: fíjate en qué cifra va con cada una.</a:t>
             </a:r>
           </a:p>
         </p:txBody>
@@ -900,12 +900,12 @@
           <a:lstStyle/>
           <a:p>
             <a:r>
-              <a:t>N1: ¿Por qué la enterrada obliga con solo cuatro metros?</a:t>
-            </a:r>
-          </a:p>
-          <a:p>
-            <a:r>
-              <a:t>N2: Porque una fuga enterrada es mucho más difícil de detectar y de cerrar que una vista, así que la norma quiere una llave de corte más cerca. Por eso: vista, veinticinco metros o más; enterrada, cuatro metros o más. El truco para no fallar es no cruzar las cifras: el número grande, veinticinco, va con lo visto, que se ve y se controla; el pequeño, cuatro, con lo enterrado, que no se ve.</a:t>
+              <a:t>N2: La respuesta correcta es la opción A: vista de veinticinco metros o más, o enterrada de cuatro metros o más. ¿Por qué? Porque una fuga enterrada es mucho más difícil de detectar y de cerrar que una vista, así que la norma quiere una llave de corte más cerca y obliga ya a los cuatro metros. El truco para no fallar es no cruzar las cifras: el número grande, veinticinco, va con lo visto, que se ve y se controla; el pequeño, cuatro, con lo enterrado, que no se ve. Esa es justo la trampa de la opción B, que cruza los números.</a:t>
+            </a:r>
+          </a:p>
+          <a:p>
+            <a:r>
+              <a:t>N1: Veinticinco visto, cuatro enterrado. Ni la opción C ni la D: no es siempre ni son cincuenta metros.</a:t>
             </a:r>
           </a:p>
         </p:txBody>
@@ -1500,12 +1500,12 @@
           <a:lstStyle/>
           <a:p>
             <a:r>
-              <a:t>N1: Dos noes que caen fijo. De estas cuatro combinaciones de llaves, ¿cuál está prohibida siempre?</a:t>
-            </a:r>
-          </a:p>
-          <a:p>
-            <a:r>
-              <a:t>N2: Recuerda que el multiuso se permite si una llave cumple todo lo exigido, pero hay una pareja que la norma prohíbe en todos los casos.</a:t>
+              <a:t>N1: Dos noes que caen fijo. Escucha con calma. Según la norma, ¿cuál de estas combinaciones de funciones nunca se permite? Te leo las cuatro. Opción A, que la llave de contador haga de llave de usuario. Opción B, que la llave de vivienda haga de llave de aparato. Opción C, que una llave ejerza varias funciones si cumple todos los requisitos. Opción D, que el corte del regulador de un envase de gas licuado de hasta quince kilos haga de llave de usuario. Piénsalo un momento.</a:t>
+            </a:r>
+          </a:p>
+          <a:p>
+            <a:r>
+              <a:t>N2: Una pista: el multiuso se permite si una llave cumple todo lo exigido, pero hay una pareja concreta que la norma prohíbe en todos los casos.</a:t>
             </a:r>
           </a:p>
         </p:txBody>
@@ -1575,12 +1575,12 @@
           <a:lstStyle/>
           <a:p>
             <a:r>
-              <a:t>N1: ¿Por qué la vivienda no puede hacer de aparato?</a:t>
-            </a:r>
-          </a:p>
-          <a:p>
-            <a:r>
-              <a:t>N2: Porque si fueran la misma llave, no podrías cortar el gas de un solo aparato sin dejar toda la casa sin gas, y se perdería el sentido de tener una llave por aparato. Las otras tres sí se permiten: el contador puede hacer de usuario en centralizaciones, una llave puede ser multifunción si cumple todo, y en envases de gas licuado de hasta quince kilos el corte del regulador sí puede hacer de llave de usuario. El único no rotundo aquí es vivienda hace de aparato.</a:t>
+              <a:t>N2: La respuesta correcta es la opción B: que la llave de vivienda haga de llave de aparato. ¿Por qué? Porque si fueran la misma llave, no podrías cortar el gas de un solo aparato sin dejar toda la casa sin gas, y se perdería el sentido de tener una llave por aparato. Las otras tres sí se permiten: el contador puede hacer de usuario en centralizaciones, una llave puede ser multifunción si cumple todo lo exigido, y en envases de gas licuado de hasta quince kilos el corte del regulador sí puede hacer de llave de usuario.</a:t>
+            </a:r>
+          </a:p>
+          <a:p>
+            <a:r>
+              <a:t>N1: El único no rotundo aquí es vivienda hace de aparato. Ese es el que buscas.</a:t>
             </a:r>
           </a:p>
         </p:txBody>
@@ -2026,12 +2026,12 @@
           <a:lstStyle/>
           <a:p>
             <a:r>
-              <a:t>N1: En gas natural, cuanta más presión de entrada, más seguridades. En el tramo más alto, de más de ciento cincuenta milibares hasta cinco bar, ¿qué te pide la norma?</a:t>
-            </a:r>
-          </a:p>
-          <a:p>
-            <a:r>
-              <a:t>N2: Piensa en la escalera de seguridad: arriba del todo se exige el paquete completo. ¿Cuántas seguridades caben además del regulador?</a:t>
+              <a:t>N1: En gas natural, cuanta más presión de entrada, más seguridades. Escucha bien. En gas natural, con una máxima presión de operación por encima de ciento cincuenta milibares y hasta cinco bar, ¿qué sistema de regulación exige la norma? Te leo las opciones. Opción A, solo regulador de presión. Opción B, regulador más válvula de seguridad por mínima. Opción C, regulador más válvula de seguridad por máxima y por mínima. Opción D, solo válvula de seguridad por máxima presión. Piénsalo un momento.</a:t>
+            </a:r>
+          </a:p>
+          <a:p>
+            <a:r>
+              <a:t>N2: Una pista: es el tramo más alto de la escalera, así que se exige el paquete completo. ¿Cuántas seguridades caben además del regulador?</a:t>
             </a:r>
           </a:p>
         </p:txBody>
@@ -2101,12 +2101,12 @@
           <a:lstStyle/>
           <a:p>
             <a:r>
-              <a:t>N1: ¿Por qué las dos seguridades?</a:t>
-            </a:r>
-          </a:p>
-          <a:p>
-            <a:r>
-              <a:t>N2: Porque en el tramo más alto de presión una avería hace más daño, puede reventar membranas y estropear aparatos, así que se exige el paquete completo: regulador más seguridad por máxima presión más seguridad por mínima. El truco para no fallar: es la única banda que lleva la seguridad por máxima; en el tramo medio, de cincuenta a ciento cincuenta, ya solo regulador más mínima, y por debajo de cincuenta, regulador si hace falta y mínima solo si pasa de veinticinco.</a:t>
+              <a:t>N2: La respuesta correcta es la opción C: regulador más válvula de seguridad por máxima y por mínima. ¿Por qué? Porque en el tramo más alto de presión una avería hace más daño, puede reventar membranas y estropear aparatos, así que se exige el paquete completo. El truco para no fallar: esta es la única banda que lleva la seguridad por máxima; en el tramo medio, de cincuenta a ciento cincuenta milibares, ya solo regulador más mínima, y por debajo de cincuenta, regulador si hace falta y mínima solo si pasa de veinticinco.</a:t>
+            </a:r>
+          </a:p>
+          <a:p>
+            <a:r>
+              <a:t>N1: Así que arriba del todo, las dos seguridades: máxima y mínima. Descartas la opción A y la D porque se quedan cortas.</a:t>
             </a:r>
           </a:p>
         </p:txBody>
